--- a/Encryption_Edge_Devices_Presentation.pptx
+++ b/Encryption_Edge_Devices_Presentation.pptx
@@ -5,27 +5,28 @@
     <p:sldMasterId id="2147483648" r:id="rId1"/>
   </p:sldMasterIdLst>
   <p:sldIdLst>
-    <p:sldId id="256" r:id="rId7"/>
-    <p:sldId id="257" r:id="rId8"/>
-    <p:sldId id="258" r:id="rId9"/>
-    <p:sldId id="259" r:id="rId10"/>
-    <p:sldId id="260" r:id="rId11"/>
-    <p:sldId id="261" r:id="rId12"/>
-    <p:sldId id="262" r:id="rId13"/>
-    <p:sldId id="263" r:id="rId14"/>
-    <p:sldId id="264" r:id="rId15"/>
-    <p:sldId id="265" r:id="rId16"/>
-    <p:sldId id="266" r:id="rId17"/>
-    <p:sldId id="267" r:id="rId18"/>
-    <p:sldId id="268" r:id="rId19"/>
-    <p:sldId id="269" r:id="rId20"/>
-    <p:sldId id="270" r:id="rId21"/>
-    <p:sldId id="271" r:id="rId22"/>
-    <p:sldId id="272" r:id="rId23"/>
-    <p:sldId id="273" r:id="rId24"/>
-    <p:sldId id="274" r:id="rId25"/>
+    <p:sldId id="256" r:id="rId2"/>
+    <p:sldId id="257" r:id="rId3"/>
+    <p:sldId id="258" r:id="rId4"/>
+    <p:sldId id="259" r:id="rId5"/>
+    <p:sldId id="260" r:id="rId6"/>
+    <p:sldId id="261" r:id="rId7"/>
+    <p:sldId id="262" r:id="rId8"/>
+    <p:sldId id="263" r:id="rId9"/>
+    <p:sldId id="264" r:id="rId10"/>
+    <p:sldId id="265" r:id="rId11"/>
+    <p:sldId id="266" r:id="rId12"/>
+    <p:sldId id="267" r:id="rId13"/>
+    <p:sldId id="268" r:id="rId14"/>
+    <p:sldId id="269" r:id="rId15"/>
+    <p:sldId id="270" r:id="rId16"/>
+    <p:sldId id="271" r:id="rId17"/>
+    <p:sldId id="272" r:id="rId18"/>
+    <p:sldId id="273" r:id="rId19"/>
+    <p:sldId id="274" r:id="rId20"/>
+    <p:sldId id="275" r:id="rId21"/>
   </p:sldIdLst>
-  <p:sldSz cx="12191695" cy="6858000" type="screen4x3"/>
+  <p:sldSz cx="12192000" cy="6858000"/>
   <p:notesSz cx="6858000" cy="9144000"/>
   <p:defaultTextStyle>
     <a:defPPr>
@@ -122,6 +123,22 @@
       </a:defRPr>
     </a:lvl9pPr>
   </p:defaultTextStyle>
+  <p:extLst>
+    <p:ext uri="{EFAFB233-063F-42B5-8137-9DF3F51BA10A}">
+      <p15:sldGuideLst xmlns:p15="http://schemas.microsoft.com/office/powerpoint/2012/main">
+        <p15:guide id="1" orient="horz" pos="2160">
+          <p15:clr>
+            <a:srgbClr val="A4A3A4"/>
+          </p15:clr>
+        </p15:guide>
+        <p15:guide id="2" pos="2880">
+          <p15:clr>
+            <a:srgbClr val="A4A3A4"/>
+          </p15:clr>
+        </p15:guide>
+      </p15:sldGuideLst>
+    </p:ext>
+  </p:extLst>
 </p:presentation>
 </file>
 
@@ -163,10 +180,9 @@
           <a:lstStyle/>
           <a:p>
             <a:r>
-              <a:rPr lang="en-US" smtClean="0"/>
+              <a:rPr lang="en-US"/>
               <a:t>Click to edit Master title style</a:t>
             </a:r>
-            <a:endParaRPr lang="en-US"/>
           </a:p>
         </p:txBody>
       </p:sp>
@@ -282,10 +298,9 @@
           </a:lstStyle>
           <a:p>
             <a:r>
-              <a:rPr lang="en-US" smtClean="0"/>
+              <a:rPr lang="en-US"/>
               <a:t>Click to edit Master subtitle style</a:t>
             </a:r>
-            <a:endParaRPr lang="en-US"/>
           </a:p>
         </p:txBody>
       </p:sp>
@@ -306,7 +321,7 @@
           <a:p>
             <a:fld id="{5BCAD085-E8A6-8845-BD4E-CB4CCA059FC4}" type="datetimeFigureOut">
               <a:rPr lang="en-US" smtClean="0"/>
-              <a:t>1/27/13</a:t>
+              <a:t>4/28/2026</a:t>
             </a:fld>
             <a:endParaRPr lang="en-US"/>
           </a:p>
@@ -400,10 +415,9 @@
           <a:lstStyle/>
           <a:p>
             <a:r>
-              <a:rPr lang="en-US" smtClean="0"/>
+              <a:rPr lang="en-US"/>
               <a:t>Click to edit Master title style</a:t>
             </a:r>
-            <a:endParaRPr lang="en-US"/>
           </a:p>
         </p:txBody>
       </p:sp>
@@ -424,38 +438,37 @@
           <a:p>
             <a:pPr lvl="0"/>
             <a:r>
-              <a:rPr lang="en-US" smtClean="0"/>
+              <a:rPr lang="en-US"/>
               <a:t>Click to edit Master text styles</a:t>
             </a:r>
           </a:p>
           <a:p>
             <a:pPr lvl="1"/>
             <a:r>
-              <a:rPr lang="en-US" smtClean="0"/>
+              <a:rPr lang="en-US"/>
               <a:t>Second level</a:t>
             </a:r>
           </a:p>
           <a:p>
             <a:pPr lvl="2"/>
             <a:r>
-              <a:rPr lang="en-US" smtClean="0"/>
+              <a:rPr lang="en-US"/>
               <a:t>Third level</a:t>
             </a:r>
           </a:p>
           <a:p>
             <a:pPr lvl="3"/>
             <a:r>
-              <a:rPr lang="en-US" smtClean="0"/>
+              <a:rPr lang="en-US"/>
               <a:t>Fourth level</a:t>
             </a:r>
           </a:p>
           <a:p>
             <a:pPr lvl="4"/>
             <a:r>
-              <a:rPr lang="en-US" smtClean="0"/>
+              <a:rPr lang="en-US"/>
               <a:t>Fifth level</a:t>
             </a:r>
-            <a:endParaRPr lang="en-US"/>
           </a:p>
         </p:txBody>
       </p:sp>
@@ -476,7 +489,7 @@
           <a:p>
             <a:fld id="{5BCAD085-E8A6-8845-BD4E-CB4CCA059FC4}" type="datetimeFigureOut">
               <a:rPr lang="en-US" smtClean="0"/>
-              <a:t>1/27/13</a:t>
+              <a:t>4/28/2026</a:t>
             </a:fld>
             <a:endParaRPr lang="en-US"/>
           </a:p>
@@ -575,10 +588,9 @@
           <a:lstStyle/>
           <a:p>
             <a:r>
-              <a:rPr lang="en-US" smtClean="0"/>
+              <a:rPr lang="en-US"/>
               <a:t>Click to edit Master title style</a:t>
             </a:r>
-            <a:endParaRPr lang="en-US"/>
           </a:p>
         </p:txBody>
       </p:sp>
@@ -604,38 +616,37 @@
           <a:p>
             <a:pPr lvl="0"/>
             <a:r>
-              <a:rPr lang="en-US" smtClean="0"/>
+              <a:rPr lang="en-US"/>
               <a:t>Click to edit Master text styles</a:t>
             </a:r>
           </a:p>
           <a:p>
             <a:pPr lvl="1"/>
             <a:r>
-              <a:rPr lang="en-US" smtClean="0"/>
+              <a:rPr lang="en-US"/>
               <a:t>Second level</a:t>
             </a:r>
           </a:p>
           <a:p>
             <a:pPr lvl="2"/>
             <a:r>
-              <a:rPr lang="en-US" smtClean="0"/>
+              <a:rPr lang="en-US"/>
               <a:t>Third level</a:t>
             </a:r>
           </a:p>
           <a:p>
             <a:pPr lvl="3"/>
             <a:r>
-              <a:rPr lang="en-US" smtClean="0"/>
+              <a:rPr lang="en-US"/>
               <a:t>Fourth level</a:t>
             </a:r>
           </a:p>
           <a:p>
             <a:pPr lvl="4"/>
             <a:r>
-              <a:rPr lang="en-US" smtClean="0"/>
+              <a:rPr lang="en-US"/>
               <a:t>Fifth level</a:t>
             </a:r>
-            <a:endParaRPr lang="en-US"/>
           </a:p>
         </p:txBody>
       </p:sp>
@@ -656,7 +667,7 @@
           <a:p>
             <a:fld id="{5BCAD085-E8A6-8845-BD4E-CB4CCA059FC4}" type="datetimeFigureOut">
               <a:rPr lang="en-US" smtClean="0"/>
-              <a:t>1/27/13</a:t>
+              <a:t>4/28/2026</a:t>
             </a:fld>
             <a:endParaRPr lang="en-US"/>
           </a:p>
@@ -750,10 +761,9 @@
           <a:lstStyle/>
           <a:p>
             <a:r>
-              <a:rPr lang="en-US" smtClean="0"/>
+              <a:rPr lang="en-US"/>
               <a:t>Click to edit Master title style</a:t>
             </a:r>
-            <a:endParaRPr lang="en-US"/>
           </a:p>
         </p:txBody>
       </p:sp>
@@ -774,38 +784,37 @@
           <a:p>
             <a:pPr lvl="0"/>
             <a:r>
-              <a:rPr lang="en-US" smtClean="0"/>
+              <a:rPr lang="en-US"/>
               <a:t>Click to edit Master text styles</a:t>
             </a:r>
           </a:p>
           <a:p>
             <a:pPr lvl="1"/>
             <a:r>
-              <a:rPr lang="en-US" smtClean="0"/>
+              <a:rPr lang="en-US"/>
               <a:t>Second level</a:t>
             </a:r>
           </a:p>
           <a:p>
             <a:pPr lvl="2"/>
             <a:r>
-              <a:rPr lang="en-US" smtClean="0"/>
+              <a:rPr lang="en-US"/>
               <a:t>Third level</a:t>
             </a:r>
           </a:p>
           <a:p>
             <a:pPr lvl="3"/>
             <a:r>
-              <a:rPr lang="en-US" smtClean="0"/>
+              <a:rPr lang="en-US"/>
               <a:t>Fourth level</a:t>
             </a:r>
           </a:p>
           <a:p>
             <a:pPr lvl="4"/>
             <a:r>
-              <a:rPr lang="en-US" smtClean="0"/>
+              <a:rPr lang="en-US"/>
               <a:t>Fifth level</a:t>
             </a:r>
-            <a:endParaRPr lang="en-US"/>
           </a:p>
         </p:txBody>
       </p:sp>
@@ -826,7 +835,7 @@
           <a:p>
             <a:fld id="{5BCAD085-E8A6-8845-BD4E-CB4CCA059FC4}" type="datetimeFigureOut">
               <a:rPr lang="en-US" smtClean="0"/>
-              <a:t>1/27/13</a:t>
+              <a:t>4/28/2026</a:t>
             </a:fld>
             <a:endParaRPr lang="en-US"/>
           </a:p>
@@ -929,10 +938,9 @@
           </a:lstStyle>
           <a:p>
             <a:r>
-              <a:rPr lang="en-US" smtClean="0"/>
+              <a:rPr lang="en-US"/>
               <a:t>Click to edit Master title style</a:t>
             </a:r>
-            <a:endParaRPr lang="en-US"/>
           </a:p>
         </p:txBody>
       </p:sp>
@@ -1049,7 +1057,7 @@
           <a:p>
             <a:pPr lvl="0"/>
             <a:r>
-              <a:rPr lang="en-US" smtClean="0"/>
+              <a:rPr lang="en-US"/>
               <a:t>Click to edit Master text styles</a:t>
             </a:r>
           </a:p>
@@ -1072,7 +1080,7 @@
           <a:p>
             <a:fld id="{5BCAD085-E8A6-8845-BD4E-CB4CCA059FC4}" type="datetimeFigureOut">
               <a:rPr lang="en-US" smtClean="0"/>
-              <a:t>1/27/13</a:t>
+              <a:t>4/28/2026</a:t>
             </a:fld>
             <a:endParaRPr lang="en-US"/>
           </a:p>
@@ -1166,10 +1174,9 @@
           <a:lstStyle/>
           <a:p>
             <a:r>
-              <a:rPr lang="en-US" smtClean="0"/>
+              <a:rPr lang="en-US"/>
               <a:t>Click to edit Master title style</a:t>
             </a:r>
-            <a:endParaRPr lang="en-US"/>
           </a:p>
         </p:txBody>
       </p:sp>
@@ -1223,38 +1230,37 @@
           <a:p>
             <a:pPr lvl="0"/>
             <a:r>
-              <a:rPr lang="en-US" smtClean="0"/>
+              <a:rPr lang="en-US"/>
               <a:t>Click to edit Master text styles</a:t>
             </a:r>
           </a:p>
           <a:p>
             <a:pPr lvl="1"/>
             <a:r>
-              <a:rPr lang="en-US" smtClean="0"/>
+              <a:rPr lang="en-US"/>
               <a:t>Second level</a:t>
             </a:r>
           </a:p>
           <a:p>
             <a:pPr lvl="2"/>
             <a:r>
-              <a:rPr lang="en-US" smtClean="0"/>
+              <a:rPr lang="en-US"/>
               <a:t>Third level</a:t>
             </a:r>
           </a:p>
           <a:p>
             <a:pPr lvl="3"/>
             <a:r>
-              <a:rPr lang="en-US" smtClean="0"/>
+              <a:rPr lang="en-US"/>
               <a:t>Fourth level</a:t>
             </a:r>
           </a:p>
           <a:p>
             <a:pPr lvl="4"/>
             <a:r>
-              <a:rPr lang="en-US" smtClean="0"/>
+              <a:rPr lang="en-US"/>
               <a:t>Fifth level</a:t>
             </a:r>
-            <a:endParaRPr lang="en-US"/>
           </a:p>
         </p:txBody>
       </p:sp>
@@ -1308,38 +1314,37 @@
           <a:p>
             <a:pPr lvl="0"/>
             <a:r>
-              <a:rPr lang="en-US" smtClean="0"/>
+              <a:rPr lang="en-US"/>
               <a:t>Click to edit Master text styles</a:t>
             </a:r>
           </a:p>
           <a:p>
             <a:pPr lvl="1"/>
             <a:r>
-              <a:rPr lang="en-US" smtClean="0"/>
+              <a:rPr lang="en-US"/>
               <a:t>Second level</a:t>
             </a:r>
           </a:p>
           <a:p>
             <a:pPr lvl="2"/>
             <a:r>
-              <a:rPr lang="en-US" smtClean="0"/>
+              <a:rPr lang="en-US"/>
               <a:t>Third level</a:t>
             </a:r>
           </a:p>
           <a:p>
             <a:pPr lvl="3"/>
             <a:r>
-              <a:rPr lang="en-US" smtClean="0"/>
+              <a:rPr lang="en-US"/>
               <a:t>Fourth level</a:t>
             </a:r>
           </a:p>
           <a:p>
             <a:pPr lvl="4"/>
             <a:r>
-              <a:rPr lang="en-US" smtClean="0"/>
+              <a:rPr lang="en-US"/>
               <a:t>Fifth level</a:t>
             </a:r>
-            <a:endParaRPr lang="en-US"/>
           </a:p>
         </p:txBody>
       </p:sp>
@@ -1360,7 +1365,7 @@
           <a:p>
             <a:fld id="{5BCAD085-E8A6-8845-BD4E-CB4CCA059FC4}" type="datetimeFigureOut">
               <a:rPr lang="en-US" smtClean="0"/>
-              <a:t>1/27/13</a:t>
+              <a:t>4/28/2026</a:t>
             </a:fld>
             <a:endParaRPr lang="en-US"/>
           </a:p>
@@ -1458,10 +1463,9 @@
           </a:lstStyle>
           <a:p>
             <a:r>
-              <a:rPr lang="en-US" smtClean="0"/>
+              <a:rPr lang="en-US"/>
               <a:t>Click to edit Master title style</a:t>
             </a:r>
-            <a:endParaRPr lang="en-US"/>
           </a:p>
         </p:txBody>
       </p:sp>
@@ -1524,7 +1528,7 @@
           <a:p>
             <a:pPr lvl="0"/>
             <a:r>
-              <a:rPr lang="en-US" smtClean="0"/>
+              <a:rPr lang="en-US"/>
               <a:t>Click to edit Master text styles</a:t>
             </a:r>
           </a:p>
@@ -1580,38 +1584,37 @@
           <a:p>
             <a:pPr lvl="0"/>
             <a:r>
-              <a:rPr lang="en-US" smtClean="0"/>
+              <a:rPr lang="en-US"/>
               <a:t>Click to edit Master text styles</a:t>
             </a:r>
           </a:p>
           <a:p>
             <a:pPr lvl="1"/>
             <a:r>
-              <a:rPr lang="en-US" smtClean="0"/>
+              <a:rPr lang="en-US"/>
               <a:t>Second level</a:t>
             </a:r>
           </a:p>
           <a:p>
             <a:pPr lvl="2"/>
             <a:r>
-              <a:rPr lang="en-US" smtClean="0"/>
+              <a:rPr lang="en-US"/>
               <a:t>Third level</a:t>
             </a:r>
           </a:p>
           <a:p>
             <a:pPr lvl="3"/>
             <a:r>
-              <a:rPr lang="en-US" smtClean="0"/>
+              <a:rPr lang="en-US"/>
               <a:t>Fourth level</a:t>
             </a:r>
           </a:p>
           <a:p>
             <a:pPr lvl="4"/>
             <a:r>
-              <a:rPr lang="en-US" smtClean="0"/>
+              <a:rPr lang="en-US"/>
               <a:t>Fifth level</a:t>
             </a:r>
-            <a:endParaRPr lang="en-US"/>
           </a:p>
         </p:txBody>
       </p:sp>
@@ -1674,7 +1677,7 @@
           <a:p>
             <a:pPr lvl="0"/>
             <a:r>
-              <a:rPr lang="en-US" smtClean="0"/>
+              <a:rPr lang="en-US"/>
               <a:t>Click to edit Master text styles</a:t>
             </a:r>
           </a:p>
@@ -1730,38 +1733,37 @@
           <a:p>
             <a:pPr lvl="0"/>
             <a:r>
-              <a:rPr lang="en-US" smtClean="0"/>
+              <a:rPr lang="en-US"/>
               <a:t>Click to edit Master text styles</a:t>
             </a:r>
           </a:p>
           <a:p>
             <a:pPr lvl="1"/>
             <a:r>
-              <a:rPr lang="en-US" smtClean="0"/>
+              <a:rPr lang="en-US"/>
               <a:t>Second level</a:t>
             </a:r>
           </a:p>
           <a:p>
             <a:pPr lvl="2"/>
             <a:r>
-              <a:rPr lang="en-US" smtClean="0"/>
+              <a:rPr lang="en-US"/>
               <a:t>Third level</a:t>
             </a:r>
           </a:p>
           <a:p>
             <a:pPr lvl="3"/>
             <a:r>
-              <a:rPr lang="en-US" smtClean="0"/>
+              <a:rPr lang="en-US"/>
               <a:t>Fourth level</a:t>
             </a:r>
           </a:p>
           <a:p>
             <a:pPr lvl="4"/>
             <a:r>
-              <a:rPr lang="en-US" smtClean="0"/>
+              <a:rPr lang="en-US"/>
               <a:t>Fifth level</a:t>
             </a:r>
-            <a:endParaRPr lang="en-US"/>
           </a:p>
         </p:txBody>
       </p:sp>
@@ -1782,7 +1784,7 @@
           <a:p>
             <a:fld id="{5BCAD085-E8A6-8845-BD4E-CB4CCA059FC4}" type="datetimeFigureOut">
               <a:rPr lang="en-US" smtClean="0"/>
-              <a:t>1/27/13</a:t>
+              <a:t>4/28/2026</a:t>
             </a:fld>
             <a:endParaRPr lang="en-US"/>
           </a:p>
@@ -1876,10 +1878,9 @@
           <a:lstStyle/>
           <a:p>
             <a:r>
-              <a:rPr lang="en-US" smtClean="0"/>
+              <a:rPr lang="en-US"/>
               <a:t>Click to edit Master title style</a:t>
             </a:r>
-            <a:endParaRPr lang="en-US"/>
           </a:p>
         </p:txBody>
       </p:sp>
@@ -1900,7 +1901,7 @@
           <a:p>
             <a:fld id="{5BCAD085-E8A6-8845-BD4E-CB4CCA059FC4}" type="datetimeFigureOut">
               <a:rPr lang="en-US" smtClean="0"/>
-              <a:t>1/27/13</a:t>
+              <a:t>4/28/2026</a:t>
             </a:fld>
             <a:endParaRPr lang="en-US"/>
           </a:p>
@@ -1995,7 +1996,7 @@
           <a:p>
             <a:fld id="{5BCAD085-E8A6-8845-BD4E-CB4CCA059FC4}" type="datetimeFigureOut">
               <a:rPr lang="en-US" smtClean="0"/>
-              <a:t>1/27/13</a:t>
+              <a:t>4/28/2026</a:t>
             </a:fld>
             <a:endParaRPr lang="en-US"/>
           </a:p>
@@ -2098,10 +2099,9 @@
           </a:lstStyle>
           <a:p>
             <a:r>
-              <a:rPr lang="en-US" smtClean="0"/>
+              <a:rPr lang="en-US"/>
               <a:t>Click to edit Master title style</a:t>
             </a:r>
-            <a:endParaRPr lang="en-US"/>
           </a:p>
         </p:txBody>
       </p:sp>
@@ -2155,38 +2155,37 @@
           <a:p>
             <a:pPr lvl="0"/>
             <a:r>
-              <a:rPr lang="en-US" smtClean="0"/>
+              <a:rPr lang="en-US"/>
               <a:t>Click to edit Master text styles</a:t>
             </a:r>
           </a:p>
           <a:p>
             <a:pPr lvl="1"/>
             <a:r>
-              <a:rPr lang="en-US" smtClean="0"/>
+              <a:rPr lang="en-US"/>
               <a:t>Second level</a:t>
             </a:r>
           </a:p>
           <a:p>
             <a:pPr lvl="2"/>
             <a:r>
-              <a:rPr lang="en-US" smtClean="0"/>
+              <a:rPr lang="en-US"/>
               <a:t>Third level</a:t>
             </a:r>
           </a:p>
           <a:p>
             <a:pPr lvl="3"/>
             <a:r>
-              <a:rPr lang="en-US" smtClean="0"/>
+              <a:rPr lang="en-US"/>
               <a:t>Fourth level</a:t>
             </a:r>
           </a:p>
           <a:p>
             <a:pPr lvl="4"/>
             <a:r>
-              <a:rPr lang="en-US" smtClean="0"/>
+              <a:rPr lang="en-US"/>
               <a:t>Fifth level</a:t>
             </a:r>
-            <a:endParaRPr lang="en-US"/>
           </a:p>
         </p:txBody>
       </p:sp>
@@ -2249,7 +2248,7 @@
           <a:p>
             <a:pPr lvl="0"/>
             <a:r>
-              <a:rPr lang="en-US" smtClean="0"/>
+              <a:rPr lang="en-US"/>
               <a:t>Click to edit Master text styles</a:t>
             </a:r>
           </a:p>
@@ -2272,7 +2271,7 @@
           <a:p>
             <a:fld id="{5BCAD085-E8A6-8845-BD4E-CB4CCA059FC4}" type="datetimeFigureOut">
               <a:rPr lang="en-US" smtClean="0"/>
-              <a:t>1/27/13</a:t>
+              <a:t>4/28/2026</a:t>
             </a:fld>
             <a:endParaRPr lang="en-US"/>
           </a:p>
@@ -2375,10 +2374,9 @@
           </a:lstStyle>
           <a:p>
             <a:r>
-              <a:rPr lang="en-US" smtClean="0"/>
+              <a:rPr lang="en-US"/>
               <a:t>Click to edit Master title style</a:t>
             </a:r>
-            <a:endParaRPr lang="en-US"/>
           </a:p>
         </p:txBody>
       </p:sp>
@@ -2502,7 +2500,7 @@
           <a:p>
             <a:pPr lvl="0"/>
             <a:r>
-              <a:rPr lang="en-US" smtClean="0"/>
+              <a:rPr lang="en-US"/>
               <a:t>Click to edit Master text styles</a:t>
             </a:r>
           </a:p>
@@ -2525,7 +2523,7 @@
           <a:p>
             <a:fld id="{5BCAD085-E8A6-8845-BD4E-CB4CCA059FC4}" type="datetimeFigureOut">
               <a:rPr lang="en-US" smtClean="0"/>
-              <a:t>1/27/13</a:t>
+              <a:t>4/28/2026</a:t>
             </a:fld>
             <a:endParaRPr lang="en-US"/>
           </a:p>
@@ -2634,10 +2632,9 @@
           <a:lstStyle/>
           <a:p>
             <a:r>
-              <a:rPr lang="en-US" smtClean="0"/>
+              <a:rPr lang="en-US"/>
               <a:t>Click to edit Master title style</a:t>
             </a:r>
-            <a:endParaRPr lang="en-US"/>
           </a:p>
         </p:txBody>
       </p:sp>
@@ -2668,38 +2665,37 @@
           <a:p>
             <a:pPr lvl="0"/>
             <a:r>
-              <a:rPr lang="en-US" smtClean="0"/>
+              <a:rPr lang="en-US"/>
               <a:t>Click to edit Master text styles</a:t>
             </a:r>
           </a:p>
           <a:p>
             <a:pPr lvl="1"/>
             <a:r>
-              <a:rPr lang="en-US" smtClean="0"/>
+              <a:rPr lang="en-US"/>
               <a:t>Second level</a:t>
             </a:r>
           </a:p>
           <a:p>
             <a:pPr lvl="2"/>
             <a:r>
-              <a:rPr lang="en-US" smtClean="0"/>
+              <a:rPr lang="en-US"/>
               <a:t>Third level</a:t>
             </a:r>
           </a:p>
           <a:p>
             <a:pPr lvl="3"/>
             <a:r>
-              <a:rPr lang="en-US" smtClean="0"/>
+              <a:rPr lang="en-US"/>
               <a:t>Fourth level</a:t>
             </a:r>
           </a:p>
           <a:p>
             <a:pPr lvl="4"/>
             <a:r>
-              <a:rPr lang="en-US" smtClean="0"/>
+              <a:rPr lang="en-US"/>
               <a:t>Fifth level</a:t>
             </a:r>
-            <a:endParaRPr lang="en-US"/>
           </a:p>
         </p:txBody>
       </p:sp>
@@ -2738,7 +2734,7 @@
           <a:p>
             <a:fld id="{5BCAD085-E8A6-8845-BD4E-CB4CCA059FC4}" type="datetimeFigureOut">
               <a:rPr lang="en-US" smtClean="0"/>
-              <a:t>1/27/13</a:t>
+              <a:t>4/28/2026</a:t>
             </a:fld>
             <a:endParaRPr lang="en-US"/>
           </a:p>
@@ -3097,7 +3093,7 @@
 </file>
 
 <file path=ppt/slides/slide1.xml><?xml version="1.0" encoding="utf-8"?>
-<p:sld xmlns:a="http://schemas.openxmlformats.org/drawingml/2006/main" xmlns:p="http://schemas.openxmlformats.org/presentationml/2006/main" xmlns:r="http://schemas.openxmlformats.org/officeDocument/2006/relationships">
+<p:sld xmlns:a="http://schemas.openxmlformats.org/drawingml/2006/main" xmlns:r="http://schemas.openxmlformats.org/officeDocument/2006/relationships" xmlns:p="http://schemas.openxmlformats.org/presentationml/2006/main">
   <p:cSld>
     <p:bg>
       <p:bgPr>
@@ -3113,7 +3109,14 @@
         <p:cNvGrpSpPr/>
         <p:nvPr/>
       </p:nvGrpSpPr>
-      <p:grpSpPr/>
+      <p:grpSpPr>
+        <a:xfrm>
+          <a:off x="0" y="0"/>
+          <a:ext cx="0" cy="0"/>
+          <a:chOff x="0" y="0"/>
+          <a:chExt cx="0" cy="0"/>
+        </a:xfrm>
+      </p:grpSpPr>
       <p:sp>
         <p:nvSpPr>
           <p:cNvPr id="2" name="Rectangle 1"/>
@@ -3154,6 +3157,7 @@
           <a:lstStyle/>
           <a:p>
             <a:pPr algn="ctr"/>
+            <a:endParaRPr/>
           </a:p>
         </p:txBody>
       </p:sp>
@@ -3278,7 +3282,7 @@
 </file>
 
 <file path=ppt/slides/slide10.xml><?xml version="1.0" encoding="utf-8"?>
-<p:sld xmlns:a="http://schemas.openxmlformats.org/drawingml/2006/main" xmlns:p="http://schemas.openxmlformats.org/presentationml/2006/main" xmlns:r="http://schemas.openxmlformats.org/officeDocument/2006/relationships">
+<p:sld xmlns:a="http://schemas.openxmlformats.org/drawingml/2006/main" xmlns:r="http://schemas.openxmlformats.org/officeDocument/2006/relationships" xmlns:p="http://schemas.openxmlformats.org/presentationml/2006/main">
   <p:cSld>
     <p:bg>
       <p:bgPr>
@@ -3294,7 +3298,14 @@
         <p:cNvGrpSpPr/>
         <p:nvPr/>
       </p:nvGrpSpPr>
-      <p:grpSpPr/>
+      <p:grpSpPr>
+        <a:xfrm>
+          <a:off x="0" y="0"/>
+          <a:ext cx="0" cy="0"/>
+          <a:chOff x="0" y="0"/>
+          <a:chExt cx="0" cy="0"/>
+        </a:xfrm>
+      </p:grpSpPr>
       <p:sp>
         <p:nvSpPr>
           <p:cNvPr id="2" name="TextBox 1"/>
@@ -3371,6 +3382,7 @@
           <a:lstStyle/>
           <a:p>
             <a:pPr algn="ctr"/>
+            <a:endParaRPr/>
           </a:p>
         </p:txBody>
       </p:sp>
@@ -3471,6 +3483,7 @@
                 <a:latin typeface="Times New Roman"/>
               </a:defRPr>
             </a:pPr>
+            <a:endParaRPr/>
           </a:p>
           <a:p>
             <a:pPr>
@@ -3651,6 +3664,7 @@
                 <a:latin typeface="Times New Roman"/>
               </a:defRPr>
             </a:pPr>
+            <a:endParaRPr/>
           </a:p>
           <a:p>
             <a:pPr>
@@ -3743,7 +3757,7 @@
 </file>
 
 <file path=ppt/slides/slide11.xml><?xml version="1.0" encoding="utf-8"?>
-<p:sld xmlns:a="http://schemas.openxmlformats.org/drawingml/2006/main" xmlns:p="http://schemas.openxmlformats.org/presentationml/2006/main" xmlns:r="http://schemas.openxmlformats.org/officeDocument/2006/relationships">
+<p:sld xmlns:a="http://schemas.openxmlformats.org/drawingml/2006/main" xmlns:r="http://schemas.openxmlformats.org/officeDocument/2006/relationships" xmlns:p="http://schemas.openxmlformats.org/presentationml/2006/main">
   <p:cSld>
     <p:bg>
       <p:bgPr>
@@ -3759,7 +3773,14 @@
         <p:cNvGrpSpPr/>
         <p:nvPr/>
       </p:nvGrpSpPr>
-      <p:grpSpPr/>
+      <p:grpSpPr>
+        <a:xfrm>
+          <a:off x="0" y="0"/>
+          <a:ext cx="0" cy="0"/>
+          <a:chOff x="0" y="0"/>
+          <a:chExt cx="0" cy="0"/>
+        </a:xfrm>
+      </p:grpSpPr>
       <p:sp>
         <p:nvSpPr>
           <p:cNvPr id="2" name="TextBox 1"/>
@@ -3836,6 +3857,7 @@
           <a:lstStyle/>
           <a:p>
             <a:pPr algn="ctr"/>
+            <a:endParaRPr/>
           </a:p>
         </p:txBody>
       </p:sp>
@@ -3918,7 +3940,7 @@
               </a:defRPr>
             </a:pPr>
             <a:r>
-              <a:t>- AES &amp; ChaCha20 achieve ~65-67 MB/s at 100KB. PRESENT and SPECK are orders of magnitude slower in pure Python.</a:t>
+              <a:t>- AES achieves ~94 MB/s and ChaCha20 ~50 MB/s at 100KB. PRESENT and SPECK are orders of magnitude slower in pure Python.</a:t>
             </a:r>
           </a:p>
         </p:txBody>
@@ -3954,7 +3976,7 @@
               </a:defRPr>
             </a:pPr>
             <a:r>
-              <a:t>- Lightweight ciphers saturate a single CPU core (~95-100%) due to intensive bit manipulation in Python.</a:t>
+              <a:t>- All algorithms show real measured CPU utilization (~88-179%) thanks to calibrated cpu_times() profiling.</a:t>
             </a:r>
           </a:p>
         </p:txBody>
@@ -3968,7 +3990,7 @@
 </file>
 
 <file path=ppt/slides/slide12.xml><?xml version="1.0" encoding="utf-8"?>
-<p:sld xmlns:a="http://schemas.openxmlformats.org/drawingml/2006/main" xmlns:p="http://schemas.openxmlformats.org/presentationml/2006/main" xmlns:r="http://schemas.openxmlformats.org/officeDocument/2006/relationships">
+<p:sld xmlns:a="http://schemas.openxmlformats.org/drawingml/2006/main" xmlns:r="http://schemas.openxmlformats.org/officeDocument/2006/relationships" xmlns:p="http://schemas.openxmlformats.org/presentationml/2006/main">
   <p:cSld>
     <p:bg>
       <p:bgPr>
@@ -3984,7 +4006,14 @@
         <p:cNvGrpSpPr/>
         <p:nvPr/>
       </p:nvGrpSpPr>
-      <p:grpSpPr/>
+      <p:grpSpPr>
+        <a:xfrm>
+          <a:off x="0" y="0"/>
+          <a:ext cx="0" cy="0"/>
+          <a:chOff x="0" y="0"/>
+          <a:chExt cx="0" cy="0"/>
+        </a:xfrm>
+      </p:grpSpPr>
       <p:sp>
         <p:nvSpPr>
           <p:cNvPr id="2" name="TextBox 1"/>
@@ -4061,6 +4090,7 @@
           <a:lstStyle/>
           <a:p>
             <a:pPr algn="ctr"/>
+            <a:endParaRPr/>
           </a:p>
         </p:txBody>
       </p:sp>
@@ -4143,7 +4173,7 @@
               </a:defRPr>
             </a:pPr>
             <a:r>
-              <a:t>- PRESENT: ~37s for 100KB encryption. SPECK: ~3s for 100KB. AES/ChaCha20: &lt;2ms for 100KB.</a:t>
+              <a:t>- PRESENT: ~127s for 100KB encryption. SPECK: ~5.6s for 100KB. AES: ~1.2ms, ChaCha20: ~2.1ms for 100KB.</a:t>
             </a:r>
           </a:p>
         </p:txBody>
@@ -4179,7 +4209,7 @@
               </a:defRPr>
             </a:pPr>
             <a:r>
-              <a:t>- Time scales linearly with data size for all algorithms, confirming O(n) complexity.</a:t>
+              <a:t>- Time scales linearly with data size for all algorithms, confirming O(n) complexity. Log-scale Y-axis used to show all bars.</a:t>
             </a:r>
           </a:p>
         </p:txBody>
@@ -4193,7 +4223,7 @@
 </file>
 
 <file path=ppt/slides/slide13.xml><?xml version="1.0" encoding="utf-8"?>
-<p:sld xmlns:a="http://schemas.openxmlformats.org/drawingml/2006/main" xmlns:p="http://schemas.openxmlformats.org/presentationml/2006/main" xmlns:r="http://schemas.openxmlformats.org/officeDocument/2006/relationships">
+<p:sld xmlns:a="http://schemas.openxmlformats.org/drawingml/2006/main" xmlns:r="http://schemas.openxmlformats.org/officeDocument/2006/relationships" xmlns:p="http://schemas.openxmlformats.org/presentationml/2006/main">
   <p:cSld>
     <p:bg>
       <p:bgPr>
@@ -4209,7 +4239,14 @@
         <p:cNvGrpSpPr/>
         <p:nvPr/>
       </p:nvGrpSpPr>
-      <p:grpSpPr/>
+      <p:grpSpPr>
+        <a:xfrm>
+          <a:off x="0" y="0"/>
+          <a:ext cx="0" cy="0"/>
+          <a:chOff x="0" y="0"/>
+          <a:chExt cx="0" cy="0"/>
+        </a:xfrm>
+      </p:grpSpPr>
       <p:sp>
         <p:nvSpPr>
           <p:cNvPr id="2" name="TextBox 1"/>
@@ -4286,6 +4323,7 @@
           <a:lstStyle/>
           <a:p>
             <a:pPr algn="ctr"/>
+            <a:endParaRPr/>
           </a:p>
         </p:txBody>
       </p:sp>
@@ -4368,7 +4406,7 @@
               </a:defRPr>
             </a:pPr>
             <a:r>
-              <a:t>- At 100KB: AES ~102KB, ChaCha20 ~100KB, PRESENT ~210KB, SPECK ~210KB peak memory.</a:t>
+              <a:t>- At 100KB: AES ~202KB, ChaCha20 ~201KB, PRESENT ~211KB, SPECK ~210KB peak memory.</a:t>
             </a:r>
           </a:p>
         </p:txBody>
@@ -4382,7 +4420,7 @@
 </file>
 
 <file path=ppt/slides/slide14.xml><?xml version="1.0" encoding="utf-8"?>
-<p:sld xmlns:a="http://schemas.openxmlformats.org/drawingml/2006/main" xmlns:p="http://schemas.openxmlformats.org/presentationml/2006/main" xmlns:r="http://schemas.openxmlformats.org/officeDocument/2006/relationships">
+<p:sld xmlns:a="http://schemas.openxmlformats.org/drawingml/2006/main" xmlns:r="http://schemas.openxmlformats.org/officeDocument/2006/relationships" xmlns:p="http://schemas.openxmlformats.org/presentationml/2006/main">
   <p:cSld>
     <p:bg>
       <p:bgPr>
@@ -4398,7 +4436,14 @@
         <p:cNvGrpSpPr/>
         <p:nvPr/>
       </p:nvGrpSpPr>
-      <p:grpSpPr/>
+      <p:grpSpPr>
+        <a:xfrm>
+          <a:off x="0" y="0"/>
+          <a:ext cx="0" cy="0"/>
+          <a:chOff x="0" y="0"/>
+          <a:chExt cx="0" cy="0"/>
+        </a:xfrm>
+      </p:grpSpPr>
       <p:sp>
         <p:nvSpPr>
           <p:cNvPr id="2" name="TextBox 1"/>
@@ -4475,6 +4520,7 @@
           <a:lstStyle/>
           <a:p>
             <a:pPr algn="ctr"/>
+            <a:endParaRPr/>
           </a:p>
         </p:txBody>
       </p:sp>
@@ -4524,7 +4570,7 @@
         </p:nvGraphicFramePr>
         <p:xfrm>
           <a:off x="731520" y="1645920"/>
-          <a:ext cx="10698480" cy="2286000"/>
+          <a:ext cx="10698480" cy="2316480"/>
         </p:xfrm>
         <a:graphic>
           <a:graphicData uri="http://schemas.openxmlformats.org/drawingml/2006/table">
@@ -4533,12 +4579,48 @@
                 <a:tableStyleId>{5C22544A-7EE6-4342-B048-85BDC9FD1C3A}</a:tableStyleId>
               </a:tblPr>
               <a:tblGrid>
-                <a:gridCol w="1783080"/>
-                <a:gridCol w="1783080"/>
-                <a:gridCol w="1783080"/>
-                <a:gridCol w="1783080"/>
-                <a:gridCol w="1783080"/>
-                <a:gridCol w="1783080"/>
+                <a:gridCol w="1783080">
+                  <a:extLst>
+                    <a:ext uri="{9D8B030D-6E8A-4147-A177-3AD203B41FA5}">
+                      <a16:colId xmlns:a16="http://schemas.microsoft.com/office/drawing/2014/main" val="20000"/>
+                    </a:ext>
+                  </a:extLst>
+                </a:gridCol>
+                <a:gridCol w="1783080">
+                  <a:extLst>
+                    <a:ext uri="{9D8B030D-6E8A-4147-A177-3AD203B41FA5}">
+                      <a16:colId xmlns:a16="http://schemas.microsoft.com/office/drawing/2014/main" val="20001"/>
+                    </a:ext>
+                  </a:extLst>
+                </a:gridCol>
+                <a:gridCol w="1783080">
+                  <a:extLst>
+                    <a:ext uri="{9D8B030D-6E8A-4147-A177-3AD203B41FA5}">
+                      <a16:colId xmlns:a16="http://schemas.microsoft.com/office/drawing/2014/main" val="20002"/>
+                    </a:ext>
+                  </a:extLst>
+                </a:gridCol>
+                <a:gridCol w="1783080">
+                  <a:extLst>
+                    <a:ext uri="{9D8B030D-6E8A-4147-A177-3AD203B41FA5}">
+                      <a16:colId xmlns:a16="http://schemas.microsoft.com/office/drawing/2014/main" val="20003"/>
+                    </a:ext>
+                  </a:extLst>
+                </a:gridCol>
+                <a:gridCol w="1783080">
+                  <a:extLst>
+                    <a:ext uri="{9D8B030D-6E8A-4147-A177-3AD203B41FA5}">
+                      <a16:colId xmlns:a16="http://schemas.microsoft.com/office/drawing/2014/main" val="20004"/>
+                    </a:ext>
+                  </a:extLst>
+                </a:gridCol>
+                <a:gridCol w="1783080">
+                  <a:extLst>
+                    <a:ext uri="{9D8B030D-6E8A-4147-A177-3AD203B41FA5}">
+                      <a16:colId xmlns:a16="http://schemas.microsoft.com/office/drawing/2014/main" val="20005"/>
+                    </a:ext>
+                  </a:extLst>
+                </a:gridCol>
               </a:tblGrid>
               <a:tr h="457200">
                 <a:tc>
@@ -4685,6 +4767,11 @@
                     </a:solidFill>
                   </a:tcPr>
                 </a:tc>
+                <a:extLst>
+                  <a:ext uri="{0D108BD9-81ED-4DB2-BD59-A6C34878D82A}">
+                    <a16:rowId xmlns:a16="http://schemas.microsoft.com/office/drawing/2014/main" val="10000"/>
+                  </a:ext>
+                </a:extLst>
               </a:tr>
               <a:tr h="457200">
                 <a:tc>
@@ -4719,7 +4806,7 @@
                         </a:defRPr>
                       </a:pPr>
                       <a:r>
-                        <a:t>3.811</a:t>
+                        <a:t>1.06</a:t>
                       </a:r>
                     </a:p>
                   </a:txBody>
@@ -4740,7 +4827,7 @@
                         </a:defRPr>
                       </a:pPr>
                       <a:r>
-                        <a:t>65.5</a:t>
+                        <a:t>179.1</a:t>
                       </a:r>
                     </a:p>
                   </a:txBody>
@@ -4761,7 +4848,7 @@
                         </a:defRPr>
                       </a:pPr>
                       <a:r>
-                        <a:t>51.6</a:t>
+                        <a:t>76.5</a:t>
                       </a:r>
                     </a:p>
                   </a:txBody>
@@ -4782,7 +4869,7 @@
                         </a:defRPr>
                       </a:pPr>
                       <a:r>
-                        <a:t>27.14</a:t>
+                        <a:t>35.80</a:t>
                       </a:r>
                     </a:p>
                   </a:txBody>
@@ -4803,7 +4890,8 @@
                         </a:defRPr>
                       </a:pPr>
                       <a:r>
-                        <a:t>7.0</a:t>
+                        <a:rPr dirty="0"/>
+                        <a:t>6.0</a:t>
                       </a:r>
                     </a:p>
                   </a:txBody>
@@ -4813,6 +4901,11 @@
                     </a:solidFill>
                   </a:tcPr>
                 </a:tc>
+                <a:extLst>
+                  <a:ext uri="{0D108BD9-81ED-4DB2-BD59-A6C34878D82A}">
+                    <a16:rowId xmlns:a16="http://schemas.microsoft.com/office/drawing/2014/main" val="10001"/>
+                  </a:ext>
+                </a:extLst>
               </a:tr>
               <a:tr h="457200">
                 <a:tc>
@@ -4843,7 +4936,7 @@
                         </a:defRPr>
                       </a:pPr>
                       <a:r>
-                        <a:t>0.993</a:t>
+                        <a:t>1.16</a:t>
                       </a:r>
                     </a:p>
                   </a:txBody>
@@ -4860,7 +4953,7 @@
                         </a:defRPr>
                       </a:pPr>
                       <a:r>
-                        <a:t>120.0</a:t>
+                        <a:t>143.1</a:t>
                       </a:r>
                     </a:p>
                   </a:txBody>
@@ -4877,7 +4970,7 @@
                         </a:defRPr>
                       </a:pPr>
                       <a:r>
-                        <a:t>39.0</a:t>
+                        <a:t>75.0</a:t>
                       </a:r>
                     </a:p>
                   </a:txBody>
@@ -4894,7 +4987,7 @@
                         </a:defRPr>
                       </a:pPr>
                       <a:r>
-                        <a:t>29.85</a:t>
+                        <a:t>22.69</a:t>
                       </a:r>
                     </a:p>
                   </a:txBody>
@@ -4911,12 +5004,18 @@
                         </a:defRPr>
                       </a:pPr>
                       <a:r>
+                        <a:rPr dirty="0"/>
                         <a:t>7.0</a:t>
                       </a:r>
                     </a:p>
                   </a:txBody>
                   <a:tcPr/>
                 </a:tc>
+                <a:extLst>
+                  <a:ext uri="{0D108BD9-81ED-4DB2-BD59-A6C34878D82A}">
+                    <a16:rowId xmlns:a16="http://schemas.microsoft.com/office/drawing/2014/main" val="10002"/>
+                  </a:ext>
+                </a:extLst>
               </a:tr>
               <a:tr h="457200">
                 <a:tc>
@@ -4951,7 +5050,7 @@
                         </a:defRPr>
                       </a:pPr>
                       <a:r>
-                        <a:t>13,783.90</a:t>
+                        <a:t>48,294.17</a:t>
                       </a:r>
                     </a:p>
                   </a:txBody>
@@ -4972,7 +5071,7 @@
                         </a:defRPr>
                       </a:pPr>
                       <a:r>
-                        <a:t>96.2</a:t>
+                        <a:t>88.6</a:t>
                       </a:r>
                     </a:p>
                   </a:txBody>
@@ -4993,7 +5092,7 @@
                         </a:defRPr>
                       </a:pPr>
                       <a:r>
-                        <a:t>79.1</a:t>
+                        <a:t>78.8</a:t>
                       </a:r>
                     </a:p>
                   </a:txBody>
@@ -5014,7 +5113,7 @@
                         </a:defRPr>
                       </a:pPr>
                       <a:r>
-                        <a:t>0.003</a:t>
+                        <a:t>0.001</a:t>
                       </a:r>
                     </a:p>
                   </a:txBody>
@@ -5035,7 +5134,7 @@
                         </a:defRPr>
                       </a:pPr>
                       <a:r>
-                        <a:t>15.0</a:t>
+                        <a:t>14.0</a:t>
                       </a:r>
                     </a:p>
                   </a:txBody>
@@ -5045,6 +5144,11 @@
                     </a:solidFill>
                   </a:tcPr>
                 </a:tc>
+                <a:extLst>
+                  <a:ext uri="{0D108BD9-81ED-4DB2-BD59-A6C34878D82A}">
+                    <a16:rowId xmlns:a16="http://schemas.microsoft.com/office/drawing/2014/main" val="10003"/>
+                  </a:ext>
+                </a:extLst>
               </a:tr>
               <a:tr h="457200">
                 <a:tc>
@@ -5075,7 +5179,7 @@
                         </a:defRPr>
                       </a:pPr>
                       <a:r>
-                        <a:t>1,181.88</a:t>
+                        <a:t>2,091.74</a:t>
                       </a:r>
                     </a:p>
                   </a:txBody>
@@ -5092,7 +5196,7 @@
                         </a:defRPr>
                       </a:pPr>
                       <a:r>
-                        <a:t>85.7</a:t>
+                        <a:t>95.3</a:t>
                       </a:r>
                     </a:p>
                   </a:txBody>
@@ -5109,7 +5213,7 @@
                         </a:defRPr>
                       </a:pPr>
                       <a:r>
-                        <a:t>79.0</a:t>
+                        <a:t>78.7</a:t>
                       </a:r>
                     </a:p>
                   </a:txBody>
@@ -5126,7 +5230,7 @@
                         </a:defRPr>
                       </a:pPr>
                       <a:r>
-                        <a:t>0.04</a:t>
+                        <a:t>0.017</a:t>
                       </a:r>
                     </a:p>
                   </a:txBody>
@@ -5143,12 +5247,18 @@
                         </a:defRPr>
                       </a:pPr>
                       <a:r>
-                        <a:t>11.0</a:t>
+                        <a:rPr dirty="0"/>
+                        <a:t>13.0</a:t>
                       </a:r>
                     </a:p>
                   </a:txBody>
                   <a:tcPr/>
                 </a:tc>
+                <a:extLst>
+                  <a:ext uri="{0D108BD9-81ED-4DB2-BD59-A6C34878D82A}">
+                    <a16:rowId xmlns:a16="http://schemas.microsoft.com/office/drawing/2014/main" val="10004"/>
+                  </a:ext>
+                </a:extLst>
               </a:tr>
             </a:tbl>
           </a:graphicData>
@@ -5221,7 +5331,8 @@
               </a:defRPr>
             </a:pPr>
             <a:r>
-              <a:t>BEST OVERALL (tied): AES-256-GCM &amp; ChaCha20-Poly1305 (Score: 7.0)</a:t>
+              <a:rPr dirty="0"/>
+              <a:t>BEST OVERALL: AES-256-GCM (Score: 6.0)</a:t>
             </a:r>
           </a:p>
         </p:txBody>
@@ -5257,7 +5368,7 @@
               </a:defRPr>
             </a:pPr>
             <a:r>
-              <a:t>- AES wins on CPU (hardware AES-NI). ChaCha20 wins on throughput &amp; memory. On devices without AES-NI, ChaCha20 is the clear winner.</a:t>
+              <a:t>- AES wins on latency &amp; throughput (hardware AES-NI). ChaCha20 is the best choice on devices without AES-NI hardware.</a:t>
             </a:r>
           </a:p>
         </p:txBody>
@@ -5271,7 +5382,7 @@
 </file>
 
 <file path=ppt/slides/slide15.xml><?xml version="1.0" encoding="utf-8"?>
-<p:sld xmlns:a="http://schemas.openxmlformats.org/drawingml/2006/main" xmlns:p="http://schemas.openxmlformats.org/presentationml/2006/main" xmlns:r="http://schemas.openxmlformats.org/officeDocument/2006/relationships">
+<p:sld xmlns:a="http://schemas.openxmlformats.org/drawingml/2006/main" xmlns:r="http://schemas.openxmlformats.org/officeDocument/2006/relationships" xmlns:p="http://schemas.openxmlformats.org/presentationml/2006/main">
   <p:cSld>
     <p:bg>
       <p:bgPr>
@@ -5287,7 +5398,14 @@
         <p:cNvGrpSpPr/>
         <p:nvPr/>
       </p:nvGrpSpPr>
-      <p:grpSpPr/>
+      <p:grpSpPr>
+        <a:xfrm>
+          <a:off x="0" y="0"/>
+          <a:ext cx="0" cy="0"/>
+          <a:chOff x="0" y="0"/>
+          <a:chExt cx="0" cy="0"/>
+        </a:xfrm>
+      </p:grpSpPr>
       <p:sp>
         <p:nvSpPr>
           <p:cNvPr id="2" name="TextBox 1"/>
@@ -5296,8 +5414,8 @@
         </p:nvSpPr>
         <p:spPr>
           <a:xfrm>
-            <a:off x="731520" y="365760"/>
-            <a:ext cx="10698480" cy="640080"/>
+            <a:off x="637563" y="301251"/>
+            <a:ext cx="10792437" cy="584775"/>
           </a:xfrm>
           <a:prstGeom prst="rect">
             <a:avLst/>
@@ -5319,7 +5437,8 @@
               </a:defRPr>
             </a:pPr>
             <a:r>
-              <a:t>Results: Scalability &amp; Distributed Performance</a:t>
+              <a:rPr dirty="0"/>
+              <a:t>Why Single-Node Benchmarking &amp; Distributed Systems?</a:t>
             </a:r>
           </a:p>
         </p:txBody>
@@ -5364,43 +5483,20 @@
           <a:lstStyle/>
           <a:p>
             <a:pPr algn="ctr"/>
-          </a:p>
-        </p:txBody>
-      </p:sp>
-      <p:pic>
-        <p:nvPicPr>
-          <p:cNvPr id="4" name="Picture 3" descr="scalability_dashboard.png"/>
-          <p:cNvPicPr>
-            <a:picLocks noChangeAspect="1"/>
-          </p:cNvPicPr>
+            <a:endParaRPr/>
+          </a:p>
+        </p:txBody>
+      </p:sp>
+      <p:sp>
+        <p:nvSpPr>
+          <p:cNvPr id="4" name="TextBox 3"/>
+          <p:cNvSpPr txBox="1"/>
           <p:nvPr/>
-        </p:nvPicPr>
-        <p:blipFill>
-          <a:blip r:embed="rId2"/>
-          <a:stretch>
-            <a:fillRect/>
-          </a:stretch>
-        </p:blipFill>
+        </p:nvSpPr>
         <p:spPr>
           <a:xfrm>
-            <a:off x="2286000" y="1371600"/>
-            <a:ext cx="7616952" cy="4114800"/>
-          </a:xfrm>
-          <a:prstGeom prst="rect">
-            <a:avLst/>
-          </a:prstGeom>
-        </p:spPr>
-      </p:pic>
-      <p:sp>
-        <p:nvSpPr>
-          <p:cNvPr id="5" name="TextBox 4"/>
-          <p:cNvSpPr txBox="1"/>
-          <p:nvPr/>
-        </p:nvSpPr>
-        <p:spPr>
-          <a:xfrm>
-            <a:off x="731520" y="5669280"/>
-            <a:ext cx="10698480" cy="457200"/>
+            <a:off x="731520" y="1280160"/>
+            <a:ext cx="4846320" cy="5029200"/>
           </a:xfrm>
           <a:prstGeom prst="rect">
             <a:avLst/>
@@ -5413,16 +5509,273 @@
           </a:bodyPr>
           <a:lstStyle/>
           <a:p>
-            <a:pPr algn="ctr">
-              <a:defRPr sz="1600" b="0">
-                <a:solidFill>
-                  <a:srgbClr val="2563EB"/>
-                </a:solidFill>
-                <a:latin typeface="Times New Roman"/>
-              </a:defRPr>
-            </a:pPr>
-            <a:r>
-              <a:t>System scalability remains nearly linear as the number of nodes increases (N = 5 to 1000).</a:t>
+            <a:pPr>
+              <a:spcAft>
+                <a:spcPts val="800"/>
+              </a:spcAft>
+              <a:defRPr sz="1400">
+                <a:solidFill>
+                  <a:srgbClr val="000000"/>
+                </a:solidFill>
+                <a:latin typeface="Times New Roman"/>
+              </a:defRPr>
+            </a:pPr>
+            <a:r>
+              <a:t>Why Single-Node First?</a:t>
+            </a:r>
+          </a:p>
+          <a:p>
+            <a:pPr>
+              <a:spcAft>
+                <a:spcPts val="800"/>
+              </a:spcAft>
+              <a:defRPr sz="1400">
+                <a:solidFill>
+                  <a:srgbClr val="000000"/>
+                </a:solidFill>
+                <a:latin typeface="Times New Roman"/>
+              </a:defRPr>
+            </a:pPr>
+            <a:endParaRPr/>
+          </a:p>
+          <a:p>
+            <a:pPr>
+              <a:spcAft>
+                <a:spcPts val="800"/>
+              </a:spcAft>
+              <a:defRPr sz="1400">
+                <a:solidFill>
+                  <a:srgbClr val="000000"/>
+                </a:solidFill>
+                <a:latin typeface="Times New Roman"/>
+              </a:defRPr>
+            </a:pPr>
+            <a:r>
+              <a:t>1. Establishes the Baseline: You cannot measure distributed scalability without knowing what 1 node can do. Single-node results provide the denominator for the Scalability Factor.</a:t>
+            </a:r>
+          </a:p>
+          <a:p>
+            <a:pPr>
+              <a:spcAft>
+                <a:spcPts val="800"/>
+              </a:spcAft>
+              <a:defRPr sz="1400">
+                <a:solidFill>
+                  <a:srgbClr val="000000"/>
+                </a:solidFill>
+                <a:latin typeface="Times New Roman"/>
+              </a:defRPr>
+            </a:pPr>
+            <a:endParaRPr/>
+          </a:p>
+          <a:p>
+            <a:pPr>
+              <a:spcAft>
+                <a:spcPts val="800"/>
+              </a:spcAft>
+              <a:defRPr sz="1400">
+                <a:solidFill>
+                  <a:srgbClr val="000000"/>
+                </a:solidFill>
+                <a:latin typeface="Times New Roman"/>
+              </a:defRPr>
+            </a:pPr>
+            <a:r>
+              <a:t>2. Finds Optimal Packet Size: Testing 1KB, 10KB, 100KB reveals each algorithm's setup overhead vs. processing cost curve, identifying the ideal network packet size.</a:t>
+            </a:r>
+          </a:p>
+          <a:p>
+            <a:pPr>
+              <a:spcAft>
+                <a:spcPts val="800"/>
+              </a:spcAft>
+              <a:defRPr sz="1400">
+                <a:solidFill>
+                  <a:srgbClr val="000000"/>
+                </a:solidFill>
+                <a:latin typeface="Times New Roman"/>
+              </a:defRPr>
+            </a:pPr>
+            <a:endParaRPr/>
+          </a:p>
+          <a:p>
+            <a:pPr>
+              <a:spcAft>
+                <a:spcPts val="800"/>
+              </a:spcAft>
+              <a:defRPr sz="1400">
+                <a:solidFill>
+                  <a:srgbClr val="000000"/>
+                </a:solidFill>
+                <a:latin typeface="Times New Roman"/>
+              </a:defRPr>
+            </a:pPr>
+            <a:r>
+              <a:t>3. Proves Hardware Feasibility: Isolates exact CPU% and peak RAM per device, proving the algorithm is physically deployable on constrained IoT hardware.</a:t>
+            </a:r>
+          </a:p>
+        </p:txBody>
+      </p:sp>
+      <p:sp>
+        <p:nvSpPr>
+          <p:cNvPr id="5" name="TextBox 4"/>
+          <p:cNvSpPr txBox="1"/>
+          <p:nvPr/>
+        </p:nvSpPr>
+        <p:spPr>
+          <a:xfrm>
+            <a:off x="5943600" y="1280160"/>
+            <a:ext cx="5303520" cy="5029200"/>
+          </a:xfrm>
+          <a:prstGeom prst="rect">
+            <a:avLst/>
+          </a:prstGeom>
+          <a:noFill/>
+        </p:spPr>
+        <p:txBody>
+          <a:bodyPr wrap="square">
+            <a:spAutoFit/>
+          </a:bodyPr>
+          <a:lstStyle/>
+          <a:p>
+            <a:pPr>
+              <a:spcAft>
+                <a:spcPts val="800"/>
+              </a:spcAft>
+              <a:defRPr sz="1400">
+                <a:solidFill>
+                  <a:srgbClr val="000000"/>
+                </a:solidFill>
+                <a:latin typeface="Times New Roman"/>
+              </a:defRPr>
+            </a:pPr>
+            <a:r>
+              <a:rPr dirty="0"/>
+              <a:t>Why Distributed Systems?</a:t>
+            </a:r>
+          </a:p>
+          <a:p>
+            <a:pPr>
+              <a:spcAft>
+                <a:spcPts val="800"/>
+              </a:spcAft>
+              <a:defRPr sz="1400">
+                <a:solidFill>
+                  <a:srgbClr val="000000"/>
+                </a:solidFill>
+                <a:latin typeface="Times New Roman"/>
+              </a:defRPr>
+            </a:pPr>
+            <a:endParaRPr dirty="0"/>
+          </a:p>
+          <a:p>
+            <a:pPr>
+              <a:spcAft>
+                <a:spcPts val="800"/>
+              </a:spcAft>
+              <a:defRPr sz="1400">
+                <a:solidFill>
+                  <a:srgbClr val="000000"/>
+                </a:solidFill>
+                <a:latin typeface="Times New Roman"/>
+              </a:defRPr>
+            </a:pPr>
+            <a:r>
+              <a:rPr dirty="0"/>
+              <a:t>1. Real-World Scale: IoT deployments have thousands of nodes encrypting concurrently. A single-node test cannot capture inter-node overhead or parallel contention.</a:t>
+            </a:r>
+          </a:p>
+          <a:p>
+            <a:pPr>
+              <a:spcAft>
+                <a:spcPts val="800"/>
+              </a:spcAft>
+              <a:defRPr sz="1400">
+                <a:solidFill>
+                  <a:srgbClr val="000000"/>
+                </a:solidFill>
+                <a:latin typeface="Times New Roman"/>
+              </a:defRPr>
+            </a:pPr>
+            <a:endParaRPr dirty="0"/>
+          </a:p>
+          <a:p>
+            <a:pPr>
+              <a:spcAft>
+                <a:spcPts val="800"/>
+              </a:spcAft>
+              <a:defRPr sz="1400">
+                <a:solidFill>
+                  <a:srgbClr val="000000"/>
+                </a:solidFill>
+                <a:latin typeface="Times New Roman"/>
+              </a:defRPr>
+            </a:pPr>
+            <a:r>
+              <a:rPr dirty="0"/>
+              <a:t>2. Scalability Proof: By distributing a fixed 100KB workload across N=5 to N=1000 nodes, we prove near-linear throughput scaling for AES/ChaCha20.</a:t>
+            </a:r>
+          </a:p>
+          <a:p>
+            <a:pPr>
+              <a:spcAft>
+                <a:spcPts val="800"/>
+              </a:spcAft>
+              <a:defRPr sz="1400">
+                <a:solidFill>
+                  <a:srgbClr val="000000"/>
+                </a:solidFill>
+                <a:latin typeface="Times New Roman"/>
+              </a:defRPr>
+            </a:pPr>
+            <a:endParaRPr dirty="0"/>
+          </a:p>
+          <a:p>
+            <a:pPr>
+              <a:spcAft>
+                <a:spcPts val="800"/>
+              </a:spcAft>
+              <a:defRPr sz="1400">
+                <a:solidFill>
+                  <a:srgbClr val="000000"/>
+                </a:solidFill>
+                <a:latin typeface="Times New Roman"/>
+              </a:defRPr>
+            </a:pPr>
+            <a:r>
+              <a:rPr dirty="0"/>
+              <a:t>3. Data Sovereignty: Encrypting at the edge (not cloud) keeps plaintext off the network. This architecture tolerates compromised intermediate nodes.</a:t>
+            </a:r>
+          </a:p>
+          <a:p>
+            <a:pPr>
+              <a:spcAft>
+                <a:spcPts val="800"/>
+              </a:spcAft>
+              <a:defRPr sz="1400">
+                <a:solidFill>
+                  <a:srgbClr val="000000"/>
+                </a:solidFill>
+                <a:latin typeface="Times New Roman"/>
+              </a:defRPr>
+            </a:pPr>
+            <a:endParaRPr dirty="0"/>
+          </a:p>
+          <a:p>
+            <a:pPr>
+              <a:spcAft>
+                <a:spcPts val="800"/>
+              </a:spcAft>
+              <a:defRPr sz="1400">
+                <a:solidFill>
+                  <a:srgbClr val="000000"/>
+                </a:solidFill>
+                <a:latin typeface="Times New Roman"/>
+              </a:defRPr>
+            </a:pPr>
+            <a:r>
+              <a:rPr dirty="0"/>
+              <a:t>4. Key Finding: AES/ChaCha20 scale almost perfectly. PRESENT/SPECK's process overhead exceeds their encryption time at high node counts.</a:t>
             </a:r>
           </a:p>
         </p:txBody>
@@ -5436,7 +5789,7 @@
 </file>
 
 <file path=ppt/slides/slide16.xml><?xml version="1.0" encoding="utf-8"?>
-<p:sld xmlns:a="http://schemas.openxmlformats.org/drawingml/2006/main" xmlns:p="http://schemas.openxmlformats.org/presentationml/2006/main" xmlns:r="http://schemas.openxmlformats.org/officeDocument/2006/relationships">
+<p:sld xmlns:a="http://schemas.openxmlformats.org/drawingml/2006/main" xmlns:r="http://schemas.openxmlformats.org/officeDocument/2006/relationships" xmlns:p="http://schemas.openxmlformats.org/presentationml/2006/main">
   <p:cSld>
     <p:bg>
       <p:bgPr>
@@ -5452,7 +5805,14 @@
         <p:cNvGrpSpPr/>
         <p:nvPr/>
       </p:nvGrpSpPr>
-      <p:grpSpPr/>
+      <p:grpSpPr>
+        <a:xfrm>
+          <a:off x="0" y="0"/>
+          <a:ext cx="0" cy="0"/>
+          <a:chOff x="0" y="0"/>
+          <a:chExt cx="0" cy="0"/>
+        </a:xfrm>
+      </p:grpSpPr>
       <p:sp>
         <p:nvSpPr>
           <p:cNvPr id="2" name="TextBox 1"/>
@@ -5484,7 +5844,7 @@
               </a:defRPr>
             </a:pPr>
             <a:r>
-              <a:t>Conclusion: Where Each Algorithm Excels &amp; Fails</a:t>
+              <a:t>Results: Scalability &amp; Distributed Performance</a:t>
             </a:r>
           </a:p>
         </p:txBody>
@@ -5529,567 +5889,70 @@
           <a:lstStyle/>
           <a:p>
             <a:pPr algn="ctr"/>
-          </a:p>
-        </p:txBody>
-      </p:sp>
-      <p:graphicFrame>
-        <p:nvGraphicFramePr>
-          <p:cNvPr id="4" name="Table 3"/>
-          <p:cNvGraphicFramePr>
-            <a:graphicFrameLocks noGrp="1"/>
-          </p:cNvGraphicFramePr>
+            <a:endParaRPr/>
+          </a:p>
+        </p:txBody>
+      </p:sp>
+      <p:pic>
+        <p:nvPicPr>
+          <p:cNvPr id="4" name="Picture 3" descr="scalability_dashboard.png"/>
+          <p:cNvPicPr>
+            <a:picLocks noChangeAspect="1"/>
+          </p:cNvPicPr>
           <p:nvPr/>
-        </p:nvGraphicFramePr>
-        <p:xfrm>
-          <a:off x="457200" y="1188720"/>
-          <a:ext cx="11247120" cy="5029200"/>
-        </p:xfrm>
-        <a:graphic>
-          <a:graphicData uri="http://schemas.openxmlformats.org/drawingml/2006/table">
-            <a:tbl>
-              <a:tblPr firstRow="1" bandRow="1">
-                <a:tableStyleId>{5C22544A-7EE6-4342-B048-85BDC9FD1C3A}</a:tableStyleId>
-              </a:tblPr>
-              <a:tblGrid>
-                <a:gridCol w="2811780"/>
-                <a:gridCol w="2811780"/>
-                <a:gridCol w="2811780"/>
-                <a:gridCol w="2811780"/>
-              </a:tblGrid>
-              <a:tr h="1005840">
-                <a:tc>
-                  <a:txBody>
-                    <a:bodyPr/>
-                    <a:lstStyle/>
-                    <a:p>
-                      <a:pPr algn="ctr">
-                        <a:defRPr sz="1200" b="1">
-                          <a:solidFill>
-                            <a:srgbClr val="FFFFFF"/>
-                          </a:solidFill>
-                          <a:latin typeface="Times New Roman"/>
-                        </a:defRPr>
-                      </a:pPr>
-                      <a:r>
-                        <a:t>Algorithm</a:t>
-                      </a:r>
-                    </a:p>
-                  </a:txBody>
-                  <a:tcPr>
-                    <a:solidFill>
-                      <a:srgbClr val="1E1E1E"/>
-                    </a:solidFill>
-                  </a:tcPr>
-                </a:tc>
-                <a:tc>
-                  <a:txBody>
-                    <a:bodyPr/>
-                    <a:lstStyle/>
-                    <a:p>
-                      <a:pPr algn="ctr">
-                        <a:defRPr sz="1200" b="1">
-                          <a:solidFill>
-                            <a:srgbClr val="FFFFFF"/>
-                          </a:solidFill>
-                          <a:latin typeface="Times New Roman"/>
-                        </a:defRPr>
-                      </a:pPr>
-                      <a:r>
-                        <a:t>Best For</a:t>
-                      </a:r>
-                    </a:p>
-                  </a:txBody>
-                  <a:tcPr>
-                    <a:solidFill>
-                      <a:srgbClr val="1E1E1E"/>
-                    </a:solidFill>
-                  </a:tcPr>
-                </a:tc>
-                <a:tc>
-                  <a:txBody>
-                    <a:bodyPr/>
-                    <a:lstStyle/>
-                    <a:p>
-                      <a:pPr algn="ctr">
-                        <a:defRPr sz="1200" b="1">
-                          <a:solidFill>
-                            <a:srgbClr val="FFFFFF"/>
-                          </a:solidFill>
-                          <a:latin typeface="Times New Roman"/>
-                        </a:defRPr>
-                      </a:pPr>
-                      <a:r>
-                        <a:t>Fails When</a:t>
-                      </a:r>
-                    </a:p>
-                  </a:txBody>
-                  <a:tcPr>
-                    <a:solidFill>
-                      <a:srgbClr val="1E1E1E"/>
-                    </a:solidFill>
-                  </a:tcPr>
-                </a:tc>
-                <a:tc>
-                  <a:txBody>
-                    <a:bodyPr/>
-                    <a:lstStyle/>
-                    <a:p>
-                      <a:pPr algn="ctr">
-                        <a:defRPr sz="1200" b="1">
-                          <a:solidFill>
-                            <a:srgbClr val="FFFFFF"/>
-                          </a:solidFill>
-                          <a:latin typeface="Times New Roman"/>
-                        </a:defRPr>
-                      </a:pPr>
-                      <a:r>
-                        <a:t>Why</a:t>
-                      </a:r>
-                    </a:p>
-                  </a:txBody>
-                  <a:tcPr>
-                    <a:solidFill>
-                      <a:srgbClr val="1E1E1E"/>
-                    </a:solidFill>
-                  </a:tcPr>
-                </a:tc>
-              </a:tr>
-              <a:tr h="1005840">
-                <a:tc>
-                  <a:txBody>
-                    <a:bodyPr/>
-                    <a:lstStyle/>
-                    <a:p>
-                      <a:pPr algn="ctr">
-                        <a:defRPr sz="1200">
-                          <a:latin typeface="Times New Roman"/>
-                        </a:defRPr>
-                      </a:pPr>
-                      <a:r>
-                        <a:t>AES-256-GCM</a:t>
-                      </a:r>
-                    </a:p>
-                  </a:txBody>
-                  <a:tcPr>
-                    <a:solidFill>
-                      <a:srgbClr val="F0F0FF"/>
-                    </a:solidFill>
-                  </a:tcPr>
-                </a:tc>
-                <a:tc>
-                  <a:txBody>
-                    <a:bodyPr/>
-                    <a:lstStyle/>
-                    <a:p>
-                      <a:pPr algn="ctr">
-                        <a:defRPr sz="1200">
-                          <a:latin typeface="Times New Roman"/>
-                        </a:defRPr>
-                      </a:pPr>
-                      <a:r>
-                        <a:t>High-performance edge nodes</a:t>
-                      </a:r>
-                    </a:p>
-                    <a:p>
-                      <a:pPr algn="ctr">
-                        <a:defRPr sz="1200">
-                          <a:latin typeface="Times New Roman"/>
-                        </a:defRPr>
-                      </a:pPr>
-                      <a:r>
-                        <a:t>(Raspberry Pi, x86 with AES-NI)</a:t>
-                      </a:r>
-                    </a:p>
-                  </a:txBody>
-                  <a:tcPr>
-                    <a:solidFill>
-                      <a:srgbClr val="F0F0FF"/>
-                    </a:solidFill>
-                  </a:tcPr>
-                </a:tc>
-                <a:tc>
-                  <a:txBody>
-                    <a:bodyPr/>
-                    <a:lstStyle/>
-                    <a:p>
-                      <a:pPr algn="ctr">
-                        <a:defRPr sz="1200">
-                          <a:latin typeface="Times New Roman"/>
-                        </a:defRPr>
-                      </a:pPr>
-                      <a:r>
-                        <a:t>Ultra-constrained devices</a:t>
-                      </a:r>
-                    </a:p>
-                    <a:p>
-                      <a:pPr algn="ctr">
-                        <a:defRPr sz="1200">
-                          <a:latin typeface="Times New Roman"/>
-                        </a:defRPr>
-                      </a:pPr>
-                      <a:r>
-                        <a:t>(passive RFID, 8-bit MCUs)</a:t>
-                      </a:r>
-                    </a:p>
-                  </a:txBody>
-                  <a:tcPr>
-                    <a:solidFill>
-                      <a:srgbClr val="F0F0FF"/>
-                    </a:solidFill>
-                  </a:tcPr>
-                </a:tc>
-                <a:tc>
-                  <a:txBody>
-                    <a:bodyPr/>
-                    <a:lstStyle/>
-                    <a:p>
-                      <a:pPr algn="ctr">
-                        <a:defRPr sz="1200">
-                          <a:latin typeface="Times New Roman"/>
-                        </a:defRPr>
-                      </a:pPr>
-                      <a:r>
-                        <a:t>Requires ~50,000 GE and dedicated</a:t>
-                      </a:r>
-                    </a:p>
-                    <a:p>
-                      <a:pPr algn="ctr">
-                        <a:defRPr sz="1200">
-                          <a:latin typeface="Times New Roman"/>
-                        </a:defRPr>
-                      </a:pPr>
-                      <a:r>
-                        <a:t>hardware instructions (AES-NI) for speed</a:t>
-                      </a:r>
-                    </a:p>
-                  </a:txBody>
-                  <a:tcPr>
-                    <a:solidFill>
-                      <a:srgbClr val="F0F0FF"/>
-                    </a:solidFill>
-                  </a:tcPr>
-                </a:tc>
-              </a:tr>
-              <a:tr h="1005840">
-                <a:tc>
-                  <a:txBody>
-                    <a:bodyPr/>
-                    <a:lstStyle/>
-                    <a:p>
-                      <a:pPr algn="ctr">
-                        <a:defRPr sz="1200">
-                          <a:latin typeface="Times New Roman"/>
-                        </a:defRPr>
-                      </a:pPr>
-                      <a:r>
-                        <a:t>ChaCha20-Poly1305</a:t>
-                      </a:r>
-                    </a:p>
-                  </a:txBody>
-                  <a:tcPr/>
-                </a:tc>
-                <a:tc>
-                  <a:txBody>
-                    <a:bodyPr/>
-                    <a:lstStyle/>
-                    <a:p>
-                      <a:pPr algn="ctr">
-                        <a:defRPr sz="1200">
-                          <a:latin typeface="Times New Roman"/>
-                        </a:defRPr>
-                      </a:pPr>
-                      <a:r>
-                        <a:t>Software-only ARM/RISC-V MCUs</a:t>
-                      </a:r>
-                    </a:p>
-                    <a:p>
-                      <a:pPr algn="ctr">
-                        <a:defRPr sz="1200">
-                          <a:latin typeface="Times New Roman"/>
-                        </a:defRPr>
-                      </a:pPr>
-                      <a:r>
-                        <a:t>(no crypto hardware needed)</a:t>
-                      </a:r>
-                    </a:p>
-                  </a:txBody>
-                  <a:tcPr/>
-                </a:tc>
-                <a:tc>
-                  <a:txBody>
-                    <a:bodyPr/>
-                    <a:lstStyle/>
-                    <a:p>
-                      <a:pPr algn="ctr">
-                        <a:defRPr sz="1200">
-                          <a:latin typeface="Times New Roman"/>
-                        </a:defRPr>
-                      </a:pPr>
-                      <a:r>
-                        <a:t>Extreme gate-count limits</a:t>
-                      </a:r>
-                    </a:p>
-                    <a:p>
-                      <a:pPr algn="ctr">
-                        <a:defRPr sz="1200">
-                          <a:latin typeface="Times New Roman"/>
-                        </a:defRPr>
-                      </a:pPr>
-                      <a:r>
-                        <a:t>(needs ~38,000 GE)</a:t>
-                      </a:r>
-                    </a:p>
-                  </a:txBody>
-                  <a:tcPr/>
-                </a:tc>
-                <a:tc>
-                  <a:txBody>
-                    <a:bodyPr/>
-                    <a:lstStyle/>
-                    <a:p>
-                      <a:pPr algn="ctr">
-                        <a:defRPr sz="1200">
-                          <a:latin typeface="Times New Roman"/>
-                        </a:defRPr>
-                      </a:pPr>
-                      <a:r>
-                        <a:t>Pure ARX ops are fast in software but</a:t>
-                      </a:r>
-                    </a:p>
-                    <a:p>
-                      <a:pPr algn="ctr">
-                        <a:defRPr sz="1200">
-                          <a:latin typeface="Times New Roman"/>
-                        </a:defRPr>
-                      </a:pPr>
-                      <a:r>
-                        <a:t>still require moderate silicon area</a:t>
-                      </a:r>
-                    </a:p>
-                  </a:txBody>
-                  <a:tcPr/>
-                </a:tc>
-              </a:tr>
-              <a:tr h="1005840">
-                <a:tc>
-                  <a:txBody>
-                    <a:bodyPr/>
-                    <a:lstStyle/>
-                    <a:p>
-                      <a:pPr algn="ctr">
-                        <a:defRPr sz="1200">
-                          <a:latin typeface="Times New Roman"/>
-                        </a:defRPr>
-                      </a:pPr>
-                      <a:r>
-                        <a:t>PRESENT-80</a:t>
-                      </a:r>
-                    </a:p>
-                  </a:txBody>
-                  <a:tcPr>
-                    <a:solidFill>
-                      <a:srgbClr val="F0F0FF"/>
-                    </a:solidFill>
-                  </a:tcPr>
-                </a:tc>
-                <a:tc>
-                  <a:txBody>
-                    <a:bodyPr/>
-                    <a:lstStyle/>
-                    <a:p>
-                      <a:pPr algn="ctr">
-                        <a:defRPr sz="1200">
-                          <a:latin typeface="Times New Roman"/>
-                        </a:defRPr>
-                      </a:pPr>
-                      <a:r>
-                        <a:t>Passive RFID, smart cards</a:t>
-                      </a:r>
-                    </a:p>
-                    <a:p>
-                      <a:pPr algn="ctr">
-                        <a:defRPr sz="1200">
-                          <a:latin typeface="Times New Roman"/>
-                        </a:defRPr>
-                      </a:pPr>
-                      <a:r>
-                        <a:t>(needs only ~1,570 GE)</a:t>
-                      </a:r>
-                    </a:p>
-                  </a:txBody>
-                  <a:tcPr>
-                    <a:solidFill>
-                      <a:srgbClr val="F0F0FF"/>
-                    </a:solidFill>
-                  </a:tcPr>
-                </a:tc>
-                <a:tc>
-                  <a:txBody>
-                    <a:bodyPr/>
-                    <a:lstStyle/>
-                    <a:p>
-                      <a:pPr algn="ctr">
-                        <a:defRPr sz="1200">
-                          <a:latin typeface="Times New Roman"/>
-                        </a:defRPr>
-                      </a:pPr>
-                      <a:r>
-                        <a:t>Any payload &gt;1KB in software</a:t>
-                      </a:r>
-                    </a:p>
-                    <a:p>
-                      <a:pPr algn="ctr">
-                        <a:defRPr sz="1200">
-                          <a:latin typeface="Times New Roman"/>
-                        </a:defRPr>
-                      </a:pPr>
-                      <a:r>
-                        <a:t>(~375ms per 1KB, ~37s per 100KB)</a:t>
-                      </a:r>
-                    </a:p>
-                  </a:txBody>
-                  <a:tcPr>
-                    <a:solidFill>
-                      <a:srgbClr val="F0F0FF"/>
-                    </a:solidFill>
-                  </a:tcPr>
-                </a:tc>
-                <a:tc>
-                  <a:txBody>
-                    <a:bodyPr/>
-                    <a:lstStyle/>
-                    <a:p>
-                      <a:pPr algn="ctr">
-                        <a:defRPr sz="1200">
-                          <a:latin typeface="Times New Roman"/>
-                        </a:defRPr>
-                      </a:pPr>
-                      <a:r>
-                        <a:t>Designed for hardware ASIC, not software.</a:t>
-                      </a:r>
-                    </a:p>
-                    <a:p>
-                      <a:pPr algn="ctr">
-                        <a:defRPr sz="1200">
-                          <a:latin typeface="Times New Roman"/>
-                        </a:defRPr>
-                      </a:pPr>
-                      <a:r>
-                        <a:t>31 rounds of 4-bit S-Box are slow in Python.</a:t>
-                      </a:r>
-                    </a:p>
-                  </a:txBody>
-                  <a:tcPr>
-                    <a:solidFill>
-                      <a:srgbClr val="F0F0FF"/>
-                    </a:solidFill>
-                  </a:tcPr>
-                </a:tc>
-              </a:tr>
-              <a:tr h="1005840">
-                <a:tc>
-                  <a:txBody>
-                    <a:bodyPr/>
-                    <a:lstStyle/>
-                    <a:p>
-                      <a:pPr algn="ctr">
-                        <a:defRPr sz="1200">
-                          <a:latin typeface="Times New Roman"/>
-                        </a:defRPr>
-                      </a:pPr>
-                      <a:r>
-                        <a:t>SPECK-64/128</a:t>
-                      </a:r>
-                    </a:p>
-                  </a:txBody>
-                  <a:tcPr/>
-                </a:tc>
-                <a:tc>
-                  <a:txBody>
-                    <a:bodyPr/>
-                    <a:lstStyle/>
-                    <a:p>
-                      <a:pPr algn="ctr">
-                        <a:defRPr sz="1200">
-                          <a:latin typeface="Times New Roman"/>
-                        </a:defRPr>
-                      </a:pPr>
-                      <a:r>
-                        <a:t>Constrained MCUs needing speed</a:t>
-                      </a:r>
-                    </a:p>
-                    <a:p>
-                      <a:pPr algn="ctr">
-                        <a:defRPr sz="1200">
-                          <a:latin typeface="Times New Roman"/>
-                        </a:defRPr>
-                      </a:pPr>
-                      <a:r>
-                        <a:t>(24 cycles/byte on ARM Cortex)</a:t>
-                      </a:r>
-                    </a:p>
-                  </a:txBody>
-                  <a:tcPr/>
-                </a:tc>
-                <a:tc>
-                  <a:txBody>
-                    <a:bodyPr/>
-                    <a:lstStyle/>
-                    <a:p>
-                      <a:pPr algn="ctr">
-                        <a:defRPr sz="1200">
-                          <a:latin typeface="Times New Roman"/>
-                        </a:defRPr>
-                      </a:pPr>
-                      <a:r>
-                        <a:t>Large payloads in pure Python</a:t>
-                      </a:r>
-                    </a:p>
-                    <a:p>
-                      <a:pPr algn="ctr">
-                        <a:defRPr sz="1200">
-                          <a:latin typeface="Times New Roman"/>
-                        </a:defRPr>
-                      </a:pPr>
-                      <a:r>
-                        <a:t>(~1.7s per 100KB)</a:t>
-                      </a:r>
-                    </a:p>
-                  </a:txBody>
-                  <a:tcPr/>
-                </a:tc>
-                <a:tc>
-                  <a:txBody>
-                    <a:bodyPr/>
-                    <a:lstStyle/>
-                    <a:p>
-                      <a:pPr algn="ctr">
-                        <a:defRPr sz="1200">
-                          <a:latin typeface="Times New Roman"/>
-                        </a:defRPr>
-                      </a:pPr>
-                      <a:r>
-                        <a:t>Optimized for C/ASM on MCUs. Python's</a:t>
-                      </a:r>
-                    </a:p>
-                    <a:p>
-                      <a:pPr algn="ctr">
-                        <a:defRPr sz="1200">
-                          <a:latin typeface="Times New Roman"/>
-                        </a:defRPr>
-                      </a:pPr>
-                      <a:r>
-                        <a:t>interpreter overhead negates ARX advantages.</a:t>
-                      </a:r>
-                    </a:p>
-                  </a:txBody>
-                  <a:tcPr/>
-                </a:tc>
-              </a:tr>
-            </a:tbl>
-          </a:graphicData>
-        </a:graphic>
-      </p:graphicFrame>
+        </p:nvPicPr>
+        <p:blipFill>
+          <a:blip r:embed="rId2"/>
+          <a:stretch>
+            <a:fillRect/>
+          </a:stretch>
+        </p:blipFill>
+        <p:spPr>
+          <a:xfrm>
+            <a:off x="2286000" y="1371600"/>
+            <a:ext cx="7616952" cy="4114800"/>
+          </a:xfrm>
+          <a:prstGeom prst="rect">
+            <a:avLst/>
+          </a:prstGeom>
+        </p:spPr>
+      </p:pic>
+      <p:sp>
+        <p:nvSpPr>
+          <p:cNvPr id="5" name="TextBox 4"/>
+          <p:cNvSpPr txBox="1"/>
+          <p:nvPr/>
+        </p:nvSpPr>
+        <p:spPr>
+          <a:xfrm>
+            <a:off x="731520" y="5669280"/>
+            <a:ext cx="10698480" cy="457200"/>
+          </a:xfrm>
+          <a:prstGeom prst="rect">
+            <a:avLst/>
+          </a:prstGeom>
+          <a:noFill/>
+        </p:spPr>
+        <p:txBody>
+          <a:bodyPr wrap="square">
+            <a:spAutoFit/>
+          </a:bodyPr>
+          <a:lstStyle/>
+          <a:p>
+            <a:pPr algn="ctr">
+              <a:defRPr sz="1600" b="0">
+                <a:solidFill>
+                  <a:srgbClr val="2563EB"/>
+                </a:solidFill>
+                <a:latin typeface="Times New Roman"/>
+              </a:defRPr>
+            </a:pPr>
+            <a:r>
+              <a:t>System scalability remains nearly linear as the number of nodes increases (N = 5 to 1000).</a:t>
+            </a:r>
+          </a:p>
+        </p:txBody>
+      </p:sp>
     </p:spTree>
   </p:cSld>
   <p:clrMapOvr>
@@ -6099,7 +5962,7 @@
 </file>
 
 <file path=ppt/slides/slide17.xml><?xml version="1.0" encoding="utf-8"?>
-<p:sld xmlns:a="http://schemas.openxmlformats.org/drawingml/2006/main" xmlns:p="http://schemas.openxmlformats.org/presentationml/2006/main" xmlns:r="http://schemas.openxmlformats.org/officeDocument/2006/relationships">
+<p:sld xmlns:a="http://schemas.openxmlformats.org/drawingml/2006/main" xmlns:r="http://schemas.openxmlformats.org/officeDocument/2006/relationships" xmlns:p="http://schemas.openxmlformats.org/presentationml/2006/main">
   <p:cSld>
     <p:bg>
       <p:bgPr>
@@ -6115,7 +5978,14 @@
         <p:cNvGrpSpPr/>
         <p:nvPr/>
       </p:nvGrpSpPr>
-      <p:grpSpPr/>
+      <p:grpSpPr>
+        <a:xfrm>
+          <a:off x="0" y="0"/>
+          <a:ext cx="0" cy="0"/>
+          <a:chOff x="0" y="0"/>
+          <a:chExt cx="0" cy="0"/>
+        </a:xfrm>
+      </p:grpSpPr>
       <p:sp>
         <p:nvSpPr>
           <p:cNvPr id="2" name="TextBox 1"/>
@@ -6147,7 +6017,7 @@
               </a:defRPr>
             </a:pPr>
             <a:r>
-              <a:t>References (1/2)</a:t>
+              <a:t>Conclusion: Where Each Algorithm Excels &amp; Fails</a:t>
             </a:r>
           </a:p>
         </p:txBody>
@@ -6192,192 +6062,617 @@
           <a:lstStyle/>
           <a:p>
             <a:pPr algn="ctr"/>
-          </a:p>
-        </p:txBody>
-      </p:sp>
-      <p:sp>
-        <p:nvSpPr>
-          <p:cNvPr id="4" name="TextBox 3"/>
-          <p:cNvSpPr txBox="1"/>
+            <a:endParaRPr/>
+          </a:p>
+        </p:txBody>
+      </p:sp>
+      <p:graphicFrame>
+        <p:nvGraphicFramePr>
+          <p:cNvPr id="4" name="Table 3"/>
+          <p:cNvGraphicFramePr>
+            <a:graphicFrameLocks noGrp="1"/>
+          </p:cNvGraphicFramePr>
           <p:nvPr/>
-        </p:nvSpPr>
-        <p:spPr>
-          <a:xfrm>
-            <a:off x="731520" y="1280160"/>
-            <a:ext cx="10698480" cy="5029200"/>
-          </a:xfrm>
-          <a:prstGeom prst="rect">
-            <a:avLst/>
-          </a:prstGeom>
-          <a:noFill/>
-        </p:spPr>
-        <p:txBody>
-          <a:bodyPr wrap="square">
-            <a:spAutoFit/>
-          </a:bodyPr>
-          <a:lstStyle/>
-          <a:p>
-            <a:pPr>
-              <a:spcAft>
-                <a:spcPts val="800"/>
-              </a:spcAft>
-              <a:defRPr sz="1400">
-                <a:solidFill>
-                  <a:srgbClr val="000000"/>
-                </a:solidFill>
-                <a:latin typeface="Times New Roman"/>
-              </a:defRPr>
-            </a:pPr>
-            <a:r>
-              <a:t>[1] Daemen, J. &amp; Rijmen, V. (2002). "The Design of Rijndael: AES." Springer.</a:t>
-            </a:r>
-          </a:p>
-          <a:p>
-            <a:pPr>
-              <a:spcAft>
-                <a:spcPts val="800"/>
-              </a:spcAft>
-              <a:defRPr sz="1400">
-                <a:solidFill>
-                  <a:srgbClr val="000000"/>
-                </a:solidFill>
-                <a:latin typeface="Times New Roman"/>
-              </a:defRPr>
-            </a:pPr>
-            <a:r>
-              <a:t>[2] Bernstein, D.J. (2008). "ChaCha, a variant of Salsa20." SASC 2008.</a:t>
-            </a:r>
-          </a:p>
-          <a:p>
-            <a:pPr>
-              <a:spcAft>
-                <a:spcPts val="800"/>
-              </a:spcAft>
-              <a:defRPr sz="1400">
-                <a:solidFill>
-                  <a:srgbClr val="000000"/>
-                </a:solidFill>
-                <a:latin typeface="Times New Roman"/>
-              </a:defRPr>
-            </a:pPr>
-            <a:r>
-              <a:t>[3] Bogdanov, A. et al. (2007). "PRESENT: An Ultra-Lightweight Block Cipher." CHES 2007, LNCS 4727.</a:t>
-            </a:r>
-          </a:p>
-          <a:p>
-            <a:pPr>
-              <a:spcAft>
-                <a:spcPts val="800"/>
-              </a:spcAft>
-              <a:defRPr sz="1400">
-                <a:solidFill>
-                  <a:srgbClr val="000000"/>
-                </a:solidFill>
-                <a:latin typeface="Times New Roman"/>
-              </a:defRPr>
-            </a:pPr>
-            <a:r>
-              <a:t>[4] Beaulieu, R. et al. (2013). "The SIMON and SPECK Families of Lightweight Block Ciphers." IACR ePrint 2013/404.</a:t>
-            </a:r>
-          </a:p>
-          <a:p>
-            <a:pPr>
-              <a:spcAft>
-                <a:spcPts val="800"/>
-              </a:spcAft>
-              <a:defRPr sz="1400">
-                <a:solidFill>
-                  <a:srgbClr val="000000"/>
-                </a:solidFill>
-                <a:latin typeface="Times New Roman"/>
-              </a:defRPr>
-            </a:pPr>
-            <a:r>
-              <a:t>[5] Thakor, V. et al. (2021). "Lightweight Cryptography Algorithms for Resource-Constrained IoT Devices." IEEE Access, Vol. 9.</a:t>
-            </a:r>
-          </a:p>
-          <a:p>
-            <a:pPr>
-              <a:spcAft>
-                <a:spcPts val="800"/>
-              </a:spcAft>
-              <a:defRPr sz="1400">
-                <a:solidFill>
-                  <a:srgbClr val="000000"/>
-                </a:solidFill>
-                <a:latin typeface="Times New Roman"/>
-              </a:defRPr>
-            </a:pPr>
-            <a:r>
-              <a:t>[6] Akyildiz, I.F. et al. (2002). "Wireless Sensor Networks: A Survey." Computer Networks, Vol. 38(4).</a:t>
-            </a:r>
-          </a:p>
-          <a:p>
-            <a:pPr>
-              <a:spcAft>
-                <a:spcPts val="800"/>
-              </a:spcAft>
-              <a:defRPr sz="1400">
-                <a:solidFill>
-                  <a:srgbClr val="000000"/>
-                </a:solidFill>
-                <a:latin typeface="Times New Roman"/>
-              </a:defRPr>
-            </a:pPr>
-            <a:r>
-              <a:t>[7] Shi, W. et al. (2016). "Edge Computing: Vision and Challenges." IEEE Internet of Things Journal, 3(5).</a:t>
-            </a:r>
-          </a:p>
-          <a:p>
-            <a:pPr>
-              <a:spcAft>
-                <a:spcPts val="800"/>
-              </a:spcAft>
-              <a:defRPr sz="1400">
-                <a:solidFill>
-                  <a:srgbClr val="000000"/>
-                </a:solidFill>
-                <a:latin typeface="Times New Roman"/>
-              </a:defRPr>
-            </a:pPr>
-            <a:r>
-              <a:t>[8] Li, S. et al. (2015). "The Internet of Things: A Survey." Information Systems Frontiers, 17(2).</a:t>
-            </a:r>
-          </a:p>
-          <a:p>
-            <a:pPr>
-              <a:spcAft>
-                <a:spcPts val="800"/>
-              </a:spcAft>
-              <a:defRPr sz="1400">
-                <a:solidFill>
-                  <a:srgbClr val="000000"/>
-                </a:solidFill>
-                <a:latin typeface="Times New Roman"/>
-              </a:defRPr>
-            </a:pPr>
-            <a:r>
-              <a:t>[9] McKay, K. et al. (2017). "Report on Lightweight Cryptography." NIST Internal Report 8114.</a:t>
-            </a:r>
-          </a:p>
-          <a:p>
-            <a:pPr>
-              <a:spcAft>
-                <a:spcPts val="800"/>
-              </a:spcAft>
-              <a:defRPr sz="1400">
-                <a:solidFill>
-                  <a:srgbClr val="000000"/>
-                </a:solidFill>
-                <a:latin typeface="Times New Roman"/>
-              </a:defRPr>
-            </a:pPr>
-            <a:r>
-              <a:t>[10] Hatzivasilis, G. et al. (2018). "Review of Lightweight Block Ciphers." Journal of Cryptographic Engineering, 8(2).</a:t>
-            </a:r>
-          </a:p>
-        </p:txBody>
-      </p:sp>
+        </p:nvGraphicFramePr>
+        <p:xfrm>
+          <a:off x="457200" y="1188720"/>
+          <a:ext cx="11247120" cy="5029200"/>
+        </p:xfrm>
+        <a:graphic>
+          <a:graphicData uri="http://schemas.openxmlformats.org/drawingml/2006/table">
+            <a:tbl>
+              <a:tblPr firstRow="1" bandRow="1">
+                <a:tableStyleId>{5C22544A-7EE6-4342-B048-85BDC9FD1C3A}</a:tableStyleId>
+              </a:tblPr>
+              <a:tblGrid>
+                <a:gridCol w="2811780">
+                  <a:extLst>
+                    <a:ext uri="{9D8B030D-6E8A-4147-A177-3AD203B41FA5}">
+                      <a16:colId xmlns:a16="http://schemas.microsoft.com/office/drawing/2014/main" val="20000"/>
+                    </a:ext>
+                  </a:extLst>
+                </a:gridCol>
+                <a:gridCol w="2811780">
+                  <a:extLst>
+                    <a:ext uri="{9D8B030D-6E8A-4147-A177-3AD203B41FA5}">
+                      <a16:colId xmlns:a16="http://schemas.microsoft.com/office/drawing/2014/main" val="20001"/>
+                    </a:ext>
+                  </a:extLst>
+                </a:gridCol>
+                <a:gridCol w="2811780">
+                  <a:extLst>
+                    <a:ext uri="{9D8B030D-6E8A-4147-A177-3AD203B41FA5}">
+                      <a16:colId xmlns:a16="http://schemas.microsoft.com/office/drawing/2014/main" val="20002"/>
+                    </a:ext>
+                  </a:extLst>
+                </a:gridCol>
+                <a:gridCol w="2811780">
+                  <a:extLst>
+                    <a:ext uri="{9D8B030D-6E8A-4147-A177-3AD203B41FA5}">
+                      <a16:colId xmlns:a16="http://schemas.microsoft.com/office/drawing/2014/main" val="20003"/>
+                    </a:ext>
+                  </a:extLst>
+                </a:gridCol>
+              </a:tblGrid>
+              <a:tr h="1005840">
+                <a:tc>
+                  <a:txBody>
+                    <a:bodyPr/>
+                    <a:lstStyle/>
+                    <a:p>
+                      <a:pPr algn="ctr">
+                        <a:defRPr sz="1200" b="1">
+                          <a:solidFill>
+                            <a:srgbClr val="FFFFFF"/>
+                          </a:solidFill>
+                          <a:latin typeface="Times New Roman"/>
+                        </a:defRPr>
+                      </a:pPr>
+                      <a:r>
+                        <a:t>Algorithm</a:t>
+                      </a:r>
+                    </a:p>
+                  </a:txBody>
+                  <a:tcPr>
+                    <a:solidFill>
+                      <a:srgbClr val="1E1E1E"/>
+                    </a:solidFill>
+                  </a:tcPr>
+                </a:tc>
+                <a:tc>
+                  <a:txBody>
+                    <a:bodyPr/>
+                    <a:lstStyle/>
+                    <a:p>
+                      <a:pPr algn="ctr">
+                        <a:defRPr sz="1200" b="1">
+                          <a:solidFill>
+                            <a:srgbClr val="FFFFFF"/>
+                          </a:solidFill>
+                          <a:latin typeface="Times New Roman"/>
+                        </a:defRPr>
+                      </a:pPr>
+                      <a:r>
+                        <a:t>Best For</a:t>
+                      </a:r>
+                    </a:p>
+                  </a:txBody>
+                  <a:tcPr>
+                    <a:solidFill>
+                      <a:srgbClr val="1E1E1E"/>
+                    </a:solidFill>
+                  </a:tcPr>
+                </a:tc>
+                <a:tc>
+                  <a:txBody>
+                    <a:bodyPr/>
+                    <a:lstStyle/>
+                    <a:p>
+                      <a:pPr algn="ctr">
+                        <a:defRPr sz="1200" b="1">
+                          <a:solidFill>
+                            <a:srgbClr val="FFFFFF"/>
+                          </a:solidFill>
+                          <a:latin typeface="Times New Roman"/>
+                        </a:defRPr>
+                      </a:pPr>
+                      <a:r>
+                        <a:t>Fails When</a:t>
+                      </a:r>
+                    </a:p>
+                  </a:txBody>
+                  <a:tcPr>
+                    <a:solidFill>
+                      <a:srgbClr val="1E1E1E"/>
+                    </a:solidFill>
+                  </a:tcPr>
+                </a:tc>
+                <a:tc>
+                  <a:txBody>
+                    <a:bodyPr/>
+                    <a:lstStyle/>
+                    <a:p>
+                      <a:pPr algn="ctr">
+                        <a:defRPr sz="1200" b="1">
+                          <a:solidFill>
+                            <a:srgbClr val="FFFFFF"/>
+                          </a:solidFill>
+                          <a:latin typeface="Times New Roman"/>
+                        </a:defRPr>
+                      </a:pPr>
+                      <a:r>
+                        <a:t>Why</a:t>
+                      </a:r>
+                    </a:p>
+                  </a:txBody>
+                  <a:tcPr>
+                    <a:solidFill>
+                      <a:srgbClr val="1E1E1E"/>
+                    </a:solidFill>
+                  </a:tcPr>
+                </a:tc>
+                <a:extLst>
+                  <a:ext uri="{0D108BD9-81ED-4DB2-BD59-A6C34878D82A}">
+                    <a16:rowId xmlns:a16="http://schemas.microsoft.com/office/drawing/2014/main" val="10000"/>
+                  </a:ext>
+                </a:extLst>
+              </a:tr>
+              <a:tr h="1005840">
+                <a:tc>
+                  <a:txBody>
+                    <a:bodyPr/>
+                    <a:lstStyle/>
+                    <a:p>
+                      <a:pPr algn="ctr">
+                        <a:defRPr sz="1200">
+                          <a:latin typeface="Times New Roman"/>
+                        </a:defRPr>
+                      </a:pPr>
+                      <a:r>
+                        <a:t>AES-256-GCM</a:t>
+                      </a:r>
+                    </a:p>
+                  </a:txBody>
+                  <a:tcPr>
+                    <a:solidFill>
+                      <a:srgbClr val="F0F0FF"/>
+                    </a:solidFill>
+                  </a:tcPr>
+                </a:tc>
+                <a:tc>
+                  <a:txBody>
+                    <a:bodyPr/>
+                    <a:lstStyle/>
+                    <a:p>
+                      <a:pPr algn="ctr">
+                        <a:defRPr sz="1200">
+                          <a:latin typeface="Times New Roman"/>
+                        </a:defRPr>
+                      </a:pPr>
+                      <a:r>
+                        <a:t>High-performance edge nodes</a:t>
+                      </a:r>
+                    </a:p>
+                    <a:p>
+                      <a:pPr algn="ctr">
+                        <a:defRPr sz="1200">
+                          <a:latin typeface="Times New Roman"/>
+                        </a:defRPr>
+                      </a:pPr>
+                      <a:r>
+                        <a:t>(Raspberry Pi, x86 with AES-NI)</a:t>
+                      </a:r>
+                    </a:p>
+                  </a:txBody>
+                  <a:tcPr>
+                    <a:solidFill>
+                      <a:srgbClr val="F0F0FF"/>
+                    </a:solidFill>
+                  </a:tcPr>
+                </a:tc>
+                <a:tc>
+                  <a:txBody>
+                    <a:bodyPr/>
+                    <a:lstStyle/>
+                    <a:p>
+                      <a:pPr algn="ctr">
+                        <a:defRPr sz="1200">
+                          <a:latin typeface="Times New Roman"/>
+                        </a:defRPr>
+                      </a:pPr>
+                      <a:r>
+                        <a:t>Ultra-constrained devices</a:t>
+                      </a:r>
+                    </a:p>
+                    <a:p>
+                      <a:pPr algn="ctr">
+                        <a:defRPr sz="1200">
+                          <a:latin typeface="Times New Roman"/>
+                        </a:defRPr>
+                      </a:pPr>
+                      <a:r>
+                        <a:t>(passive RFID, 8-bit MCUs)</a:t>
+                      </a:r>
+                    </a:p>
+                  </a:txBody>
+                  <a:tcPr>
+                    <a:solidFill>
+                      <a:srgbClr val="F0F0FF"/>
+                    </a:solidFill>
+                  </a:tcPr>
+                </a:tc>
+                <a:tc>
+                  <a:txBody>
+                    <a:bodyPr/>
+                    <a:lstStyle/>
+                    <a:p>
+                      <a:pPr algn="ctr">
+                        <a:defRPr sz="1200">
+                          <a:latin typeface="Times New Roman"/>
+                        </a:defRPr>
+                      </a:pPr>
+                      <a:r>
+                        <a:t>Requires ~50,000 GE and dedicated</a:t>
+                      </a:r>
+                    </a:p>
+                    <a:p>
+                      <a:pPr algn="ctr">
+                        <a:defRPr sz="1200">
+                          <a:latin typeface="Times New Roman"/>
+                        </a:defRPr>
+                      </a:pPr>
+                      <a:r>
+                        <a:t>hardware instructions (AES-NI) for speed</a:t>
+                      </a:r>
+                    </a:p>
+                  </a:txBody>
+                  <a:tcPr>
+                    <a:solidFill>
+                      <a:srgbClr val="F0F0FF"/>
+                    </a:solidFill>
+                  </a:tcPr>
+                </a:tc>
+                <a:extLst>
+                  <a:ext uri="{0D108BD9-81ED-4DB2-BD59-A6C34878D82A}">
+                    <a16:rowId xmlns:a16="http://schemas.microsoft.com/office/drawing/2014/main" val="10001"/>
+                  </a:ext>
+                </a:extLst>
+              </a:tr>
+              <a:tr h="1005840">
+                <a:tc>
+                  <a:txBody>
+                    <a:bodyPr/>
+                    <a:lstStyle/>
+                    <a:p>
+                      <a:pPr algn="ctr">
+                        <a:defRPr sz="1200">
+                          <a:latin typeface="Times New Roman"/>
+                        </a:defRPr>
+                      </a:pPr>
+                      <a:r>
+                        <a:t>ChaCha20-Poly1305</a:t>
+                      </a:r>
+                    </a:p>
+                  </a:txBody>
+                  <a:tcPr/>
+                </a:tc>
+                <a:tc>
+                  <a:txBody>
+                    <a:bodyPr/>
+                    <a:lstStyle/>
+                    <a:p>
+                      <a:pPr algn="ctr">
+                        <a:defRPr sz="1200">
+                          <a:latin typeface="Times New Roman"/>
+                        </a:defRPr>
+                      </a:pPr>
+                      <a:r>
+                        <a:t>Software-only ARM/RISC-V MCUs</a:t>
+                      </a:r>
+                    </a:p>
+                    <a:p>
+                      <a:pPr algn="ctr">
+                        <a:defRPr sz="1200">
+                          <a:latin typeface="Times New Roman"/>
+                        </a:defRPr>
+                      </a:pPr>
+                      <a:r>
+                        <a:t>(no crypto hardware needed)</a:t>
+                      </a:r>
+                    </a:p>
+                  </a:txBody>
+                  <a:tcPr/>
+                </a:tc>
+                <a:tc>
+                  <a:txBody>
+                    <a:bodyPr/>
+                    <a:lstStyle/>
+                    <a:p>
+                      <a:pPr algn="ctr">
+                        <a:defRPr sz="1200">
+                          <a:latin typeface="Times New Roman"/>
+                        </a:defRPr>
+                      </a:pPr>
+                      <a:r>
+                        <a:t>Extreme gate-count limits</a:t>
+                      </a:r>
+                    </a:p>
+                    <a:p>
+                      <a:pPr algn="ctr">
+                        <a:defRPr sz="1200">
+                          <a:latin typeface="Times New Roman"/>
+                        </a:defRPr>
+                      </a:pPr>
+                      <a:r>
+                        <a:t>(needs ~38,000 GE)</a:t>
+                      </a:r>
+                    </a:p>
+                  </a:txBody>
+                  <a:tcPr/>
+                </a:tc>
+                <a:tc>
+                  <a:txBody>
+                    <a:bodyPr/>
+                    <a:lstStyle/>
+                    <a:p>
+                      <a:pPr algn="ctr">
+                        <a:defRPr sz="1200">
+                          <a:latin typeface="Times New Roman"/>
+                        </a:defRPr>
+                      </a:pPr>
+                      <a:r>
+                        <a:t>Pure ARX ops are fast in software but</a:t>
+                      </a:r>
+                    </a:p>
+                    <a:p>
+                      <a:pPr algn="ctr">
+                        <a:defRPr sz="1200">
+                          <a:latin typeface="Times New Roman"/>
+                        </a:defRPr>
+                      </a:pPr>
+                      <a:r>
+                        <a:t>still require moderate silicon area</a:t>
+                      </a:r>
+                    </a:p>
+                  </a:txBody>
+                  <a:tcPr/>
+                </a:tc>
+                <a:extLst>
+                  <a:ext uri="{0D108BD9-81ED-4DB2-BD59-A6C34878D82A}">
+                    <a16:rowId xmlns:a16="http://schemas.microsoft.com/office/drawing/2014/main" val="10002"/>
+                  </a:ext>
+                </a:extLst>
+              </a:tr>
+              <a:tr h="1005840">
+                <a:tc>
+                  <a:txBody>
+                    <a:bodyPr/>
+                    <a:lstStyle/>
+                    <a:p>
+                      <a:pPr algn="ctr">
+                        <a:defRPr sz="1200">
+                          <a:latin typeface="Times New Roman"/>
+                        </a:defRPr>
+                      </a:pPr>
+                      <a:r>
+                        <a:t>PRESENT-80</a:t>
+                      </a:r>
+                    </a:p>
+                  </a:txBody>
+                  <a:tcPr>
+                    <a:solidFill>
+                      <a:srgbClr val="F0F0FF"/>
+                    </a:solidFill>
+                  </a:tcPr>
+                </a:tc>
+                <a:tc>
+                  <a:txBody>
+                    <a:bodyPr/>
+                    <a:lstStyle/>
+                    <a:p>
+                      <a:pPr algn="ctr">
+                        <a:defRPr sz="1200">
+                          <a:latin typeface="Times New Roman"/>
+                        </a:defRPr>
+                      </a:pPr>
+                      <a:r>
+                        <a:t>Passive RFID, smart cards</a:t>
+                      </a:r>
+                    </a:p>
+                    <a:p>
+                      <a:pPr algn="ctr">
+                        <a:defRPr sz="1200">
+                          <a:latin typeface="Times New Roman"/>
+                        </a:defRPr>
+                      </a:pPr>
+                      <a:r>
+                        <a:t>(needs only ~1,570 GE)</a:t>
+                      </a:r>
+                    </a:p>
+                  </a:txBody>
+                  <a:tcPr>
+                    <a:solidFill>
+                      <a:srgbClr val="F0F0FF"/>
+                    </a:solidFill>
+                  </a:tcPr>
+                </a:tc>
+                <a:tc>
+                  <a:txBody>
+                    <a:bodyPr/>
+                    <a:lstStyle/>
+                    <a:p>
+                      <a:pPr algn="ctr">
+                        <a:defRPr sz="1200">
+                          <a:latin typeface="Times New Roman"/>
+                        </a:defRPr>
+                      </a:pPr>
+                      <a:r>
+                        <a:t>Any payload &gt;1KB in software</a:t>
+                      </a:r>
+                    </a:p>
+                    <a:p>
+                      <a:pPr algn="ctr">
+                        <a:defRPr sz="1200">
+                          <a:latin typeface="Times New Roman"/>
+                        </a:defRPr>
+                      </a:pPr>
+                      <a:r>
+                        <a:t>(~375ms per 1KB, ~37s per 100KB)</a:t>
+                      </a:r>
+                    </a:p>
+                  </a:txBody>
+                  <a:tcPr>
+                    <a:solidFill>
+                      <a:srgbClr val="F0F0FF"/>
+                    </a:solidFill>
+                  </a:tcPr>
+                </a:tc>
+                <a:tc>
+                  <a:txBody>
+                    <a:bodyPr/>
+                    <a:lstStyle/>
+                    <a:p>
+                      <a:pPr algn="ctr">
+                        <a:defRPr sz="1200">
+                          <a:latin typeface="Times New Roman"/>
+                        </a:defRPr>
+                      </a:pPr>
+                      <a:r>
+                        <a:t>Designed for hardware ASIC, not software.</a:t>
+                      </a:r>
+                    </a:p>
+                    <a:p>
+                      <a:pPr algn="ctr">
+                        <a:defRPr sz="1200">
+                          <a:latin typeface="Times New Roman"/>
+                        </a:defRPr>
+                      </a:pPr>
+                      <a:r>
+                        <a:t>31 rounds of 4-bit S-Box are slow in Python.</a:t>
+                      </a:r>
+                    </a:p>
+                  </a:txBody>
+                  <a:tcPr>
+                    <a:solidFill>
+                      <a:srgbClr val="F0F0FF"/>
+                    </a:solidFill>
+                  </a:tcPr>
+                </a:tc>
+                <a:extLst>
+                  <a:ext uri="{0D108BD9-81ED-4DB2-BD59-A6C34878D82A}">
+                    <a16:rowId xmlns:a16="http://schemas.microsoft.com/office/drawing/2014/main" val="10003"/>
+                  </a:ext>
+                </a:extLst>
+              </a:tr>
+              <a:tr h="1005840">
+                <a:tc>
+                  <a:txBody>
+                    <a:bodyPr/>
+                    <a:lstStyle/>
+                    <a:p>
+                      <a:pPr algn="ctr">
+                        <a:defRPr sz="1200">
+                          <a:latin typeface="Times New Roman"/>
+                        </a:defRPr>
+                      </a:pPr>
+                      <a:r>
+                        <a:t>SPECK-64/128</a:t>
+                      </a:r>
+                    </a:p>
+                  </a:txBody>
+                  <a:tcPr/>
+                </a:tc>
+                <a:tc>
+                  <a:txBody>
+                    <a:bodyPr/>
+                    <a:lstStyle/>
+                    <a:p>
+                      <a:pPr algn="ctr">
+                        <a:defRPr sz="1200">
+                          <a:latin typeface="Times New Roman"/>
+                        </a:defRPr>
+                      </a:pPr>
+                      <a:r>
+                        <a:t>Constrained MCUs needing speed</a:t>
+                      </a:r>
+                    </a:p>
+                    <a:p>
+                      <a:pPr algn="ctr">
+                        <a:defRPr sz="1200">
+                          <a:latin typeface="Times New Roman"/>
+                        </a:defRPr>
+                      </a:pPr>
+                      <a:r>
+                        <a:t>(24 cycles/byte on ARM Cortex)</a:t>
+                      </a:r>
+                    </a:p>
+                  </a:txBody>
+                  <a:tcPr/>
+                </a:tc>
+                <a:tc>
+                  <a:txBody>
+                    <a:bodyPr/>
+                    <a:lstStyle/>
+                    <a:p>
+                      <a:pPr algn="ctr">
+                        <a:defRPr sz="1200">
+                          <a:latin typeface="Times New Roman"/>
+                        </a:defRPr>
+                      </a:pPr>
+                      <a:r>
+                        <a:t>Large payloads in pure Python</a:t>
+                      </a:r>
+                    </a:p>
+                    <a:p>
+                      <a:pPr algn="ctr">
+                        <a:defRPr sz="1200">
+                          <a:latin typeface="Times New Roman"/>
+                        </a:defRPr>
+                      </a:pPr>
+                      <a:r>
+                        <a:t>(~1.7s per 100KB)</a:t>
+                      </a:r>
+                    </a:p>
+                  </a:txBody>
+                  <a:tcPr/>
+                </a:tc>
+                <a:tc>
+                  <a:txBody>
+                    <a:bodyPr/>
+                    <a:lstStyle/>
+                    <a:p>
+                      <a:pPr algn="ctr">
+                        <a:defRPr sz="1200">
+                          <a:latin typeface="Times New Roman"/>
+                        </a:defRPr>
+                      </a:pPr>
+                      <a:r>
+                        <a:t>Optimized for C/ASM on MCUs. Python's</a:t>
+                      </a:r>
+                    </a:p>
+                    <a:p>
+                      <a:pPr algn="ctr">
+                        <a:defRPr sz="1200">
+                          <a:latin typeface="Times New Roman"/>
+                        </a:defRPr>
+                      </a:pPr>
+                      <a:r>
+                        <a:t>interpreter overhead negates ARX advantages.</a:t>
+                      </a:r>
+                    </a:p>
+                  </a:txBody>
+                  <a:tcPr/>
+                </a:tc>
+                <a:extLst>
+                  <a:ext uri="{0D108BD9-81ED-4DB2-BD59-A6C34878D82A}">
+                    <a16:rowId xmlns:a16="http://schemas.microsoft.com/office/drawing/2014/main" val="10004"/>
+                  </a:ext>
+                </a:extLst>
+              </a:tr>
+            </a:tbl>
+          </a:graphicData>
+        </a:graphic>
+      </p:graphicFrame>
     </p:spTree>
   </p:cSld>
   <p:clrMapOvr>
@@ -6387,7 +6682,7 @@
 </file>
 
 <file path=ppt/slides/slide18.xml><?xml version="1.0" encoding="utf-8"?>
-<p:sld xmlns:a="http://schemas.openxmlformats.org/drawingml/2006/main" xmlns:p="http://schemas.openxmlformats.org/presentationml/2006/main" xmlns:r="http://schemas.openxmlformats.org/officeDocument/2006/relationships">
+<p:sld xmlns:a="http://schemas.openxmlformats.org/drawingml/2006/main" xmlns:r="http://schemas.openxmlformats.org/officeDocument/2006/relationships" xmlns:p="http://schemas.openxmlformats.org/presentationml/2006/main">
   <p:cSld>
     <p:bg>
       <p:bgPr>
@@ -6403,7 +6698,14 @@
         <p:cNvGrpSpPr/>
         <p:nvPr/>
       </p:nvGrpSpPr>
-      <p:grpSpPr/>
+      <p:grpSpPr>
+        <a:xfrm>
+          <a:off x="0" y="0"/>
+          <a:ext cx="0" cy="0"/>
+          <a:chOff x="0" y="0"/>
+          <a:chExt cx="0" cy="0"/>
+        </a:xfrm>
+      </p:grpSpPr>
       <p:sp>
         <p:nvSpPr>
           <p:cNvPr id="2" name="TextBox 1"/>
@@ -6435,7 +6737,7 @@
               </a:defRPr>
             </a:pPr>
             <a:r>
-              <a:t>References (2/2)</a:t>
+              <a:t>References (1/2)</a:t>
             </a:r>
           </a:p>
         </p:txBody>
@@ -6480,6 +6782,7 @@
           <a:lstStyle/>
           <a:p>
             <a:pPr algn="ctr"/>
+            <a:endParaRPr/>
           </a:p>
         </p:txBody>
       </p:sp>
@@ -6509,7 +6812,7 @@
               <a:spcAft>
                 <a:spcPts val="800"/>
               </a:spcAft>
-              <a:defRPr sz="1500">
+              <a:defRPr sz="1400">
                 <a:solidFill>
                   <a:srgbClr val="000000"/>
                 </a:solidFill>
@@ -6517,7 +6820,7 @@
               </a:defRPr>
             </a:pPr>
             <a:r>
-              <a:t>Wikipedia / Online References:</a:t>
+              <a:t>[1] Daemen, J. &amp; Rijmen, V. (2002). "The Design of Rijndael: AES." Springer.</a:t>
             </a:r>
           </a:p>
           <a:p>
@@ -6525,20 +6828,23 @@
               <a:spcAft>
                 <a:spcPts val="800"/>
               </a:spcAft>
-              <a:defRPr sz="1500">
+              <a:defRPr sz="1400">
                 <a:solidFill>
                   <a:srgbClr val="000000"/>
                 </a:solidFill>
                 <a:latin typeface="Times New Roman"/>
               </a:defRPr>
             </a:pPr>
+            <a:r>
+              <a:t>[2] Bernstein, D.J. (2008). "ChaCha, a variant of Salsa20." SASC 2008.</a:t>
+            </a:r>
           </a:p>
           <a:p>
             <a:pPr>
               <a:spcAft>
                 <a:spcPts val="800"/>
               </a:spcAft>
-              <a:defRPr sz="1500">
+              <a:defRPr sz="1400">
                 <a:solidFill>
                   <a:srgbClr val="000000"/>
                 </a:solidFill>
@@ -6546,7 +6852,7 @@
               </a:defRPr>
             </a:pPr>
             <a:r>
-              <a:t>[W1] https://en.wikipedia.org/wiki/Advanced_Encryption_Standard</a:t>
+              <a:t>[3] Bogdanov, A. et al. (2007). "PRESENT: An Ultra-Lightweight Block Cipher." CHES 2007, LNCS 4727.</a:t>
             </a:r>
           </a:p>
           <a:p>
@@ -6554,7 +6860,7 @@
               <a:spcAft>
                 <a:spcPts val="800"/>
               </a:spcAft>
-              <a:defRPr sz="1500">
+              <a:defRPr sz="1400">
                 <a:solidFill>
                   <a:srgbClr val="000000"/>
                 </a:solidFill>
@@ -6562,7 +6868,7 @@
               </a:defRPr>
             </a:pPr>
             <a:r>
-              <a:t>[W2] https://en.wikipedia.org/wiki/Salsa20#ChaCha_variant</a:t>
+              <a:t>[4] Beaulieu, R. et al. (2013). "The SIMON and SPECK Families of Lightweight Block Ciphers." IACR ePrint 2013/404.</a:t>
             </a:r>
           </a:p>
           <a:p>
@@ -6570,7 +6876,7 @@
               <a:spcAft>
                 <a:spcPts val="800"/>
               </a:spcAft>
-              <a:defRPr sz="1500">
+              <a:defRPr sz="1400">
                 <a:solidFill>
                   <a:srgbClr val="000000"/>
                 </a:solidFill>
@@ -6578,7 +6884,87 @@
               </a:defRPr>
             </a:pPr>
             <a:r>
-              <a:t>[W3] https://en.wikipedia.org/wiki/PRESENT_(cipher)</a:t>
+              <a:t>[5] Thakor, V. et al. (2021). "Lightweight Cryptography Algorithms for Resource-Constrained IoT Devices." IEEE Access, Vol. 9.</a:t>
+            </a:r>
+          </a:p>
+          <a:p>
+            <a:pPr>
+              <a:spcAft>
+                <a:spcPts val="800"/>
+              </a:spcAft>
+              <a:defRPr sz="1400">
+                <a:solidFill>
+                  <a:srgbClr val="000000"/>
+                </a:solidFill>
+                <a:latin typeface="Times New Roman"/>
+              </a:defRPr>
+            </a:pPr>
+            <a:r>
+              <a:t>[6] Akyildiz, I.F. et al. (2002). "Wireless Sensor Networks: A Survey." Computer Networks, Vol. 38(4).</a:t>
+            </a:r>
+          </a:p>
+          <a:p>
+            <a:pPr>
+              <a:spcAft>
+                <a:spcPts val="800"/>
+              </a:spcAft>
+              <a:defRPr sz="1400">
+                <a:solidFill>
+                  <a:srgbClr val="000000"/>
+                </a:solidFill>
+                <a:latin typeface="Times New Roman"/>
+              </a:defRPr>
+            </a:pPr>
+            <a:r>
+              <a:t>[7] Shi, W. et al. (2016). "Edge Computing: Vision and Challenges." IEEE Internet of Things Journal, 3(5).</a:t>
+            </a:r>
+          </a:p>
+          <a:p>
+            <a:pPr>
+              <a:spcAft>
+                <a:spcPts val="800"/>
+              </a:spcAft>
+              <a:defRPr sz="1400">
+                <a:solidFill>
+                  <a:srgbClr val="000000"/>
+                </a:solidFill>
+                <a:latin typeface="Times New Roman"/>
+              </a:defRPr>
+            </a:pPr>
+            <a:r>
+              <a:t>[8] Li, S. et al. (2015). "The Internet of Things: A Survey." Information Systems Frontiers, 17(2).</a:t>
+            </a:r>
+          </a:p>
+          <a:p>
+            <a:pPr>
+              <a:spcAft>
+                <a:spcPts val="800"/>
+              </a:spcAft>
+              <a:defRPr sz="1400">
+                <a:solidFill>
+                  <a:srgbClr val="000000"/>
+                </a:solidFill>
+                <a:latin typeface="Times New Roman"/>
+              </a:defRPr>
+            </a:pPr>
+            <a:r>
+              <a:t>[9] McKay, K. et al. (2017). "Report on Lightweight Cryptography." NIST Internal Report 8114.</a:t>
+            </a:r>
+          </a:p>
+          <a:p>
+            <a:pPr>
+              <a:spcAft>
+                <a:spcPts val="800"/>
+              </a:spcAft>
+              <a:defRPr sz="1400">
+                <a:solidFill>
+                  <a:srgbClr val="000000"/>
+                </a:solidFill>
+                <a:latin typeface="Times New Roman"/>
+              </a:defRPr>
+            </a:pPr>
+            <a:r>
+              <a:t>[10] Hatzivasilis, G. et al. (2018). "Review of Lightweight Block Ciphers." Journal of Cryptographic Engineering, 8(2).</a:t>
             </a:r>
           </a:p>
         </p:txBody>
@@ -6592,7 +6978,7 @@
 </file>
 
 <file path=ppt/slides/slide19.xml><?xml version="1.0" encoding="utf-8"?>
-<p:sld xmlns:a="http://schemas.openxmlformats.org/drawingml/2006/main" xmlns:p="http://schemas.openxmlformats.org/presentationml/2006/main" xmlns:r="http://schemas.openxmlformats.org/officeDocument/2006/relationships">
+<p:sld xmlns:a="http://schemas.openxmlformats.org/drawingml/2006/main" xmlns:r="http://schemas.openxmlformats.org/officeDocument/2006/relationships" xmlns:p="http://schemas.openxmlformats.org/presentationml/2006/main">
   <p:cSld>
     <p:bg>
       <p:bgPr>
@@ -6608,7 +6994,458 @@
         <p:cNvGrpSpPr/>
         <p:nvPr/>
       </p:nvGrpSpPr>
-      <p:grpSpPr/>
+      <p:grpSpPr>
+        <a:xfrm>
+          <a:off x="0" y="0"/>
+          <a:ext cx="0" cy="0"/>
+          <a:chOff x="0" y="0"/>
+          <a:chExt cx="0" cy="0"/>
+        </a:xfrm>
+      </p:grpSpPr>
+      <p:sp>
+        <p:nvSpPr>
+          <p:cNvPr id="2" name="TextBox 1"/>
+          <p:cNvSpPr txBox="1"/>
+          <p:nvPr/>
+        </p:nvSpPr>
+        <p:spPr>
+          <a:xfrm>
+            <a:off x="731520" y="365760"/>
+            <a:ext cx="10698480" cy="640080"/>
+          </a:xfrm>
+          <a:prstGeom prst="rect">
+            <a:avLst/>
+          </a:prstGeom>
+          <a:noFill/>
+        </p:spPr>
+        <p:txBody>
+          <a:bodyPr wrap="square">
+            <a:spAutoFit/>
+          </a:bodyPr>
+          <a:lstStyle/>
+          <a:p>
+            <a:pPr algn="l">
+              <a:defRPr sz="3200" b="1">
+                <a:solidFill>
+                  <a:srgbClr val="1E1E1E"/>
+                </a:solidFill>
+                <a:latin typeface="Times New Roman"/>
+              </a:defRPr>
+            </a:pPr>
+            <a:r>
+              <a:t>References (2/2)</a:t>
+            </a:r>
+          </a:p>
+        </p:txBody>
+      </p:sp>
+      <p:sp>
+        <p:nvSpPr>
+          <p:cNvPr id="3" name="Rectangle 2"/>
+          <p:cNvSpPr/>
+          <p:nvPr/>
+        </p:nvSpPr>
+        <p:spPr>
+          <a:xfrm>
+            <a:off x="731520" y="1005840"/>
+            <a:ext cx="10698480" cy="25400"/>
+          </a:xfrm>
+          <a:prstGeom prst="rect">
+            <a:avLst/>
+          </a:prstGeom>
+          <a:solidFill>
+            <a:srgbClr val="2563EB"/>
+          </a:solidFill>
+          <a:ln>
+            <a:noFill/>
+          </a:ln>
+        </p:spPr>
+        <p:style>
+          <a:lnRef idx="1">
+            <a:schemeClr val="accent1"/>
+          </a:lnRef>
+          <a:fillRef idx="3">
+            <a:schemeClr val="accent1"/>
+          </a:fillRef>
+          <a:effectRef idx="2">
+            <a:schemeClr val="accent1"/>
+          </a:effectRef>
+          <a:fontRef idx="minor">
+            <a:schemeClr val="lt1"/>
+          </a:fontRef>
+        </p:style>
+        <p:txBody>
+          <a:bodyPr rtlCol="0" anchor="ctr"/>
+          <a:lstStyle/>
+          <a:p>
+            <a:pPr algn="ctr"/>
+            <a:endParaRPr/>
+          </a:p>
+        </p:txBody>
+      </p:sp>
+      <p:sp>
+        <p:nvSpPr>
+          <p:cNvPr id="4" name="TextBox 3"/>
+          <p:cNvSpPr txBox="1"/>
+          <p:nvPr/>
+        </p:nvSpPr>
+        <p:spPr>
+          <a:xfrm>
+            <a:off x="731520" y="1280160"/>
+            <a:ext cx="10698480" cy="5029200"/>
+          </a:xfrm>
+          <a:prstGeom prst="rect">
+            <a:avLst/>
+          </a:prstGeom>
+          <a:noFill/>
+        </p:spPr>
+        <p:txBody>
+          <a:bodyPr wrap="square">
+            <a:spAutoFit/>
+          </a:bodyPr>
+          <a:lstStyle/>
+          <a:p>
+            <a:pPr>
+              <a:spcAft>
+                <a:spcPts val="800"/>
+              </a:spcAft>
+              <a:defRPr sz="1500">
+                <a:solidFill>
+                  <a:srgbClr val="000000"/>
+                </a:solidFill>
+                <a:latin typeface="Times New Roman"/>
+              </a:defRPr>
+            </a:pPr>
+            <a:r>
+              <a:t>Wikipedia / Online References:</a:t>
+            </a:r>
+          </a:p>
+          <a:p>
+            <a:pPr>
+              <a:spcAft>
+                <a:spcPts val="800"/>
+              </a:spcAft>
+              <a:defRPr sz="1500">
+                <a:solidFill>
+                  <a:srgbClr val="000000"/>
+                </a:solidFill>
+                <a:latin typeface="Times New Roman"/>
+              </a:defRPr>
+            </a:pPr>
+            <a:endParaRPr/>
+          </a:p>
+          <a:p>
+            <a:pPr>
+              <a:spcAft>
+                <a:spcPts val="800"/>
+              </a:spcAft>
+              <a:defRPr sz="1500">
+                <a:solidFill>
+                  <a:srgbClr val="000000"/>
+                </a:solidFill>
+                <a:latin typeface="Times New Roman"/>
+              </a:defRPr>
+            </a:pPr>
+            <a:r>
+              <a:t>[W1] https://en.wikipedia.org/wiki/Advanced_Encryption_Standard</a:t>
+            </a:r>
+          </a:p>
+          <a:p>
+            <a:pPr>
+              <a:spcAft>
+                <a:spcPts val="800"/>
+              </a:spcAft>
+              <a:defRPr sz="1500">
+                <a:solidFill>
+                  <a:srgbClr val="000000"/>
+                </a:solidFill>
+                <a:latin typeface="Times New Roman"/>
+              </a:defRPr>
+            </a:pPr>
+            <a:r>
+              <a:t>[W2] https://en.wikipedia.org/wiki/Salsa20#ChaCha_variant</a:t>
+            </a:r>
+          </a:p>
+          <a:p>
+            <a:pPr>
+              <a:spcAft>
+                <a:spcPts val="800"/>
+              </a:spcAft>
+              <a:defRPr sz="1500">
+                <a:solidFill>
+                  <a:srgbClr val="000000"/>
+                </a:solidFill>
+                <a:latin typeface="Times New Roman"/>
+              </a:defRPr>
+            </a:pPr>
+            <a:r>
+              <a:t>[W3] https://en.wikipedia.org/wiki/PRESENT_(cipher)</a:t>
+            </a:r>
+          </a:p>
+        </p:txBody>
+      </p:sp>
+    </p:spTree>
+  </p:cSld>
+  <p:clrMapOvr>
+    <a:masterClrMapping/>
+  </p:clrMapOvr>
+</p:sld>
+</file>
+
+<file path=ppt/slides/slide2.xml><?xml version="1.0" encoding="utf-8"?>
+<p:sld xmlns:a="http://schemas.openxmlformats.org/drawingml/2006/main" xmlns:r="http://schemas.openxmlformats.org/officeDocument/2006/relationships" xmlns:p="http://schemas.openxmlformats.org/presentationml/2006/main">
+  <p:cSld>
+    <p:bg>
+      <p:bgPr>
+        <a:solidFill>
+          <a:srgbClr val="FFFFFF"/>
+        </a:solidFill>
+        <a:effectLst/>
+      </p:bgPr>
+    </p:bg>
+    <p:spTree>
+      <p:nvGrpSpPr>
+        <p:cNvPr id="1" name=""/>
+        <p:cNvGrpSpPr/>
+        <p:nvPr/>
+      </p:nvGrpSpPr>
+      <p:grpSpPr>
+        <a:xfrm>
+          <a:off x="0" y="0"/>
+          <a:ext cx="0" cy="0"/>
+          <a:chOff x="0" y="0"/>
+          <a:chExt cx="0" cy="0"/>
+        </a:xfrm>
+      </p:grpSpPr>
+      <p:sp>
+        <p:nvSpPr>
+          <p:cNvPr id="2" name="TextBox 1"/>
+          <p:cNvSpPr txBox="1"/>
+          <p:nvPr/>
+        </p:nvSpPr>
+        <p:spPr>
+          <a:xfrm>
+            <a:off x="731520" y="365760"/>
+            <a:ext cx="10698480" cy="640080"/>
+          </a:xfrm>
+          <a:prstGeom prst="rect">
+            <a:avLst/>
+          </a:prstGeom>
+          <a:noFill/>
+        </p:spPr>
+        <p:txBody>
+          <a:bodyPr wrap="square">
+            <a:spAutoFit/>
+          </a:bodyPr>
+          <a:lstStyle/>
+          <a:p>
+            <a:pPr algn="l">
+              <a:defRPr sz="3200" b="1">
+                <a:solidFill>
+                  <a:srgbClr val="1E1E1E"/>
+                </a:solidFill>
+                <a:latin typeface="Times New Roman"/>
+              </a:defRPr>
+            </a:pPr>
+            <a:r>
+              <a:t>Problem Statement</a:t>
+            </a:r>
+          </a:p>
+        </p:txBody>
+      </p:sp>
+      <p:sp>
+        <p:nvSpPr>
+          <p:cNvPr id="3" name="Rectangle 2"/>
+          <p:cNvSpPr/>
+          <p:nvPr/>
+        </p:nvSpPr>
+        <p:spPr>
+          <a:xfrm>
+            <a:off x="731520" y="1005840"/>
+            <a:ext cx="10698480" cy="25400"/>
+          </a:xfrm>
+          <a:prstGeom prst="rect">
+            <a:avLst/>
+          </a:prstGeom>
+          <a:solidFill>
+            <a:srgbClr val="2563EB"/>
+          </a:solidFill>
+          <a:ln>
+            <a:noFill/>
+          </a:ln>
+        </p:spPr>
+        <p:style>
+          <a:lnRef idx="1">
+            <a:schemeClr val="accent1"/>
+          </a:lnRef>
+          <a:fillRef idx="3">
+            <a:schemeClr val="accent1"/>
+          </a:fillRef>
+          <a:effectRef idx="2">
+            <a:schemeClr val="accent1"/>
+          </a:effectRef>
+          <a:fontRef idx="minor">
+            <a:schemeClr val="lt1"/>
+          </a:fontRef>
+        </p:style>
+        <p:txBody>
+          <a:bodyPr rtlCol="0" anchor="ctr"/>
+          <a:lstStyle/>
+          <a:p>
+            <a:pPr algn="ctr"/>
+            <a:endParaRPr/>
+          </a:p>
+        </p:txBody>
+      </p:sp>
+      <p:sp>
+        <p:nvSpPr>
+          <p:cNvPr id="4" name="TextBox 3"/>
+          <p:cNvSpPr txBox="1"/>
+          <p:nvPr/>
+        </p:nvSpPr>
+        <p:spPr>
+          <a:xfrm>
+            <a:off x="731520" y="1371600"/>
+            <a:ext cx="10698480" cy="5029200"/>
+          </a:xfrm>
+          <a:prstGeom prst="rect">
+            <a:avLst/>
+          </a:prstGeom>
+          <a:noFill/>
+        </p:spPr>
+        <p:txBody>
+          <a:bodyPr wrap="square">
+            <a:spAutoFit/>
+          </a:bodyPr>
+          <a:lstStyle/>
+          <a:p>
+            <a:pPr>
+              <a:spcAft>
+                <a:spcPts val="800"/>
+              </a:spcAft>
+              <a:defRPr sz="1800">
+                <a:solidFill>
+                  <a:srgbClr val="000000"/>
+                </a:solidFill>
+                <a:latin typeface="Times New Roman"/>
+              </a:defRPr>
+            </a:pPr>
+            <a:r>
+              <a:t>- Security Constraint: IoT edge devices (sensors, smart cameras, medical monitors) collect sensitive data that must be encrypted immediately before transmission.</a:t>
+            </a:r>
+          </a:p>
+          <a:p>
+            <a:pPr>
+              <a:spcAft>
+                <a:spcPts val="800"/>
+              </a:spcAft>
+              <a:defRPr sz="1800">
+                <a:solidFill>
+                  <a:srgbClr val="000000"/>
+                </a:solidFill>
+                <a:latin typeface="Times New Roman"/>
+              </a:defRPr>
+            </a:pPr>
+            <a:r>
+              <a:t>- Hardware Constraint: Edge devices possess strictly limited CPU cycles, memory, and battery life.</a:t>
+            </a:r>
+          </a:p>
+          <a:p>
+            <a:pPr>
+              <a:spcAft>
+                <a:spcPts val="800"/>
+              </a:spcAft>
+              <a:defRPr sz="1800">
+                <a:solidFill>
+                  <a:srgbClr val="000000"/>
+                </a:solidFill>
+                <a:latin typeface="Times New Roman"/>
+              </a:defRPr>
+            </a:pPr>
+            <a:r>
+              <a:t>- Conventional Problem: Traditional standard encryption (like full hardware AES) may exhaust the resources of ultra-constrained devices (e.g., simple RFID tags or microcontrollers).</a:t>
+            </a:r>
+          </a:p>
+          <a:p>
+            <a:pPr>
+              <a:spcAft>
+                <a:spcPts val="800"/>
+              </a:spcAft>
+              <a:defRPr sz="1800">
+                <a:solidFill>
+                  <a:srgbClr val="000000"/>
+                </a:solidFill>
+                <a:latin typeface="Times New Roman"/>
+              </a:defRPr>
+            </a:pPr>
+            <a:endParaRPr/>
+          </a:p>
+          <a:p>
+            <a:pPr>
+              <a:spcAft>
+                <a:spcPts val="800"/>
+              </a:spcAft>
+              <a:defRPr sz="1800">
+                <a:solidFill>
+                  <a:srgbClr val="000000"/>
+                </a:solidFill>
+                <a:latin typeface="Times New Roman"/>
+              </a:defRPr>
+            </a:pPr>
+            <a:r>
+              <a:t>Core Objective:</a:t>
+            </a:r>
+          </a:p>
+          <a:p>
+            <a:pPr>
+              <a:spcAft>
+                <a:spcPts val="800"/>
+              </a:spcAft>
+              <a:defRPr sz="1800">
+                <a:solidFill>
+                  <a:srgbClr val="000000"/>
+                </a:solidFill>
+                <a:latin typeface="Times New Roman"/>
+              </a:defRPr>
+            </a:pPr>
+            <a:r>
+              <a:t>To conduct a rigorous comparative evaluation of standard versus lightweight encryption algorithms -- measuring latency, throughput, CPU utilization, and memory footprint -- to identify the optimal algorithm for diverse edge environments.</a:t>
+            </a:r>
+          </a:p>
+        </p:txBody>
+      </p:sp>
+    </p:spTree>
+  </p:cSld>
+  <p:clrMapOvr>
+    <a:masterClrMapping/>
+  </p:clrMapOvr>
+</p:sld>
+</file>
+
+<file path=ppt/slides/slide20.xml><?xml version="1.0" encoding="utf-8"?>
+<p:sld xmlns:a="http://schemas.openxmlformats.org/drawingml/2006/main" xmlns:r="http://schemas.openxmlformats.org/officeDocument/2006/relationships" xmlns:p="http://schemas.openxmlformats.org/presentationml/2006/main">
+  <p:cSld>
+    <p:bg>
+      <p:bgPr>
+        <a:solidFill>
+          <a:srgbClr val="FFFFFF"/>
+        </a:solidFill>
+        <a:effectLst/>
+      </p:bgPr>
+    </p:bg>
+    <p:spTree>
+      <p:nvGrpSpPr>
+        <p:cNvPr id="1" name=""/>
+        <p:cNvGrpSpPr/>
+        <p:nvPr/>
+      </p:nvGrpSpPr>
+      <p:grpSpPr>
+        <a:xfrm>
+          <a:off x="0" y="0"/>
+          <a:ext cx="0" cy="0"/>
+          <a:chOff x="0" y="0"/>
+          <a:chExt cx="0" cy="0"/>
+        </a:xfrm>
+      </p:grpSpPr>
       <p:sp>
         <p:nvSpPr>
           <p:cNvPr id="2" name="TextBox 1"/>
@@ -6685,6 +7522,7 @@
           <a:lstStyle/>
           <a:p>
             <a:pPr algn="ctr"/>
+            <a:endParaRPr/>
           </a:p>
         </p:txBody>
       </p:sp>
@@ -6768,8 +7606,8 @@
 </p:sld>
 </file>
 
-<file path=ppt/slides/slide2.xml><?xml version="1.0" encoding="utf-8"?>
-<p:sld xmlns:a="http://schemas.openxmlformats.org/drawingml/2006/main" xmlns:p="http://schemas.openxmlformats.org/presentationml/2006/main" xmlns:r="http://schemas.openxmlformats.org/officeDocument/2006/relationships">
+<file path=ppt/slides/slide3.xml><?xml version="1.0" encoding="utf-8"?>
+<p:sld xmlns:a="http://schemas.openxmlformats.org/drawingml/2006/main" xmlns:r="http://schemas.openxmlformats.org/officeDocument/2006/relationships" xmlns:p="http://schemas.openxmlformats.org/presentationml/2006/main">
   <p:cSld>
     <p:bg>
       <p:bgPr>
@@ -6785,7 +7623,14 @@
         <p:cNvGrpSpPr/>
         <p:nvPr/>
       </p:nvGrpSpPr>
-      <p:grpSpPr/>
+      <p:grpSpPr>
+        <a:xfrm>
+          <a:off x="0" y="0"/>
+          <a:ext cx="0" cy="0"/>
+          <a:chOff x="0" y="0"/>
+          <a:chExt cx="0" cy="0"/>
+        </a:xfrm>
+      </p:grpSpPr>
       <p:sp>
         <p:nvSpPr>
           <p:cNvPr id="2" name="TextBox 1"/>
@@ -6817,7 +7662,7 @@
               </a:defRPr>
             </a:pPr>
             <a:r>
-              <a:t>Problem Statement</a:t>
+              <a:t>Justification for Problem Statement</a:t>
             </a:r>
           </a:p>
         </p:txBody>
@@ -6862,6 +7707,7 @@
           <a:lstStyle/>
           <a:p>
             <a:pPr algn="ctr"/>
+            <a:endParaRPr/>
           </a:p>
         </p:txBody>
       </p:sp>
@@ -6891,7 +7737,7 @@
               <a:spcAft>
                 <a:spcPts val="800"/>
               </a:spcAft>
-              <a:defRPr sz="1800">
+              <a:defRPr sz="1600">
                 <a:solidFill>
                   <a:srgbClr val="000000"/>
                 </a:solidFill>
@@ -6899,7 +7745,7 @@
               </a:defRPr>
             </a:pPr>
             <a:r>
-              <a:t>- Security Constraint: IoT edge devices (sensors, smart cameras, medical monitors) collect sensitive data that must be encrypted immediately before transmission.</a:t>
+              <a:t>Why is this problem important?</a:t>
             </a:r>
           </a:p>
           <a:p>
@@ -6907,23 +7753,21 @@
               <a:spcAft>
                 <a:spcPts val="800"/>
               </a:spcAft>
-              <a:defRPr sz="1800">
+              <a:defRPr sz="1600">
                 <a:solidFill>
                   <a:srgbClr val="000000"/>
                 </a:solidFill>
                 <a:latin typeface="Times New Roman"/>
               </a:defRPr>
             </a:pPr>
-            <a:r>
-              <a:t>- Hardware Constraint: Edge devices possess strictly limited CPU cycles, memory, and battery life.</a:t>
-            </a:r>
+            <a:endParaRPr/>
           </a:p>
           <a:p>
             <a:pPr>
               <a:spcAft>
                 <a:spcPts val="800"/>
               </a:spcAft>
-              <a:defRPr sz="1800">
+              <a:defRPr sz="1600">
                 <a:solidFill>
                   <a:srgbClr val="000000"/>
                 </a:solidFill>
@@ -6931,7 +7775,7 @@
               </a:defRPr>
             </a:pPr>
             <a:r>
-              <a:t>- Conventional Problem: Traditional standard encryption (like full hardware AES) may exhaust the resources of ultra-constrained devices (e.g., simple RFID tags or microcontrollers).</a:t>
+              <a:t>1. Explosive IoT Growth: By 2025, over 75 billion IoT devices are projected worldwide. Each device generates sensitive data requiring encryption.</a:t>
             </a:r>
           </a:p>
           <a:p>
@@ -6939,20 +7783,21 @@
               <a:spcAft>
                 <a:spcPts val="800"/>
               </a:spcAft>
-              <a:defRPr sz="1800">
+              <a:defRPr sz="1600">
                 <a:solidFill>
                   <a:srgbClr val="000000"/>
                 </a:solidFill>
                 <a:latin typeface="Times New Roman"/>
               </a:defRPr>
             </a:pPr>
+            <a:endParaRPr/>
           </a:p>
           <a:p>
             <a:pPr>
               <a:spcAft>
                 <a:spcPts val="800"/>
               </a:spcAft>
-              <a:defRPr sz="1800">
+              <a:defRPr sz="1600">
                 <a:solidFill>
                   <a:srgbClr val="000000"/>
                 </a:solidFill>
@@ -6960,7 +7805,7 @@
               </a:defRPr>
             </a:pPr>
             <a:r>
-              <a:t>Core Objective:</a:t>
+              <a:t>2. Edge Security Gap: Most IoT breaches occur at the edge. Encrypting data at the source (not in the cloud) prevents man-in-the-middle interception during transmission.</a:t>
             </a:r>
           </a:p>
           <a:p>
@@ -6968,15 +7813,89 @@
               <a:spcAft>
                 <a:spcPts val="800"/>
               </a:spcAft>
-              <a:defRPr sz="1800">
+              <a:defRPr sz="1600">
                 <a:solidFill>
                   <a:srgbClr val="000000"/>
                 </a:solidFill>
                 <a:latin typeface="Times New Roman"/>
               </a:defRPr>
             </a:pPr>
-            <a:r>
-              <a:t>To conduct a rigorous comparative evaluation of standard versus lightweight encryption algorithms -- measuring latency, throughput, CPU utilization, and memory footprint -- to identify the optimal algorithm for diverse edge environments.</a:t>
+            <a:endParaRPr/>
+          </a:p>
+          <a:p>
+            <a:pPr>
+              <a:spcAft>
+                <a:spcPts val="800"/>
+              </a:spcAft>
+              <a:defRPr sz="1600">
+                <a:solidFill>
+                  <a:srgbClr val="000000"/>
+                </a:solidFill>
+                <a:latin typeface="Times New Roman"/>
+              </a:defRPr>
+            </a:pPr>
+            <a:r>
+              <a:t>3. Resource Mismatch: Standard AES requires dedicated hardware (AES-NI) that passive RFID tags and 8-bit microcontrollers simply do not have. Lightweight ciphers (PRESENT, SPECK) were specifically designed for these constraints.</a:t>
+            </a:r>
+          </a:p>
+          <a:p>
+            <a:pPr>
+              <a:spcAft>
+                <a:spcPts val="800"/>
+              </a:spcAft>
+              <a:defRPr sz="1600">
+                <a:solidFill>
+                  <a:srgbClr val="000000"/>
+                </a:solidFill>
+                <a:latin typeface="Times New Roman"/>
+              </a:defRPr>
+            </a:pPr>
+            <a:endParaRPr/>
+          </a:p>
+          <a:p>
+            <a:pPr>
+              <a:spcAft>
+                <a:spcPts val="800"/>
+              </a:spcAft>
+              <a:defRPr sz="1600">
+                <a:solidFill>
+                  <a:srgbClr val="000000"/>
+                </a:solidFill>
+                <a:latin typeface="Times New Roman"/>
+              </a:defRPr>
+            </a:pPr>
+            <a:r>
+              <a:t>4. No Universal Solution: There is no single 'best' algorithm -- the optimal choice depends on whether the device has hardware acceleration, how much RAM/ROM is available, and the acceptable latency budget.</a:t>
+            </a:r>
+          </a:p>
+          <a:p>
+            <a:pPr>
+              <a:spcAft>
+                <a:spcPts val="800"/>
+              </a:spcAft>
+              <a:defRPr sz="1600">
+                <a:solidFill>
+                  <a:srgbClr val="000000"/>
+                </a:solidFill>
+                <a:latin typeface="Times New Roman"/>
+              </a:defRPr>
+            </a:pPr>
+            <a:endParaRPr/>
+          </a:p>
+          <a:p>
+            <a:pPr>
+              <a:spcAft>
+                <a:spcPts val="800"/>
+              </a:spcAft>
+              <a:defRPr sz="1600">
+                <a:solidFill>
+                  <a:srgbClr val="000000"/>
+                </a:solidFill>
+                <a:latin typeface="Times New Roman"/>
+              </a:defRPr>
+            </a:pPr>
+            <a:r>
+              <a:t>5. Distributed Systems Relevance: In a real deployment, thousands of edge nodes must encrypt concurrently. Our benchmark measures not just individual cipher performance but system-wide scalability under parallel distributed workloads.</a:t>
             </a:r>
           </a:p>
         </p:txBody>
@@ -6989,8 +7908,8 @@
 </p:sld>
 </file>
 
-<file path=ppt/slides/slide3.xml><?xml version="1.0" encoding="utf-8"?>
-<p:sld xmlns:a="http://schemas.openxmlformats.org/drawingml/2006/main" xmlns:p="http://schemas.openxmlformats.org/presentationml/2006/main" xmlns:r="http://schemas.openxmlformats.org/officeDocument/2006/relationships">
+<file path=ppt/slides/slide4.xml><?xml version="1.0" encoding="utf-8"?>
+<p:sld xmlns:a="http://schemas.openxmlformats.org/drawingml/2006/main" xmlns:r="http://schemas.openxmlformats.org/officeDocument/2006/relationships" xmlns:p="http://schemas.openxmlformats.org/presentationml/2006/main">
   <p:cSld>
     <p:bg>
       <p:bgPr>
@@ -7006,7 +7925,14 @@
         <p:cNvGrpSpPr/>
         <p:nvPr/>
       </p:nvGrpSpPr>
-      <p:grpSpPr/>
+      <p:grpSpPr>
+        <a:xfrm>
+          <a:off x="0" y="0"/>
+          <a:ext cx="0" cy="0"/>
+          <a:chOff x="0" y="0"/>
+          <a:chExt cx="0" cy="0"/>
+        </a:xfrm>
+      </p:grpSpPr>
       <p:sp>
         <p:nvSpPr>
           <p:cNvPr id="2" name="TextBox 1"/>
@@ -7038,7 +7964,7 @@
               </a:defRPr>
             </a:pPr>
             <a:r>
-              <a:t>Justification for Problem Statement</a:t>
+              <a:t>Literature Survey (1/2)</a:t>
             </a:r>
           </a:p>
         </p:txBody>
@@ -7083,193 +8009,588 @@
           <a:lstStyle/>
           <a:p>
             <a:pPr algn="ctr"/>
-          </a:p>
-        </p:txBody>
-      </p:sp>
-      <p:sp>
-        <p:nvSpPr>
-          <p:cNvPr id="4" name="TextBox 3"/>
-          <p:cNvSpPr txBox="1"/>
+            <a:endParaRPr/>
+          </a:p>
+        </p:txBody>
+      </p:sp>
+      <p:graphicFrame>
+        <p:nvGraphicFramePr>
+          <p:cNvPr id="4" name="Table 3"/>
+          <p:cNvGraphicFramePr>
+            <a:graphicFrameLocks noGrp="1"/>
+          </p:cNvGraphicFramePr>
           <p:nvPr/>
-        </p:nvSpPr>
-        <p:spPr>
-          <a:xfrm>
-            <a:off x="731520" y="1371600"/>
-            <a:ext cx="10698480" cy="5029200"/>
-          </a:xfrm>
-          <a:prstGeom prst="rect">
-            <a:avLst/>
-          </a:prstGeom>
-          <a:noFill/>
-        </p:spPr>
-        <p:txBody>
-          <a:bodyPr wrap="square">
-            <a:spAutoFit/>
-          </a:bodyPr>
-          <a:lstStyle/>
-          <a:p>
-            <a:pPr>
-              <a:spcAft>
-                <a:spcPts val="800"/>
-              </a:spcAft>
-              <a:defRPr sz="1600">
-                <a:solidFill>
-                  <a:srgbClr val="000000"/>
-                </a:solidFill>
-                <a:latin typeface="Times New Roman"/>
-              </a:defRPr>
-            </a:pPr>
-            <a:r>
-              <a:t>Why is this problem important?</a:t>
-            </a:r>
-          </a:p>
-          <a:p>
-            <a:pPr>
-              <a:spcAft>
-                <a:spcPts val="800"/>
-              </a:spcAft>
-              <a:defRPr sz="1600">
-                <a:solidFill>
-                  <a:srgbClr val="000000"/>
-                </a:solidFill>
-                <a:latin typeface="Times New Roman"/>
-              </a:defRPr>
-            </a:pPr>
-          </a:p>
-          <a:p>
-            <a:pPr>
-              <a:spcAft>
-                <a:spcPts val="800"/>
-              </a:spcAft>
-              <a:defRPr sz="1600">
-                <a:solidFill>
-                  <a:srgbClr val="000000"/>
-                </a:solidFill>
-                <a:latin typeface="Times New Roman"/>
-              </a:defRPr>
-            </a:pPr>
-            <a:r>
-              <a:t>1. Explosive IoT Growth: By 2025, over 75 billion IoT devices are projected worldwide. Each device generates sensitive data requiring encryption.</a:t>
-            </a:r>
-          </a:p>
-          <a:p>
-            <a:pPr>
-              <a:spcAft>
-                <a:spcPts val="800"/>
-              </a:spcAft>
-              <a:defRPr sz="1600">
-                <a:solidFill>
-                  <a:srgbClr val="000000"/>
-                </a:solidFill>
-                <a:latin typeface="Times New Roman"/>
-              </a:defRPr>
-            </a:pPr>
-          </a:p>
-          <a:p>
-            <a:pPr>
-              <a:spcAft>
-                <a:spcPts val="800"/>
-              </a:spcAft>
-              <a:defRPr sz="1600">
-                <a:solidFill>
-                  <a:srgbClr val="000000"/>
-                </a:solidFill>
-                <a:latin typeface="Times New Roman"/>
-              </a:defRPr>
-            </a:pPr>
-            <a:r>
-              <a:t>2. Edge Security Gap: Most IoT breaches occur at the edge. Encrypting data at the source (not in the cloud) prevents man-in-the-middle interception during transmission.</a:t>
-            </a:r>
-          </a:p>
-          <a:p>
-            <a:pPr>
-              <a:spcAft>
-                <a:spcPts val="800"/>
-              </a:spcAft>
-              <a:defRPr sz="1600">
-                <a:solidFill>
-                  <a:srgbClr val="000000"/>
-                </a:solidFill>
-                <a:latin typeface="Times New Roman"/>
-              </a:defRPr>
-            </a:pPr>
-          </a:p>
-          <a:p>
-            <a:pPr>
-              <a:spcAft>
-                <a:spcPts val="800"/>
-              </a:spcAft>
-              <a:defRPr sz="1600">
-                <a:solidFill>
-                  <a:srgbClr val="000000"/>
-                </a:solidFill>
-                <a:latin typeface="Times New Roman"/>
-              </a:defRPr>
-            </a:pPr>
-            <a:r>
-              <a:t>3. Resource Mismatch: Standard AES requires dedicated hardware (AES-NI) that passive RFID tags and 8-bit microcontrollers simply do not have. Lightweight ciphers (PRESENT, SPECK) were specifically designed for these constraints.</a:t>
-            </a:r>
-          </a:p>
-          <a:p>
-            <a:pPr>
-              <a:spcAft>
-                <a:spcPts val="800"/>
-              </a:spcAft>
-              <a:defRPr sz="1600">
-                <a:solidFill>
-                  <a:srgbClr val="000000"/>
-                </a:solidFill>
-                <a:latin typeface="Times New Roman"/>
-              </a:defRPr>
-            </a:pPr>
-          </a:p>
-          <a:p>
-            <a:pPr>
-              <a:spcAft>
-                <a:spcPts val="800"/>
-              </a:spcAft>
-              <a:defRPr sz="1600">
-                <a:solidFill>
-                  <a:srgbClr val="000000"/>
-                </a:solidFill>
-                <a:latin typeface="Times New Roman"/>
-              </a:defRPr>
-            </a:pPr>
-            <a:r>
-              <a:t>4. No Universal Solution: There is no single 'best' algorithm -- the optimal choice depends on whether the device has hardware acceleration, how much RAM/ROM is available, and the acceptable latency budget.</a:t>
-            </a:r>
-          </a:p>
-          <a:p>
-            <a:pPr>
-              <a:spcAft>
-                <a:spcPts val="800"/>
-              </a:spcAft>
-              <a:defRPr sz="1600">
-                <a:solidFill>
-                  <a:srgbClr val="000000"/>
-                </a:solidFill>
-                <a:latin typeface="Times New Roman"/>
-              </a:defRPr>
-            </a:pPr>
-          </a:p>
-          <a:p>
-            <a:pPr>
-              <a:spcAft>
-                <a:spcPts val="800"/>
-              </a:spcAft>
-              <a:defRPr sz="1600">
-                <a:solidFill>
-                  <a:srgbClr val="000000"/>
-                </a:solidFill>
-                <a:latin typeface="Times New Roman"/>
-              </a:defRPr>
-            </a:pPr>
-            <a:r>
-              <a:t>5. Distributed Systems Relevance: In a real deployment, thousands of edge nodes must encrypt concurrently. Our benchmark measures not just individual cipher performance but system-wide scalability under parallel distributed workloads.</a:t>
-            </a:r>
-          </a:p>
-        </p:txBody>
-      </p:sp>
+        </p:nvGraphicFramePr>
+        <p:xfrm>
+          <a:off x="457200" y="1188720"/>
+          <a:ext cx="11247120" cy="5029200"/>
+        </p:xfrm>
+        <a:graphic>
+          <a:graphicData uri="http://schemas.openxmlformats.org/drawingml/2006/table">
+            <a:tbl>
+              <a:tblPr firstRow="1" bandRow="1">
+                <a:tableStyleId>{5C22544A-7EE6-4342-B048-85BDC9FD1C3A}</a:tableStyleId>
+              </a:tblPr>
+              <a:tblGrid>
+                <a:gridCol w="2811780">
+                  <a:extLst>
+                    <a:ext uri="{9D8B030D-6E8A-4147-A177-3AD203B41FA5}">
+                      <a16:colId xmlns:a16="http://schemas.microsoft.com/office/drawing/2014/main" val="20000"/>
+                    </a:ext>
+                  </a:extLst>
+                </a:gridCol>
+                <a:gridCol w="2811780">
+                  <a:extLst>
+                    <a:ext uri="{9D8B030D-6E8A-4147-A177-3AD203B41FA5}">
+                      <a16:colId xmlns:a16="http://schemas.microsoft.com/office/drawing/2014/main" val="20001"/>
+                    </a:ext>
+                  </a:extLst>
+                </a:gridCol>
+                <a:gridCol w="2811780">
+                  <a:extLst>
+                    <a:ext uri="{9D8B030D-6E8A-4147-A177-3AD203B41FA5}">
+                      <a16:colId xmlns:a16="http://schemas.microsoft.com/office/drawing/2014/main" val="20002"/>
+                    </a:ext>
+                  </a:extLst>
+                </a:gridCol>
+                <a:gridCol w="2811780">
+                  <a:extLst>
+                    <a:ext uri="{9D8B030D-6E8A-4147-A177-3AD203B41FA5}">
+                      <a16:colId xmlns:a16="http://schemas.microsoft.com/office/drawing/2014/main" val="20003"/>
+                    </a:ext>
+                  </a:extLst>
+                </a:gridCol>
+              </a:tblGrid>
+              <a:tr h="838200">
+                <a:tc>
+                  <a:txBody>
+                    <a:bodyPr/>
+                    <a:lstStyle/>
+                    <a:p>
+                      <a:pPr algn="ctr">
+                        <a:defRPr sz="1100" b="1">
+                          <a:solidFill>
+                            <a:srgbClr val="FFFFFF"/>
+                          </a:solidFill>
+                          <a:latin typeface="Times New Roman"/>
+                        </a:defRPr>
+                      </a:pPr>
+                      <a:r>
+                        <a:t>#</a:t>
+                      </a:r>
+                    </a:p>
+                  </a:txBody>
+                  <a:tcPr>
+                    <a:solidFill>
+                      <a:srgbClr val="1E1E1E"/>
+                    </a:solidFill>
+                  </a:tcPr>
+                </a:tc>
+                <a:tc>
+                  <a:txBody>
+                    <a:bodyPr/>
+                    <a:lstStyle/>
+                    <a:p>
+                      <a:pPr algn="ctr">
+                        <a:defRPr sz="1100" b="1">
+                          <a:solidFill>
+                            <a:srgbClr val="FFFFFF"/>
+                          </a:solidFill>
+                          <a:latin typeface="Times New Roman"/>
+                        </a:defRPr>
+                      </a:pPr>
+                      <a:r>
+                        <a:t>Paper Title</a:t>
+                      </a:r>
+                    </a:p>
+                  </a:txBody>
+                  <a:tcPr>
+                    <a:solidFill>
+                      <a:srgbClr val="1E1E1E"/>
+                    </a:solidFill>
+                  </a:tcPr>
+                </a:tc>
+                <a:tc>
+                  <a:txBody>
+                    <a:bodyPr/>
+                    <a:lstStyle/>
+                    <a:p>
+                      <a:pPr algn="ctr">
+                        <a:defRPr sz="1100" b="1">
+                          <a:solidFill>
+                            <a:srgbClr val="FFFFFF"/>
+                          </a:solidFill>
+                          <a:latin typeface="Times New Roman"/>
+                        </a:defRPr>
+                      </a:pPr>
+                      <a:r>
+                        <a:t>Authors / Year</a:t>
+                      </a:r>
+                    </a:p>
+                  </a:txBody>
+                  <a:tcPr>
+                    <a:solidFill>
+                      <a:srgbClr val="1E1E1E"/>
+                    </a:solidFill>
+                  </a:tcPr>
+                </a:tc>
+                <a:tc>
+                  <a:txBody>
+                    <a:bodyPr/>
+                    <a:lstStyle/>
+                    <a:p>
+                      <a:pPr algn="ctr">
+                        <a:defRPr sz="1100" b="1">
+                          <a:solidFill>
+                            <a:srgbClr val="FFFFFF"/>
+                          </a:solidFill>
+                          <a:latin typeface="Times New Roman"/>
+                        </a:defRPr>
+                      </a:pPr>
+                      <a:r>
+                        <a:t>Key Contribution / Relevance</a:t>
+                      </a:r>
+                    </a:p>
+                  </a:txBody>
+                  <a:tcPr>
+                    <a:solidFill>
+                      <a:srgbClr val="1E1E1E"/>
+                    </a:solidFill>
+                  </a:tcPr>
+                </a:tc>
+                <a:extLst>
+                  <a:ext uri="{0D108BD9-81ED-4DB2-BD59-A6C34878D82A}">
+                    <a16:rowId xmlns:a16="http://schemas.microsoft.com/office/drawing/2014/main" val="10000"/>
+                  </a:ext>
+                </a:extLst>
+              </a:tr>
+              <a:tr h="838200">
+                <a:tc>
+                  <a:txBody>
+                    <a:bodyPr/>
+                    <a:lstStyle/>
+                    <a:p>
+                      <a:pPr algn="ctr">
+                        <a:defRPr sz="1100">
+                          <a:latin typeface="Times New Roman"/>
+                        </a:defRPr>
+                      </a:pPr>
+                      <a:r>
+                        <a:t>1</a:t>
+                      </a:r>
+                    </a:p>
+                  </a:txBody>
+                  <a:tcPr>
+                    <a:solidFill>
+                      <a:srgbClr val="F0F0FF"/>
+                    </a:solidFill>
+                  </a:tcPr>
+                </a:tc>
+                <a:tc>
+                  <a:txBody>
+                    <a:bodyPr/>
+                    <a:lstStyle/>
+                    <a:p>
+                      <a:pPr algn="ctr">
+                        <a:defRPr sz="1100">
+                          <a:latin typeface="Times New Roman"/>
+                        </a:defRPr>
+                      </a:pPr>
+                      <a:r>
+                        <a:t>The Design of Rijndael: AES</a:t>
+                      </a:r>
+                    </a:p>
+                  </a:txBody>
+                  <a:tcPr>
+                    <a:solidFill>
+                      <a:srgbClr val="F0F0FF"/>
+                    </a:solidFill>
+                  </a:tcPr>
+                </a:tc>
+                <a:tc>
+                  <a:txBody>
+                    <a:bodyPr/>
+                    <a:lstStyle/>
+                    <a:p>
+                      <a:pPr algn="ctr">
+                        <a:defRPr sz="1100">
+                          <a:latin typeface="Times New Roman"/>
+                        </a:defRPr>
+                      </a:pPr>
+                      <a:r>
+                        <a:t>Daemen &amp; Rijmen, 2002</a:t>
+                      </a:r>
+                    </a:p>
+                  </a:txBody>
+                  <a:tcPr>
+                    <a:solidFill>
+                      <a:srgbClr val="F0F0FF"/>
+                    </a:solidFill>
+                  </a:tcPr>
+                </a:tc>
+                <a:tc>
+                  <a:txBody>
+                    <a:bodyPr/>
+                    <a:lstStyle/>
+                    <a:p>
+                      <a:pPr algn="ctr">
+                        <a:defRPr sz="1100">
+                          <a:latin typeface="Times New Roman"/>
+                        </a:defRPr>
+                      </a:pPr>
+                      <a:r>
+                        <a:t>Establishes AES block cipher. We use AES-256-GCM as industry-standard baseline.</a:t>
+                      </a:r>
+                    </a:p>
+                  </a:txBody>
+                  <a:tcPr>
+                    <a:solidFill>
+                      <a:srgbClr val="F0F0FF"/>
+                    </a:solidFill>
+                  </a:tcPr>
+                </a:tc>
+                <a:extLst>
+                  <a:ext uri="{0D108BD9-81ED-4DB2-BD59-A6C34878D82A}">
+                    <a16:rowId xmlns:a16="http://schemas.microsoft.com/office/drawing/2014/main" val="10001"/>
+                  </a:ext>
+                </a:extLst>
+              </a:tr>
+              <a:tr h="838200">
+                <a:tc>
+                  <a:txBody>
+                    <a:bodyPr/>
+                    <a:lstStyle/>
+                    <a:p>
+                      <a:pPr algn="ctr">
+                        <a:defRPr sz="1100">
+                          <a:latin typeface="Times New Roman"/>
+                        </a:defRPr>
+                      </a:pPr>
+                      <a:r>
+                        <a:t>2</a:t>
+                      </a:r>
+                    </a:p>
+                  </a:txBody>
+                  <a:tcPr/>
+                </a:tc>
+                <a:tc>
+                  <a:txBody>
+                    <a:bodyPr/>
+                    <a:lstStyle/>
+                    <a:p>
+                      <a:pPr algn="ctr">
+                        <a:defRPr sz="1100">
+                          <a:latin typeface="Times New Roman"/>
+                        </a:defRPr>
+                      </a:pPr>
+                      <a:r>
+                        <a:t>ChaCha, a variant of Salsa20</a:t>
+                      </a:r>
+                    </a:p>
+                  </a:txBody>
+                  <a:tcPr/>
+                </a:tc>
+                <a:tc>
+                  <a:txBody>
+                    <a:bodyPr/>
+                    <a:lstStyle/>
+                    <a:p>
+                      <a:pPr algn="ctr">
+                        <a:defRPr sz="1100">
+                          <a:latin typeface="Times New Roman"/>
+                        </a:defRPr>
+                      </a:pPr>
+                      <a:r>
+                        <a:t>Bernstein D.J., 2008</a:t>
+                      </a:r>
+                    </a:p>
+                  </a:txBody>
+                  <a:tcPr/>
+                </a:tc>
+                <a:tc>
+                  <a:txBody>
+                    <a:bodyPr/>
+                    <a:lstStyle/>
+                    <a:p>
+                      <a:pPr algn="ctr">
+                        <a:defRPr sz="1100">
+                          <a:latin typeface="Times New Roman"/>
+                        </a:defRPr>
+                      </a:pPr>
+                      <a:r>
+                        <a:t>ChaCha20 stream cipher excels in software without hardware crypto instructions.</a:t>
+                      </a:r>
+                    </a:p>
+                  </a:txBody>
+                  <a:tcPr/>
+                </a:tc>
+                <a:extLst>
+                  <a:ext uri="{0D108BD9-81ED-4DB2-BD59-A6C34878D82A}">
+                    <a16:rowId xmlns:a16="http://schemas.microsoft.com/office/drawing/2014/main" val="10002"/>
+                  </a:ext>
+                </a:extLst>
+              </a:tr>
+              <a:tr h="838200">
+                <a:tc>
+                  <a:txBody>
+                    <a:bodyPr/>
+                    <a:lstStyle/>
+                    <a:p>
+                      <a:pPr algn="ctr">
+                        <a:defRPr sz="1100">
+                          <a:latin typeface="Times New Roman"/>
+                        </a:defRPr>
+                      </a:pPr>
+                      <a:r>
+                        <a:t>3</a:t>
+                      </a:r>
+                    </a:p>
+                  </a:txBody>
+                  <a:tcPr>
+                    <a:solidFill>
+                      <a:srgbClr val="F0F0FF"/>
+                    </a:solidFill>
+                  </a:tcPr>
+                </a:tc>
+                <a:tc>
+                  <a:txBody>
+                    <a:bodyPr/>
+                    <a:lstStyle/>
+                    <a:p>
+                      <a:pPr algn="ctr">
+                        <a:defRPr sz="1100">
+                          <a:latin typeface="Times New Roman"/>
+                        </a:defRPr>
+                      </a:pPr>
+                      <a:r>
+                        <a:t>PRESENT: An Ultra-Lightweight Block Cipher</a:t>
+                      </a:r>
+                    </a:p>
+                  </a:txBody>
+                  <a:tcPr>
+                    <a:solidFill>
+                      <a:srgbClr val="F0F0FF"/>
+                    </a:solidFill>
+                  </a:tcPr>
+                </a:tc>
+                <a:tc>
+                  <a:txBody>
+                    <a:bodyPr/>
+                    <a:lstStyle/>
+                    <a:p>
+                      <a:pPr algn="ctr">
+                        <a:defRPr sz="1100">
+                          <a:latin typeface="Times New Roman"/>
+                        </a:defRPr>
+                      </a:pPr>
+                      <a:r>
+                        <a:t>Bogdanov et al., CHES 2007</a:t>
+                      </a:r>
+                    </a:p>
+                  </a:txBody>
+                  <a:tcPr>
+                    <a:solidFill>
+                      <a:srgbClr val="F0F0FF"/>
+                    </a:solidFill>
+                  </a:tcPr>
+                </a:tc>
+                <a:tc>
+                  <a:txBody>
+                    <a:bodyPr/>
+                    <a:lstStyle/>
+                    <a:p>
+                      <a:pPr algn="ctr">
+                        <a:defRPr sz="1100">
+                          <a:latin typeface="Times New Roman"/>
+                        </a:defRPr>
+                      </a:pPr>
+                      <a:r>
+                        <a:t>SPN cipher for extreme constraints (~1,570 GE). Benchmarks lowest hardware tier.</a:t>
+                      </a:r>
+                    </a:p>
+                  </a:txBody>
+                  <a:tcPr>
+                    <a:solidFill>
+                      <a:srgbClr val="F0F0FF"/>
+                    </a:solidFill>
+                  </a:tcPr>
+                </a:tc>
+                <a:extLst>
+                  <a:ext uri="{0D108BD9-81ED-4DB2-BD59-A6C34878D82A}">
+                    <a16:rowId xmlns:a16="http://schemas.microsoft.com/office/drawing/2014/main" val="10003"/>
+                  </a:ext>
+                </a:extLst>
+              </a:tr>
+              <a:tr h="838200">
+                <a:tc>
+                  <a:txBody>
+                    <a:bodyPr/>
+                    <a:lstStyle/>
+                    <a:p>
+                      <a:pPr algn="ctr">
+                        <a:defRPr sz="1100">
+                          <a:latin typeface="Times New Roman"/>
+                        </a:defRPr>
+                      </a:pPr>
+                      <a:r>
+                        <a:t>4</a:t>
+                      </a:r>
+                    </a:p>
+                  </a:txBody>
+                  <a:tcPr/>
+                </a:tc>
+                <a:tc>
+                  <a:txBody>
+                    <a:bodyPr/>
+                    <a:lstStyle/>
+                    <a:p>
+                      <a:pPr algn="ctr">
+                        <a:defRPr sz="1100">
+                          <a:latin typeface="Times New Roman"/>
+                        </a:defRPr>
+                      </a:pPr>
+                      <a:r>
+                        <a:t>The SIMON and SPECK Families</a:t>
+                      </a:r>
+                    </a:p>
+                  </a:txBody>
+                  <a:tcPr/>
+                </a:tc>
+                <a:tc>
+                  <a:txBody>
+                    <a:bodyPr/>
+                    <a:lstStyle/>
+                    <a:p>
+                      <a:pPr algn="ctr">
+                        <a:defRPr sz="1100">
+                          <a:latin typeface="Times New Roman"/>
+                        </a:defRPr>
+                      </a:pPr>
+                      <a:r>
+                        <a:t>Beaulieu et al., IACR 2013</a:t>
+                      </a:r>
+                    </a:p>
+                  </a:txBody>
+                  <a:tcPr/>
+                </a:tc>
+                <a:tc>
+                  <a:txBody>
+                    <a:bodyPr/>
+                    <a:lstStyle/>
+                    <a:p>
+                      <a:pPr algn="ctr">
+                        <a:defRPr sz="1100">
+                          <a:latin typeface="Times New Roman"/>
+                        </a:defRPr>
+                      </a:pPr>
+                      <a:r>
+                        <a:t>SPECK-64/128 ARX cipher by NSA. 24 cycles/byte on ARM Cortex microcontrollers.</a:t>
+                      </a:r>
+                    </a:p>
+                  </a:txBody>
+                  <a:tcPr/>
+                </a:tc>
+                <a:extLst>
+                  <a:ext uri="{0D108BD9-81ED-4DB2-BD59-A6C34878D82A}">
+                    <a16:rowId xmlns:a16="http://schemas.microsoft.com/office/drawing/2014/main" val="10004"/>
+                  </a:ext>
+                </a:extLst>
+              </a:tr>
+              <a:tr h="838200">
+                <a:tc>
+                  <a:txBody>
+                    <a:bodyPr/>
+                    <a:lstStyle/>
+                    <a:p>
+                      <a:pPr algn="ctr">
+                        <a:defRPr sz="1100">
+                          <a:latin typeface="Times New Roman"/>
+                        </a:defRPr>
+                      </a:pPr>
+                      <a:r>
+                        <a:t>5</a:t>
+                      </a:r>
+                    </a:p>
+                  </a:txBody>
+                  <a:tcPr>
+                    <a:solidFill>
+                      <a:srgbClr val="F0F0FF"/>
+                    </a:solidFill>
+                  </a:tcPr>
+                </a:tc>
+                <a:tc>
+                  <a:txBody>
+                    <a:bodyPr/>
+                    <a:lstStyle/>
+                    <a:p>
+                      <a:pPr algn="ctr">
+                        <a:defRPr sz="1100">
+                          <a:latin typeface="Times New Roman"/>
+                        </a:defRPr>
+                      </a:pPr>
+                      <a:r>
+                        <a:t>Lightweight Crypto for IoT Devices</a:t>
+                      </a:r>
+                    </a:p>
+                  </a:txBody>
+                  <a:tcPr>
+                    <a:solidFill>
+                      <a:srgbClr val="F0F0FF"/>
+                    </a:solidFill>
+                  </a:tcPr>
+                </a:tc>
+                <a:tc>
+                  <a:txBody>
+                    <a:bodyPr/>
+                    <a:lstStyle/>
+                    <a:p>
+                      <a:pPr algn="ctr">
+                        <a:defRPr sz="1100">
+                          <a:latin typeface="Times New Roman"/>
+                        </a:defRPr>
+                      </a:pPr>
+                      <a:r>
+                        <a:t>Thakor et al., IEEE Access 2021</a:t>
+                      </a:r>
+                    </a:p>
+                  </a:txBody>
+                  <a:tcPr>
+                    <a:solidFill>
+                      <a:srgbClr val="F0F0FF"/>
+                    </a:solidFill>
+                  </a:tcPr>
+                </a:tc>
+                <a:tc>
+                  <a:txBody>
+                    <a:bodyPr/>
+                    <a:lstStyle/>
+                    <a:p>
+                      <a:pPr algn="ctr">
+                        <a:defRPr sz="1100">
+                          <a:latin typeface="Times New Roman"/>
+                        </a:defRPr>
+                      </a:pPr>
+                      <a:r>
+                        <a:t>Comparative framework for latency, throughput, memory. Our methodology mirrors this.</a:t>
+                      </a:r>
+                    </a:p>
+                  </a:txBody>
+                  <a:tcPr>
+                    <a:solidFill>
+                      <a:srgbClr val="F0F0FF"/>
+                    </a:solidFill>
+                  </a:tcPr>
+                </a:tc>
+                <a:extLst>
+                  <a:ext uri="{0D108BD9-81ED-4DB2-BD59-A6C34878D82A}">
+                    <a16:rowId xmlns:a16="http://schemas.microsoft.com/office/drawing/2014/main" val="10005"/>
+                  </a:ext>
+                </a:extLst>
+              </a:tr>
+            </a:tbl>
+          </a:graphicData>
+        </a:graphic>
+      </p:graphicFrame>
     </p:spTree>
   </p:cSld>
   <p:clrMapOvr>
@@ -7278,8 +8599,8 @@
 </p:sld>
 </file>
 
-<file path=ppt/slides/slide4.xml><?xml version="1.0" encoding="utf-8"?>
-<p:sld xmlns:a="http://schemas.openxmlformats.org/drawingml/2006/main" xmlns:p="http://schemas.openxmlformats.org/presentationml/2006/main" xmlns:r="http://schemas.openxmlformats.org/officeDocument/2006/relationships">
+<file path=ppt/slides/slide5.xml><?xml version="1.0" encoding="utf-8"?>
+<p:sld xmlns:a="http://schemas.openxmlformats.org/drawingml/2006/main" xmlns:r="http://schemas.openxmlformats.org/officeDocument/2006/relationships" xmlns:p="http://schemas.openxmlformats.org/presentationml/2006/main">
   <p:cSld>
     <p:bg>
       <p:bgPr>
@@ -7295,7 +8616,14 @@
         <p:cNvGrpSpPr/>
         <p:nvPr/>
       </p:nvGrpSpPr>
-      <p:grpSpPr/>
+      <p:grpSpPr>
+        <a:xfrm>
+          <a:off x="0" y="0"/>
+          <a:ext cx="0" cy="0"/>
+          <a:chOff x="0" y="0"/>
+          <a:chExt cx="0" cy="0"/>
+        </a:xfrm>
+      </p:grpSpPr>
       <p:sp>
         <p:nvSpPr>
           <p:cNvPr id="2" name="TextBox 1"/>
@@ -7327,7 +8655,7 @@
               </a:defRPr>
             </a:pPr>
             <a:r>
-              <a:t>Literature Survey (1/2)</a:t>
+              <a:t>Literature Survey (2/2)</a:t>
             </a:r>
           </a:p>
         </p:txBody>
@@ -7372,6 +8700,7 @@
           <a:lstStyle/>
           <a:p>
             <a:pPr algn="ctr"/>
+            <a:endParaRPr/>
           </a:p>
         </p:txBody>
       </p:sp>
@@ -7394,10 +8723,34 @@
                 <a:tableStyleId>{5C22544A-7EE6-4342-B048-85BDC9FD1C3A}</a:tableStyleId>
               </a:tblPr>
               <a:tblGrid>
-                <a:gridCol w="2811780"/>
-                <a:gridCol w="2811780"/>
-                <a:gridCol w="2811780"/>
-                <a:gridCol w="2811780"/>
+                <a:gridCol w="2811780">
+                  <a:extLst>
+                    <a:ext uri="{9D8B030D-6E8A-4147-A177-3AD203B41FA5}">
+                      <a16:colId xmlns:a16="http://schemas.microsoft.com/office/drawing/2014/main" val="20000"/>
+                    </a:ext>
+                  </a:extLst>
+                </a:gridCol>
+                <a:gridCol w="2811780">
+                  <a:extLst>
+                    <a:ext uri="{9D8B030D-6E8A-4147-A177-3AD203B41FA5}">
+                      <a16:colId xmlns:a16="http://schemas.microsoft.com/office/drawing/2014/main" val="20001"/>
+                    </a:ext>
+                  </a:extLst>
+                </a:gridCol>
+                <a:gridCol w="2811780">
+                  <a:extLst>
+                    <a:ext uri="{9D8B030D-6E8A-4147-A177-3AD203B41FA5}">
+                      <a16:colId xmlns:a16="http://schemas.microsoft.com/office/drawing/2014/main" val="20002"/>
+                    </a:ext>
+                  </a:extLst>
+                </a:gridCol>
+                <a:gridCol w="2811780">
+                  <a:extLst>
+                    <a:ext uri="{9D8B030D-6E8A-4147-A177-3AD203B41FA5}">
+                      <a16:colId xmlns:a16="http://schemas.microsoft.com/office/drawing/2014/main" val="20003"/>
+                    </a:ext>
+                  </a:extLst>
+                </a:gridCol>
               </a:tblGrid>
               <a:tr h="838200">
                 <a:tc>
@@ -7496,6 +8849,11 @@
                     </a:solidFill>
                   </a:tcPr>
                 </a:tc>
+                <a:extLst>
+                  <a:ext uri="{0D108BD9-81ED-4DB2-BD59-A6C34878D82A}">
+                    <a16:rowId xmlns:a16="http://schemas.microsoft.com/office/drawing/2014/main" val="10000"/>
+                  </a:ext>
+                </a:extLst>
               </a:tr>
               <a:tr h="838200">
                 <a:tc>
@@ -7509,7 +8867,7 @@
                         </a:defRPr>
                       </a:pPr>
                       <a:r>
-                        <a:t>1</a:t>
+                        <a:t>6</a:t>
                       </a:r>
                     </a:p>
                   </a:txBody>
@@ -7530,7 +8888,7 @@
                         </a:defRPr>
                       </a:pPr>
                       <a:r>
-                        <a:t>The Design of Rijndael: AES</a:t>
+                        <a:t>Wireless Sensor Networks: A Survey</a:t>
                       </a:r>
                     </a:p>
                   </a:txBody>
@@ -7551,7 +8909,7 @@
                         </a:defRPr>
                       </a:pPr>
                       <a:r>
-                        <a:t>Daemen &amp; Rijmen, 2002</a:t>
+                        <a:t>Akyildiz et al., Comp. Networks 2002</a:t>
                       </a:r>
                     </a:p>
                   </a:txBody>
@@ -7572,7 +8930,7 @@
                         </a:defRPr>
                       </a:pPr>
                       <a:r>
-                        <a:t>Establishes AES block cipher. We use AES-256-GCM as industry-standard baseline.</a:t>
+                        <a:t>Node count scales with area x density (N=AxD). Informs our distributed simulation.</a:t>
                       </a:r>
                     </a:p>
                   </a:txBody>
@@ -7582,6 +8940,11 @@
                     </a:solidFill>
                   </a:tcPr>
                 </a:tc>
+                <a:extLst>
+                  <a:ext uri="{0D108BD9-81ED-4DB2-BD59-A6C34878D82A}">
+                    <a16:rowId xmlns:a16="http://schemas.microsoft.com/office/drawing/2014/main" val="10001"/>
+                  </a:ext>
+                </a:extLst>
               </a:tr>
               <a:tr h="838200">
                 <a:tc>
@@ -7595,7 +8958,7 @@
                         </a:defRPr>
                       </a:pPr>
                       <a:r>
-                        <a:t>2</a:t>
+                        <a:t>7</a:t>
                       </a:r>
                     </a:p>
                   </a:txBody>
@@ -7612,7 +8975,7 @@
                         </a:defRPr>
                       </a:pPr>
                       <a:r>
-                        <a:t>ChaCha, a variant of Salsa20</a:t>
+                        <a:t>Edge Computing: Vision and Challenges</a:t>
                       </a:r>
                     </a:p>
                   </a:txBody>
@@ -7629,7 +8992,7 @@
                         </a:defRPr>
                       </a:pPr>
                       <a:r>
-                        <a:t>Bernstein D.J., 2008</a:t>
+                        <a:t>Shi et al., IEEE IoT Journal 2016</a:t>
                       </a:r>
                     </a:p>
                   </a:txBody>
@@ -7646,12 +9009,17 @@
                         </a:defRPr>
                       </a:pPr>
                       <a:r>
-                        <a:t>ChaCha20 stream cipher excels in software without hardware crypto instructions.</a:t>
+                        <a:t>Defines edge computing paradigm. Justifies why encryption must occur at edge, not cloud.</a:t>
                       </a:r>
                     </a:p>
                   </a:txBody>
                   <a:tcPr/>
                 </a:tc>
+                <a:extLst>
+                  <a:ext uri="{0D108BD9-81ED-4DB2-BD59-A6C34878D82A}">
+                    <a16:rowId xmlns:a16="http://schemas.microsoft.com/office/drawing/2014/main" val="10002"/>
+                  </a:ext>
+                </a:extLst>
               </a:tr>
               <a:tr h="838200">
                 <a:tc>
@@ -7665,7 +9033,7 @@
                         </a:defRPr>
                       </a:pPr>
                       <a:r>
-                        <a:t>3</a:t>
+                        <a:t>8</a:t>
                       </a:r>
                     </a:p>
                   </a:txBody>
@@ -7686,7 +9054,7 @@
                         </a:defRPr>
                       </a:pPr>
                       <a:r>
-                        <a:t>PRESENT: An Ultra-Lightweight Block Cipher</a:t>
+                        <a:t>The Internet of Things: A Survey</a:t>
                       </a:r>
                     </a:p>
                   </a:txBody>
@@ -7707,7 +9075,7 @@
                         </a:defRPr>
                       </a:pPr>
                       <a:r>
-                        <a:t>Bogdanov et al., CHES 2007</a:t>
+                        <a:t>Li et al., Inf. Systems Frontiers 2015</a:t>
                       </a:r>
                     </a:p>
                   </a:txBody>
@@ -7728,7 +9096,7 @@
                         </a:defRPr>
                       </a:pPr>
                       <a:r>
-                        <a:t>SPN cipher for extreme constraints (~1,570 GE). Benchmarks lowest hardware tier.</a:t>
+                        <a:t>Comprehensive IoT architecture survey. Validates our sensor data model and edge constraints.</a:t>
                       </a:r>
                     </a:p>
                   </a:txBody>
@@ -7738,6 +9106,11 @@
                     </a:solidFill>
                   </a:tcPr>
                 </a:tc>
+                <a:extLst>
+                  <a:ext uri="{0D108BD9-81ED-4DB2-BD59-A6C34878D82A}">
+                    <a16:rowId xmlns:a16="http://schemas.microsoft.com/office/drawing/2014/main" val="10003"/>
+                  </a:ext>
+                </a:extLst>
               </a:tr>
               <a:tr h="838200">
                 <a:tc>
@@ -7751,7 +9124,7 @@
                         </a:defRPr>
                       </a:pPr>
                       <a:r>
-                        <a:t>4</a:t>
+                        <a:t>9</a:t>
                       </a:r>
                     </a:p>
                   </a:txBody>
@@ -7768,7 +9141,7 @@
                         </a:defRPr>
                       </a:pPr>
                       <a:r>
-                        <a:t>The SIMON and SPECK Families</a:t>
+                        <a:t>Report on Lightweight Cryptography</a:t>
                       </a:r>
                     </a:p>
                   </a:txBody>
@@ -7785,7 +9158,7 @@
                         </a:defRPr>
                       </a:pPr>
                       <a:r>
-                        <a:t>Beaulieu et al., IACR 2013</a:t>
+                        <a:t>McKay et al., NIST IR 8114, 2017</a:t>
                       </a:r>
                     </a:p>
                   </a:txBody>
@@ -7802,12 +9175,17 @@
                         </a:defRPr>
                       </a:pPr>
                       <a:r>
-                        <a:t>SPECK-64/128 ARX cipher by NSA. 24 cycles/byte on ARM Cortex microcontrollers.</a:t>
+                        <a:t>NIST guidelines for lightweight crypto selection. Frames our algorithm comparison criteria.</a:t>
                       </a:r>
                     </a:p>
                   </a:txBody>
                   <a:tcPr/>
                 </a:tc>
+                <a:extLst>
+                  <a:ext uri="{0D108BD9-81ED-4DB2-BD59-A6C34878D82A}">
+                    <a16:rowId xmlns:a16="http://schemas.microsoft.com/office/drawing/2014/main" val="10004"/>
+                  </a:ext>
+                </a:extLst>
               </a:tr>
               <a:tr h="838200">
                 <a:tc>
@@ -7821,7 +9199,7 @@
                         </a:defRPr>
                       </a:pPr>
                       <a:r>
-                        <a:t>5</a:t>
+                        <a:t>10</a:t>
                       </a:r>
                     </a:p>
                   </a:txBody>
@@ -7842,7 +9220,7 @@
                         </a:defRPr>
                       </a:pPr>
                       <a:r>
-                        <a:t>Lightweight Crypto for IoT Devices</a:t>
+                        <a:t>Review of Lightweight Block Ciphers</a:t>
                       </a:r>
                     </a:p>
                   </a:txBody>
@@ -7863,7 +9241,7 @@
                         </a:defRPr>
                       </a:pPr>
                       <a:r>
-                        <a:t>Thakor et al., IEEE Access 2021</a:t>
+                        <a:t>Hatzivasilis et al., J. Crypto. Eng. 2018</a:t>
                       </a:r>
                     </a:p>
                   </a:txBody>
@@ -7884,7 +9262,7 @@
                         </a:defRPr>
                       </a:pPr>
                       <a:r>
-                        <a:t>Comparative framework for latency, throughput, memory. Our methodology mirrors this.</a:t>
+                        <a:t>Systematic review of PRESENT, SPECK, SIMON. Validates our from-scratch implementation approach.</a:t>
                       </a:r>
                     </a:p>
                   </a:txBody>
@@ -7894,6 +9272,11 @@
                     </a:solidFill>
                   </a:tcPr>
                 </a:tc>
+                <a:extLst>
+                  <a:ext uri="{0D108BD9-81ED-4DB2-BD59-A6C34878D82A}">
+                    <a16:rowId xmlns:a16="http://schemas.microsoft.com/office/drawing/2014/main" val="10005"/>
+                  </a:ext>
+                </a:extLst>
               </a:tr>
             </a:tbl>
           </a:graphicData>
@@ -7907,8 +9290,8 @@
 </p:sld>
 </file>
 
-<file path=ppt/slides/slide5.xml><?xml version="1.0" encoding="utf-8"?>
-<p:sld xmlns:a="http://schemas.openxmlformats.org/drawingml/2006/main" xmlns:p="http://schemas.openxmlformats.org/presentationml/2006/main" xmlns:r="http://schemas.openxmlformats.org/officeDocument/2006/relationships">
+<file path=ppt/slides/slide6.xml><?xml version="1.0" encoding="utf-8"?>
+<p:sld xmlns:a="http://schemas.openxmlformats.org/drawingml/2006/main" xmlns:r="http://schemas.openxmlformats.org/officeDocument/2006/relationships" xmlns:p="http://schemas.openxmlformats.org/presentationml/2006/main">
   <p:cSld>
     <p:bg>
       <p:bgPr>
@@ -7924,7 +9307,14 @@
         <p:cNvGrpSpPr/>
         <p:nvPr/>
       </p:nvGrpSpPr>
-      <p:grpSpPr/>
+      <p:grpSpPr>
+        <a:xfrm>
+          <a:off x="0" y="0"/>
+          <a:ext cx="0" cy="0"/>
+          <a:chOff x="0" y="0"/>
+          <a:chExt cx="0" cy="0"/>
+        </a:xfrm>
+      </p:grpSpPr>
       <p:sp>
         <p:nvSpPr>
           <p:cNvPr id="2" name="TextBox 1"/>
@@ -7956,7 +9346,7 @@
               </a:defRPr>
             </a:pPr>
             <a:r>
-              <a:t>Literature Survey (2/2)</a:t>
+              <a:t>Dataset Generation</a:t>
             </a:r>
           </a:p>
         </p:txBody>
@@ -8001,533 +9391,267 @@
           <a:lstStyle/>
           <a:p>
             <a:pPr algn="ctr"/>
-          </a:p>
-        </p:txBody>
-      </p:sp>
-      <p:graphicFrame>
-        <p:nvGraphicFramePr>
-          <p:cNvPr id="4" name="Table 3"/>
-          <p:cNvGraphicFramePr>
-            <a:graphicFrameLocks noGrp="1"/>
-          </p:cNvGraphicFramePr>
+            <a:endParaRPr/>
+          </a:p>
+        </p:txBody>
+      </p:sp>
+      <p:sp>
+        <p:nvSpPr>
+          <p:cNvPr id="4" name="TextBox 3"/>
+          <p:cNvSpPr txBox="1"/>
           <p:nvPr/>
-        </p:nvGraphicFramePr>
-        <p:xfrm>
-          <a:off x="457200" y="1188720"/>
-          <a:ext cx="11247120" cy="5029200"/>
-        </p:xfrm>
-        <a:graphic>
-          <a:graphicData uri="http://schemas.openxmlformats.org/drawingml/2006/table">
-            <a:tbl>
-              <a:tblPr firstRow="1" bandRow="1">
-                <a:tableStyleId>{5C22544A-7EE6-4342-B048-85BDC9FD1C3A}</a:tableStyleId>
-              </a:tblPr>
-              <a:tblGrid>
-                <a:gridCol w="2811780"/>
-                <a:gridCol w="2811780"/>
-                <a:gridCol w="2811780"/>
-                <a:gridCol w="2811780"/>
-              </a:tblGrid>
-              <a:tr h="838200">
-                <a:tc>
-                  <a:txBody>
-                    <a:bodyPr/>
-                    <a:lstStyle/>
-                    <a:p>
-                      <a:pPr algn="ctr">
-                        <a:defRPr sz="1100" b="1">
-                          <a:solidFill>
-                            <a:srgbClr val="FFFFFF"/>
-                          </a:solidFill>
-                          <a:latin typeface="Times New Roman"/>
-                        </a:defRPr>
-                      </a:pPr>
-                      <a:r>
-                        <a:t>#</a:t>
-                      </a:r>
-                    </a:p>
-                  </a:txBody>
-                  <a:tcPr>
-                    <a:solidFill>
-                      <a:srgbClr val="1E1E1E"/>
-                    </a:solidFill>
-                  </a:tcPr>
-                </a:tc>
-                <a:tc>
-                  <a:txBody>
-                    <a:bodyPr/>
-                    <a:lstStyle/>
-                    <a:p>
-                      <a:pPr algn="ctr">
-                        <a:defRPr sz="1100" b="1">
-                          <a:solidFill>
-                            <a:srgbClr val="FFFFFF"/>
-                          </a:solidFill>
-                          <a:latin typeface="Times New Roman"/>
-                        </a:defRPr>
-                      </a:pPr>
-                      <a:r>
-                        <a:t>Paper Title</a:t>
-                      </a:r>
-                    </a:p>
-                  </a:txBody>
-                  <a:tcPr>
-                    <a:solidFill>
-                      <a:srgbClr val="1E1E1E"/>
-                    </a:solidFill>
-                  </a:tcPr>
-                </a:tc>
-                <a:tc>
-                  <a:txBody>
-                    <a:bodyPr/>
-                    <a:lstStyle/>
-                    <a:p>
-                      <a:pPr algn="ctr">
-                        <a:defRPr sz="1100" b="1">
-                          <a:solidFill>
-                            <a:srgbClr val="FFFFFF"/>
-                          </a:solidFill>
-                          <a:latin typeface="Times New Roman"/>
-                        </a:defRPr>
-                      </a:pPr>
-                      <a:r>
-                        <a:t>Authors / Year</a:t>
-                      </a:r>
-                    </a:p>
-                  </a:txBody>
-                  <a:tcPr>
-                    <a:solidFill>
-                      <a:srgbClr val="1E1E1E"/>
-                    </a:solidFill>
-                  </a:tcPr>
-                </a:tc>
-                <a:tc>
-                  <a:txBody>
-                    <a:bodyPr/>
-                    <a:lstStyle/>
-                    <a:p>
-                      <a:pPr algn="ctr">
-                        <a:defRPr sz="1100" b="1">
-                          <a:solidFill>
-                            <a:srgbClr val="FFFFFF"/>
-                          </a:solidFill>
-                          <a:latin typeface="Times New Roman"/>
-                        </a:defRPr>
-                      </a:pPr>
-                      <a:r>
-                        <a:t>Key Contribution / Relevance</a:t>
-                      </a:r>
-                    </a:p>
-                  </a:txBody>
-                  <a:tcPr>
-                    <a:solidFill>
-                      <a:srgbClr val="1E1E1E"/>
-                    </a:solidFill>
-                  </a:tcPr>
-                </a:tc>
-              </a:tr>
-              <a:tr h="838200">
-                <a:tc>
-                  <a:txBody>
-                    <a:bodyPr/>
-                    <a:lstStyle/>
-                    <a:p>
-                      <a:pPr algn="ctr">
-                        <a:defRPr sz="1100">
-                          <a:latin typeface="Times New Roman"/>
-                        </a:defRPr>
-                      </a:pPr>
-                      <a:r>
-                        <a:t>6</a:t>
-                      </a:r>
-                    </a:p>
-                  </a:txBody>
-                  <a:tcPr>
-                    <a:solidFill>
-                      <a:srgbClr val="F0F0FF"/>
-                    </a:solidFill>
-                  </a:tcPr>
-                </a:tc>
-                <a:tc>
-                  <a:txBody>
-                    <a:bodyPr/>
-                    <a:lstStyle/>
-                    <a:p>
-                      <a:pPr algn="ctr">
-                        <a:defRPr sz="1100">
-                          <a:latin typeface="Times New Roman"/>
-                        </a:defRPr>
-                      </a:pPr>
-                      <a:r>
-                        <a:t>Wireless Sensor Networks: A Survey</a:t>
-                      </a:r>
-                    </a:p>
-                  </a:txBody>
-                  <a:tcPr>
-                    <a:solidFill>
-                      <a:srgbClr val="F0F0FF"/>
-                    </a:solidFill>
-                  </a:tcPr>
-                </a:tc>
-                <a:tc>
-                  <a:txBody>
-                    <a:bodyPr/>
-                    <a:lstStyle/>
-                    <a:p>
-                      <a:pPr algn="ctr">
-                        <a:defRPr sz="1100">
-                          <a:latin typeface="Times New Roman"/>
-                        </a:defRPr>
-                      </a:pPr>
-                      <a:r>
-                        <a:t>Akyildiz et al., Comp. Networks 2002</a:t>
-                      </a:r>
-                    </a:p>
-                  </a:txBody>
-                  <a:tcPr>
-                    <a:solidFill>
-                      <a:srgbClr val="F0F0FF"/>
-                    </a:solidFill>
-                  </a:tcPr>
-                </a:tc>
-                <a:tc>
-                  <a:txBody>
-                    <a:bodyPr/>
-                    <a:lstStyle/>
-                    <a:p>
-                      <a:pPr algn="ctr">
-                        <a:defRPr sz="1100">
-                          <a:latin typeface="Times New Roman"/>
-                        </a:defRPr>
-                      </a:pPr>
-                      <a:r>
-                        <a:t>Node count scales with area x density (N=AxD). Informs our distributed simulation.</a:t>
-                      </a:r>
-                    </a:p>
-                  </a:txBody>
-                  <a:tcPr>
-                    <a:solidFill>
-                      <a:srgbClr val="F0F0FF"/>
-                    </a:solidFill>
-                  </a:tcPr>
-                </a:tc>
-              </a:tr>
-              <a:tr h="838200">
-                <a:tc>
-                  <a:txBody>
-                    <a:bodyPr/>
-                    <a:lstStyle/>
-                    <a:p>
-                      <a:pPr algn="ctr">
-                        <a:defRPr sz="1100">
-                          <a:latin typeface="Times New Roman"/>
-                        </a:defRPr>
-                      </a:pPr>
-                      <a:r>
-                        <a:t>7</a:t>
-                      </a:r>
-                    </a:p>
-                  </a:txBody>
-                  <a:tcPr/>
-                </a:tc>
-                <a:tc>
-                  <a:txBody>
-                    <a:bodyPr/>
-                    <a:lstStyle/>
-                    <a:p>
-                      <a:pPr algn="ctr">
-                        <a:defRPr sz="1100">
-                          <a:latin typeface="Times New Roman"/>
-                        </a:defRPr>
-                      </a:pPr>
-                      <a:r>
-                        <a:t>Edge Computing: Vision and Challenges</a:t>
-                      </a:r>
-                    </a:p>
-                  </a:txBody>
-                  <a:tcPr/>
-                </a:tc>
-                <a:tc>
-                  <a:txBody>
-                    <a:bodyPr/>
-                    <a:lstStyle/>
-                    <a:p>
-                      <a:pPr algn="ctr">
-                        <a:defRPr sz="1100">
-                          <a:latin typeface="Times New Roman"/>
-                        </a:defRPr>
-                      </a:pPr>
-                      <a:r>
-                        <a:t>Shi et al., IEEE IoT Journal 2016</a:t>
-                      </a:r>
-                    </a:p>
-                  </a:txBody>
-                  <a:tcPr/>
-                </a:tc>
-                <a:tc>
-                  <a:txBody>
-                    <a:bodyPr/>
-                    <a:lstStyle/>
-                    <a:p>
-                      <a:pPr algn="ctr">
-                        <a:defRPr sz="1100">
-                          <a:latin typeface="Times New Roman"/>
-                        </a:defRPr>
-                      </a:pPr>
-                      <a:r>
-                        <a:t>Defines edge computing paradigm. Justifies why encryption must occur at edge, not cloud.</a:t>
-                      </a:r>
-                    </a:p>
-                  </a:txBody>
-                  <a:tcPr/>
-                </a:tc>
-              </a:tr>
-              <a:tr h="838200">
-                <a:tc>
-                  <a:txBody>
-                    <a:bodyPr/>
-                    <a:lstStyle/>
-                    <a:p>
-                      <a:pPr algn="ctr">
-                        <a:defRPr sz="1100">
-                          <a:latin typeface="Times New Roman"/>
-                        </a:defRPr>
-                      </a:pPr>
-                      <a:r>
-                        <a:t>8</a:t>
-                      </a:r>
-                    </a:p>
-                  </a:txBody>
-                  <a:tcPr>
-                    <a:solidFill>
-                      <a:srgbClr val="F0F0FF"/>
-                    </a:solidFill>
-                  </a:tcPr>
-                </a:tc>
-                <a:tc>
-                  <a:txBody>
-                    <a:bodyPr/>
-                    <a:lstStyle/>
-                    <a:p>
-                      <a:pPr algn="ctr">
-                        <a:defRPr sz="1100">
-                          <a:latin typeface="Times New Roman"/>
-                        </a:defRPr>
-                      </a:pPr>
-                      <a:r>
-                        <a:t>The Internet of Things: A Survey</a:t>
-                      </a:r>
-                    </a:p>
-                  </a:txBody>
-                  <a:tcPr>
-                    <a:solidFill>
-                      <a:srgbClr val="F0F0FF"/>
-                    </a:solidFill>
-                  </a:tcPr>
-                </a:tc>
-                <a:tc>
-                  <a:txBody>
-                    <a:bodyPr/>
-                    <a:lstStyle/>
-                    <a:p>
-                      <a:pPr algn="ctr">
-                        <a:defRPr sz="1100">
-                          <a:latin typeface="Times New Roman"/>
-                        </a:defRPr>
-                      </a:pPr>
-                      <a:r>
-                        <a:t>Li et al., Inf. Systems Frontiers 2015</a:t>
-                      </a:r>
-                    </a:p>
-                  </a:txBody>
-                  <a:tcPr>
-                    <a:solidFill>
-                      <a:srgbClr val="F0F0FF"/>
-                    </a:solidFill>
-                  </a:tcPr>
-                </a:tc>
-                <a:tc>
-                  <a:txBody>
-                    <a:bodyPr/>
-                    <a:lstStyle/>
-                    <a:p>
-                      <a:pPr algn="ctr">
-                        <a:defRPr sz="1100">
-                          <a:latin typeface="Times New Roman"/>
-                        </a:defRPr>
-                      </a:pPr>
-                      <a:r>
-                        <a:t>Comprehensive IoT architecture survey. Validates our sensor data model and edge constraints.</a:t>
-                      </a:r>
-                    </a:p>
-                  </a:txBody>
-                  <a:tcPr>
-                    <a:solidFill>
-                      <a:srgbClr val="F0F0FF"/>
-                    </a:solidFill>
-                  </a:tcPr>
-                </a:tc>
-              </a:tr>
-              <a:tr h="838200">
-                <a:tc>
-                  <a:txBody>
-                    <a:bodyPr/>
-                    <a:lstStyle/>
-                    <a:p>
-                      <a:pPr algn="ctr">
-                        <a:defRPr sz="1100">
-                          <a:latin typeface="Times New Roman"/>
-                        </a:defRPr>
-                      </a:pPr>
-                      <a:r>
-                        <a:t>9</a:t>
-                      </a:r>
-                    </a:p>
-                  </a:txBody>
-                  <a:tcPr/>
-                </a:tc>
-                <a:tc>
-                  <a:txBody>
-                    <a:bodyPr/>
-                    <a:lstStyle/>
-                    <a:p>
-                      <a:pPr algn="ctr">
-                        <a:defRPr sz="1100">
-                          <a:latin typeface="Times New Roman"/>
-                        </a:defRPr>
-                      </a:pPr>
-                      <a:r>
-                        <a:t>Report on Lightweight Cryptography</a:t>
-                      </a:r>
-                    </a:p>
-                  </a:txBody>
-                  <a:tcPr/>
-                </a:tc>
-                <a:tc>
-                  <a:txBody>
-                    <a:bodyPr/>
-                    <a:lstStyle/>
-                    <a:p>
-                      <a:pPr algn="ctr">
-                        <a:defRPr sz="1100">
-                          <a:latin typeface="Times New Roman"/>
-                        </a:defRPr>
-                      </a:pPr>
-                      <a:r>
-                        <a:t>McKay et al., NIST IR 8114, 2017</a:t>
-                      </a:r>
-                    </a:p>
-                  </a:txBody>
-                  <a:tcPr/>
-                </a:tc>
-                <a:tc>
-                  <a:txBody>
-                    <a:bodyPr/>
-                    <a:lstStyle/>
-                    <a:p>
-                      <a:pPr algn="ctr">
-                        <a:defRPr sz="1100">
-                          <a:latin typeface="Times New Roman"/>
-                        </a:defRPr>
-                      </a:pPr>
-                      <a:r>
-                        <a:t>NIST guidelines for lightweight crypto selection. Frames our algorithm comparison criteria.</a:t>
-                      </a:r>
-                    </a:p>
-                  </a:txBody>
-                  <a:tcPr/>
-                </a:tc>
-              </a:tr>
-              <a:tr h="838200">
-                <a:tc>
-                  <a:txBody>
-                    <a:bodyPr/>
-                    <a:lstStyle/>
-                    <a:p>
-                      <a:pPr algn="ctr">
-                        <a:defRPr sz="1100">
-                          <a:latin typeface="Times New Roman"/>
-                        </a:defRPr>
-                      </a:pPr>
-                      <a:r>
-                        <a:t>10</a:t>
-                      </a:r>
-                    </a:p>
-                  </a:txBody>
-                  <a:tcPr>
-                    <a:solidFill>
-                      <a:srgbClr val="F0F0FF"/>
-                    </a:solidFill>
-                  </a:tcPr>
-                </a:tc>
-                <a:tc>
-                  <a:txBody>
-                    <a:bodyPr/>
-                    <a:lstStyle/>
-                    <a:p>
-                      <a:pPr algn="ctr">
-                        <a:defRPr sz="1100">
-                          <a:latin typeface="Times New Roman"/>
-                        </a:defRPr>
-                      </a:pPr>
-                      <a:r>
-                        <a:t>Review of Lightweight Block Ciphers</a:t>
-                      </a:r>
-                    </a:p>
-                  </a:txBody>
-                  <a:tcPr>
-                    <a:solidFill>
-                      <a:srgbClr val="F0F0FF"/>
-                    </a:solidFill>
-                  </a:tcPr>
-                </a:tc>
-                <a:tc>
-                  <a:txBody>
-                    <a:bodyPr/>
-                    <a:lstStyle/>
-                    <a:p>
-                      <a:pPr algn="ctr">
-                        <a:defRPr sz="1100">
-                          <a:latin typeface="Times New Roman"/>
-                        </a:defRPr>
-                      </a:pPr>
-                      <a:r>
-                        <a:t>Hatzivasilis et al., J. Crypto. Eng. 2018</a:t>
-                      </a:r>
-                    </a:p>
-                  </a:txBody>
-                  <a:tcPr>
-                    <a:solidFill>
-                      <a:srgbClr val="F0F0FF"/>
-                    </a:solidFill>
-                  </a:tcPr>
-                </a:tc>
-                <a:tc>
-                  <a:txBody>
-                    <a:bodyPr/>
-                    <a:lstStyle/>
-                    <a:p>
-                      <a:pPr algn="ctr">
-                        <a:defRPr sz="1100">
-                          <a:latin typeface="Times New Roman"/>
-                        </a:defRPr>
-                      </a:pPr>
-                      <a:r>
-                        <a:t>Systematic review of PRESENT, SPECK, SIMON. Validates our from-scratch implementation approach.</a:t>
-                      </a:r>
-                    </a:p>
-                  </a:txBody>
-                  <a:tcPr>
-                    <a:solidFill>
-                      <a:srgbClr val="F0F0FF"/>
-                    </a:solidFill>
-                  </a:tcPr>
-                </a:tc>
-              </a:tr>
-            </a:tbl>
-          </a:graphicData>
-        </a:graphic>
-      </p:graphicFrame>
+        </p:nvSpPr>
+        <p:spPr>
+          <a:xfrm>
+            <a:off x="731520" y="1371600"/>
+            <a:ext cx="10698480" cy="5029200"/>
+          </a:xfrm>
+          <a:prstGeom prst="rect">
+            <a:avLst/>
+          </a:prstGeom>
+          <a:noFill/>
+        </p:spPr>
+        <p:txBody>
+          <a:bodyPr wrap="square">
+            <a:spAutoFit/>
+          </a:bodyPr>
+          <a:lstStyle/>
+          <a:p>
+            <a:pPr>
+              <a:spcAft>
+                <a:spcPts val="800"/>
+              </a:spcAft>
+              <a:defRPr sz="1600">
+                <a:solidFill>
+                  <a:srgbClr val="000000"/>
+                </a:solidFill>
+                <a:latin typeface="Times New Roman"/>
+              </a:defRPr>
+            </a:pPr>
+            <a:r>
+              <a:t>Synthetic IoT Sensor Data:</a:t>
+            </a:r>
+          </a:p>
+          <a:p>
+            <a:pPr>
+              <a:spcAft>
+                <a:spcPts val="800"/>
+              </a:spcAft>
+              <a:defRPr sz="1600">
+                <a:solidFill>
+                  <a:srgbClr val="000000"/>
+                </a:solidFill>
+                <a:latin typeface="Times New Roman"/>
+              </a:defRPr>
+            </a:pPr>
+            <a:r>
+              <a:t>- We generate realistic JSON payloads mimicking IoT sensor telemetry streams.</a:t>
+            </a:r>
+          </a:p>
+          <a:p>
+            <a:pPr>
+              <a:spcAft>
+                <a:spcPts val="800"/>
+              </a:spcAft>
+              <a:defRPr sz="1600">
+                <a:solidFill>
+                  <a:srgbClr val="000000"/>
+                </a:solidFill>
+                <a:latin typeface="Times New Roman"/>
+              </a:defRPr>
+            </a:pPr>
+            <a:r>
+              <a:t>- Each record contains: timestamp, device_id, temperature_c, humidity_pct, pressure_hpa, light_lux, sensor_voltage, status.</a:t>
+            </a:r>
+          </a:p>
+          <a:p>
+            <a:pPr>
+              <a:spcAft>
+                <a:spcPts val="800"/>
+              </a:spcAft>
+              <a:defRPr sz="1600">
+                <a:solidFill>
+                  <a:srgbClr val="000000"/>
+                </a:solidFill>
+                <a:latin typeface="Times New Roman"/>
+              </a:defRPr>
+            </a:pPr>
+            <a:endParaRPr/>
+          </a:p>
+          <a:p>
+            <a:pPr>
+              <a:spcAft>
+                <a:spcPts val="800"/>
+              </a:spcAft>
+              <a:defRPr sz="1600">
+                <a:solidFill>
+                  <a:srgbClr val="000000"/>
+                </a:solidFill>
+                <a:latin typeface="Times New Roman"/>
+              </a:defRPr>
+            </a:pPr>
+            <a:r>
+              <a:t>Data Sizes Used: 1KB, 10KB, 100KB</a:t>
+            </a:r>
+          </a:p>
+          <a:p>
+            <a:pPr>
+              <a:spcAft>
+                <a:spcPts val="800"/>
+              </a:spcAft>
+              <a:defRPr sz="1600">
+                <a:solidFill>
+                  <a:srgbClr val="000000"/>
+                </a:solidFill>
+                <a:latin typeface="Times New Roman"/>
+              </a:defRPr>
+            </a:pPr>
+            <a:r>
+              <a:t>- 1KB: Single sensor reading (~5 JSON records) -- typical RFID/smart card payload.</a:t>
+            </a:r>
+          </a:p>
+          <a:p>
+            <a:pPr>
+              <a:spcAft>
+                <a:spcPts val="800"/>
+              </a:spcAft>
+              <a:defRPr sz="1600">
+                <a:solidFill>
+                  <a:srgbClr val="000000"/>
+                </a:solidFill>
+                <a:latin typeface="Times New Roman"/>
+              </a:defRPr>
+            </a:pPr>
+            <a:r>
+              <a:t>- 10KB: Small batch of readings (~50 records) -- typical for periodic sensor uploads.</a:t>
+            </a:r>
+          </a:p>
+          <a:p>
+            <a:pPr>
+              <a:spcAft>
+                <a:spcPts val="800"/>
+              </a:spcAft>
+              <a:defRPr sz="1600">
+                <a:solidFill>
+                  <a:srgbClr val="000000"/>
+                </a:solidFill>
+                <a:latin typeface="Times New Roman"/>
+              </a:defRPr>
+            </a:pPr>
+            <a:r>
+              <a:t>- 100KB: Larger aggregated batch (~500 records) -- typical for edge gateway aggregation.</a:t>
+            </a:r>
+          </a:p>
+          <a:p>
+            <a:pPr>
+              <a:spcAft>
+                <a:spcPts val="800"/>
+              </a:spcAft>
+              <a:defRPr sz="1600">
+                <a:solidFill>
+                  <a:srgbClr val="000000"/>
+                </a:solidFill>
+                <a:latin typeface="Times New Roman"/>
+              </a:defRPr>
+            </a:pPr>
+            <a:endParaRPr/>
+          </a:p>
+          <a:p>
+            <a:pPr>
+              <a:spcAft>
+                <a:spcPts val="800"/>
+              </a:spcAft>
+              <a:defRPr sz="1600">
+                <a:solidFill>
+                  <a:srgbClr val="000000"/>
+                </a:solidFill>
+                <a:latin typeface="Times New Roman"/>
+              </a:defRPr>
+            </a:pPr>
+            <a:r>
+              <a:t>Generation Strategy:</a:t>
+            </a:r>
+          </a:p>
+          <a:p>
+            <a:pPr>
+              <a:spcAft>
+                <a:spcPts val="800"/>
+              </a:spcAft>
+              <a:defRPr sz="1600">
+                <a:solidFill>
+                  <a:srgbClr val="000000"/>
+                </a:solidFill>
+                <a:latin typeface="Times New Roman"/>
+              </a:defRPr>
+            </a:pPr>
+            <a:r>
+              <a:t>- Records are accumulated until the serialized JSON meets the target byte size.</a:t>
+            </a:r>
+          </a:p>
+          <a:p>
+            <a:pPr>
+              <a:spcAft>
+                <a:spcPts val="800"/>
+              </a:spcAft>
+              <a:defRPr sz="1600">
+                <a:solidFill>
+                  <a:srgbClr val="000000"/>
+                </a:solidFill>
+                <a:latin typeface="Times New Roman"/>
+              </a:defRPr>
+            </a:pPr>
+            <a:r>
+              <a:t>- Data is then padded or trimmed to exactly match the requested size.</a:t>
+            </a:r>
+          </a:p>
+          <a:p>
+            <a:pPr>
+              <a:spcAft>
+                <a:spcPts val="800"/>
+              </a:spcAft>
+              <a:defRPr sz="1600">
+                <a:solidFill>
+                  <a:srgbClr val="000000"/>
+                </a:solidFill>
+                <a:latin typeface="Times New Roman"/>
+              </a:defRPr>
+            </a:pPr>
+            <a:r>
+              <a:t>- The same data is used across all algorithms at each size for fair comparison.</a:t>
+            </a:r>
+          </a:p>
+          <a:p>
+            <a:pPr>
+              <a:spcAft>
+                <a:spcPts val="800"/>
+              </a:spcAft>
+              <a:defRPr sz="1600">
+                <a:solidFill>
+                  <a:srgbClr val="000000"/>
+                </a:solidFill>
+                <a:latin typeface="Times New Roman"/>
+              </a:defRPr>
+            </a:pPr>
+            <a:endParaRPr/>
+          </a:p>
+          <a:p>
+            <a:pPr>
+              <a:spcAft>
+                <a:spcPts val="800"/>
+              </a:spcAft>
+              <a:defRPr sz="1600">
+                <a:solidFill>
+                  <a:srgbClr val="000000"/>
+                </a:solidFill>
+                <a:latin typeface="Times New Roman"/>
+              </a:defRPr>
+            </a:pPr>
+            <a:r>
+              <a:t>Total Benchmark Matrix: 4 algorithms x 3 sizes x 5 iterations x 2 ops (enc+dec) = 120 runs</a:t>
+            </a:r>
+          </a:p>
+        </p:txBody>
+      </p:sp>
     </p:spTree>
   </p:cSld>
   <p:clrMapOvr>
@@ -8536,8 +9660,8 @@
 </p:sld>
 </file>
 
-<file path=ppt/slides/slide6.xml><?xml version="1.0" encoding="utf-8"?>
-<p:sld xmlns:a="http://schemas.openxmlformats.org/drawingml/2006/main" xmlns:p="http://schemas.openxmlformats.org/presentationml/2006/main" xmlns:r="http://schemas.openxmlformats.org/officeDocument/2006/relationships">
+<file path=ppt/slides/slide7.xml><?xml version="1.0" encoding="utf-8"?>
+<p:sld xmlns:a="http://schemas.openxmlformats.org/drawingml/2006/main" xmlns:r="http://schemas.openxmlformats.org/officeDocument/2006/relationships" xmlns:p="http://schemas.openxmlformats.org/presentationml/2006/main">
   <p:cSld>
     <p:bg>
       <p:bgPr>
@@ -8553,7 +9677,14 @@
         <p:cNvGrpSpPr/>
         <p:nvPr/>
       </p:nvGrpSpPr>
-      <p:grpSpPr/>
+      <p:grpSpPr>
+        <a:xfrm>
+          <a:off x="0" y="0"/>
+          <a:ext cx="0" cy="0"/>
+          <a:chOff x="0" y="0"/>
+          <a:chExt cx="0" cy="0"/>
+        </a:xfrm>
+      </p:grpSpPr>
       <p:sp>
         <p:nvSpPr>
           <p:cNvPr id="2" name="TextBox 1"/>
@@ -8585,7 +9716,7 @@
               </a:defRPr>
             </a:pPr>
             <a:r>
-              <a:t>Dataset Generation</a:t>
+              <a:t>System Architecture</a:t>
             </a:r>
           </a:p>
         </p:txBody>
@@ -8630,365 +9761,7 @@
           <a:lstStyle/>
           <a:p>
             <a:pPr algn="ctr"/>
-          </a:p>
-        </p:txBody>
-      </p:sp>
-      <p:sp>
-        <p:nvSpPr>
-          <p:cNvPr id="4" name="TextBox 3"/>
-          <p:cNvSpPr txBox="1"/>
-          <p:nvPr/>
-        </p:nvSpPr>
-        <p:spPr>
-          <a:xfrm>
-            <a:off x="731520" y="1371600"/>
-            <a:ext cx="10698480" cy="5029200"/>
-          </a:xfrm>
-          <a:prstGeom prst="rect">
-            <a:avLst/>
-          </a:prstGeom>
-          <a:noFill/>
-        </p:spPr>
-        <p:txBody>
-          <a:bodyPr wrap="square">
-            <a:spAutoFit/>
-          </a:bodyPr>
-          <a:lstStyle/>
-          <a:p>
-            <a:pPr>
-              <a:spcAft>
-                <a:spcPts val="800"/>
-              </a:spcAft>
-              <a:defRPr sz="1600">
-                <a:solidFill>
-                  <a:srgbClr val="000000"/>
-                </a:solidFill>
-                <a:latin typeface="Times New Roman"/>
-              </a:defRPr>
-            </a:pPr>
-            <a:r>
-              <a:t>Synthetic IoT Sensor Data:</a:t>
-            </a:r>
-          </a:p>
-          <a:p>
-            <a:pPr>
-              <a:spcAft>
-                <a:spcPts val="800"/>
-              </a:spcAft>
-              <a:defRPr sz="1600">
-                <a:solidFill>
-                  <a:srgbClr val="000000"/>
-                </a:solidFill>
-                <a:latin typeface="Times New Roman"/>
-              </a:defRPr>
-            </a:pPr>
-            <a:r>
-              <a:t>- We generate realistic JSON payloads mimicking IoT sensor telemetry streams.</a:t>
-            </a:r>
-          </a:p>
-          <a:p>
-            <a:pPr>
-              <a:spcAft>
-                <a:spcPts val="800"/>
-              </a:spcAft>
-              <a:defRPr sz="1600">
-                <a:solidFill>
-                  <a:srgbClr val="000000"/>
-                </a:solidFill>
-                <a:latin typeface="Times New Roman"/>
-              </a:defRPr>
-            </a:pPr>
-            <a:r>
-              <a:t>- Each record contains: timestamp, device_id, temperature_c, humidity_pct, pressure_hpa, light_lux, sensor_voltage, status.</a:t>
-            </a:r>
-          </a:p>
-          <a:p>
-            <a:pPr>
-              <a:spcAft>
-                <a:spcPts val="800"/>
-              </a:spcAft>
-              <a:defRPr sz="1600">
-                <a:solidFill>
-                  <a:srgbClr val="000000"/>
-                </a:solidFill>
-                <a:latin typeface="Times New Roman"/>
-              </a:defRPr>
-            </a:pPr>
-          </a:p>
-          <a:p>
-            <a:pPr>
-              <a:spcAft>
-                <a:spcPts val="800"/>
-              </a:spcAft>
-              <a:defRPr sz="1600">
-                <a:solidFill>
-                  <a:srgbClr val="000000"/>
-                </a:solidFill>
-                <a:latin typeface="Times New Roman"/>
-              </a:defRPr>
-            </a:pPr>
-            <a:r>
-              <a:t>Data Sizes Used: 1KB, 10KB, 100KB</a:t>
-            </a:r>
-          </a:p>
-          <a:p>
-            <a:pPr>
-              <a:spcAft>
-                <a:spcPts val="800"/>
-              </a:spcAft>
-              <a:defRPr sz="1600">
-                <a:solidFill>
-                  <a:srgbClr val="000000"/>
-                </a:solidFill>
-                <a:latin typeface="Times New Roman"/>
-              </a:defRPr>
-            </a:pPr>
-            <a:r>
-              <a:t>- 1KB: Single sensor reading (~5 JSON records) -- typical RFID/smart card payload.</a:t>
-            </a:r>
-          </a:p>
-          <a:p>
-            <a:pPr>
-              <a:spcAft>
-                <a:spcPts val="800"/>
-              </a:spcAft>
-              <a:defRPr sz="1600">
-                <a:solidFill>
-                  <a:srgbClr val="000000"/>
-                </a:solidFill>
-                <a:latin typeface="Times New Roman"/>
-              </a:defRPr>
-            </a:pPr>
-            <a:r>
-              <a:t>- 10KB: Small batch of readings (~50 records) -- typical for periodic sensor uploads.</a:t>
-            </a:r>
-          </a:p>
-          <a:p>
-            <a:pPr>
-              <a:spcAft>
-                <a:spcPts val="800"/>
-              </a:spcAft>
-              <a:defRPr sz="1600">
-                <a:solidFill>
-                  <a:srgbClr val="000000"/>
-                </a:solidFill>
-                <a:latin typeface="Times New Roman"/>
-              </a:defRPr>
-            </a:pPr>
-            <a:r>
-              <a:t>- 100KB: Larger aggregated batch (~500 records) -- typical for edge gateway aggregation.</a:t>
-            </a:r>
-          </a:p>
-          <a:p>
-            <a:pPr>
-              <a:spcAft>
-                <a:spcPts val="800"/>
-              </a:spcAft>
-              <a:defRPr sz="1600">
-                <a:solidFill>
-                  <a:srgbClr val="000000"/>
-                </a:solidFill>
-                <a:latin typeface="Times New Roman"/>
-              </a:defRPr>
-            </a:pPr>
-          </a:p>
-          <a:p>
-            <a:pPr>
-              <a:spcAft>
-                <a:spcPts val="800"/>
-              </a:spcAft>
-              <a:defRPr sz="1600">
-                <a:solidFill>
-                  <a:srgbClr val="000000"/>
-                </a:solidFill>
-                <a:latin typeface="Times New Roman"/>
-              </a:defRPr>
-            </a:pPr>
-            <a:r>
-              <a:t>Generation Strategy:</a:t>
-            </a:r>
-          </a:p>
-          <a:p>
-            <a:pPr>
-              <a:spcAft>
-                <a:spcPts val="800"/>
-              </a:spcAft>
-              <a:defRPr sz="1600">
-                <a:solidFill>
-                  <a:srgbClr val="000000"/>
-                </a:solidFill>
-                <a:latin typeface="Times New Roman"/>
-              </a:defRPr>
-            </a:pPr>
-            <a:r>
-              <a:t>- Records are accumulated until the serialized JSON meets the target byte size.</a:t>
-            </a:r>
-          </a:p>
-          <a:p>
-            <a:pPr>
-              <a:spcAft>
-                <a:spcPts val="800"/>
-              </a:spcAft>
-              <a:defRPr sz="1600">
-                <a:solidFill>
-                  <a:srgbClr val="000000"/>
-                </a:solidFill>
-                <a:latin typeface="Times New Roman"/>
-              </a:defRPr>
-            </a:pPr>
-            <a:r>
-              <a:t>- Data is then padded or trimmed to exactly match the requested size.</a:t>
-            </a:r>
-          </a:p>
-          <a:p>
-            <a:pPr>
-              <a:spcAft>
-                <a:spcPts val="800"/>
-              </a:spcAft>
-              <a:defRPr sz="1600">
-                <a:solidFill>
-                  <a:srgbClr val="000000"/>
-                </a:solidFill>
-                <a:latin typeface="Times New Roman"/>
-              </a:defRPr>
-            </a:pPr>
-            <a:r>
-              <a:t>- The same data is used across all algorithms at each size for fair comparison.</a:t>
-            </a:r>
-          </a:p>
-          <a:p>
-            <a:pPr>
-              <a:spcAft>
-                <a:spcPts val="800"/>
-              </a:spcAft>
-              <a:defRPr sz="1600">
-                <a:solidFill>
-                  <a:srgbClr val="000000"/>
-                </a:solidFill>
-                <a:latin typeface="Times New Roman"/>
-              </a:defRPr>
-            </a:pPr>
-          </a:p>
-          <a:p>
-            <a:pPr>
-              <a:spcAft>
-                <a:spcPts val="800"/>
-              </a:spcAft>
-              <a:defRPr sz="1600">
-                <a:solidFill>
-                  <a:srgbClr val="000000"/>
-                </a:solidFill>
-                <a:latin typeface="Times New Roman"/>
-              </a:defRPr>
-            </a:pPr>
-            <a:r>
-              <a:t>Total Benchmark Matrix: 4 algorithms x 3 sizes x 5 iterations x 2 ops (enc+dec) = 120 runs</a:t>
-            </a:r>
-          </a:p>
-        </p:txBody>
-      </p:sp>
-    </p:spTree>
-  </p:cSld>
-  <p:clrMapOvr>
-    <a:masterClrMapping/>
-  </p:clrMapOvr>
-</p:sld>
-</file>
-
-<file path=ppt/slides/slide7.xml><?xml version="1.0" encoding="utf-8"?>
-<p:sld xmlns:a="http://schemas.openxmlformats.org/drawingml/2006/main" xmlns:p="http://schemas.openxmlformats.org/presentationml/2006/main" xmlns:r="http://schemas.openxmlformats.org/officeDocument/2006/relationships">
-  <p:cSld>
-    <p:bg>
-      <p:bgPr>
-        <a:solidFill>
-          <a:srgbClr val="FFFFFF"/>
-        </a:solidFill>
-        <a:effectLst/>
-      </p:bgPr>
-    </p:bg>
-    <p:spTree>
-      <p:nvGrpSpPr>
-        <p:cNvPr id="1" name=""/>
-        <p:cNvGrpSpPr/>
-        <p:nvPr/>
-      </p:nvGrpSpPr>
-      <p:grpSpPr/>
-      <p:sp>
-        <p:nvSpPr>
-          <p:cNvPr id="2" name="TextBox 1"/>
-          <p:cNvSpPr txBox="1"/>
-          <p:nvPr/>
-        </p:nvSpPr>
-        <p:spPr>
-          <a:xfrm>
-            <a:off x="731520" y="365760"/>
-            <a:ext cx="10698480" cy="640080"/>
-          </a:xfrm>
-          <a:prstGeom prst="rect">
-            <a:avLst/>
-          </a:prstGeom>
-          <a:noFill/>
-        </p:spPr>
-        <p:txBody>
-          <a:bodyPr wrap="square">
-            <a:spAutoFit/>
-          </a:bodyPr>
-          <a:lstStyle/>
-          <a:p>
-            <a:pPr algn="l">
-              <a:defRPr sz="3200" b="1">
-                <a:solidFill>
-                  <a:srgbClr val="1E1E1E"/>
-                </a:solidFill>
-                <a:latin typeface="Times New Roman"/>
-              </a:defRPr>
-            </a:pPr>
-            <a:r>
-              <a:t>System Architecture</a:t>
-            </a:r>
-          </a:p>
-        </p:txBody>
-      </p:sp>
-      <p:sp>
-        <p:nvSpPr>
-          <p:cNvPr id="3" name="Rectangle 2"/>
-          <p:cNvSpPr/>
-          <p:nvPr/>
-        </p:nvSpPr>
-        <p:spPr>
-          <a:xfrm>
-            <a:off x="731520" y="1005840"/>
-            <a:ext cx="10698480" cy="25400"/>
-          </a:xfrm>
-          <a:prstGeom prst="rect">
-            <a:avLst/>
-          </a:prstGeom>
-          <a:solidFill>
-            <a:srgbClr val="2563EB"/>
-          </a:solidFill>
-          <a:ln>
-            <a:noFill/>
-          </a:ln>
-        </p:spPr>
-        <p:style>
-          <a:lnRef idx="1">
-            <a:schemeClr val="accent1"/>
-          </a:lnRef>
-          <a:fillRef idx="3">
-            <a:schemeClr val="accent1"/>
-          </a:fillRef>
-          <a:effectRef idx="2">
-            <a:schemeClr val="accent1"/>
-          </a:effectRef>
-          <a:fontRef idx="minor">
-            <a:schemeClr val="lt1"/>
-          </a:fontRef>
-        </p:style>
-        <p:txBody>
-          <a:bodyPr rtlCol="0" anchor="ctr"/>
-          <a:lstStyle/>
-          <a:p>
-            <a:pPr algn="ctr"/>
+            <a:endParaRPr/>
           </a:p>
         </p:txBody>
       </p:sp>
@@ -9025,7 +9798,7 @@
 </file>
 
 <file path=ppt/slides/slide8.xml><?xml version="1.0" encoding="utf-8"?>
-<p:sld xmlns:a="http://schemas.openxmlformats.org/drawingml/2006/main" xmlns:p="http://schemas.openxmlformats.org/presentationml/2006/main" xmlns:r="http://schemas.openxmlformats.org/officeDocument/2006/relationships">
+<p:sld xmlns:a="http://schemas.openxmlformats.org/drawingml/2006/main" xmlns:r="http://schemas.openxmlformats.org/officeDocument/2006/relationships" xmlns:p="http://schemas.openxmlformats.org/presentationml/2006/main">
   <p:cSld>
     <p:bg>
       <p:bgPr>
@@ -9041,7 +9814,14 @@
         <p:cNvGrpSpPr/>
         <p:nvPr/>
       </p:nvGrpSpPr>
-      <p:grpSpPr/>
+      <p:grpSpPr>
+        <a:xfrm>
+          <a:off x="0" y="0"/>
+          <a:ext cx="0" cy="0"/>
+          <a:chOff x="0" y="0"/>
+          <a:chExt cx="0" cy="0"/>
+        </a:xfrm>
+      </p:grpSpPr>
       <p:sp>
         <p:nvSpPr>
           <p:cNvPr id="2" name="TextBox 1"/>
@@ -9118,6 +9898,7 @@
           <a:lstStyle/>
           <a:p>
             <a:pPr algn="ctr"/>
+            <a:endParaRPr/>
           </a:p>
         </p:txBody>
       </p:sp>
@@ -9170,6 +9951,7 @@
                 <a:latin typeface="Times New Roman"/>
               </a:defRPr>
             </a:pPr>
+            <a:endParaRPr/>
           </a:p>
           <a:p>
             <a:pPr>
@@ -9199,6 +9981,7 @@
                 <a:latin typeface="Times New Roman"/>
               </a:defRPr>
             </a:pPr>
+            <a:endParaRPr/>
           </a:p>
           <a:p>
             <a:pPr>
@@ -9228,6 +10011,7 @@
                 <a:latin typeface="Times New Roman"/>
               </a:defRPr>
             </a:pPr>
+            <a:endParaRPr/>
           </a:p>
           <a:p>
             <a:pPr>
@@ -9257,6 +10041,7 @@
                 <a:latin typeface="Times New Roman"/>
               </a:defRPr>
             </a:pPr>
+            <a:endParaRPr/>
           </a:p>
           <a:p>
             <a:pPr>
@@ -9286,6 +10071,7 @@
                 <a:latin typeface="Times New Roman"/>
               </a:defRPr>
             </a:pPr>
+            <a:endParaRPr/>
           </a:p>
           <a:p>
             <a:pPr>
@@ -9314,7 +10100,7 @@
 </file>
 
 <file path=ppt/slides/slide9.xml><?xml version="1.0" encoding="utf-8"?>
-<p:sld xmlns:a="http://schemas.openxmlformats.org/drawingml/2006/main" xmlns:p="http://schemas.openxmlformats.org/presentationml/2006/main" xmlns:r="http://schemas.openxmlformats.org/officeDocument/2006/relationships">
+<p:sld xmlns:a="http://schemas.openxmlformats.org/drawingml/2006/main" xmlns:r="http://schemas.openxmlformats.org/officeDocument/2006/relationships" xmlns:p="http://schemas.openxmlformats.org/presentationml/2006/main">
   <p:cSld>
     <p:bg>
       <p:bgPr>
@@ -9330,7 +10116,14 @@
         <p:cNvGrpSpPr/>
         <p:nvPr/>
       </p:nvGrpSpPr>
-      <p:grpSpPr/>
+      <p:grpSpPr>
+        <a:xfrm>
+          <a:off x="0" y="0"/>
+          <a:ext cx="0" cy="0"/>
+          <a:chOff x="0" y="0"/>
+          <a:chExt cx="0" cy="0"/>
+        </a:xfrm>
+      </p:grpSpPr>
       <p:sp>
         <p:nvSpPr>
           <p:cNvPr id="2" name="TextBox 1"/>
@@ -9407,6 +10200,7 @@
           <a:lstStyle/>
           <a:p>
             <a:pPr algn="ctr"/>
+            <a:endParaRPr/>
           </a:p>
         </p:txBody>
       </p:sp>
@@ -9420,7 +10214,7 @@
         </p:nvGraphicFramePr>
         <p:xfrm>
           <a:off x="457200" y="1188720"/>
-          <a:ext cx="11247120" cy="2286000"/>
+          <a:ext cx="11247120" cy="2426970"/>
         </p:xfrm>
         <a:graphic>
           <a:graphicData uri="http://schemas.openxmlformats.org/drawingml/2006/table">
@@ -9429,11 +10223,41 @@
                 <a:tableStyleId>{5C22544A-7EE6-4342-B048-85BDC9FD1C3A}</a:tableStyleId>
               </a:tblPr>
               <a:tblGrid>
-                <a:gridCol w="2249424"/>
-                <a:gridCol w="2249424"/>
-                <a:gridCol w="2249424"/>
-                <a:gridCol w="2249424"/>
-                <a:gridCol w="2249424"/>
+                <a:gridCol w="2249424">
+                  <a:extLst>
+                    <a:ext uri="{9D8B030D-6E8A-4147-A177-3AD203B41FA5}">
+                      <a16:colId xmlns:a16="http://schemas.microsoft.com/office/drawing/2014/main" val="20000"/>
+                    </a:ext>
+                  </a:extLst>
+                </a:gridCol>
+                <a:gridCol w="2249424">
+                  <a:extLst>
+                    <a:ext uri="{9D8B030D-6E8A-4147-A177-3AD203B41FA5}">
+                      <a16:colId xmlns:a16="http://schemas.microsoft.com/office/drawing/2014/main" val="20001"/>
+                    </a:ext>
+                  </a:extLst>
+                </a:gridCol>
+                <a:gridCol w="2249424">
+                  <a:extLst>
+                    <a:ext uri="{9D8B030D-6E8A-4147-A177-3AD203B41FA5}">
+                      <a16:colId xmlns:a16="http://schemas.microsoft.com/office/drawing/2014/main" val="20002"/>
+                    </a:ext>
+                  </a:extLst>
+                </a:gridCol>
+                <a:gridCol w="2249424">
+                  <a:extLst>
+                    <a:ext uri="{9D8B030D-6E8A-4147-A177-3AD203B41FA5}">
+                      <a16:colId xmlns:a16="http://schemas.microsoft.com/office/drawing/2014/main" val="20003"/>
+                    </a:ext>
+                  </a:extLst>
+                </a:gridCol>
+                <a:gridCol w="2249424">
+                  <a:extLst>
+                    <a:ext uri="{9D8B030D-6E8A-4147-A177-3AD203B41FA5}">
+                      <a16:colId xmlns:a16="http://schemas.microsoft.com/office/drawing/2014/main" val="20004"/>
+                    </a:ext>
+                  </a:extLst>
+                </a:gridCol>
               </a:tblGrid>
               <a:tr h="285750">
                 <a:tc>
@@ -9556,6 +10380,11 @@
                     </a:solidFill>
                   </a:tcPr>
                 </a:tc>
+                <a:extLst>
+                  <a:ext uri="{0D108BD9-81ED-4DB2-BD59-A6C34878D82A}">
+                    <a16:rowId xmlns:a16="http://schemas.microsoft.com/office/drawing/2014/main" val="10000"/>
+                  </a:ext>
+                </a:extLst>
               </a:tr>
               <a:tr h="285750">
                 <a:tc>
@@ -9663,6 +10492,11 @@
                     </a:solidFill>
                   </a:tcPr>
                 </a:tc>
+                <a:extLst>
+                  <a:ext uri="{0D108BD9-81ED-4DB2-BD59-A6C34878D82A}">
+                    <a16:rowId xmlns:a16="http://schemas.microsoft.com/office/drawing/2014/main" val="10001"/>
+                  </a:ext>
+                </a:extLst>
               </a:tr>
               <a:tr h="285750">
                 <a:tc>
@@ -9750,6 +10584,11 @@
                   </a:txBody>
                   <a:tcPr/>
                 </a:tc>
+                <a:extLst>
+                  <a:ext uri="{0D108BD9-81ED-4DB2-BD59-A6C34878D82A}">
+                    <a16:rowId xmlns:a16="http://schemas.microsoft.com/office/drawing/2014/main" val="10002"/>
+                  </a:ext>
+                </a:extLst>
               </a:tr>
               <a:tr h="285750">
                 <a:tc>
@@ -9857,6 +10696,11 @@
                     </a:solidFill>
                   </a:tcPr>
                 </a:tc>
+                <a:extLst>
+                  <a:ext uri="{0D108BD9-81ED-4DB2-BD59-A6C34878D82A}">
+                    <a16:rowId xmlns:a16="http://schemas.microsoft.com/office/drawing/2014/main" val="10003"/>
+                  </a:ext>
+                </a:extLst>
               </a:tr>
               <a:tr h="285750">
                 <a:tc>
@@ -9944,6 +10788,11 @@
                   </a:txBody>
                   <a:tcPr/>
                 </a:tc>
+                <a:extLst>
+                  <a:ext uri="{0D108BD9-81ED-4DB2-BD59-A6C34878D82A}">
+                    <a16:rowId xmlns:a16="http://schemas.microsoft.com/office/drawing/2014/main" val="10004"/>
+                  </a:ext>
+                </a:extLst>
               </a:tr>
               <a:tr h="285750">
                 <a:tc>
@@ -10051,6 +10900,11 @@
                     </a:solidFill>
                   </a:tcPr>
                 </a:tc>
+                <a:extLst>
+                  <a:ext uri="{0D108BD9-81ED-4DB2-BD59-A6C34878D82A}">
+                    <a16:rowId xmlns:a16="http://schemas.microsoft.com/office/drawing/2014/main" val="10005"/>
+                  </a:ext>
+                </a:extLst>
               </a:tr>
               <a:tr h="285750">
                 <a:tc>
@@ -10138,6 +10992,11 @@
                   </a:txBody>
                   <a:tcPr/>
                 </a:tc>
+                <a:extLst>
+                  <a:ext uri="{0D108BD9-81ED-4DB2-BD59-A6C34878D82A}">
+                    <a16:rowId xmlns:a16="http://schemas.microsoft.com/office/drawing/2014/main" val="10006"/>
+                  </a:ext>
+                </a:extLst>
               </a:tr>
               <a:tr h="285750">
                 <a:tc>
@@ -10245,6 +11104,11 @@
                     </a:solidFill>
                   </a:tcPr>
                 </a:tc>
+                <a:extLst>
+                  <a:ext uri="{0D108BD9-81ED-4DB2-BD59-A6C34878D82A}">
+                    <a16:rowId xmlns:a16="http://schemas.microsoft.com/office/drawing/2014/main" val="10007"/>
+                  </a:ext>
+                </a:extLst>
               </a:tr>
             </a:tbl>
           </a:graphicData>

--- a/Encryption_Edge_Devices_Presentation.pptx
+++ b/Encryption_Edge_Devices_Presentation.pptx
@@ -11,20 +11,19 @@
     <p:sldId id="259" r:id="rId5"/>
     <p:sldId id="260" r:id="rId6"/>
     <p:sldId id="261" r:id="rId7"/>
-    <p:sldId id="262" r:id="rId8"/>
-    <p:sldId id="263" r:id="rId9"/>
-    <p:sldId id="264" r:id="rId10"/>
-    <p:sldId id="265" r:id="rId11"/>
-    <p:sldId id="266" r:id="rId12"/>
-    <p:sldId id="267" r:id="rId13"/>
-    <p:sldId id="268" r:id="rId14"/>
-    <p:sldId id="269" r:id="rId15"/>
-    <p:sldId id="270" r:id="rId16"/>
+    <p:sldId id="270" r:id="rId8"/>
+    <p:sldId id="262" r:id="rId9"/>
+    <p:sldId id="263" r:id="rId10"/>
+    <p:sldId id="264" r:id="rId11"/>
+    <p:sldId id="265" r:id="rId12"/>
+    <p:sldId id="266" r:id="rId13"/>
+    <p:sldId id="267" r:id="rId14"/>
+    <p:sldId id="268" r:id="rId15"/>
+    <p:sldId id="269" r:id="rId16"/>
     <p:sldId id="271" r:id="rId17"/>
     <p:sldId id="272" r:id="rId18"/>
     <p:sldId id="273" r:id="rId19"/>
-    <p:sldId id="274" r:id="rId20"/>
-    <p:sldId id="275" r:id="rId21"/>
+    <p:sldId id="275" r:id="rId20"/>
   </p:sldIdLst>
   <p:sldSz cx="12192000" cy="6858000"/>
   <p:notesSz cx="6858000" cy="9144000"/>
@@ -142,6 +141,14 @@
 </p:presentation>
 </file>
 
+<file path=ppt/revisionInfo.xml><?xml version="1.0" encoding="utf-8"?>
+<p1510:revInfo xmlns:a="http://schemas.openxmlformats.org/drawingml/2006/main" xmlns:r="http://schemas.openxmlformats.org/officeDocument/2006/relationships" xmlns:p1510="http://schemas.microsoft.com/office/powerpoint/2015/10/main">
+  <p1510:revLst>
+    <p1510:client id="{D8178E46-4AE9-E0F2-C097-3F2FD5C192A0}" v="504" dt="2026-04-28T04:11:43.678"/>
+  </p1510:revLst>
+</p1510:revInfo>
+</file>
+
 <file path=ppt/slideLayouts/slideLayout1.xml><?xml version="1.0" encoding="utf-8"?>
 <p:sldLayout xmlns:a="http://schemas.openxmlformats.org/drawingml/2006/main" xmlns:r="http://schemas.openxmlformats.org/officeDocument/2006/relationships" xmlns:p="http://schemas.openxmlformats.org/presentationml/2006/main" type="title" preserve="1">
   <p:cSld name="Title Slide">
@@ -321,7 +328,7 @@
           <a:p>
             <a:fld id="{5BCAD085-E8A6-8845-BD4E-CB4CCA059FC4}" type="datetimeFigureOut">
               <a:rPr lang="en-US" smtClean="0"/>
-              <a:t>4/28/2026</a:t>
+              <a:t>4/27/2026</a:t>
             </a:fld>
             <a:endParaRPr lang="en-US"/>
           </a:p>
@@ -489,7 +496,7 @@
           <a:p>
             <a:fld id="{5BCAD085-E8A6-8845-BD4E-CB4CCA059FC4}" type="datetimeFigureOut">
               <a:rPr lang="en-US" smtClean="0"/>
-              <a:t>4/28/2026</a:t>
+              <a:t>4/27/2026</a:t>
             </a:fld>
             <a:endParaRPr lang="en-US"/>
           </a:p>
@@ -667,7 +674,7 @@
           <a:p>
             <a:fld id="{5BCAD085-E8A6-8845-BD4E-CB4CCA059FC4}" type="datetimeFigureOut">
               <a:rPr lang="en-US" smtClean="0"/>
-              <a:t>4/28/2026</a:t>
+              <a:t>4/27/2026</a:t>
             </a:fld>
             <a:endParaRPr lang="en-US"/>
           </a:p>
@@ -835,7 +842,7 @@
           <a:p>
             <a:fld id="{5BCAD085-E8A6-8845-BD4E-CB4CCA059FC4}" type="datetimeFigureOut">
               <a:rPr lang="en-US" smtClean="0"/>
-              <a:t>4/28/2026</a:t>
+              <a:t>4/27/2026</a:t>
             </a:fld>
             <a:endParaRPr lang="en-US"/>
           </a:p>
@@ -1080,7 +1087,7 @@
           <a:p>
             <a:fld id="{5BCAD085-E8A6-8845-BD4E-CB4CCA059FC4}" type="datetimeFigureOut">
               <a:rPr lang="en-US" smtClean="0"/>
-              <a:t>4/28/2026</a:t>
+              <a:t>4/27/2026</a:t>
             </a:fld>
             <a:endParaRPr lang="en-US"/>
           </a:p>
@@ -1365,7 +1372,7 @@
           <a:p>
             <a:fld id="{5BCAD085-E8A6-8845-BD4E-CB4CCA059FC4}" type="datetimeFigureOut">
               <a:rPr lang="en-US" smtClean="0"/>
-              <a:t>4/28/2026</a:t>
+              <a:t>4/27/2026</a:t>
             </a:fld>
             <a:endParaRPr lang="en-US"/>
           </a:p>
@@ -1784,7 +1791,7 @@
           <a:p>
             <a:fld id="{5BCAD085-E8A6-8845-BD4E-CB4CCA059FC4}" type="datetimeFigureOut">
               <a:rPr lang="en-US" smtClean="0"/>
-              <a:t>4/28/2026</a:t>
+              <a:t>4/27/2026</a:t>
             </a:fld>
             <a:endParaRPr lang="en-US"/>
           </a:p>
@@ -1901,7 +1908,7 @@
           <a:p>
             <a:fld id="{5BCAD085-E8A6-8845-BD4E-CB4CCA059FC4}" type="datetimeFigureOut">
               <a:rPr lang="en-US" smtClean="0"/>
-              <a:t>4/28/2026</a:t>
+              <a:t>4/27/2026</a:t>
             </a:fld>
             <a:endParaRPr lang="en-US"/>
           </a:p>
@@ -1996,7 +2003,7 @@
           <a:p>
             <a:fld id="{5BCAD085-E8A6-8845-BD4E-CB4CCA059FC4}" type="datetimeFigureOut">
               <a:rPr lang="en-US" smtClean="0"/>
-              <a:t>4/28/2026</a:t>
+              <a:t>4/27/2026</a:t>
             </a:fld>
             <a:endParaRPr lang="en-US"/>
           </a:p>
@@ -2271,7 +2278,7 @@
           <a:p>
             <a:fld id="{5BCAD085-E8A6-8845-BD4E-CB4CCA059FC4}" type="datetimeFigureOut">
               <a:rPr lang="en-US" smtClean="0"/>
-              <a:t>4/28/2026</a:t>
+              <a:t>4/27/2026</a:t>
             </a:fld>
             <a:endParaRPr lang="en-US"/>
           </a:p>
@@ -2523,7 +2530,7 @@
           <a:p>
             <a:fld id="{5BCAD085-E8A6-8845-BD4E-CB4CCA059FC4}" type="datetimeFigureOut">
               <a:rPr lang="en-US" smtClean="0"/>
-              <a:t>4/28/2026</a:t>
+              <a:t>4/27/2026</a:t>
             </a:fld>
             <a:endParaRPr lang="en-US"/>
           </a:p>
@@ -2734,7 +2741,7 @@
           <a:p>
             <a:fld id="{5BCAD085-E8A6-8845-BD4E-CB4CCA059FC4}" type="datetimeFigureOut">
               <a:rPr lang="en-US" smtClean="0"/>
-              <a:t>4/28/2026</a:t>
+              <a:t>4/27/2026</a:t>
             </a:fld>
             <a:endParaRPr lang="en-US"/>
           </a:p>
@@ -3125,7 +3132,7 @@
         </p:nvSpPr>
         <p:spPr>
           <a:xfrm>
-            <a:off x="731520" y="2560320"/>
+            <a:off x="731520" y="1717638"/>
             <a:ext cx="10698480" cy="25400"/>
           </a:xfrm>
           <a:prstGeom prst="rect">
@@ -3169,7 +3176,7 @@
         </p:nvSpPr>
         <p:spPr>
           <a:xfrm>
-            <a:off x="731520" y="914400"/>
+            <a:off x="731520" y="466165"/>
             <a:ext cx="10698480" cy="1371600"/>
           </a:xfrm>
           <a:prstGeom prst="rect">
@@ -3209,7 +3216,7 @@
         </p:nvSpPr>
         <p:spPr>
           <a:xfrm>
-            <a:off x="731520" y="2926080"/>
+            <a:off x="623944" y="1841351"/>
             <a:ext cx="10698480" cy="548640"/>
           </a:xfrm>
           <a:prstGeom prst="rect">
@@ -3239,14 +3246,20 @@
       </p:sp>
       <p:sp>
         <p:nvSpPr>
-          <p:cNvPr id="5" name="TextBox 4"/>
+          <p:cNvPr id="7" name="TextBox 6">
+            <a:extLst>
+              <a:ext uri="{FF2B5EF4-FFF2-40B4-BE49-F238E27FC236}">
+                <a16:creationId xmlns:a16="http://schemas.microsoft.com/office/drawing/2014/main" id="{FB4C3961-57C9-72F6-0CF3-D73489DD4BF9}"/>
+              </a:ext>
+            </a:extLst>
+          </p:cNvPr>
           <p:cNvSpPr txBox="1"/>
           <p:nvPr/>
         </p:nvSpPr>
         <p:spPr>
           <a:xfrm>
-            <a:off x="731520" y="4114800"/>
-            <a:ext cx="10698480" cy="457200"/>
+            <a:off x="2043444" y="-36182"/>
+            <a:ext cx="7572944" cy="1009725"/>
           </a:xfrm>
           <a:prstGeom prst="rect">
             <a:avLst/>
@@ -3254,22 +3267,1698 @@
           <a:noFill/>
         </p:spPr>
         <p:txBody>
-          <a:bodyPr wrap="square">
+          <a:bodyPr rot="0" spcFirstLastPara="0" vertOverflow="overflow" horzOverflow="overflow" vert="horz" wrap="square" lIns="91440" tIns="45720" rIns="91440" bIns="45720" numCol="1" spcCol="0" rtlCol="0" fromWordArt="0" anchor="t" anchorCtr="0" forceAA="0" compatLnSpc="1">
+            <a:prstTxWarp prst="textNoShape">
+              <a:avLst/>
+            </a:prstTxWarp>
             <a:spAutoFit/>
           </a:bodyPr>
           <a:lstStyle/>
           <a:p>
-            <a:pPr algn="ctr">
-              <a:defRPr sz="1800" b="0">
-                <a:solidFill>
-                  <a:srgbClr val="646464"/>
-                </a:solidFill>
-                <a:latin typeface="Times New Roman"/>
-              </a:defRPr>
-            </a:pPr>
-            <a:r>
-              <a:t>Distributed Systems - Final Project Presentation</a:t>
-            </a:r>
+            <a:pPr algn="ctr"/>
+            <a:r>
+              <a:rPr lang="en-IN" sz="2800" b="1">
+                <a:latin typeface="Times New Roman"/>
+                <a:cs typeface="Times New Roman"/>
+              </a:rPr>
+              <a:t>23CSE312 Distributed Systems </a:t>
+            </a:r>
+            <a:endParaRPr lang="en-GB" sz="2800" b="1">
+              <a:latin typeface="Times New Roman"/>
+              <a:cs typeface="Times New Roman"/>
+            </a:endParaRPr>
+          </a:p>
+          <a:p>
+            <a:pPr algn="ctr"/>
+            <a:endParaRPr lang="en-GB" sz="1400" b="1" dirty="0">
+              <a:latin typeface="Times New Roman"/>
+              <a:cs typeface="Times New Roman"/>
+            </a:endParaRPr>
+          </a:p>
+          <a:p>
+            <a:pPr algn="ctr"/>
+            <a:endParaRPr lang="en-US" b="1" dirty="0">
+              <a:ea typeface="Calibri"/>
+              <a:cs typeface="Calibri"/>
+            </a:endParaRPr>
+          </a:p>
+        </p:txBody>
+      </p:sp>
+      <p:graphicFrame>
+        <p:nvGraphicFramePr>
+          <p:cNvPr id="9" name="Table 8">
+            <a:extLst>
+              <a:ext uri="{FF2B5EF4-FFF2-40B4-BE49-F238E27FC236}">
+                <a16:creationId xmlns:a16="http://schemas.microsoft.com/office/drawing/2014/main" id="{DB2AD620-20B4-C065-FB20-9F44A703D627}"/>
+              </a:ext>
+            </a:extLst>
+          </p:cNvPr>
+          <p:cNvGraphicFramePr>
+            <a:graphicFrameLocks noGrp="1"/>
+          </p:cNvGraphicFramePr>
+          <p:nvPr>
+            <p:extLst>
+              <p:ext uri="{D42A27DB-BD31-4B8C-83A1-F6EECF244321}">
+                <p14:modId xmlns:p14="http://schemas.microsoft.com/office/powerpoint/2010/main" val="1992866827"/>
+              </p:ext>
+            </p:extLst>
+          </p:nvPr>
+        </p:nvGraphicFramePr>
+        <p:xfrm>
+          <a:off x="1810870" y="2617694"/>
+          <a:ext cx="8225531" cy="2326934"/>
+        </p:xfrm>
+        <a:graphic>
+          <a:graphicData uri="http://schemas.openxmlformats.org/drawingml/2006/table">
+            <a:tbl>
+              <a:tblPr bandRow="1">
+                <a:tableStyleId>{5C22544A-7EE6-4342-B048-85BDC9FD1C3A}</a:tableStyleId>
+              </a:tblPr>
+              <a:tblGrid>
+                <a:gridCol w="793161">
+                  <a:extLst>
+                    <a:ext uri="{9D8B030D-6E8A-4147-A177-3AD203B41FA5}">
+                      <a16:colId xmlns:a16="http://schemas.microsoft.com/office/drawing/2014/main" val="2418392335"/>
+                    </a:ext>
+                  </a:extLst>
+                </a:gridCol>
+                <a:gridCol w="2332196">
+                  <a:extLst>
+                    <a:ext uri="{9D8B030D-6E8A-4147-A177-3AD203B41FA5}">
+                      <a16:colId xmlns:a16="http://schemas.microsoft.com/office/drawing/2014/main" val="938963659"/>
+                    </a:ext>
+                  </a:extLst>
+                </a:gridCol>
+                <a:gridCol w="3866338">
+                  <a:extLst>
+                    <a:ext uri="{9D8B030D-6E8A-4147-A177-3AD203B41FA5}">
+                      <a16:colId xmlns:a16="http://schemas.microsoft.com/office/drawing/2014/main" val="3098588841"/>
+                    </a:ext>
+                  </a:extLst>
+                </a:gridCol>
+                <a:gridCol w="1233836">
+                  <a:extLst>
+                    <a:ext uri="{9D8B030D-6E8A-4147-A177-3AD203B41FA5}">
+                      <a16:colId xmlns:a16="http://schemas.microsoft.com/office/drawing/2014/main" val="4081599170"/>
+                    </a:ext>
+                  </a:extLst>
+                </a:gridCol>
+              </a:tblGrid>
+              <a:tr h="730913">
+                <a:tc>
+                  <a:txBody>
+                    <a:bodyPr/>
+                    <a:lstStyle/>
+                    <a:p>
+                      <a:pPr algn="ctr" rtl="0" fontAlgn="base">
+                        <a:lnSpc>
+                          <a:spcPts val="1350"/>
+                        </a:lnSpc>
+                        <a:buNone/>
+                      </a:pPr>
+                      <a:r>
+                        <a:rPr lang="en-US" sz="1600" b="1" i="0" u="none" strike="noStrike" err="1">
+                          <a:solidFill>
+                            <a:srgbClr val="000000"/>
+                          </a:solidFill>
+                          <a:effectLst/>
+                          <a:latin typeface="Times New Roman"/>
+                        </a:rPr>
+                        <a:t>S.No</a:t>
+                      </a:r>
+                      <a:endParaRPr lang="en-US" b="0" i="0" err="1">
+                        <a:solidFill>
+                          <a:srgbClr val="000000"/>
+                        </a:solidFill>
+                        <a:effectLst/>
+                        <a:latin typeface="Times New Roman"/>
+                      </a:endParaRPr>
+                    </a:p>
+                  </a:txBody>
+                  <a:tcPr anchor="ctr">
+                    <a:lnL w="9525" cap="flat" cmpd="sng" algn="ctr">
+                      <a:solidFill>
+                        <a:srgbClr val="000000"/>
+                      </a:solidFill>
+                      <a:prstDash val="solid"/>
+                      <a:round/>
+                      <a:headEnd type="none" w="med" len="med"/>
+                      <a:tailEnd type="none" w="med" len="med"/>
+                    </a:lnL>
+                    <a:lnR w="9525" cap="flat" cmpd="sng" algn="ctr">
+                      <a:solidFill>
+                        <a:srgbClr val="000000"/>
+                      </a:solidFill>
+                      <a:prstDash val="solid"/>
+                      <a:round/>
+                      <a:headEnd type="none" w="med" len="med"/>
+                      <a:tailEnd type="none" w="med" len="med"/>
+                    </a:lnR>
+                    <a:lnT w="9525" cap="flat" cmpd="sng" algn="ctr">
+                      <a:solidFill>
+                        <a:srgbClr val="000000"/>
+                      </a:solidFill>
+                      <a:prstDash val="solid"/>
+                      <a:round/>
+                      <a:headEnd type="none" w="med" len="med"/>
+                      <a:tailEnd type="none" w="med" len="med"/>
+                    </a:lnT>
+                    <a:lnB w="9525" cap="flat" cmpd="sng" algn="ctr">
+                      <a:solidFill>
+                        <a:srgbClr val="000000"/>
+                      </a:solidFill>
+                      <a:prstDash val="solid"/>
+                      <a:round/>
+                      <a:headEnd type="none" w="med" len="med"/>
+                      <a:tailEnd type="none" w="med" len="med"/>
+                    </a:lnB>
+                    <a:noFill/>
+                  </a:tcPr>
+                </a:tc>
+                <a:tc>
+                  <a:txBody>
+                    <a:bodyPr/>
+                    <a:lstStyle/>
+                    <a:p>
+                      <a:pPr algn="ctr" rtl="0" fontAlgn="base">
+                        <a:lnSpc>
+                          <a:spcPts val="1350"/>
+                        </a:lnSpc>
+                        <a:buNone/>
+                      </a:pPr>
+                      <a:r>
+                        <a:rPr lang="en-US" sz="1600" b="1" i="0" u="none" strike="noStrike" dirty="0" err="1">
+                          <a:solidFill>
+                            <a:srgbClr val="000000"/>
+                          </a:solidFill>
+                          <a:effectLst/>
+                          <a:latin typeface="Times New Roman"/>
+                        </a:rPr>
+                        <a:t>Reg.No</a:t>
+                      </a:r>
+                      <a:endParaRPr lang="en-US" b="0" i="0" dirty="0" err="1">
+                        <a:solidFill>
+                          <a:srgbClr val="000000"/>
+                        </a:solidFill>
+                        <a:effectLst/>
+                        <a:latin typeface="Times New Roman"/>
+                      </a:endParaRPr>
+                    </a:p>
+                  </a:txBody>
+                  <a:tcPr anchor="ctr">
+                    <a:lnL w="9525" cap="flat" cmpd="sng" algn="ctr">
+                      <a:solidFill>
+                        <a:srgbClr val="000000"/>
+                      </a:solidFill>
+                      <a:prstDash val="solid"/>
+                      <a:round/>
+                      <a:headEnd type="none" w="med" len="med"/>
+                      <a:tailEnd type="none" w="med" len="med"/>
+                    </a:lnL>
+                    <a:lnR w="9525" cap="flat" cmpd="sng" algn="ctr">
+                      <a:solidFill>
+                        <a:srgbClr val="000000"/>
+                      </a:solidFill>
+                      <a:prstDash val="solid"/>
+                      <a:round/>
+                      <a:headEnd type="none" w="med" len="med"/>
+                      <a:tailEnd type="none" w="med" len="med"/>
+                    </a:lnR>
+                    <a:lnT w="9525" cap="flat" cmpd="sng" algn="ctr">
+                      <a:solidFill>
+                        <a:srgbClr val="000000"/>
+                      </a:solidFill>
+                      <a:prstDash val="solid"/>
+                      <a:round/>
+                      <a:headEnd type="none" w="med" len="med"/>
+                      <a:tailEnd type="none" w="med" len="med"/>
+                    </a:lnT>
+                    <a:lnB w="9525" cap="flat" cmpd="sng" algn="ctr">
+                      <a:solidFill>
+                        <a:srgbClr val="000000"/>
+                      </a:solidFill>
+                      <a:prstDash val="solid"/>
+                      <a:round/>
+                      <a:headEnd type="none" w="med" len="med"/>
+                      <a:tailEnd type="none" w="med" len="med"/>
+                    </a:lnB>
+                    <a:noFill/>
+                  </a:tcPr>
+                </a:tc>
+                <a:tc>
+                  <a:txBody>
+                    <a:bodyPr/>
+                    <a:lstStyle/>
+                    <a:p>
+                      <a:pPr algn="ctr" rtl="0" fontAlgn="base">
+                        <a:lnSpc>
+                          <a:spcPts val="1350"/>
+                        </a:lnSpc>
+                        <a:buNone/>
+                      </a:pPr>
+                      <a:r>
+                        <a:rPr lang="en-US" sz="1600" b="1" i="0" u="none" strike="noStrike">
+                          <a:solidFill>
+                            <a:srgbClr val="000000"/>
+                          </a:solidFill>
+                          <a:effectLst/>
+                          <a:latin typeface="Times New Roman" panose="02020603050405020304" pitchFamily="18" charset="0"/>
+                        </a:rPr>
+                        <a:t>Name of the Student</a:t>
+                      </a:r>
+                      <a:endParaRPr lang="en-US" b="0" i="0">
+                        <a:solidFill>
+                          <a:srgbClr val="000000"/>
+                        </a:solidFill>
+                        <a:effectLst/>
+                      </a:endParaRPr>
+                    </a:p>
+                  </a:txBody>
+                  <a:tcPr anchor="ctr">
+                    <a:lnL w="9525" cap="flat" cmpd="sng" algn="ctr">
+                      <a:solidFill>
+                        <a:srgbClr val="000000"/>
+                      </a:solidFill>
+                      <a:prstDash val="solid"/>
+                      <a:round/>
+                      <a:headEnd type="none" w="med" len="med"/>
+                      <a:tailEnd type="none" w="med" len="med"/>
+                    </a:lnL>
+                    <a:lnR w="9525" cap="flat" cmpd="sng" algn="ctr">
+                      <a:solidFill>
+                        <a:srgbClr val="000000"/>
+                      </a:solidFill>
+                      <a:prstDash val="solid"/>
+                      <a:round/>
+                      <a:headEnd type="none" w="med" len="med"/>
+                      <a:tailEnd type="none" w="med" len="med"/>
+                    </a:lnR>
+                    <a:lnT w="9525" cap="flat" cmpd="sng" algn="ctr">
+                      <a:solidFill>
+                        <a:srgbClr val="000000"/>
+                      </a:solidFill>
+                      <a:prstDash val="solid"/>
+                      <a:round/>
+                      <a:headEnd type="none" w="med" len="med"/>
+                      <a:tailEnd type="none" w="med" len="med"/>
+                    </a:lnT>
+                    <a:lnB w="9525" cap="flat" cmpd="sng" algn="ctr">
+                      <a:solidFill>
+                        <a:srgbClr val="000000"/>
+                      </a:solidFill>
+                      <a:prstDash val="solid"/>
+                      <a:round/>
+                      <a:headEnd type="none" w="med" len="med"/>
+                      <a:tailEnd type="none" w="med" len="med"/>
+                    </a:lnB>
+                    <a:noFill/>
+                  </a:tcPr>
+                </a:tc>
+                <a:tc>
+                  <a:txBody>
+                    <a:bodyPr/>
+                    <a:lstStyle/>
+                    <a:p>
+                      <a:pPr algn="ctr" rtl="0" fontAlgn="base">
+                        <a:lnSpc>
+                          <a:spcPts val="1350"/>
+                        </a:lnSpc>
+                        <a:buNone/>
+                      </a:pPr>
+                      <a:r>
+                        <a:rPr lang="en-US" sz="1600" b="1" i="0" u="none" strike="noStrike">
+                          <a:solidFill>
+                            <a:srgbClr val="000000"/>
+                          </a:solidFill>
+                          <a:effectLst/>
+                          <a:latin typeface="Times New Roman" panose="02020603050405020304" pitchFamily="18" charset="0"/>
+                        </a:rPr>
+                        <a:t>Section</a:t>
+                      </a:r>
+                      <a:endParaRPr lang="en-US" b="0" i="0">
+                        <a:solidFill>
+                          <a:srgbClr val="000000"/>
+                        </a:solidFill>
+                        <a:effectLst/>
+                      </a:endParaRPr>
+                    </a:p>
+                  </a:txBody>
+                  <a:tcPr anchor="ctr">
+                    <a:lnL w="9525" cap="flat" cmpd="sng" algn="ctr">
+                      <a:solidFill>
+                        <a:srgbClr val="000000"/>
+                      </a:solidFill>
+                      <a:prstDash val="solid"/>
+                      <a:round/>
+                      <a:headEnd type="none" w="med" len="med"/>
+                      <a:tailEnd type="none" w="med" len="med"/>
+                    </a:lnL>
+                    <a:lnR w="9525" cap="flat" cmpd="sng" algn="ctr">
+                      <a:solidFill>
+                        <a:srgbClr val="000000"/>
+                      </a:solidFill>
+                      <a:prstDash val="solid"/>
+                      <a:round/>
+                      <a:headEnd type="none" w="med" len="med"/>
+                      <a:tailEnd type="none" w="med" len="med"/>
+                    </a:lnR>
+                    <a:lnT w="9525" cap="flat" cmpd="sng" algn="ctr">
+                      <a:solidFill>
+                        <a:srgbClr val="000000"/>
+                      </a:solidFill>
+                      <a:prstDash val="solid"/>
+                      <a:round/>
+                      <a:headEnd type="none" w="med" len="med"/>
+                      <a:tailEnd type="none" w="med" len="med"/>
+                    </a:lnT>
+                    <a:lnB w="9525" cap="flat" cmpd="sng" algn="ctr">
+                      <a:solidFill>
+                        <a:srgbClr val="000000"/>
+                      </a:solidFill>
+                      <a:prstDash val="solid"/>
+                      <a:round/>
+                      <a:headEnd type="none" w="med" len="med"/>
+                      <a:tailEnd type="none" w="med" len="med"/>
+                    </a:lnB>
+                    <a:noFill/>
+                  </a:tcPr>
+                </a:tc>
+                <a:extLst>
+                  <a:ext uri="{0D108BD9-81ED-4DB2-BD59-A6C34878D82A}">
+                    <a16:rowId xmlns:a16="http://schemas.microsoft.com/office/drawing/2014/main" val="1431856592"/>
+                  </a:ext>
+                </a:extLst>
+              </a:tr>
+              <a:tr h="385430">
+                <a:tc>
+                  <a:txBody>
+                    <a:bodyPr/>
+                    <a:lstStyle/>
+                    <a:p>
+                      <a:pPr algn="ctr" rtl="0" fontAlgn="base">
+                        <a:lnSpc>
+                          <a:spcPts val="1200"/>
+                        </a:lnSpc>
+                        <a:buNone/>
+                      </a:pPr>
+                      <a:r>
+                        <a:rPr lang="en-GB" sz="1400" b="1" i="0" u="none" strike="noStrike">
+                          <a:solidFill>
+                            <a:srgbClr val="000000"/>
+                          </a:solidFill>
+                          <a:effectLst/>
+                          <a:latin typeface="Times New Roman" panose="02020603050405020304" pitchFamily="18" charset="0"/>
+                        </a:rPr>
+                        <a:t>1</a:t>
+                      </a:r>
+                      <a:endParaRPr lang="en-US" b="0" i="0">
+                        <a:solidFill>
+                          <a:srgbClr val="000000"/>
+                        </a:solidFill>
+                        <a:effectLst/>
+                      </a:endParaRPr>
+                    </a:p>
+                  </a:txBody>
+                  <a:tcPr>
+                    <a:lnL w="9525" cap="flat" cmpd="sng" algn="ctr">
+                      <a:solidFill>
+                        <a:srgbClr val="000000"/>
+                      </a:solidFill>
+                      <a:prstDash val="solid"/>
+                      <a:round/>
+                      <a:headEnd type="none" w="med" len="med"/>
+                      <a:tailEnd type="none" w="med" len="med"/>
+                    </a:lnL>
+                    <a:lnR w="9525" cap="flat" cmpd="sng" algn="ctr">
+                      <a:solidFill>
+                        <a:srgbClr val="000000"/>
+                      </a:solidFill>
+                      <a:prstDash val="solid"/>
+                      <a:round/>
+                      <a:headEnd type="none" w="med" len="med"/>
+                      <a:tailEnd type="none" w="med" len="med"/>
+                    </a:lnR>
+                    <a:lnT w="9525" cap="flat" cmpd="sng" algn="ctr">
+                      <a:solidFill>
+                        <a:srgbClr val="000000"/>
+                      </a:solidFill>
+                      <a:prstDash val="solid"/>
+                      <a:round/>
+                      <a:headEnd type="none" w="med" len="med"/>
+                      <a:tailEnd type="none" w="med" len="med"/>
+                    </a:lnT>
+                    <a:lnB w="9525" cap="flat" cmpd="sng" algn="ctr">
+                      <a:solidFill>
+                        <a:srgbClr val="000000"/>
+                      </a:solidFill>
+                      <a:prstDash val="solid"/>
+                      <a:round/>
+                      <a:headEnd type="none" w="med" len="med"/>
+                      <a:tailEnd type="none" w="med" len="med"/>
+                    </a:lnB>
+                    <a:noFill/>
+                  </a:tcPr>
+                </a:tc>
+                <a:tc>
+                  <a:txBody>
+                    <a:bodyPr/>
+                    <a:lstStyle/>
+                    <a:p>
+                      <a:pPr algn="ctr" rtl="0" fontAlgn="base">
+                        <a:lnSpc>
+                          <a:spcPts val="1200"/>
+                        </a:lnSpc>
+                        <a:buNone/>
+                      </a:pPr>
+                      <a:r>
+                        <a:rPr lang="en-US" sz="1400" b="1" i="0" u="none" strike="noStrike">
+                          <a:solidFill>
+                            <a:srgbClr val="000000"/>
+                          </a:solidFill>
+                          <a:effectLst/>
+                          <a:latin typeface="Times New Roman"/>
+                        </a:rPr>
+                        <a:t>BL.EN.U4CSE23211</a:t>
+                      </a:r>
+                      <a:endParaRPr lang="en-US" b="0" i="0">
+                        <a:solidFill>
+                          <a:srgbClr val="000000"/>
+                        </a:solidFill>
+                        <a:effectLst/>
+                      </a:endParaRPr>
+                    </a:p>
+                  </a:txBody>
+                  <a:tcPr>
+                    <a:lnL w="9525" cap="flat" cmpd="sng" algn="ctr">
+                      <a:solidFill>
+                        <a:srgbClr val="000000"/>
+                      </a:solidFill>
+                      <a:prstDash val="solid"/>
+                      <a:round/>
+                      <a:headEnd type="none" w="med" len="med"/>
+                      <a:tailEnd type="none" w="med" len="med"/>
+                    </a:lnL>
+                    <a:lnR w="9525" cap="flat" cmpd="sng" algn="ctr">
+                      <a:solidFill>
+                        <a:srgbClr val="000000"/>
+                      </a:solidFill>
+                      <a:prstDash val="solid"/>
+                      <a:round/>
+                      <a:headEnd type="none" w="med" len="med"/>
+                      <a:tailEnd type="none" w="med" len="med"/>
+                    </a:lnR>
+                    <a:lnT w="9525" cap="flat" cmpd="sng" algn="ctr">
+                      <a:solidFill>
+                        <a:srgbClr val="000000"/>
+                      </a:solidFill>
+                      <a:prstDash val="solid"/>
+                      <a:round/>
+                      <a:headEnd type="none" w="med" len="med"/>
+                      <a:tailEnd type="none" w="med" len="med"/>
+                    </a:lnT>
+                    <a:lnB w="9525" cap="flat" cmpd="sng" algn="ctr">
+                      <a:solidFill>
+                        <a:srgbClr val="000000"/>
+                      </a:solidFill>
+                      <a:prstDash val="solid"/>
+                      <a:round/>
+                      <a:headEnd type="none" w="med" len="med"/>
+                      <a:tailEnd type="none" w="med" len="med"/>
+                    </a:lnB>
+                    <a:noFill/>
+                  </a:tcPr>
+                </a:tc>
+                <a:tc>
+                  <a:txBody>
+                    <a:bodyPr/>
+                    <a:lstStyle/>
+                    <a:p>
+                      <a:pPr algn="ctr" rtl="0" fontAlgn="base">
+                        <a:lnSpc>
+                          <a:spcPts val="1200"/>
+                        </a:lnSpc>
+                        <a:buNone/>
+                      </a:pPr>
+                      <a:r>
+                        <a:rPr lang="en-US" sz="1400" b="1" i="0" u="none" strike="noStrike">
+                          <a:solidFill>
+                            <a:srgbClr val="000000"/>
+                          </a:solidFill>
+                          <a:effectLst/>
+                          <a:latin typeface="Times New Roman"/>
+                        </a:rPr>
+                        <a:t>Bandaru Ram Jayadeep</a:t>
+                      </a:r>
+                      <a:endParaRPr lang="en-US" sz="1400" b="1" i="0" u="none" strike="noStrike" dirty="0">
+                        <a:solidFill>
+                          <a:srgbClr val="000000"/>
+                        </a:solidFill>
+                        <a:effectLst/>
+                        <a:latin typeface="Times New Roman"/>
+                      </a:endParaRPr>
+                    </a:p>
+                  </a:txBody>
+                  <a:tcPr>
+                    <a:lnL w="9525" cap="flat" cmpd="sng" algn="ctr">
+                      <a:solidFill>
+                        <a:srgbClr val="000000"/>
+                      </a:solidFill>
+                      <a:prstDash val="solid"/>
+                      <a:round/>
+                      <a:headEnd type="none" w="med" len="med"/>
+                      <a:tailEnd type="none" w="med" len="med"/>
+                    </a:lnL>
+                    <a:lnR w="9525" cap="flat" cmpd="sng" algn="ctr">
+                      <a:solidFill>
+                        <a:srgbClr val="000000"/>
+                      </a:solidFill>
+                      <a:prstDash val="solid"/>
+                      <a:round/>
+                      <a:headEnd type="none" w="med" len="med"/>
+                      <a:tailEnd type="none" w="med" len="med"/>
+                    </a:lnR>
+                    <a:lnT w="9525" cap="flat" cmpd="sng" algn="ctr">
+                      <a:solidFill>
+                        <a:srgbClr val="000000"/>
+                      </a:solidFill>
+                      <a:prstDash val="solid"/>
+                      <a:round/>
+                      <a:headEnd type="none" w="med" len="med"/>
+                      <a:tailEnd type="none" w="med" len="med"/>
+                    </a:lnT>
+                    <a:lnB w="9525" cap="flat" cmpd="sng" algn="ctr">
+                      <a:solidFill>
+                        <a:srgbClr val="000000"/>
+                      </a:solidFill>
+                      <a:prstDash val="solid"/>
+                      <a:round/>
+                      <a:headEnd type="none" w="med" len="med"/>
+                      <a:tailEnd type="none" w="med" len="med"/>
+                    </a:lnB>
+                    <a:noFill/>
+                  </a:tcPr>
+                </a:tc>
+                <a:tc>
+                  <a:txBody>
+                    <a:bodyPr/>
+                    <a:lstStyle/>
+                    <a:p>
+                      <a:pPr algn="ctr" rtl="0" fontAlgn="base">
+                        <a:lnSpc>
+                          <a:spcPts val="1200"/>
+                        </a:lnSpc>
+                        <a:buNone/>
+                      </a:pPr>
+                      <a:r>
+                        <a:rPr lang="en-US" sz="1400" b="1" i="0" u="none" strike="noStrike">
+                          <a:solidFill>
+                            <a:srgbClr val="000000"/>
+                          </a:solidFill>
+                          <a:effectLst/>
+                          <a:latin typeface="Times New Roman" panose="02020603050405020304" pitchFamily="18" charset="0"/>
+                        </a:rPr>
+                        <a:t>CSE C</a:t>
+                      </a:r>
+                      <a:endParaRPr lang="en-US" b="0" i="0">
+                        <a:solidFill>
+                          <a:srgbClr val="000000"/>
+                        </a:solidFill>
+                        <a:effectLst/>
+                      </a:endParaRPr>
+                    </a:p>
+                  </a:txBody>
+                  <a:tcPr>
+                    <a:lnL w="9525" cap="flat" cmpd="sng" algn="ctr">
+                      <a:solidFill>
+                        <a:srgbClr val="000000"/>
+                      </a:solidFill>
+                      <a:prstDash val="solid"/>
+                      <a:round/>
+                      <a:headEnd type="none" w="med" len="med"/>
+                      <a:tailEnd type="none" w="med" len="med"/>
+                    </a:lnL>
+                    <a:lnR w="9525" cap="flat" cmpd="sng" algn="ctr">
+                      <a:solidFill>
+                        <a:srgbClr val="000000"/>
+                      </a:solidFill>
+                      <a:prstDash val="solid"/>
+                      <a:round/>
+                      <a:headEnd type="none" w="med" len="med"/>
+                      <a:tailEnd type="none" w="med" len="med"/>
+                    </a:lnR>
+                    <a:lnT w="9525" cap="flat" cmpd="sng" algn="ctr">
+                      <a:solidFill>
+                        <a:srgbClr val="000000"/>
+                      </a:solidFill>
+                      <a:prstDash val="solid"/>
+                      <a:round/>
+                      <a:headEnd type="none" w="med" len="med"/>
+                      <a:tailEnd type="none" w="med" len="med"/>
+                    </a:lnT>
+                    <a:lnB w="9525" cap="flat" cmpd="sng" algn="ctr">
+                      <a:solidFill>
+                        <a:srgbClr val="000000"/>
+                      </a:solidFill>
+                      <a:prstDash val="solid"/>
+                      <a:round/>
+                      <a:headEnd type="none" w="med" len="med"/>
+                      <a:tailEnd type="none" w="med" len="med"/>
+                    </a:lnB>
+                    <a:noFill/>
+                  </a:tcPr>
+                </a:tc>
+                <a:extLst>
+                  <a:ext uri="{0D108BD9-81ED-4DB2-BD59-A6C34878D82A}">
+                    <a16:rowId xmlns:a16="http://schemas.microsoft.com/office/drawing/2014/main" val="1168737332"/>
+                  </a:ext>
+                </a:extLst>
+              </a:tr>
+              <a:tr h="358848">
+                <a:tc>
+                  <a:txBody>
+                    <a:bodyPr/>
+                    <a:lstStyle/>
+                    <a:p>
+                      <a:pPr algn="ctr" rtl="0" fontAlgn="base">
+                        <a:lnSpc>
+                          <a:spcPts val="1200"/>
+                        </a:lnSpc>
+                        <a:buNone/>
+                      </a:pPr>
+                      <a:r>
+                        <a:rPr lang="en-US" sz="1400" b="1" i="0" u="none" strike="noStrike">
+                          <a:solidFill>
+                            <a:srgbClr val="000000"/>
+                          </a:solidFill>
+                          <a:effectLst/>
+                          <a:latin typeface="Times New Roman" panose="02020603050405020304" pitchFamily="18" charset="0"/>
+                        </a:rPr>
+                        <a:t>2</a:t>
+                      </a:r>
+                      <a:endParaRPr lang="en-US" b="0" i="0">
+                        <a:solidFill>
+                          <a:srgbClr val="000000"/>
+                        </a:solidFill>
+                        <a:effectLst/>
+                      </a:endParaRPr>
+                    </a:p>
+                  </a:txBody>
+                  <a:tcPr>
+                    <a:lnL w="9525" cap="flat" cmpd="sng" algn="ctr">
+                      <a:solidFill>
+                        <a:srgbClr val="000000"/>
+                      </a:solidFill>
+                      <a:prstDash val="solid"/>
+                      <a:round/>
+                      <a:headEnd type="none" w="med" len="med"/>
+                      <a:tailEnd type="none" w="med" len="med"/>
+                    </a:lnL>
+                    <a:lnR w="9525" cap="flat" cmpd="sng" algn="ctr">
+                      <a:solidFill>
+                        <a:srgbClr val="000000"/>
+                      </a:solidFill>
+                      <a:prstDash val="solid"/>
+                      <a:round/>
+                      <a:headEnd type="none" w="med" len="med"/>
+                      <a:tailEnd type="none" w="med" len="med"/>
+                    </a:lnR>
+                    <a:lnT w="9525" cap="flat" cmpd="sng" algn="ctr">
+                      <a:solidFill>
+                        <a:srgbClr val="000000"/>
+                      </a:solidFill>
+                      <a:prstDash val="solid"/>
+                      <a:round/>
+                      <a:headEnd type="none" w="med" len="med"/>
+                      <a:tailEnd type="none" w="med" len="med"/>
+                    </a:lnT>
+                    <a:lnB w="9525" cap="flat" cmpd="sng" algn="ctr">
+                      <a:solidFill>
+                        <a:srgbClr val="000000"/>
+                      </a:solidFill>
+                      <a:prstDash val="solid"/>
+                      <a:round/>
+                      <a:headEnd type="none" w="med" len="med"/>
+                      <a:tailEnd type="none" w="med" len="med"/>
+                    </a:lnB>
+                    <a:noFill/>
+                  </a:tcPr>
+                </a:tc>
+                <a:tc>
+                  <a:txBody>
+                    <a:bodyPr/>
+                    <a:lstStyle/>
+                    <a:p>
+                      <a:pPr algn="ctr" rtl="0" fontAlgn="base">
+                        <a:lnSpc>
+                          <a:spcPts val="1200"/>
+                        </a:lnSpc>
+                        <a:buNone/>
+                      </a:pPr>
+                      <a:r>
+                        <a:rPr lang="en-US" sz="1400" b="1" i="0" u="none" strike="noStrike">
+                          <a:solidFill>
+                            <a:srgbClr val="000000"/>
+                          </a:solidFill>
+                          <a:effectLst/>
+                          <a:latin typeface="Times New Roman"/>
+                        </a:rPr>
+                        <a:t>BL.EN.U4CSE23241</a:t>
+                      </a:r>
+                      <a:endParaRPr lang="en-US" b="0" i="0">
+                        <a:solidFill>
+                          <a:srgbClr val="000000"/>
+                        </a:solidFill>
+                        <a:effectLst/>
+                      </a:endParaRPr>
+                    </a:p>
+                  </a:txBody>
+                  <a:tcPr>
+                    <a:lnL w="9525" cap="flat" cmpd="sng" algn="ctr">
+                      <a:solidFill>
+                        <a:srgbClr val="000000"/>
+                      </a:solidFill>
+                      <a:prstDash val="solid"/>
+                      <a:round/>
+                      <a:headEnd type="none" w="med" len="med"/>
+                      <a:tailEnd type="none" w="med" len="med"/>
+                    </a:lnL>
+                    <a:lnR w="9525" cap="flat" cmpd="sng" algn="ctr">
+                      <a:solidFill>
+                        <a:srgbClr val="000000"/>
+                      </a:solidFill>
+                      <a:prstDash val="solid"/>
+                      <a:round/>
+                      <a:headEnd type="none" w="med" len="med"/>
+                      <a:tailEnd type="none" w="med" len="med"/>
+                    </a:lnR>
+                    <a:lnT w="9525" cap="flat" cmpd="sng" algn="ctr">
+                      <a:solidFill>
+                        <a:srgbClr val="000000"/>
+                      </a:solidFill>
+                      <a:prstDash val="solid"/>
+                      <a:round/>
+                      <a:headEnd type="none" w="med" len="med"/>
+                      <a:tailEnd type="none" w="med" len="med"/>
+                    </a:lnT>
+                    <a:lnB w="9525" cap="flat" cmpd="sng" algn="ctr">
+                      <a:solidFill>
+                        <a:srgbClr val="000000"/>
+                      </a:solidFill>
+                      <a:prstDash val="solid"/>
+                      <a:round/>
+                      <a:headEnd type="none" w="med" len="med"/>
+                      <a:tailEnd type="none" w="med" len="med"/>
+                    </a:lnB>
+                    <a:noFill/>
+                  </a:tcPr>
+                </a:tc>
+                <a:tc>
+                  <a:txBody>
+                    <a:bodyPr/>
+                    <a:lstStyle/>
+                    <a:p>
+                      <a:pPr algn="ctr" rtl="0" fontAlgn="base">
+                        <a:lnSpc>
+                          <a:spcPts val="1200"/>
+                        </a:lnSpc>
+                        <a:buNone/>
+                      </a:pPr>
+                      <a:r>
+                        <a:rPr lang="en-US" sz="1400" b="1" i="0" u="none" strike="noStrike">
+                          <a:solidFill>
+                            <a:srgbClr val="000000"/>
+                          </a:solidFill>
+                          <a:effectLst/>
+                          <a:latin typeface="Times New Roman"/>
+                        </a:rPr>
+                        <a:t>Padala Siva Rama Krishna Reddy</a:t>
+                      </a:r>
+                    </a:p>
+                  </a:txBody>
+                  <a:tcPr>
+                    <a:lnL w="9525" cap="flat" cmpd="sng" algn="ctr">
+                      <a:solidFill>
+                        <a:srgbClr val="000000"/>
+                      </a:solidFill>
+                      <a:prstDash val="solid"/>
+                      <a:round/>
+                      <a:headEnd type="none" w="med" len="med"/>
+                      <a:tailEnd type="none" w="med" len="med"/>
+                    </a:lnL>
+                    <a:lnR w="9525" cap="flat" cmpd="sng" algn="ctr">
+                      <a:solidFill>
+                        <a:srgbClr val="000000"/>
+                      </a:solidFill>
+                      <a:prstDash val="solid"/>
+                      <a:round/>
+                      <a:headEnd type="none" w="med" len="med"/>
+                      <a:tailEnd type="none" w="med" len="med"/>
+                    </a:lnR>
+                    <a:lnT w="9525" cap="flat" cmpd="sng" algn="ctr">
+                      <a:solidFill>
+                        <a:srgbClr val="000000"/>
+                      </a:solidFill>
+                      <a:prstDash val="solid"/>
+                      <a:round/>
+                      <a:headEnd type="none" w="med" len="med"/>
+                      <a:tailEnd type="none" w="med" len="med"/>
+                    </a:lnT>
+                    <a:lnB w="9525" cap="flat" cmpd="sng" algn="ctr">
+                      <a:solidFill>
+                        <a:srgbClr val="000000"/>
+                      </a:solidFill>
+                      <a:prstDash val="solid"/>
+                      <a:round/>
+                      <a:headEnd type="none" w="med" len="med"/>
+                      <a:tailEnd type="none" w="med" len="med"/>
+                    </a:lnB>
+                    <a:noFill/>
+                  </a:tcPr>
+                </a:tc>
+                <a:tc>
+                  <a:txBody>
+                    <a:bodyPr/>
+                    <a:lstStyle/>
+                    <a:p>
+                      <a:pPr algn="ctr" rtl="0" fontAlgn="base">
+                        <a:lnSpc>
+                          <a:spcPts val="1200"/>
+                        </a:lnSpc>
+                        <a:buNone/>
+                      </a:pPr>
+                      <a:r>
+                        <a:rPr lang="en-US" sz="1400" b="1" i="0" u="none" strike="noStrike">
+                          <a:solidFill>
+                            <a:srgbClr val="000000"/>
+                          </a:solidFill>
+                          <a:effectLst/>
+                          <a:latin typeface="Times New Roman" panose="02020603050405020304" pitchFamily="18" charset="0"/>
+                        </a:rPr>
+                        <a:t>CSE C</a:t>
+                      </a:r>
+                      <a:endParaRPr lang="en-US" b="0" i="0">
+                        <a:solidFill>
+                          <a:srgbClr val="000000"/>
+                        </a:solidFill>
+                        <a:effectLst/>
+                      </a:endParaRPr>
+                    </a:p>
+                  </a:txBody>
+                  <a:tcPr>
+                    <a:lnL w="9525" cap="flat" cmpd="sng" algn="ctr">
+                      <a:solidFill>
+                        <a:srgbClr val="000000"/>
+                      </a:solidFill>
+                      <a:prstDash val="solid"/>
+                      <a:round/>
+                      <a:headEnd type="none" w="med" len="med"/>
+                      <a:tailEnd type="none" w="med" len="med"/>
+                    </a:lnL>
+                    <a:lnR w="9525" cap="flat" cmpd="sng" algn="ctr">
+                      <a:solidFill>
+                        <a:srgbClr val="000000"/>
+                      </a:solidFill>
+                      <a:prstDash val="solid"/>
+                      <a:round/>
+                      <a:headEnd type="none" w="med" len="med"/>
+                      <a:tailEnd type="none" w="med" len="med"/>
+                    </a:lnR>
+                    <a:lnT w="9525" cap="flat" cmpd="sng" algn="ctr">
+                      <a:solidFill>
+                        <a:srgbClr val="000000"/>
+                      </a:solidFill>
+                      <a:prstDash val="solid"/>
+                      <a:round/>
+                      <a:headEnd type="none" w="med" len="med"/>
+                      <a:tailEnd type="none" w="med" len="med"/>
+                    </a:lnT>
+                    <a:lnB w="9525" cap="flat" cmpd="sng" algn="ctr">
+                      <a:solidFill>
+                        <a:srgbClr val="000000"/>
+                      </a:solidFill>
+                      <a:prstDash val="solid"/>
+                      <a:round/>
+                      <a:headEnd type="none" w="med" len="med"/>
+                      <a:tailEnd type="none" w="med" len="med"/>
+                    </a:lnB>
+                    <a:noFill/>
+                  </a:tcPr>
+                </a:tc>
+                <a:extLst>
+                  <a:ext uri="{0D108BD9-81ED-4DB2-BD59-A6C34878D82A}">
+                    <a16:rowId xmlns:a16="http://schemas.microsoft.com/office/drawing/2014/main" val="593614587"/>
+                  </a:ext>
+                </a:extLst>
+              </a:tr>
+              <a:tr h="398720">
+                <a:tc>
+                  <a:txBody>
+                    <a:bodyPr/>
+                    <a:lstStyle/>
+                    <a:p>
+                      <a:pPr algn="ctr" rtl="0" fontAlgn="base">
+                        <a:lnSpc>
+                          <a:spcPts val="1200"/>
+                        </a:lnSpc>
+                        <a:buNone/>
+                      </a:pPr>
+                      <a:r>
+                        <a:rPr lang="en-US" sz="1400" b="1" i="0" u="none" strike="noStrike">
+                          <a:solidFill>
+                            <a:srgbClr val="000000"/>
+                          </a:solidFill>
+                          <a:effectLst/>
+                          <a:latin typeface="Times New Roman" panose="02020603050405020304" pitchFamily="18" charset="0"/>
+                        </a:rPr>
+                        <a:t>3</a:t>
+                      </a:r>
+                      <a:endParaRPr lang="en-US" b="0" i="0">
+                        <a:solidFill>
+                          <a:srgbClr val="000000"/>
+                        </a:solidFill>
+                        <a:effectLst/>
+                      </a:endParaRPr>
+                    </a:p>
+                  </a:txBody>
+                  <a:tcPr>
+                    <a:lnL w="9525" cap="flat" cmpd="sng" algn="ctr">
+                      <a:solidFill>
+                        <a:srgbClr val="000000"/>
+                      </a:solidFill>
+                      <a:prstDash val="solid"/>
+                      <a:round/>
+                      <a:headEnd type="none" w="med" len="med"/>
+                      <a:tailEnd type="none" w="med" len="med"/>
+                    </a:lnL>
+                    <a:lnR w="9525" cap="flat" cmpd="sng" algn="ctr">
+                      <a:solidFill>
+                        <a:srgbClr val="000000"/>
+                      </a:solidFill>
+                      <a:prstDash val="solid"/>
+                      <a:round/>
+                      <a:headEnd type="none" w="med" len="med"/>
+                      <a:tailEnd type="none" w="med" len="med"/>
+                    </a:lnR>
+                    <a:lnT w="9525" cap="flat" cmpd="sng" algn="ctr">
+                      <a:solidFill>
+                        <a:srgbClr val="000000"/>
+                      </a:solidFill>
+                      <a:prstDash val="solid"/>
+                      <a:round/>
+                      <a:headEnd type="none" w="med" len="med"/>
+                      <a:tailEnd type="none" w="med" len="med"/>
+                    </a:lnT>
+                    <a:lnB w="9525" cap="flat" cmpd="sng" algn="ctr">
+                      <a:solidFill>
+                        <a:srgbClr val="000000"/>
+                      </a:solidFill>
+                      <a:prstDash val="solid"/>
+                      <a:round/>
+                      <a:headEnd type="none" w="med" len="med"/>
+                      <a:tailEnd type="none" w="med" len="med"/>
+                    </a:lnB>
+                    <a:noFill/>
+                  </a:tcPr>
+                </a:tc>
+                <a:tc>
+                  <a:txBody>
+                    <a:bodyPr/>
+                    <a:lstStyle/>
+                    <a:p>
+                      <a:pPr algn="ctr" rtl="0" fontAlgn="base">
+                        <a:lnSpc>
+                          <a:spcPts val="1200"/>
+                        </a:lnSpc>
+                        <a:buNone/>
+                      </a:pPr>
+                      <a:r>
+                        <a:rPr lang="en-US" sz="1400" b="1" i="0" u="none" strike="noStrike">
+                          <a:solidFill>
+                            <a:srgbClr val="000000"/>
+                          </a:solidFill>
+                          <a:effectLst/>
+                          <a:latin typeface="Times New Roman"/>
+                        </a:rPr>
+                        <a:t>BL.EN.U4CSE23244</a:t>
+                      </a:r>
+                      <a:endParaRPr lang="en-US" b="0" i="0">
+                        <a:solidFill>
+                          <a:srgbClr val="000000"/>
+                        </a:solidFill>
+                        <a:effectLst/>
+                      </a:endParaRPr>
+                    </a:p>
+                  </a:txBody>
+                  <a:tcPr>
+                    <a:lnL w="9525" cap="flat" cmpd="sng" algn="ctr">
+                      <a:solidFill>
+                        <a:srgbClr val="000000"/>
+                      </a:solidFill>
+                      <a:prstDash val="solid"/>
+                      <a:round/>
+                      <a:headEnd type="none" w="med" len="med"/>
+                      <a:tailEnd type="none" w="med" len="med"/>
+                    </a:lnL>
+                    <a:lnR w="9525" cap="flat" cmpd="sng" algn="ctr">
+                      <a:solidFill>
+                        <a:srgbClr val="000000"/>
+                      </a:solidFill>
+                      <a:prstDash val="solid"/>
+                      <a:round/>
+                      <a:headEnd type="none" w="med" len="med"/>
+                      <a:tailEnd type="none" w="med" len="med"/>
+                    </a:lnR>
+                    <a:lnT w="9525" cap="flat" cmpd="sng" algn="ctr">
+                      <a:solidFill>
+                        <a:srgbClr val="000000"/>
+                      </a:solidFill>
+                      <a:prstDash val="solid"/>
+                      <a:round/>
+                      <a:headEnd type="none" w="med" len="med"/>
+                      <a:tailEnd type="none" w="med" len="med"/>
+                    </a:lnT>
+                    <a:lnB w="9525" cap="flat" cmpd="sng" algn="ctr">
+                      <a:solidFill>
+                        <a:srgbClr val="000000"/>
+                      </a:solidFill>
+                      <a:prstDash val="solid"/>
+                      <a:round/>
+                      <a:headEnd type="none" w="med" len="med"/>
+                      <a:tailEnd type="none" w="med" len="med"/>
+                    </a:lnB>
+                    <a:noFill/>
+                  </a:tcPr>
+                </a:tc>
+                <a:tc>
+                  <a:txBody>
+                    <a:bodyPr/>
+                    <a:lstStyle/>
+                    <a:p>
+                      <a:pPr algn="ctr" rtl="0" fontAlgn="base">
+                        <a:lnSpc>
+                          <a:spcPts val="1200"/>
+                        </a:lnSpc>
+                        <a:buNone/>
+                      </a:pPr>
+                      <a:r>
+                        <a:rPr lang="en-US" sz="1400" b="1" i="0" u="none" strike="noStrike" dirty="0" err="1">
+                          <a:solidFill>
+                            <a:srgbClr val="000000"/>
+                          </a:solidFill>
+                          <a:effectLst/>
+                          <a:latin typeface="Times New Roman"/>
+                        </a:rPr>
+                        <a:t>Pathem</a:t>
+                      </a:r>
+                      <a:r>
+                        <a:rPr lang="en-US" sz="1400" b="1" i="0" u="none" strike="noStrike" dirty="0">
+                          <a:solidFill>
+                            <a:srgbClr val="000000"/>
+                          </a:solidFill>
+                          <a:effectLst/>
+                          <a:latin typeface="Times New Roman"/>
+                        </a:rPr>
+                        <a:t> </a:t>
+                      </a:r>
+                      <a:r>
+                        <a:rPr lang="en-US" sz="1400" b="1" i="0" u="none" strike="noStrike" dirty="0" err="1">
+                          <a:solidFill>
+                            <a:srgbClr val="000000"/>
+                          </a:solidFill>
+                          <a:effectLst/>
+                          <a:latin typeface="Times New Roman"/>
+                        </a:rPr>
+                        <a:t>Ashwak</a:t>
+                      </a:r>
+                      <a:r>
+                        <a:rPr lang="en-US" sz="1400" b="1" i="0" u="none" strike="noStrike" dirty="0">
+                          <a:solidFill>
+                            <a:srgbClr val="000000"/>
+                          </a:solidFill>
+                          <a:effectLst/>
+                          <a:latin typeface="Times New Roman"/>
+                        </a:rPr>
+                        <a:t> Patel</a:t>
+                      </a:r>
+                    </a:p>
+                  </a:txBody>
+                  <a:tcPr>
+                    <a:lnL w="9525" cap="flat" cmpd="sng" algn="ctr">
+                      <a:solidFill>
+                        <a:srgbClr val="000000"/>
+                      </a:solidFill>
+                      <a:prstDash val="solid"/>
+                      <a:round/>
+                      <a:headEnd type="none" w="med" len="med"/>
+                      <a:tailEnd type="none" w="med" len="med"/>
+                    </a:lnL>
+                    <a:lnR w="9525" cap="flat" cmpd="sng" algn="ctr">
+                      <a:solidFill>
+                        <a:srgbClr val="000000"/>
+                      </a:solidFill>
+                      <a:prstDash val="solid"/>
+                      <a:round/>
+                      <a:headEnd type="none" w="med" len="med"/>
+                      <a:tailEnd type="none" w="med" len="med"/>
+                    </a:lnR>
+                    <a:lnT w="9525" cap="flat" cmpd="sng" algn="ctr">
+                      <a:solidFill>
+                        <a:srgbClr val="000000"/>
+                      </a:solidFill>
+                      <a:prstDash val="solid"/>
+                      <a:round/>
+                      <a:headEnd type="none" w="med" len="med"/>
+                      <a:tailEnd type="none" w="med" len="med"/>
+                    </a:lnT>
+                    <a:lnB w="9525" cap="flat" cmpd="sng" algn="ctr">
+                      <a:solidFill>
+                        <a:srgbClr val="000000"/>
+                      </a:solidFill>
+                      <a:prstDash val="solid"/>
+                      <a:round/>
+                      <a:headEnd type="none" w="med" len="med"/>
+                      <a:tailEnd type="none" w="med" len="med"/>
+                    </a:lnB>
+                    <a:noFill/>
+                  </a:tcPr>
+                </a:tc>
+                <a:tc>
+                  <a:txBody>
+                    <a:bodyPr/>
+                    <a:lstStyle/>
+                    <a:p>
+                      <a:pPr algn="ctr" rtl="0" fontAlgn="base">
+                        <a:lnSpc>
+                          <a:spcPts val="1200"/>
+                        </a:lnSpc>
+                        <a:buNone/>
+                      </a:pPr>
+                      <a:r>
+                        <a:rPr lang="en-US" sz="1400" b="1" i="0" u="none" strike="noStrike">
+                          <a:solidFill>
+                            <a:srgbClr val="000000"/>
+                          </a:solidFill>
+                          <a:effectLst/>
+                          <a:latin typeface="Times New Roman" panose="02020603050405020304" pitchFamily="18" charset="0"/>
+                        </a:rPr>
+                        <a:t>CSE C</a:t>
+                      </a:r>
+                    </a:p>
+                    <a:p>
+                      <a:pPr lvl="0" algn="ctr">
+                        <a:lnSpc>
+                          <a:spcPts val="1200"/>
+                        </a:lnSpc>
+                        <a:buNone/>
+                      </a:pPr>
+                      <a:endParaRPr lang="en-US" sz="1400" b="1" i="0" u="none" strike="noStrike" dirty="0">
+                        <a:solidFill>
+                          <a:srgbClr val="000000"/>
+                        </a:solidFill>
+                        <a:effectLst/>
+                        <a:latin typeface="Times New Roman"/>
+                      </a:endParaRPr>
+                    </a:p>
+                  </a:txBody>
+                  <a:tcPr>
+                    <a:lnL w="9525" cap="flat" cmpd="sng" algn="ctr">
+                      <a:solidFill>
+                        <a:srgbClr val="000000"/>
+                      </a:solidFill>
+                      <a:prstDash val="solid"/>
+                      <a:round/>
+                      <a:headEnd type="none" w="med" len="med"/>
+                      <a:tailEnd type="none" w="med" len="med"/>
+                    </a:lnL>
+                    <a:lnR w="9525" cap="flat" cmpd="sng" algn="ctr">
+                      <a:solidFill>
+                        <a:srgbClr val="000000"/>
+                      </a:solidFill>
+                      <a:prstDash val="solid"/>
+                      <a:round/>
+                      <a:headEnd type="none" w="med" len="med"/>
+                      <a:tailEnd type="none" w="med" len="med"/>
+                    </a:lnR>
+                    <a:lnT w="9525" cap="flat" cmpd="sng" algn="ctr">
+                      <a:solidFill>
+                        <a:srgbClr val="000000"/>
+                      </a:solidFill>
+                      <a:prstDash val="solid"/>
+                      <a:round/>
+                      <a:headEnd type="none" w="med" len="med"/>
+                      <a:tailEnd type="none" w="med" len="med"/>
+                    </a:lnT>
+                    <a:lnB w="9525" cap="flat" cmpd="sng" algn="ctr">
+                      <a:solidFill>
+                        <a:srgbClr val="000000"/>
+                      </a:solidFill>
+                      <a:prstDash val="solid"/>
+                      <a:round/>
+                      <a:headEnd type="none" w="med" len="med"/>
+                      <a:tailEnd type="none" w="med" len="med"/>
+                    </a:lnB>
+                    <a:noFill/>
+                  </a:tcPr>
+                </a:tc>
+                <a:extLst>
+                  <a:ext uri="{0D108BD9-81ED-4DB2-BD59-A6C34878D82A}">
+                    <a16:rowId xmlns:a16="http://schemas.microsoft.com/office/drawing/2014/main" val="412187733"/>
+                  </a:ext>
+                </a:extLst>
+              </a:tr>
+              <a:tr h="451883">
+                <a:tc>
+                  <a:txBody>
+                    <a:bodyPr/>
+                    <a:lstStyle/>
+                    <a:p>
+                      <a:pPr lvl="0" algn="ctr">
+                        <a:lnSpc>
+                          <a:spcPts val="1200"/>
+                        </a:lnSpc>
+                        <a:buNone/>
+                      </a:pPr>
+                      <a:r>
+                        <a:rPr lang="en-US" sz="1400" b="1" i="0" u="none" strike="noStrike">
+                          <a:solidFill>
+                            <a:srgbClr val="000000"/>
+                          </a:solidFill>
+                          <a:effectLst/>
+                          <a:latin typeface="Times New Roman"/>
+                        </a:rPr>
+                        <a:t>4</a:t>
+                      </a:r>
+                      <a:endParaRPr lang="en-US" sz="1400" b="1" i="0" u="none" strike="noStrike" dirty="0">
+                        <a:solidFill>
+                          <a:srgbClr val="000000"/>
+                        </a:solidFill>
+                        <a:effectLst/>
+                        <a:latin typeface="Times New Roman"/>
+                      </a:endParaRPr>
+                    </a:p>
+                  </a:txBody>
+                  <a:tcPr>
+                    <a:lnL w="9524">
+                      <a:solidFill>
+                        <a:srgbClr val="000000"/>
+                      </a:solidFill>
+                    </a:lnL>
+                    <a:lnR w="9524">
+                      <a:solidFill>
+                        <a:srgbClr val="000000"/>
+                      </a:solidFill>
+                    </a:lnR>
+                    <a:lnT w="9524">
+                      <a:solidFill>
+                        <a:srgbClr val="000000"/>
+                      </a:solidFill>
+                    </a:lnT>
+                    <a:lnB w="9524">
+                      <a:solidFill>
+                        <a:srgbClr val="000000"/>
+                      </a:solidFill>
+                    </a:lnB>
+                    <a:noFill/>
+                  </a:tcPr>
+                </a:tc>
+                <a:tc>
+                  <a:txBody>
+                    <a:bodyPr/>
+                    <a:lstStyle/>
+                    <a:p>
+                      <a:pPr lvl="0" algn="ctr">
+                        <a:lnSpc>
+                          <a:spcPts val="1200"/>
+                        </a:lnSpc>
+                        <a:buNone/>
+                      </a:pPr>
+                      <a:r>
+                        <a:rPr lang="en-US" sz="1400" b="1" i="0" u="none" strike="noStrike" noProof="0">
+                          <a:solidFill>
+                            <a:srgbClr val="000000"/>
+                          </a:solidFill>
+                          <a:effectLst/>
+                          <a:latin typeface="Times New Roman"/>
+                          <a:cs typeface="Times New Roman"/>
+                        </a:rPr>
+                        <a:t>BL.EN.U4CSE23247</a:t>
+                      </a:r>
+                      <a:endParaRPr lang="en-US"/>
+                    </a:p>
+                  </a:txBody>
+                  <a:tcPr>
+                    <a:lnL w="9524">
+                      <a:solidFill>
+                        <a:srgbClr val="000000"/>
+                      </a:solidFill>
+                    </a:lnL>
+                    <a:lnR w="9524">
+                      <a:solidFill>
+                        <a:srgbClr val="000000"/>
+                      </a:solidFill>
+                    </a:lnR>
+                    <a:lnT w="9524">
+                      <a:solidFill>
+                        <a:srgbClr val="000000"/>
+                      </a:solidFill>
+                    </a:lnT>
+                    <a:lnB w="9524">
+                      <a:solidFill>
+                        <a:srgbClr val="000000"/>
+                      </a:solidFill>
+                    </a:lnB>
+                    <a:noFill/>
+                  </a:tcPr>
+                </a:tc>
+                <a:tc>
+                  <a:txBody>
+                    <a:bodyPr/>
+                    <a:lstStyle/>
+                    <a:p>
+                      <a:pPr lvl="0" algn="ctr">
+                        <a:lnSpc>
+                          <a:spcPts val="1200"/>
+                        </a:lnSpc>
+                        <a:buNone/>
+                      </a:pPr>
+                      <a:r>
+                        <a:rPr lang="en-US" sz="1400" b="1" i="0" u="none" strike="noStrike" dirty="0" err="1">
+                          <a:solidFill>
+                            <a:srgbClr val="000000"/>
+                          </a:solidFill>
+                          <a:effectLst/>
+                          <a:latin typeface="Times New Roman"/>
+                        </a:rPr>
+                        <a:t>Reddim</a:t>
+                      </a:r>
+                      <a:r>
+                        <a:rPr lang="en-US" sz="1400" b="1" i="0" u="none" strike="noStrike" dirty="0">
+                          <a:solidFill>
+                            <a:srgbClr val="000000"/>
+                          </a:solidFill>
+                          <a:effectLst/>
+                          <a:latin typeface="Times New Roman"/>
+                        </a:rPr>
+                        <a:t> </a:t>
+                      </a:r>
+                      <a:r>
+                        <a:rPr lang="en-US" sz="1400" b="1" i="0" u="none" strike="noStrike" dirty="0" err="1">
+                          <a:solidFill>
+                            <a:srgbClr val="000000"/>
+                          </a:solidFill>
+                          <a:effectLst/>
+                          <a:latin typeface="Times New Roman"/>
+                        </a:rPr>
+                        <a:t>Thoshan</a:t>
+                      </a:r>
+                      <a:r>
+                        <a:rPr lang="en-US" sz="1400" b="1" i="0" u="none" strike="noStrike" dirty="0">
+                          <a:solidFill>
+                            <a:srgbClr val="000000"/>
+                          </a:solidFill>
+                          <a:effectLst/>
+                          <a:latin typeface="Times New Roman"/>
+                        </a:rPr>
+                        <a:t> Reddy</a:t>
+                      </a:r>
+                    </a:p>
+                  </a:txBody>
+                  <a:tcPr>
+                    <a:lnL w="9524">
+                      <a:solidFill>
+                        <a:srgbClr val="000000"/>
+                      </a:solidFill>
+                    </a:lnL>
+                    <a:lnR w="9524">
+                      <a:solidFill>
+                        <a:srgbClr val="000000"/>
+                      </a:solidFill>
+                    </a:lnR>
+                    <a:lnT w="9524">
+                      <a:solidFill>
+                        <a:srgbClr val="000000"/>
+                      </a:solidFill>
+                    </a:lnT>
+                    <a:lnB w="9524">
+                      <a:solidFill>
+                        <a:srgbClr val="000000"/>
+                      </a:solidFill>
+                    </a:lnB>
+                    <a:noFill/>
+                  </a:tcPr>
+                </a:tc>
+                <a:tc>
+                  <a:txBody>
+                    <a:bodyPr/>
+                    <a:lstStyle/>
+                    <a:p>
+                      <a:pPr lvl="0" algn="ctr">
+                        <a:lnSpc>
+                          <a:spcPts val="1200"/>
+                        </a:lnSpc>
+                        <a:buNone/>
+                      </a:pPr>
+                      <a:r>
+                        <a:rPr lang="en-US" sz="1400" b="1" i="0" u="none" strike="noStrike">
+                          <a:solidFill>
+                            <a:srgbClr val="000000"/>
+                          </a:solidFill>
+                          <a:effectLst/>
+                          <a:latin typeface="Times New Roman"/>
+                        </a:rPr>
+                        <a:t>CSE C</a:t>
+                      </a:r>
+                      <a:endParaRPr lang="en-US" sz="1400" b="1" i="0" u="none" strike="noStrike" dirty="0">
+                        <a:solidFill>
+                          <a:srgbClr val="000000"/>
+                        </a:solidFill>
+                        <a:effectLst/>
+                        <a:latin typeface="Times New Roman"/>
+                      </a:endParaRPr>
+                    </a:p>
+                  </a:txBody>
+                  <a:tcPr>
+                    <a:lnL w="9524">
+                      <a:solidFill>
+                        <a:srgbClr val="000000"/>
+                      </a:solidFill>
+                    </a:lnL>
+                    <a:lnR w="9524">
+                      <a:solidFill>
+                        <a:srgbClr val="000000"/>
+                      </a:solidFill>
+                    </a:lnR>
+                    <a:lnT w="9524">
+                      <a:solidFill>
+                        <a:srgbClr val="000000"/>
+                      </a:solidFill>
+                    </a:lnT>
+                    <a:lnB w="9524">
+                      <a:solidFill>
+                        <a:srgbClr val="000000"/>
+                      </a:solidFill>
+                    </a:lnB>
+                    <a:noFill/>
+                  </a:tcPr>
+                </a:tc>
+                <a:extLst>
+                  <a:ext uri="{0D108BD9-81ED-4DB2-BD59-A6C34878D82A}">
+                    <a16:rowId xmlns:a16="http://schemas.microsoft.com/office/drawing/2014/main" val="629914927"/>
+                  </a:ext>
+                </a:extLst>
+              </a:tr>
+            </a:tbl>
+          </a:graphicData>
+        </a:graphic>
+      </p:graphicFrame>
+      <p:sp>
+        <p:nvSpPr>
+          <p:cNvPr id="10" name="TextBox 9">
+            <a:extLst>
+              <a:ext uri="{FF2B5EF4-FFF2-40B4-BE49-F238E27FC236}">
+                <a16:creationId xmlns:a16="http://schemas.microsoft.com/office/drawing/2014/main" id="{711788B2-8A98-3A8C-38AE-D26C0F8EA9CA}"/>
+              </a:ext>
+            </a:extLst>
+          </p:cNvPr>
+          <p:cNvSpPr txBox="1"/>
+          <p:nvPr/>
+        </p:nvSpPr>
+        <p:spPr>
+          <a:xfrm>
+            <a:off x="735106" y="2120153"/>
+            <a:ext cx="6096000" cy="615553"/>
+          </a:xfrm>
+          <a:prstGeom prst="rect">
+            <a:avLst/>
+          </a:prstGeom>
+          <a:noFill/>
+        </p:spPr>
+        <p:txBody>
+          <a:bodyPr rot="0" spcFirstLastPara="0" vertOverflow="overflow" horzOverflow="overflow" vert="horz" wrap="square" lIns="91440" tIns="45720" rIns="91440" bIns="45720" numCol="1" spcCol="0" rtlCol="0" fromWordArt="0" anchor="t" anchorCtr="0" forceAA="0" compatLnSpc="1">
+            <a:prstTxWarp prst="textNoShape">
+              <a:avLst/>
+            </a:prstTxWarp>
+            <a:spAutoFit/>
+          </a:bodyPr>
+          <a:lstStyle/>
+          <a:p>
+            <a:r>
+              <a:rPr lang="en-US" sz="1600" b="1" i="0" u="none" strike="noStrike" baseline="0" dirty="0" err="1">
+                <a:solidFill>
+                  <a:srgbClr val="000000"/>
+                </a:solidFill>
+                <a:latin typeface="Times New Roman"/>
+              </a:rPr>
+              <a:t>Team_No</a:t>
+            </a:r>
+            <a:r>
+              <a:rPr lang="en-US" sz="1600" b="1" i="0" u="none" strike="noStrike" baseline="0" dirty="0">
+                <a:solidFill>
+                  <a:srgbClr val="000000"/>
+                </a:solidFill>
+                <a:latin typeface="Times New Roman"/>
+              </a:rPr>
+              <a:t>: </a:t>
+            </a:r>
+            <a:r>
+              <a:rPr lang="en-US" sz="1600" b="1" dirty="0">
+                <a:solidFill>
+                  <a:srgbClr val="000000"/>
+                </a:solidFill>
+                <a:latin typeface="Times New Roman"/>
+              </a:rPr>
+              <a:t>8</a:t>
+            </a:r>
+            <a:endParaRPr lang="en-US" sz="1600" dirty="0">
+              <a:latin typeface="Times New Roman"/>
+              <a:cs typeface="Times New Roman"/>
+            </a:endParaRPr>
+          </a:p>
+          <a:p>
+            <a:pPr algn="ctr"/>
+            <a:endParaRPr lang="en-US"/>
+          </a:p>
+        </p:txBody>
+      </p:sp>
+      <p:sp>
+        <p:nvSpPr>
+          <p:cNvPr id="11" name="TextBox 10">
+            <a:extLst>
+              <a:ext uri="{FF2B5EF4-FFF2-40B4-BE49-F238E27FC236}">
+                <a16:creationId xmlns:a16="http://schemas.microsoft.com/office/drawing/2014/main" id="{5B4AC3C6-96FD-B84E-AE1D-1952734D011F}"/>
+              </a:ext>
+            </a:extLst>
+          </p:cNvPr>
+          <p:cNvSpPr txBox="1"/>
+          <p:nvPr/>
+        </p:nvSpPr>
+        <p:spPr>
+          <a:xfrm>
+            <a:off x="735106" y="5212976"/>
+            <a:ext cx="6096000" cy="1107996"/>
+          </a:xfrm>
+          <a:prstGeom prst="rect">
+            <a:avLst/>
+          </a:prstGeom>
+          <a:noFill/>
+        </p:spPr>
+        <p:txBody>
+          <a:bodyPr rot="0" spcFirstLastPara="0" vertOverflow="overflow" horzOverflow="overflow" vert="horz" wrap="square" lIns="91440" tIns="45720" rIns="91440" bIns="45720" numCol="1" spcCol="0" rtlCol="0" fromWordArt="0" anchor="t" anchorCtr="0" forceAA="0" compatLnSpc="1">
+            <a:prstTxWarp prst="textNoShape">
+              <a:avLst/>
+            </a:prstTxWarp>
+            <a:spAutoFit/>
+          </a:bodyPr>
+          <a:lstStyle/>
+          <a:p>
+            <a:pPr algn="l" rtl="0"/>
+            <a:r>
+              <a:rPr lang="en-US" sz="1600" b="1" i="0" u="none" strike="noStrike" baseline="0">
+                <a:solidFill>
+                  <a:srgbClr val="000000"/>
+                </a:solidFill>
+                <a:latin typeface="Times New Roman"/>
+                <a:ea typeface="Segoe UI"/>
+                <a:cs typeface="Segoe UI"/>
+              </a:rPr>
+              <a:t>Project Advisor:</a:t>
+            </a:r>
+            <a:r>
+              <a:rPr lang="en-US" sz="1600" b="0" i="0" u="none" strike="noStrike" baseline="0">
+                <a:solidFill>
+                  <a:srgbClr val="000000"/>
+                </a:solidFill>
+                <a:latin typeface="Times New Roman"/>
+                <a:ea typeface="Segoe UI"/>
+                <a:cs typeface="Segoe UI"/>
+              </a:rPr>
+              <a:t>​</a:t>
+            </a:r>
+            <a:r>
+              <a:rPr lang="en-US" sz="1600" b="0" i="0">
+                <a:solidFill>
+                  <a:srgbClr val="000000"/>
+                </a:solidFill>
+                <a:latin typeface="Times New Roman"/>
+                <a:ea typeface="Segoe UI"/>
+                <a:cs typeface="Segoe UI"/>
+              </a:rPr>
+              <a:t>​</a:t>
+            </a:r>
+          </a:p>
+          <a:p>
+            <a:pPr algn="l" rtl="0"/>
+            <a:r>
+              <a:rPr lang="en-US" sz="1600" b="1" i="0" u="none" strike="noStrike" baseline="0">
+                <a:solidFill>
+                  <a:srgbClr val="000000"/>
+                </a:solidFill>
+                <a:latin typeface="Times New Roman"/>
+                <a:ea typeface="Segoe UI"/>
+                <a:cs typeface="Segoe UI"/>
+              </a:rPr>
+              <a:t>Ms. Sreebha Bhaskaran</a:t>
+            </a:r>
+            <a:r>
+              <a:rPr lang="en-US" sz="1600" b="0" i="0" u="none" strike="noStrike" baseline="0">
+                <a:solidFill>
+                  <a:srgbClr val="000000"/>
+                </a:solidFill>
+                <a:latin typeface="Times New Roman"/>
+                <a:ea typeface="Segoe UI"/>
+                <a:cs typeface="Segoe UI"/>
+              </a:rPr>
+              <a:t>​</a:t>
+            </a:r>
+            <a:r>
+              <a:rPr lang="en-US" sz="1600" b="0" i="0">
+                <a:solidFill>
+                  <a:srgbClr val="000000"/>
+                </a:solidFill>
+                <a:latin typeface="Times New Roman"/>
+                <a:ea typeface="Segoe UI"/>
+                <a:cs typeface="Segoe UI"/>
+              </a:rPr>
+              <a:t>​</a:t>
+            </a:r>
+          </a:p>
+          <a:p>
+            <a:pPr algn="l" rtl="0"/>
+            <a:r>
+              <a:rPr lang="en-US" sz="1600" b="1" i="0" u="none" strike="noStrike" baseline="0">
+                <a:solidFill>
+                  <a:srgbClr val="000000"/>
+                </a:solidFill>
+                <a:latin typeface="Times New Roman"/>
+                <a:ea typeface="Segoe UI"/>
+                <a:cs typeface="Segoe UI"/>
+              </a:rPr>
+              <a:t>Dr. Meena Belwal</a:t>
+            </a:r>
+          </a:p>
+          <a:p>
+            <a:pPr algn="ctr"/>
+            <a:endParaRPr lang="en-US"/>
           </a:p>
         </p:txBody>
       </p:sp>
@@ -3337,7 +5026,7 @@
               </a:defRPr>
             </a:pPr>
             <a:r>
-              <a:t>Algorithm Methodology (Detailed)</a:t>
+              <a:t>Encryption Algorithm Models</a:t>
             </a:r>
           </a:p>
         </p:txBody>
@@ -3386,6 +5075,1034 @@
           </a:p>
         </p:txBody>
       </p:sp>
+      <p:graphicFrame>
+        <p:nvGraphicFramePr>
+          <p:cNvPr id="4" name="Table 3"/>
+          <p:cNvGraphicFramePr>
+            <a:graphicFrameLocks noGrp="1"/>
+          </p:cNvGraphicFramePr>
+          <p:nvPr/>
+        </p:nvGraphicFramePr>
+        <p:xfrm>
+          <a:off x="457200" y="1188720"/>
+          <a:ext cx="11247120" cy="2426970"/>
+        </p:xfrm>
+        <a:graphic>
+          <a:graphicData uri="http://schemas.openxmlformats.org/drawingml/2006/table">
+            <a:tbl>
+              <a:tblPr firstRow="1" bandRow="1">
+                <a:tableStyleId>{5C22544A-7EE6-4342-B048-85BDC9FD1C3A}</a:tableStyleId>
+              </a:tblPr>
+              <a:tblGrid>
+                <a:gridCol w="2249424">
+                  <a:extLst>
+                    <a:ext uri="{9D8B030D-6E8A-4147-A177-3AD203B41FA5}">
+                      <a16:colId xmlns:a16="http://schemas.microsoft.com/office/drawing/2014/main" val="20000"/>
+                    </a:ext>
+                  </a:extLst>
+                </a:gridCol>
+                <a:gridCol w="2249424">
+                  <a:extLst>
+                    <a:ext uri="{9D8B030D-6E8A-4147-A177-3AD203B41FA5}">
+                      <a16:colId xmlns:a16="http://schemas.microsoft.com/office/drawing/2014/main" val="20001"/>
+                    </a:ext>
+                  </a:extLst>
+                </a:gridCol>
+                <a:gridCol w="2249424">
+                  <a:extLst>
+                    <a:ext uri="{9D8B030D-6E8A-4147-A177-3AD203B41FA5}">
+                      <a16:colId xmlns:a16="http://schemas.microsoft.com/office/drawing/2014/main" val="20002"/>
+                    </a:ext>
+                  </a:extLst>
+                </a:gridCol>
+                <a:gridCol w="2249424">
+                  <a:extLst>
+                    <a:ext uri="{9D8B030D-6E8A-4147-A177-3AD203B41FA5}">
+                      <a16:colId xmlns:a16="http://schemas.microsoft.com/office/drawing/2014/main" val="20003"/>
+                    </a:ext>
+                  </a:extLst>
+                </a:gridCol>
+                <a:gridCol w="2249424">
+                  <a:extLst>
+                    <a:ext uri="{9D8B030D-6E8A-4147-A177-3AD203B41FA5}">
+                      <a16:colId xmlns:a16="http://schemas.microsoft.com/office/drawing/2014/main" val="20004"/>
+                    </a:ext>
+                  </a:extLst>
+                </a:gridCol>
+              </a:tblGrid>
+              <a:tr h="285750">
+                <a:tc>
+                  <a:txBody>
+                    <a:bodyPr/>
+                    <a:lstStyle/>
+                    <a:p>
+                      <a:pPr algn="ctr">
+                        <a:defRPr sz="1100" b="1">
+                          <a:solidFill>
+                            <a:srgbClr val="FFFFFF"/>
+                          </a:solidFill>
+                          <a:latin typeface="Times New Roman"/>
+                        </a:defRPr>
+                      </a:pPr>
+                      <a:r>
+                        <a:t>Property</a:t>
+                      </a:r>
+                    </a:p>
+                  </a:txBody>
+                  <a:tcPr>
+                    <a:solidFill>
+                      <a:srgbClr val="1E1E1E"/>
+                    </a:solidFill>
+                  </a:tcPr>
+                </a:tc>
+                <a:tc>
+                  <a:txBody>
+                    <a:bodyPr/>
+                    <a:lstStyle/>
+                    <a:p>
+                      <a:pPr algn="ctr">
+                        <a:defRPr sz="1100" b="1">
+                          <a:solidFill>
+                            <a:srgbClr val="FFFFFF"/>
+                          </a:solidFill>
+                          <a:latin typeface="Times New Roman"/>
+                        </a:defRPr>
+                      </a:pPr>
+                      <a:r>
+                        <a:t>AES-256-GCM</a:t>
+                      </a:r>
+                    </a:p>
+                  </a:txBody>
+                  <a:tcPr>
+                    <a:solidFill>
+                      <a:srgbClr val="1E1E1E"/>
+                    </a:solidFill>
+                  </a:tcPr>
+                </a:tc>
+                <a:tc>
+                  <a:txBody>
+                    <a:bodyPr/>
+                    <a:lstStyle/>
+                    <a:p>
+                      <a:pPr algn="ctr">
+                        <a:defRPr sz="1100" b="1">
+                          <a:solidFill>
+                            <a:srgbClr val="FFFFFF"/>
+                          </a:solidFill>
+                          <a:latin typeface="Times New Roman"/>
+                        </a:defRPr>
+                      </a:pPr>
+                      <a:r>
+                        <a:t>ChaCha20-Poly1305</a:t>
+                      </a:r>
+                    </a:p>
+                  </a:txBody>
+                  <a:tcPr>
+                    <a:solidFill>
+                      <a:srgbClr val="1E1E1E"/>
+                    </a:solidFill>
+                  </a:tcPr>
+                </a:tc>
+                <a:tc>
+                  <a:txBody>
+                    <a:bodyPr/>
+                    <a:lstStyle/>
+                    <a:p>
+                      <a:pPr algn="ctr">
+                        <a:defRPr sz="1100" b="1">
+                          <a:solidFill>
+                            <a:srgbClr val="FFFFFF"/>
+                          </a:solidFill>
+                          <a:latin typeface="Times New Roman"/>
+                        </a:defRPr>
+                      </a:pPr>
+                      <a:r>
+                        <a:t>PRESENT-80</a:t>
+                      </a:r>
+                    </a:p>
+                  </a:txBody>
+                  <a:tcPr>
+                    <a:solidFill>
+                      <a:srgbClr val="1E1E1E"/>
+                    </a:solidFill>
+                  </a:tcPr>
+                </a:tc>
+                <a:tc>
+                  <a:txBody>
+                    <a:bodyPr/>
+                    <a:lstStyle/>
+                    <a:p>
+                      <a:pPr algn="ctr">
+                        <a:defRPr sz="1100" b="1">
+                          <a:solidFill>
+                            <a:srgbClr val="FFFFFF"/>
+                          </a:solidFill>
+                          <a:latin typeface="Times New Roman"/>
+                        </a:defRPr>
+                      </a:pPr>
+                      <a:r>
+                        <a:t>SPECK-64/128</a:t>
+                      </a:r>
+                    </a:p>
+                  </a:txBody>
+                  <a:tcPr>
+                    <a:solidFill>
+                      <a:srgbClr val="1E1E1E"/>
+                    </a:solidFill>
+                  </a:tcPr>
+                </a:tc>
+                <a:extLst>
+                  <a:ext uri="{0D108BD9-81ED-4DB2-BD59-A6C34878D82A}">
+                    <a16:rowId xmlns:a16="http://schemas.microsoft.com/office/drawing/2014/main" val="10000"/>
+                  </a:ext>
+                </a:extLst>
+              </a:tr>
+              <a:tr h="285750">
+                <a:tc>
+                  <a:txBody>
+                    <a:bodyPr/>
+                    <a:lstStyle/>
+                    <a:p>
+                      <a:pPr algn="ctr">
+                        <a:defRPr sz="1100">
+                          <a:latin typeface="Times New Roman"/>
+                        </a:defRPr>
+                      </a:pPr>
+                      <a:r>
+                        <a:t>Type</a:t>
+                      </a:r>
+                    </a:p>
+                  </a:txBody>
+                  <a:tcPr>
+                    <a:solidFill>
+                      <a:srgbClr val="F0F0FF"/>
+                    </a:solidFill>
+                  </a:tcPr>
+                </a:tc>
+                <a:tc>
+                  <a:txBody>
+                    <a:bodyPr/>
+                    <a:lstStyle/>
+                    <a:p>
+                      <a:pPr algn="ctr">
+                        <a:defRPr sz="1100">
+                          <a:latin typeface="Times New Roman"/>
+                        </a:defRPr>
+                      </a:pPr>
+                      <a:r>
+                        <a:t>Block Cipher</a:t>
+                      </a:r>
+                    </a:p>
+                  </a:txBody>
+                  <a:tcPr>
+                    <a:solidFill>
+                      <a:srgbClr val="F0F0FF"/>
+                    </a:solidFill>
+                  </a:tcPr>
+                </a:tc>
+                <a:tc>
+                  <a:txBody>
+                    <a:bodyPr/>
+                    <a:lstStyle/>
+                    <a:p>
+                      <a:pPr algn="ctr">
+                        <a:defRPr sz="1100">
+                          <a:latin typeface="Times New Roman"/>
+                        </a:defRPr>
+                      </a:pPr>
+                      <a:r>
+                        <a:t>Stream Cipher</a:t>
+                      </a:r>
+                    </a:p>
+                  </a:txBody>
+                  <a:tcPr>
+                    <a:solidFill>
+                      <a:srgbClr val="F0F0FF"/>
+                    </a:solidFill>
+                  </a:tcPr>
+                </a:tc>
+                <a:tc>
+                  <a:txBody>
+                    <a:bodyPr/>
+                    <a:lstStyle/>
+                    <a:p>
+                      <a:pPr algn="ctr">
+                        <a:defRPr sz="1100">
+                          <a:latin typeface="Times New Roman"/>
+                        </a:defRPr>
+                      </a:pPr>
+                      <a:r>
+                        <a:t>Block Cipher (Lightweight)</a:t>
+                      </a:r>
+                    </a:p>
+                  </a:txBody>
+                  <a:tcPr>
+                    <a:solidFill>
+                      <a:srgbClr val="F0F0FF"/>
+                    </a:solidFill>
+                  </a:tcPr>
+                </a:tc>
+                <a:tc>
+                  <a:txBody>
+                    <a:bodyPr/>
+                    <a:lstStyle/>
+                    <a:p>
+                      <a:pPr algn="ctr">
+                        <a:defRPr sz="1100">
+                          <a:latin typeface="Times New Roman"/>
+                        </a:defRPr>
+                      </a:pPr>
+                      <a:r>
+                        <a:t>Block Cipher (Lightweight)</a:t>
+                      </a:r>
+                    </a:p>
+                  </a:txBody>
+                  <a:tcPr>
+                    <a:solidFill>
+                      <a:srgbClr val="F0F0FF"/>
+                    </a:solidFill>
+                  </a:tcPr>
+                </a:tc>
+                <a:extLst>
+                  <a:ext uri="{0D108BD9-81ED-4DB2-BD59-A6C34878D82A}">
+                    <a16:rowId xmlns:a16="http://schemas.microsoft.com/office/drawing/2014/main" val="10001"/>
+                  </a:ext>
+                </a:extLst>
+              </a:tr>
+              <a:tr h="285750">
+                <a:tc>
+                  <a:txBody>
+                    <a:bodyPr/>
+                    <a:lstStyle/>
+                    <a:p>
+                      <a:pPr algn="ctr">
+                        <a:defRPr sz="1100">
+                          <a:latin typeface="Times New Roman"/>
+                        </a:defRPr>
+                      </a:pPr>
+                      <a:r>
+                        <a:t>Structure</a:t>
+                      </a:r>
+                    </a:p>
+                  </a:txBody>
+                  <a:tcPr/>
+                </a:tc>
+                <a:tc>
+                  <a:txBody>
+                    <a:bodyPr/>
+                    <a:lstStyle/>
+                    <a:p>
+                      <a:pPr algn="ctr">
+                        <a:defRPr sz="1100">
+                          <a:latin typeface="Times New Roman"/>
+                        </a:defRPr>
+                      </a:pPr>
+                      <a:r>
+                        <a:t>SPN (SubBytes, ShiftRows, MixColumns)</a:t>
+                      </a:r>
+                    </a:p>
+                  </a:txBody>
+                  <a:tcPr/>
+                </a:tc>
+                <a:tc>
+                  <a:txBody>
+                    <a:bodyPr/>
+                    <a:lstStyle/>
+                    <a:p>
+                      <a:pPr algn="ctr">
+                        <a:defRPr sz="1100">
+                          <a:latin typeface="Times New Roman"/>
+                        </a:defRPr>
+                      </a:pPr>
+                      <a:r>
+                        <a:t>ARX (Add, Rotate, XOR)</a:t>
+                      </a:r>
+                    </a:p>
+                  </a:txBody>
+                  <a:tcPr/>
+                </a:tc>
+                <a:tc>
+                  <a:txBody>
+                    <a:bodyPr/>
+                    <a:lstStyle/>
+                    <a:p>
+                      <a:pPr algn="ctr">
+                        <a:defRPr sz="1100">
+                          <a:latin typeface="Times New Roman"/>
+                        </a:defRPr>
+                      </a:pPr>
+                      <a:r>
+                        <a:t>SPN (4-bit S-Box + P-Box)</a:t>
+                      </a:r>
+                    </a:p>
+                  </a:txBody>
+                  <a:tcPr/>
+                </a:tc>
+                <a:tc>
+                  <a:txBody>
+                    <a:bodyPr/>
+                    <a:lstStyle/>
+                    <a:p>
+                      <a:pPr algn="ctr">
+                        <a:defRPr sz="1100">
+                          <a:latin typeface="Times New Roman"/>
+                        </a:defRPr>
+                      </a:pPr>
+                      <a:r>
+                        <a:t>ARX (Add, Rotate, XOR)</a:t>
+                      </a:r>
+                    </a:p>
+                  </a:txBody>
+                  <a:tcPr/>
+                </a:tc>
+                <a:extLst>
+                  <a:ext uri="{0D108BD9-81ED-4DB2-BD59-A6C34878D82A}">
+                    <a16:rowId xmlns:a16="http://schemas.microsoft.com/office/drawing/2014/main" val="10002"/>
+                  </a:ext>
+                </a:extLst>
+              </a:tr>
+              <a:tr h="285750">
+                <a:tc>
+                  <a:txBody>
+                    <a:bodyPr/>
+                    <a:lstStyle/>
+                    <a:p>
+                      <a:pPr algn="ctr">
+                        <a:defRPr sz="1100">
+                          <a:latin typeface="Times New Roman"/>
+                        </a:defRPr>
+                      </a:pPr>
+                      <a:r>
+                        <a:t>Block Size</a:t>
+                      </a:r>
+                    </a:p>
+                  </a:txBody>
+                  <a:tcPr>
+                    <a:solidFill>
+                      <a:srgbClr val="F0F0FF"/>
+                    </a:solidFill>
+                  </a:tcPr>
+                </a:tc>
+                <a:tc>
+                  <a:txBody>
+                    <a:bodyPr/>
+                    <a:lstStyle/>
+                    <a:p>
+                      <a:pPr algn="ctr">
+                        <a:defRPr sz="1100">
+                          <a:latin typeface="Times New Roman"/>
+                        </a:defRPr>
+                      </a:pPr>
+                      <a:r>
+                        <a:t>128 bits</a:t>
+                      </a:r>
+                    </a:p>
+                  </a:txBody>
+                  <a:tcPr>
+                    <a:solidFill>
+                      <a:srgbClr val="F0F0FF"/>
+                    </a:solidFill>
+                  </a:tcPr>
+                </a:tc>
+                <a:tc>
+                  <a:txBody>
+                    <a:bodyPr/>
+                    <a:lstStyle/>
+                    <a:p>
+                      <a:pPr algn="ctr">
+                        <a:defRPr sz="1100">
+                          <a:latin typeface="Times New Roman"/>
+                        </a:defRPr>
+                      </a:pPr>
+                      <a:r>
+                        <a:t>N/A (stream)</a:t>
+                      </a:r>
+                    </a:p>
+                  </a:txBody>
+                  <a:tcPr>
+                    <a:solidFill>
+                      <a:srgbClr val="F0F0FF"/>
+                    </a:solidFill>
+                  </a:tcPr>
+                </a:tc>
+                <a:tc>
+                  <a:txBody>
+                    <a:bodyPr/>
+                    <a:lstStyle/>
+                    <a:p>
+                      <a:pPr algn="ctr">
+                        <a:defRPr sz="1100">
+                          <a:latin typeface="Times New Roman"/>
+                        </a:defRPr>
+                      </a:pPr>
+                      <a:r>
+                        <a:t>64 bits</a:t>
+                      </a:r>
+                    </a:p>
+                  </a:txBody>
+                  <a:tcPr>
+                    <a:solidFill>
+                      <a:srgbClr val="F0F0FF"/>
+                    </a:solidFill>
+                  </a:tcPr>
+                </a:tc>
+                <a:tc>
+                  <a:txBody>
+                    <a:bodyPr/>
+                    <a:lstStyle/>
+                    <a:p>
+                      <a:pPr algn="ctr">
+                        <a:defRPr sz="1100">
+                          <a:latin typeface="Times New Roman"/>
+                        </a:defRPr>
+                      </a:pPr>
+                      <a:r>
+                        <a:t>64 bits</a:t>
+                      </a:r>
+                    </a:p>
+                  </a:txBody>
+                  <a:tcPr>
+                    <a:solidFill>
+                      <a:srgbClr val="F0F0FF"/>
+                    </a:solidFill>
+                  </a:tcPr>
+                </a:tc>
+                <a:extLst>
+                  <a:ext uri="{0D108BD9-81ED-4DB2-BD59-A6C34878D82A}">
+                    <a16:rowId xmlns:a16="http://schemas.microsoft.com/office/drawing/2014/main" val="10003"/>
+                  </a:ext>
+                </a:extLst>
+              </a:tr>
+              <a:tr h="285750">
+                <a:tc>
+                  <a:txBody>
+                    <a:bodyPr/>
+                    <a:lstStyle/>
+                    <a:p>
+                      <a:pPr algn="ctr">
+                        <a:defRPr sz="1100">
+                          <a:latin typeface="Times New Roman"/>
+                        </a:defRPr>
+                      </a:pPr>
+                      <a:r>
+                        <a:t>Key Size</a:t>
+                      </a:r>
+                    </a:p>
+                  </a:txBody>
+                  <a:tcPr/>
+                </a:tc>
+                <a:tc>
+                  <a:txBody>
+                    <a:bodyPr/>
+                    <a:lstStyle/>
+                    <a:p>
+                      <a:pPr algn="ctr">
+                        <a:defRPr sz="1100">
+                          <a:latin typeface="Times New Roman"/>
+                        </a:defRPr>
+                      </a:pPr>
+                      <a:r>
+                        <a:t>256 bits</a:t>
+                      </a:r>
+                    </a:p>
+                  </a:txBody>
+                  <a:tcPr/>
+                </a:tc>
+                <a:tc>
+                  <a:txBody>
+                    <a:bodyPr/>
+                    <a:lstStyle/>
+                    <a:p>
+                      <a:pPr algn="ctr">
+                        <a:defRPr sz="1100">
+                          <a:latin typeface="Times New Roman"/>
+                        </a:defRPr>
+                      </a:pPr>
+                      <a:r>
+                        <a:t>256 bits</a:t>
+                      </a:r>
+                    </a:p>
+                  </a:txBody>
+                  <a:tcPr/>
+                </a:tc>
+                <a:tc>
+                  <a:txBody>
+                    <a:bodyPr/>
+                    <a:lstStyle/>
+                    <a:p>
+                      <a:pPr algn="ctr">
+                        <a:defRPr sz="1100">
+                          <a:latin typeface="Times New Roman"/>
+                        </a:defRPr>
+                      </a:pPr>
+                      <a:r>
+                        <a:t>80 bits</a:t>
+                      </a:r>
+                    </a:p>
+                  </a:txBody>
+                  <a:tcPr/>
+                </a:tc>
+                <a:tc>
+                  <a:txBody>
+                    <a:bodyPr/>
+                    <a:lstStyle/>
+                    <a:p>
+                      <a:pPr algn="ctr">
+                        <a:defRPr sz="1100">
+                          <a:latin typeface="Times New Roman"/>
+                        </a:defRPr>
+                      </a:pPr>
+                      <a:r>
+                        <a:t>128 bits</a:t>
+                      </a:r>
+                    </a:p>
+                  </a:txBody>
+                  <a:tcPr/>
+                </a:tc>
+                <a:extLst>
+                  <a:ext uri="{0D108BD9-81ED-4DB2-BD59-A6C34878D82A}">
+                    <a16:rowId xmlns:a16="http://schemas.microsoft.com/office/drawing/2014/main" val="10004"/>
+                  </a:ext>
+                </a:extLst>
+              </a:tr>
+              <a:tr h="285750">
+                <a:tc>
+                  <a:txBody>
+                    <a:bodyPr/>
+                    <a:lstStyle/>
+                    <a:p>
+                      <a:pPr algn="ctr">
+                        <a:defRPr sz="1100">
+                          <a:latin typeface="Times New Roman"/>
+                        </a:defRPr>
+                      </a:pPr>
+                      <a:r>
+                        <a:t>Rounds</a:t>
+                      </a:r>
+                    </a:p>
+                  </a:txBody>
+                  <a:tcPr>
+                    <a:solidFill>
+                      <a:srgbClr val="F0F0FF"/>
+                    </a:solidFill>
+                  </a:tcPr>
+                </a:tc>
+                <a:tc>
+                  <a:txBody>
+                    <a:bodyPr/>
+                    <a:lstStyle/>
+                    <a:p>
+                      <a:pPr algn="ctr">
+                        <a:defRPr sz="1100">
+                          <a:latin typeface="Times New Roman"/>
+                        </a:defRPr>
+                      </a:pPr>
+                      <a:r>
+                        <a:t>14</a:t>
+                      </a:r>
+                    </a:p>
+                  </a:txBody>
+                  <a:tcPr>
+                    <a:solidFill>
+                      <a:srgbClr val="F0F0FF"/>
+                    </a:solidFill>
+                  </a:tcPr>
+                </a:tc>
+                <a:tc>
+                  <a:txBody>
+                    <a:bodyPr/>
+                    <a:lstStyle/>
+                    <a:p>
+                      <a:pPr algn="ctr">
+                        <a:defRPr sz="1100">
+                          <a:latin typeface="Times New Roman"/>
+                        </a:defRPr>
+                      </a:pPr>
+                      <a:r>
+                        <a:t>20 quarter-rounds</a:t>
+                      </a:r>
+                    </a:p>
+                  </a:txBody>
+                  <a:tcPr>
+                    <a:solidFill>
+                      <a:srgbClr val="F0F0FF"/>
+                    </a:solidFill>
+                  </a:tcPr>
+                </a:tc>
+                <a:tc>
+                  <a:txBody>
+                    <a:bodyPr/>
+                    <a:lstStyle/>
+                    <a:p>
+                      <a:pPr algn="ctr">
+                        <a:defRPr sz="1100">
+                          <a:latin typeface="Times New Roman"/>
+                        </a:defRPr>
+                      </a:pPr>
+                      <a:r>
+                        <a:t>31</a:t>
+                      </a:r>
+                    </a:p>
+                  </a:txBody>
+                  <a:tcPr>
+                    <a:solidFill>
+                      <a:srgbClr val="F0F0FF"/>
+                    </a:solidFill>
+                  </a:tcPr>
+                </a:tc>
+                <a:tc>
+                  <a:txBody>
+                    <a:bodyPr/>
+                    <a:lstStyle/>
+                    <a:p>
+                      <a:pPr algn="ctr">
+                        <a:defRPr sz="1100">
+                          <a:latin typeface="Times New Roman"/>
+                        </a:defRPr>
+                      </a:pPr>
+                      <a:r>
+                        <a:t>27</a:t>
+                      </a:r>
+                    </a:p>
+                  </a:txBody>
+                  <a:tcPr>
+                    <a:solidFill>
+                      <a:srgbClr val="F0F0FF"/>
+                    </a:solidFill>
+                  </a:tcPr>
+                </a:tc>
+                <a:extLst>
+                  <a:ext uri="{0D108BD9-81ED-4DB2-BD59-A6C34878D82A}">
+                    <a16:rowId xmlns:a16="http://schemas.microsoft.com/office/drawing/2014/main" val="10005"/>
+                  </a:ext>
+                </a:extLst>
+              </a:tr>
+              <a:tr h="285750">
+                <a:tc>
+                  <a:txBody>
+                    <a:bodyPr/>
+                    <a:lstStyle/>
+                    <a:p>
+                      <a:pPr algn="ctr">
+                        <a:defRPr sz="1100">
+                          <a:latin typeface="Times New Roman"/>
+                        </a:defRPr>
+                      </a:pPr>
+                      <a:r>
+                        <a:t>Auth Mode</a:t>
+                      </a:r>
+                    </a:p>
+                  </a:txBody>
+                  <a:tcPr/>
+                </a:tc>
+                <a:tc>
+                  <a:txBody>
+                    <a:bodyPr/>
+                    <a:lstStyle/>
+                    <a:p>
+                      <a:pPr algn="ctr">
+                        <a:defRPr sz="1100">
+                          <a:latin typeface="Times New Roman"/>
+                        </a:defRPr>
+                      </a:pPr>
+                      <a:r>
+                        <a:t>GCM (GHASH)</a:t>
+                      </a:r>
+                    </a:p>
+                  </a:txBody>
+                  <a:tcPr/>
+                </a:tc>
+                <a:tc>
+                  <a:txBody>
+                    <a:bodyPr/>
+                    <a:lstStyle/>
+                    <a:p>
+                      <a:pPr algn="ctr">
+                        <a:defRPr sz="1100">
+                          <a:latin typeface="Times New Roman"/>
+                        </a:defRPr>
+                      </a:pPr>
+                      <a:r>
+                        <a:t>Poly1305 MAC</a:t>
+                      </a:r>
+                    </a:p>
+                  </a:txBody>
+                  <a:tcPr/>
+                </a:tc>
+                <a:tc>
+                  <a:txBody>
+                    <a:bodyPr/>
+                    <a:lstStyle/>
+                    <a:p>
+                      <a:pPr algn="ctr">
+                        <a:defRPr sz="1100">
+                          <a:latin typeface="Times New Roman"/>
+                        </a:defRPr>
+                      </a:pPr>
+                      <a:r>
+                        <a:t>CTR + HMAC-SHA256</a:t>
+                      </a:r>
+                    </a:p>
+                  </a:txBody>
+                  <a:tcPr/>
+                </a:tc>
+                <a:tc>
+                  <a:txBody>
+                    <a:bodyPr/>
+                    <a:lstStyle/>
+                    <a:p>
+                      <a:pPr algn="ctr">
+                        <a:defRPr sz="1100">
+                          <a:latin typeface="Times New Roman"/>
+                        </a:defRPr>
+                      </a:pPr>
+                      <a:r>
+                        <a:t>CTR + HMAC-SHA256</a:t>
+                      </a:r>
+                    </a:p>
+                  </a:txBody>
+                  <a:tcPr/>
+                </a:tc>
+                <a:extLst>
+                  <a:ext uri="{0D108BD9-81ED-4DB2-BD59-A6C34878D82A}">
+                    <a16:rowId xmlns:a16="http://schemas.microsoft.com/office/drawing/2014/main" val="10006"/>
+                  </a:ext>
+                </a:extLst>
+              </a:tr>
+              <a:tr h="285750">
+                <a:tc>
+                  <a:txBody>
+                    <a:bodyPr/>
+                    <a:lstStyle/>
+                    <a:p>
+                      <a:pPr algn="ctr">
+                        <a:defRPr sz="1100">
+                          <a:latin typeface="Times New Roman"/>
+                        </a:defRPr>
+                      </a:pPr>
+                      <a:r>
+                        <a:t>Gate Count</a:t>
+                      </a:r>
+                    </a:p>
+                  </a:txBody>
+                  <a:tcPr>
+                    <a:solidFill>
+                      <a:srgbClr val="F0F0FF"/>
+                    </a:solidFill>
+                  </a:tcPr>
+                </a:tc>
+                <a:tc>
+                  <a:txBody>
+                    <a:bodyPr/>
+                    <a:lstStyle/>
+                    <a:p>
+                      <a:pPr algn="ctr">
+                        <a:defRPr sz="1100">
+                          <a:latin typeface="Times New Roman"/>
+                        </a:defRPr>
+                      </a:pPr>
+                      <a:r>
+                        <a:t>~50,000 GE</a:t>
+                      </a:r>
+                    </a:p>
+                  </a:txBody>
+                  <a:tcPr>
+                    <a:solidFill>
+                      <a:srgbClr val="F0F0FF"/>
+                    </a:solidFill>
+                  </a:tcPr>
+                </a:tc>
+                <a:tc>
+                  <a:txBody>
+                    <a:bodyPr/>
+                    <a:lstStyle/>
+                    <a:p>
+                      <a:pPr algn="ctr">
+                        <a:defRPr sz="1100">
+                          <a:latin typeface="Times New Roman"/>
+                        </a:defRPr>
+                      </a:pPr>
+                      <a:r>
+                        <a:t>~38,000 GE</a:t>
+                      </a:r>
+                    </a:p>
+                  </a:txBody>
+                  <a:tcPr>
+                    <a:solidFill>
+                      <a:srgbClr val="F0F0FF"/>
+                    </a:solidFill>
+                  </a:tcPr>
+                </a:tc>
+                <a:tc>
+                  <a:txBody>
+                    <a:bodyPr/>
+                    <a:lstStyle/>
+                    <a:p>
+                      <a:pPr algn="ctr">
+                        <a:defRPr sz="1100">
+                          <a:latin typeface="Times New Roman"/>
+                        </a:defRPr>
+                      </a:pPr>
+                      <a:r>
+                        <a:t>~1,570 GE</a:t>
+                      </a:r>
+                    </a:p>
+                  </a:txBody>
+                  <a:tcPr>
+                    <a:solidFill>
+                      <a:srgbClr val="F0F0FF"/>
+                    </a:solidFill>
+                  </a:tcPr>
+                </a:tc>
+                <a:tc>
+                  <a:txBody>
+                    <a:bodyPr/>
+                    <a:lstStyle/>
+                    <a:p>
+                      <a:pPr algn="ctr">
+                        <a:defRPr sz="1100">
+                          <a:latin typeface="Times New Roman"/>
+                        </a:defRPr>
+                      </a:pPr>
+                      <a:r>
+                        <a:t>~2,400 GE</a:t>
+                      </a:r>
+                    </a:p>
+                  </a:txBody>
+                  <a:tcPr>
+                    <a:solidFill>
+                      <a:srgbClr val="F0F0FF"/>
+                    </a:solidFill>
+                  </a:tcPr>
+                </a:tc>
+                <a:extLst>
+                  <a:ext uri="{0D108BD9-81ED-4DB2-BD59-A6C34878D82A}">
+                    <a16:rowId xmlns:a16="http://schemas.microsoft.com/office/drawing/2014/main" val="10007"/>
+                  </a:ext>
+                </a:extLst>
+              </a:tr>
+            </a:tbl>
+          </a:graphicData>
+        </a:graphic>
+      </p:graphicFrame>
+    </p:spTree>
+  </p:cSld>
+  <p:clrMapOvr>
+    <a:masterClrMapping/>
+  </p:clrMapOvr>
+</p:sld>
+</file>
+
+<file path=ppt/slides/slide11.xml><?xml version="1.0" encoding="utf-8"?>
+<p:sld xmlns:a="http://schemas.openxmlformats.org/drawingml/2006/main" xmlns:r="http://schemas.openxmlformats.org/officeDocument/2006/relationships" xmlns:p="http://schemas.openxmlformats.org/presentationml/2006/main">
+  <p:cSld>
+    <p:bg>
+      <p:bgPr>
+        <a:solidFill>
+          <a:srgbClr val="FFFFFF"/>
+        </a:solidFill>
+        <a:effectLst/>
+      </p:bgPr>
+    </p:bg>
+    <p:spTree>
+      <p:nvGrpSpPr>
+        <p:cNvPr id="1" name=""/>
+        <p:cNvGrpSpPr/>
+        <p:nvPr/>
+      </p:nvGrpSpPr>
+      <p:grpSpPr>
+        <a:xfrm>
+          <a:off x="0" y="0"/>
+          <a:ext cx="0" cy="0"/>
+          <a:chOff x="0" y="0"/>
+          <a:chExt cx="0" cy="0"/>
+        </a:xfrm>
+      </p:grpSpPr>
+      <p:sp>
+        <p:nvSpPr>
+          <p:cNvPr id="2" name="TextBox 1"/>
+          <p:cNvSpPr txBox="1"/>
+          <p:nvPr/>
+        </p:nvSpPr>
+        <p:spPr>
+          <a:xfrm>
+            <a:off x="731520" y="365760"/>
+            <a:ext cx="10698480" cy="584775"/>
+          </a:xfrm>
+          <a:prstGeom prst="rect">
+            <a:avLst/>
+          </a:prstGeom>
+          <a:noFill/>
+        </p:spPr>
+        <p:txBody>
+          <a:bodyPr wrap="square" lIns="91440" tIns="45720" rIns="91440" bIns="45720" anchor="t">
+            <a:spAutoFit/>
+          </a:bodyPr>
+          <a:lstStyle/>
+          <a:p>
+            <a:pPr algn="l">
+              <a:defRPr sz="3200" b="1">
+                <a:solidFill>
+                  <a:srgbClr val="1E1E1E"/>
+                </a:solidFill>
+                <a:latin typeface="Times New Roman"/>
+              </a:defRPr>
+            </a:pPr>
+            <a:r>
+              <a:t>Algorithm </a:t>
+            </a:r>
+            <a:r>
+              <a:rPr lang="en-US"/>
+              <a:t>Methodology</a:t>
+            </a:r>
+            <a:endParaRPr/>
+          </a:p>
+        </p:txBody>
+      </p:sp>
+      <p:sp>
+        <p:nvSpPr>
+          <p:cNvPr id="3" name="Rectangle 2"/>
+          <p:cNvSpPr/>
+          <p:nvPr/>
+        </p:nvSpPr>
+        <p:spPr>
+          <a:xfrm>
+            <a:off x="731520" y="1005840"/>
+            <a:ext cx="10698480" cy="25400"/>
+          </a:xfrm>
+          <a:prstGeom prst="rect">
+            <a:avLst/>
+          </a:prstGeom>
+          <a:solidFill>
+            <a:srgbClr val="2563EB"/>
+          </a:solidFill>
+          <a:ln>
+            <a:noFill/>
+          </a:ln>
+        </p:spPr>
+        <p:style>
+          <a:lnRef idx="1">
+            <a:schemeClr val="accent1"/>
+          </a:lnRef>
+          <a:fillRef idx="3">
+            <a:schemeClr val="accent1"/>
+          </a:fillRef>
+          <a:effectRef idx="2">
+            <a:schemeClr val="accent1"/>
+          </a:effectRef>
+          <a:fontRef idx="minor">
+            <a:schemeClr val="lt1"/>
+          </a:fontRef>
+        </p:style>
+        <p:txBody>
+          <a:bodyPr rtlCol="0" anchor="ctr"/>
+          <a:lstStyle/>
+          <a:p>
+            <a:pPr algn="ctr"/>
+            <a:endParaRPr/>
+          </a:p>
+        </p:txBody>
+      </p:sp>
       <p:sp>
         <p:nvSpPr>
           <p:cNvPr id="4" name="TextBox 3"/>
@@ -3756,7 +6473,7 @@
 </p:sld>
 </file>
 
-<file path=ppt/slides/slide11.xml><?xml version="1.0" encoding="utf-8"?>
+<file path=ppt/slides/slide12.xml><?xml version="1.0" encoding="utf-8"?>
 <p:sld xmlns:a="http://schemas.openxmlformats.org/drawingml/2006/main" xmlns:r="http://schemas.openxmlformats.org/officeDocument/2006/relationships" xmlns:p="http://schemas.openxmlformats.org/presentationml/2006/main">
   <p:cSld>
     <p:bg>
@@ -3989,7 +6706,7 @@
 </p:sld>
 </file>
 
-<file path=ppt/slides/slide12.xml><?xml version="1.0" encoding="utf-8"?>
+<file path=ppt/slides/slide13.xml><?xml version="1.0" encoding="utf-8"?>
 <p:sld xmlns:a="http://schemas.openxmlformats.org/drawingml/2006/main" xmlns:r="http://schemas.openxmlformats.org/officeDocument/2006/relationships" xmlns:p="http://schemas.openxmlformats.org/presentationml/2006/main">
   <p:cSld>
     <p:bg>
@@ -4222,7 +6939,7 @@
 </p:sld>
 </file>
 
-<file path=ppt/slides/slide13.xml><?xml version="1.0" encoding="utf-8"?>
+<file path=ppt/slides/slide14.xml><?xml version="1.0" encoding="utf-8"?>
 <p:sld xmlns:a="http://schemas.openxmlformats.org/drawingml/2006/main" xmlns:r="http://schemas.openxmlformats.org/officeDocument/2006/relationships" xmlns:p="http://schemas.openxmlformats.org/presentationml/2006/main">
   <p:cSld>
     <p:bg>
@@ -4419,7 +7136,7 @@
 </p:sld>
 </file>
 
-<file path=ppt/slides/slide14.xml><?xml version="1.0" encoding="utf-8"?>
+<file path=ppt/slides/slide15.xml><?xml version="1.0" encoding="utf-8"?>
 <p:sld xmlns:a="http://schemas.openxmlformats.org/drawingml/2006/main" xmlns:r="http://schemas.openxmlformats.org/officeDocument/2006/relationships" xmlns:p="http://schemas.openxmlformats.org/presentationml/2006/main">
   <p:cSld>
     <p:bg>
@@ -5272,7 +7989,7 @@
         </p:nvSpPr>
         <p:spPr>
           <a:xfrm>
-            <a:off x="731520" y="4206240"/>
+            <a:off x="731520" y="4480914"/>
             <a:ext cx="10698480" cy="365760"/>
           </a:xfrm>
           <a:prstGeom prst="rect">
@@ -5308,7 +8025,7 @@
         </p:nvSpPr>
         <p:spPr>
           <a:xfrm>
-            <a:off x="731520" y="4663440"/>
+            <a:off x="731520" y="4840650"/>
             <a:ext cx="10698480" cy="457200"/>
           </a:xfrm>
           <a:prstGeom prst="rect">
@@ -5369,413 +8086,6 @@
             </a:pPr>
             <a:r>
               <a:t>- AES wins on latency &amp; throughput (hardware AES-NI). ChaCha20 is the best choice on devices without AES-NI hardware.</a:t>
-            </a:r>
-          </a:p>
-        </p:txBody>
-      </p:sp>
-    </p:spTree>
-  </p:cSld>
-  <p:clrMapOvr>
-    <a:masterClrMapping/>
-  </p:clrMapOvr>
-</p:sld>
-</file>
-
-<file path=ppt/slides/slide15.xml><?xml version="1.0" encoding="utf-8"?>
-<p:sld xmlns:a="http://schemas.openxmlformats.org/drawingml/2006/main" xmlns:r="http://schemas.openxmlformats.org/officeDocument/2006/relationships" xmlns:p="http://schemas.openxmlformats.org/presentationml/2006/main">
-  <p:cSld>
-    <p:bg>
-      <p:bgPr>
-        <a:solidFill>
-          <a:srgbClr val="FFFFFF"/>
-        </a:solidFill>
-        <a:effectLst/>
-      </p:bgPr>
-    </p:bg>
-    <p:spTree>
-      <p:nvGrpSpPr>
-        <p:cNvPr id="1" name=""/>
-        <p:cNvGrpSpPr/>
-        <p:nvPr/>
-      </p:nvGrpSpPr>
-      <p:grpSpPr>
-        <a:xfrm>
-          <a:off x="0" y="0"/>
-          <a:ext cx="0" cy="0"/>
-          <a:chOff x="0" y="0"/>
-          <a:chExt cx="0" cy="0"/>
-        </a:xfrm>
-      </p:grpSpPr>
-      <p:sp>
-        <p:nvSpPr>
-          <p:cNvPr id="2" name="TextBox 1"/>
-          <p:cNvSpPr txBox="1"/>
-          <p:nvPr/>
-        </p:nvSpPr>
-        <p:spPr>
-          <a:xfrm>
-            <a:off x="637563" y="301251"/>
-            <a:ext cx="10792437" cy="584775"/>
-          </a:xfrm>
-          <a:prstGeom prst="rect">
-            <a:avLst/>
-          </a:prstGeom>
-          <a:noFill/>
-        </p:spPr>
-        <p:txBody>
-          <a:bodyPr wrap="square">
-            <a:spAutoFit/>
-          </a:bodyPr>
-          <a:lstStyle/>
-          <a:p>
-            <a:pPr algn="l">
-              <a:defRPr sz="3200" b="1">
-                <a:solidFill>
-                  <a:srgbClr val="1E1E1E"/>
-                </a:solidFill>
-                <a:latin typeface="Times New Roman"/>
-              </a:defRPr>
-            </a:pPr>
-            <a:r>
-              <a:rPr dirty="0"/>
-              <a:t>Why Single-Node Benchmarking &amp; Distributed Systems?</a:t>
-            </a:r>
-          </a:p>
-        </p:txBody>
-      </p:sp>
-      <p:sp>
-        <p:nvSpPr>
-          <p:cNvPr id="3" name="Rectangle 2"/>
-          <p:cNvSpPr/>
-          <p:nvPr/>
-        </p:nvSpPr>
-        <p:spPr>
-          <a:xfrm>
-            <a:off x="731520" y="1005840"/>
-            <a:ext cx="10698480" cy="25400"/>
-          </a:xfrm>
-          <a:prstGeom prst="rect">
-            <a:avLst/>
-          </a:prstGeom>
-          <a:solidFill>
-            <a:srgbClr val="2563EB"/>
-          </a:solidFill>
-          <a:ln>
-            <a:noFill/>
-          </a:ln>
-        </p:spPr>
-        <p:style>
-          <a:lnRef idx="1">
-            <a:schemeClr val="accent1"/>
-          </a:lnRef>
-          <a:fillRef idx="3">
-            <a:schemeClr val="accent1"/>
-          </a:fillRef>
-          <a:effectRef idx="2">
-            <a:schemeClr val="accent1"/>
-          </a:effectRef>
-          <a:fontRef idx="minor">
-            <a:schemeClr val="lt1"/>
-          </a:fontRef>
-        </p:style>
-        <p:txBody>
-          <a:bodyPr rtlCol="0" anchor="ctr"/>
-          <a:lstStyle/>
-          <a:p>
-            <a:pPr algn="ctr"/>
-            <a:endParaRPr/>
-          </a:p>
-        </p:txBody>
-      </p:sp>
-      <p:sp>
-        <p:nvSpPr>
-          <p:cNvPr id="4" name="TextBox 3"/>
-          <p:cNvSpPr txBox="1"/>
-          <p:nvPr/>
-        </p:nvSpPr>
-        <p:spPr>
-          <a:xfrm>
-            <a:off x="731520" y="1280160"/>
-            <a:ext cx="4846320" cy="5029200"/>
-          </a:xfrm>
-          <a:prstGeom prst="rect">
-            <a:avLst/>
-          </a:prstGeom>
-          <a:noFill/>
-        </p:spPr>
-        <p:txBody>
-          <a:bodyPr wrap="square">
-            <a:spAutoFit/>
-          </a:bodyPr>
-          <a:lstStyle/>
-          <a:p>
-            <a:pPr>
-              <a:spcAft>
-                <a:spcPts val="800"/>
-              </a:spcAft>
-              <a:defRPr sz="1400">
-                <a:solidFill>
-                  <a:srgbClr val="000000"/>
-                </a:solidFill>
-                <a:latin typeface="Times New Roman"/>
-              </a:defRPr>
-            </a:pPr>
-            <a:r>
-              <a:t>Why Single-Node First?</a:t>
-            </a:r>
-          </a:p>
-          <a:p>
-            <a:pPr>
-              <a:spcAft>
-                <a:spcPts val="800"/>
-              </a:spcAft>
-              <a:defRPr sz="1400">
-                <a:solidFill>
-                  <a:srgbClr val="000000"/>
-                </a:solidFill>
-                <a:latin typeface="Times New Roman"/>
-              </a:defRPr>
-            </a:pPr>
-            <a:endParaRPr/>
-          </a:p>
-          <a:p>
-            <a:pPr>
-              <a:spcAft>
-                <a:spcPts val="800"/>
-              </a:spcAft>
-              <a:defRPr sz="1400">
-                <a:solidFill>
-                  <a:srgbClr val="000000"/>
-                </a:solidFill>
-                <a:latin typeface="Times New Roman"/>
-              </a:defRPr>
-            </a:pPr>
-            <a:r>
-              <a:t>1. Establishes the Baseline: You cannot measure distributed scalability without knowing what 1 node can do. Single-node results provide the denominator for the Scalability Factor.</a:t>
-            </a:r>
-          </a:p>
-          <a:p>
-            <a:pPr>
-              <a:spcAft>
-                <a:spcPts val="800"/>
-              </a:spcAft>
-              <a:defRPr sz="1400">
-                <a:solidFill>
-                  <a:srgbClr val="000000"/>
-                </a:solidFill>
-                <a:latin typeface="Times New Roman"/>
-              </a:defRPr>
-            </a:pPr>
-            <a:endParaRPr/>
-          </a:p>
-          <a:p>
-            <a:pPr>
-              <a:spcAft>
-                <a:spcPts val="800"/>
-              </a:spcAft>
-              <a:defRPr sz="1400">
-                <a:solidFill>
-                  <a:srgbClr val="000000"/>
-                </a:solidFill>
-                <a:latin typeface="Times New Roman"/>
-              </a:defRPr>
-            </a:pPr>
-            <a:r>
-              <a:t>2. Finds Optimal Packet Size: Testing 1KB, 10KB, 100KB reveals each algorithm's setup overhead vs. processing cost curve, identifying the ideal network packet size.</a:t>
-            </a:r>
-          </a:p>
-          <a:p>
-            <a:pPr>
-              <a:spcAft>
-                <a:spcPts val="800"/>
-              </a:spcAft>
-              <a:defRPr sz="1400">
-                <a:solidFill>
-                  <a:srgbClr val="000000"/>
-                </a:solidFill>
-                <a:latin typeface="Times New Roman"/>
-              </a:defRPr>
-            </a:pPr>
-            <a:endParaRPr/>
-          </a:p>
-          <a:p>
-            <a:pPr>
-              <a:spcAft>
-                <a:spcPts val="800"/>
-              </a:spcAft>
-              <a:defRPr sz="1400">
-                <a:solidFill>
-                  <a:srgbClr val="000000"/>
-                </a:solidFill>
-                <a:latin typeface="Times New Roman"/>
-              </a:defRPr>
-            </a:pPr>
-            <a:r>
-              <a:t>3. Proves Hardware Feasibility: Isolates exact CPU% and peak RAM per device, proving the algorithm is physically deployable on constrained IoT hardware.</a:t>
-            </a:r>
-          </a:p>
-        </p:txBody>
-      </p:sp>
-      <p:sp>
-        <p:nvSpPr>
-          <p:cNvPr id="5" name="TextBox 4"/>
-          <p:cNvSpPr txBox="1"/>
-          <p:nvPr/>
-        </p:nvSpPr>
-        <p:spPr>
-          <a:xfrm>
-            <a:off x="5943600" y="1280160"/>
-            <a:ext cx="5303520" cy="5029200"/>
-          </a:xfrm>
-          <a:prstGeom prst="rect">
-            <a:avLst/>
-          </a:prstGeom>
-          <a:noFill/>
-        </p:spPr>
-        <p:txBody>
-          <a:bodyPr wrap="square">
-            <a:spAutoFit/>
-          </a:bodyPr>
-          <a:lstStyle/>
-          <a:p>
-            <a:pPr>
-              <a:spcAft>
-                <a:spcPts val="800"/>
-              </a:spcAft>
-              <a:defRPr sz="1400">
-                <a:solidFill>
-                  <a:srgbClr val="000000"/>
-                </a:solidFill>
-                <a:latin typeface="Times New Roman"/>
-              </a:defRPr>
-            </a:pPr>
-            <a:r>
-              <a:rPr dirty="0"/>
-              <a:t>Why Distributed Systems?</a:t>
-            </a:r>
-          </a:p>
-          <a:p>
-            <a:pPr>
-              <a:spcAft>
-                <a:spcPts val="800"/>
-              </a:spcAft>
-              <a:defRPr sz="1400">
-                <a:solidFill>
-                  <a:srgbClr val="000000"/>
-                </a:solidFill>
-                <a:latin typeface="Times New Roman"/>
-              </a:defRPr>
-            </a:pPr>
-            <a:endParaRPr dirty="0"/>
-          </a:p>
-          <a:p>
-            <a:pPr>
-              <a:spcAft>
-                <a:spcPts val="800"/>
-              </a:spcAft>
-              <a:defRPr sz="1400">
-                <a:solidFill>
-                  <a:srgbClr val="000000"/>
-                </a:solidFill>
-                <a:latin typeface="Times New Roman"/>
-              </a:defRPr>
-            </a:pPr>
-            <a:r>
-              <a:rPr dirty="0"/>
-              <a:t>1. Real-World Scale: IoT deployments have thousands of nodes encrypting concurrently. A single-node test cannot capture inter-node overhead or parallel contention.</a:t>
-            </a:r>
-          </a:p>
-          <a:p>
-            <a:pPr>
-              <a:spcAft>
-                <a:spcPts val="800"/>
-              </a:spcAft>
-              <a:defRPr sz="1400">
-                <a:solidFill>
-                  <a:srgbClr val="000000"/>
-                </a:solidFill>
-                <a:latin typeface="Times New Roman"/>
-              </a:defRPr>
-            </a:pPr>
-            <a:endParaRPr dirty="0"/>
-          </a:p>
-          <a:p>
-            <a:pPr>
-              <a:spcAft>
-                <a:spcPts val="800"/>
-              </a:spcAft>
-              <a:defRPr sz="1400">
-                <a:solidFill>
-                  <a:srgbClr val="000000"/>
-                </a:solidFill>
-                <a:latin typeface="Times New Roman"/>
-              </a:defRPr>
-            </a:pPr>
-            <a:r>
-              <a:rPr dirty="0"/>
-              <a:t>2. Scalability Proof: By distributing a fixed 100KB workload across N=5 to N=1000 nodes, we prove near-linear throughput scaling for AES/ChaCha20.</a:t>
-            </a:r>
-          </a:p>
-          <a:p>
-            <a:pPr>
-              <a:spcAft>
-                <a:spcPts val="800"/>
-              </a:spcAft>
-              <a:defRPr sz="1400">
-                <a:solidFill>
-                  <a:srgbClr val="000000"/>
-                </a:solidFill>
-                <a:latin typeface="Times New Roman"/>
-              </a:defRPr>
-            </a:pPr>
-            <a:endParaRPr dirty="0"/>
-          </a:p>
-          <a:p>
-            <a:pPr>
-              <a:spcAft>
-                <a:spcPts val="800"/>
-              </a:spcAft>
-              <a:defRPr sz="1400">
-                <a:solidFill>
-                  <a:srgbClr val="000000"/>
-                </a:solidFill>
-                <a:latin typeface="Times New Roman"/>
-              </a:defRPr>
-            </a:pPr>
-            <a:r>
-              <a:rPr dirty="0"/>
-              <a:t>3. Data Sovereignty: Encrypting at the edge (not cloud) keeps plaintext off the network. This architecture tolerates compromised intermediate nodes.</a:t>
-            </a:r>
-          </a:p>
-          <a:p>
-            <a:pPr>
-              <a:spcAft>
-                <a:spcPts val="800"/>
-              </a:spcAft>
-              <a:defRPr sz="1400">
-                <a:solidFill>
-                  <a:srgbClr val="000000"/>
-                </a:solidFill>
-                <a:latin typeface="Times New Roman"/>
-              </a:defRPr>
-            </a:pPr>
-            <a:endParaRPr dirty="0"/>
-          </a:p>
-          <a:p>
-            <a:pPr>
-              <a:spcAft>
-                <a:spcPts val="800"/>
-              </a:spcAft>
-              <a:defRPr sz="1400">
-                <a:solidFill>
-                  <a:srgbClr val="000000"/>
-                </a:solidFill>
-                <a:latin typeface="Times New Roman"/>
-              </a:defRPr>
-            </a:pPr>
-            <a:r>
-              <a:rPr dirty="0"/>
-              <a:t>4. Key Finding: AES/ChaCha20 scale almost perfectly. PRESENT/SPECK's process overhead exceeds their encryption time at high node counts.</a:t>
             </a:r>
           </a:p>
         </p:txBody>
@@ -6795,7 +9105,7 @@
         <p:spPr>
           <a:xfrm>
             <a:off x="731520" y="1280160"/>
-            <a:ext cx="10698480" cy="5029200"/>
+            <a:ext cx="10698480" cy="4488408"/>
           </a:xfrm>
           <a:prstGeom prst="rect">
             <a:avLst/>
@@ -6803,7 +9113,7 @@
           <a:noFill/>
         </p:spPr>
         <p:txBody>
-          <a:bodyPr wrap="square">
+          <a:bodyPr wrap="square" lIns="91440" tIns="45720" rIns="91440" bIns="45720" anchor="t">
             <a:spAutoFit/>
           </a:bodyPr>
           <a:lstStyle/>
@@ -6820,7 +9130,16 @@
               </a:defRPr>
             </a:pPr>
             <a:r>
-              <a:t>[1] Daemen, J. &amp; Rijmen, V. (2002). "The Design of Rijndael: AES." Springer.</a:t>
+              <a:rPr dirty="0"/>
+              <a:t>[1] Daemen, J. &amp; </a:t>
+            </a:r>
+            <a:r>
+              <a:rPr dirty="0" err="1"/>
+              <a:t>Rijmen</a:t>
+            </a:r>
+            <a:r>
+              <a:rPr dirty="0"/>
+              <a:t>, V. (2002). "The Design of Rijndael: AES." Springer.</a:t>
             </a:r>
           </a:p>
           <a:p>
@@ -6836,8 +9155,20 @@
               </a:defRPr>
             </a:pPr>
             <a:r>
-              <a:t>[2] Bernstein, D.J. (2008). "ChaCha, a variant of Salsa20." SASC 2008.</a:t>
-            </a:r>
+              <a:rPr dirty="0"/>
+              <a:t>[2] Bernstein, D.J. (2008). "</a:t>
+            </a:r>
+            <a:r>
+              <a:rPr dirty="0" err="1"/>
+              <a:t>ChaCha</a:t>
+            </a:r>
+            <a:r>
+              <a:rPr dirty="0"/>
+              <a:t>, a variant of Salsa20." SASC 2008.</a:t>
+            </a:r>
+            <a:endParaRPr dirty="0">
+              <a:cs typeface="Times New Roman"/>
+            </a:endParaRPr>
           </a:p>
           <a:p>
             <a:pPr>
@@ -6868,8 +9199,20 @@
               </a:defRPr>
             </a:pPr>
             <a:r>
-              <a:t>[4] Beaulieu, R. et al. (2013). "The SIMON and SPECK Families of Lightweight Block Ciphers." IACR ePrint 2013/404.</a:t>
-            </a:r>
+              <a:rPr dirty="0"/>
+              <a:t>[4] Beaulieu, R. et al. (2013). "The SIMON and SPECK Families of Lightweight Block Ciphers." IACR </a:t>
+            </a:r>
+            <a:r>
+              <a:rPr dirty="0" err="1"/>
+              <a:t>ePrint</a:t>
+            </a:r>
+            <a:r>
+              <a:rPr dirty="0"/>
+              <a:t> 2013/404.</a:t>
+            </a:r>
+            <a:endParaRPr dirty="0">
+              <a:cs typeface="Times New Roman"/>
+            </a:endParaRPr>
           </a:p>
           <a:p>
             <a:pPr>
@@ -6964,8 +9307,126 @@
               </a:defRPr>
             </a:pPr>
             <a:r>
-              <a:t>[10] Hatzivasilis, G. et al. (2018). "Review of Lightweight Block Ciphers." Journal of Cryptographic Engineering, 8(2).</a:t>
-            </a:r>
+              <a:rPr dirty="0"/>
+              <a:t>[10] </a:t>
+            </a:r>
+            <a:r>
+              <a:rPr dirty="0" err="1"/>
+              <a:t>Hatzivasilis</a:t>
+            </a:r>
+            <a:r>
+              <a:rPr dirty="0"/>
+              <a:t>, G. et al. (2018). "Review of Lightweight Block Ciphers." Journal of Cryptographic Engineering, 8(2).</a:t>
+            </a:r>
+            <a:endParaRPr dirty="0">
+              <a:cs typeface="Times New Roman"/>
+            </a:endParaRPr>
+          </a:p>
+          <a:p>
+            <a:pPr>
+              <a:spcAft>
+                <a:spcPts val="800"/>
+              </a:spcAft>
+              <a:defRPr sz="1400">
+                <a:solidFill>
+                  <a:srgbClr val="000000"/>
+                </a:solidFill>
+                <a:latin typeface="Times New Roman"/>
+              </a:defRPr>
+            </a:pPr>
+            <a:r>
+              <a:rPr lang="en-US" sz="1400">
+                <a:cs typeface="Times New Roman"/>
+              </a:rPr>
+              <a:t>[11] </a:t>
+            </a:r>
+            <a:r>
+              <a:rPr lang="en-US" sz="1400" dirty="0">
+                <a:cs typeface="Times New Roman"/>
+                <a:hlinkClick r:id="rId2"/>
+              </a:rPr>
+              <a:t>https://en.wikipedia.org/wiki/Advanced_Encryption_Standard</a:t>
+            </a:r>
+            <a:endParaRPr lang="en-US" sz="1400" dirty="0">
+              <a:cs typeface="Times New Roman"/>
+            </a:endParaRPr>
+          </a:p>
+          <a:p>
+            <a:pPr>
+              <a:spcAft>
+                <a:spcPts val="800"/>
+              </a:spcAft>
+              <a:defRPr sz="1400">
+                <a:solidFill>
+                  <a:srgbClr val="000000"/>
+                </a:solidFill>
+                <a:latin typeface="Times New Roman"/>
+              </a:defRPr>
+            </a:pPr>
+            <a:r>
+              <a:rPr lang="en-US" sz="1400">
+                <a:cs typeface="Times New Roman"/>
+              </a:rPr>
+              <a:t>[12] </a:t>
+            </a:r>
+            <a:r>
+              <a:rPr lang="en-US" sz="1400" dirty="0">
+                <a:cs typeface="Times New Roman"/>
+                <a:hlinkClick r:id="rId3"/>
+              </a:rPr>
+              <a:t>https://en.wikipedia.org/wiki/Salsa20#ChaCha_variant</a:t>
+            </a:r>
+            <a:endParaRPr lang="en-US" sz="1400" dirty="0">
+              <a:cs typeface="Times New Roman"/>
+            </a:endParaRPr>
+          </a:p>
+          <a:p>
+            <a:pPr>
+              <a:spcAft>
+                <a:spcPts val="800"/>
+              </a:spcAft>
+              <a:defRPr sz="1400">
+                <a:solidFill>
+                  <a:srgbClr val="000000"/>
+                </a:solidFill>
+                <a:latin typeface="Times New Roman"/>
+              </a:defRPr>
+            </a:pPr>
+            <a:r>
+              <a:rPr lang="en-US" sz="1400" dirty="0">
+                <a:cs typeface="Times New Roman"/>
+              </a:rPr>
+              <a:t>[13] </a:t>
+            </a:r>
+            <a:r>
+              <a:rPr lang="en-US" sz="1400" dirty="0">
+                <a:cs typeface="Times New Roman"/>
+                <a:hlinkClick r:id="rId4"/>
+              </a:rPr>
+              <a:t>https://en.wikipedia.org/wiki/PRESENT_(cipher</a:t>
+            </a:r>
+            <a:r>
+              <a:rPr lang="en-US" sz="1400" dirty="0">
+                <a:cs typeface="Times New Roman"/>
+              </a:rPr>
+              <a:t>)</a:t>
+            </a:r>
+          </a:p>
+          <a:p>
+            <a:pPr>
+              <a:spcAft>
+                <a:spcPts val="800"/>
+              </a:spcAft>
+              <a:defRPr sz="1400">
+                <a:solidFill>
+                  <a:srgbClr val="000000"/>
+                </a:solidFill>
+                <a:latin typeface="Times New Roman"/>
+              </a:defRPr>
+            </a:pPr>
+            <a:endParaRPr lang="en-US" dirty="0">
+              <a:cs typeface="Times New Roman"/>
+            </a:endParaRPr>
           </a:p>
         </p:txBody>
       </p:sp>
@@ -7010,8 +9471,8 @@
         </p:nvSpPr>
         <p:spPr>
           <a:xfrm>
-            <a:off x="731520" y="365760"/>
-            <a:ext cx="10698480" cy="640080"/>
+            <a:off x="731520" y="2286000"/>
+            <a:ext cx="10698480" cy="1371600"/>
           </a:xfrm>
           <a:prstGeom prst="rect">
             <a:avLst/>
@@ -7024,8 +9485,8 @@
           </a:bodyPr>
           <a:lstStyle/>
           <a:p>
-            <a:pPr algn="l">
-              <a:defRPr sz="3200" b="1">
+            <a:pPr algn="ctr">
+              <a:defRPr sz="4800" b="1">
                 <a:solidFill>
                   <a:srgbClr val="1E1E1E"/>
                 </a:solidFill>
@@ -7033,7 +9494,7 @@
               </a:defRPr>
             </a:pPr>
             <a:r>
-              <a:t>References (2/2)</a:t>
+              <a:t>Thank You</a:t>
             </a:r>
           </a:p>
         </p:txBody>
@@ -7046,7 +9507,7 @@
         </p:nvSpPr>
         <p:spPr>
           <a:xfrm>
-            <a:off x="731520" y="1005840"/>
+            <a:off x="731520" y="3657600"/>
             <a:ext cx="10698480" cy="25400"/>
           </a:xfrm>
           <a:prstGeom prst="rect">
@@ -7079,107 +9540,6 @@
           <a:p>
             <a:pPr algn="ctr"/>
             <a:endParaRPr/>
-          </a:p>
-        </p:txBody>
-      </p:sp>
-      <p:sp>
-        <p:nvSpPr>
-          <p:cNvPr id="4" name="TextBox 3"/>
-          <p:cNvSpPr txBox="1"/>
-          <p:nvPr/>
-        </p:nvSpPr>
-        <p:spPr>
-          <a:xfrm>
-            <a:off x="731520" y="1280160"/>
-            <a:ext cx="10698480" cy="5029200"/>
-          </a:xfrm>
-          <a:prstGeom prst="rect">
-            <a:avLst/>
-          </a:prstGeom>
-          <a:noFill/>
-        </p:spPr>
-        <p:txBody>
-          <a:bodyPr wrap="square">
-            <a:spAutoFit/>
-          </a:bodyPr>
-          <a:lstStyle/>
-          <a:p>
-            <a:pPr>
-              <a:spcAft>
-                <a:spcPts val="800"/>
-              </a:spcAft>
-              <a:defRPr sz="1500">
-                <a:solidFill>
-                  <a:srgbClr val="000000"/>
-                </a:solidFill>
-                <a:latin typeface="Times New Roman"/>
-              </a:defRPr>
-            </a:pPr>
-            <a:r>
-              <a:t>Wikipedia / Online References:</a:t>
-            </a:r>
-          </a:p>
-          <a:p>
-            <a:pPr>
-              <a:spcAft>
-                <a:spcPts val="800"/>
-              </a:spcAft>
-              <a:defRPr sz="1500">
-                <a:solidFill>
-                  <a:srgbClr val="000000"/>
-                </a:solidFill>
-                <a:latin typeface="Times New Roman"/>
-              </a:defRPr>
-            </a:pPr>
-            <a:endParaRPr/>
-          </a:p>
-          <a:p>
-            <a:pPr>
-              <a:spcAft>
-                <a:spcPts val="800"/>
-              </a:spcAft>
-              <a:defRPr sz="1500">
-                <a:solidFill>
-                  <a:srgbClr val="000000"/>
-                </a:solidFill>
-                <a:latin typeface="Times New Roman"/>
-              </a:defRPr>
-            </a:pPr>
-            <a:r>
-              <a:t>[W1] https://en.wikipedia.org/wiki/Advanced_Encryption_Standard</a:t>
-            </a:r>
-          </a:p>
-          <a:p>
-            <a:pPr>
-              <a:spcAft>
-                <a:spcPts val="800"/>
-              </a:spcAft>
-              <a:defRPr sz="1500">
-                <a:solidFill>
-                  <a:srgbClr val="000000"/>
-                </a:solidFill>
-                <a:latin typeface="Times New Roman"/>
-              </a:defRPr>
-            </a:pPr>
-            <a:r>
-              <a:t>[W2] https://en.wikipedia.org/wiki/Salsa20#ChaCha_variant</a:t>
-            </a:r>
-          </a:p>
-          <a:p>
-            <a:pPr>
-              <a:spcAft>
-                <a:spcPts val="800"/>
-              </a:spcAft>
-              <a:defRPr sz="1500">
-                <a:solidFill>
-                  <a:srgbClr val="000000"/>
-                </a:solidFill>
-                <a:latin typeface="Times New Roman"/>
-              </a:defRPr>
-            </a:pPr>
-            <a:r>
-              <a:t>[W3] https://en.wikipedia.org/wiki/PRESENT_(cipher)</a:t>
-            </a:r>
           </a:p>
         </p:txBody>
       </p:sp>
@@ -7305,7 +9665,7 @@
         <p:spPr>
           <a:xfrm>
             <a:off x="731520" y="1371600"/>
-            <a:ext cx="10698480" cy="5029200"/>
+            <a:ext cx="10698480" cy="3375283"/>
           </a:xfrm>
           <a:prstGeom prst="rect">
             <a:avLst/>
@@ -7313,10 +9673,73 @@
           <a:noFill/>
         </p:spPr>
         <p:txBody>
-          <a:bodyPr wrap="square">
+          <a:bodyPr wrap="square" lIns="91440" tIns="45720" rIns="91440" bIns="45720" anchor="t">
             <a:spAutoFit/>
           </a:bodyPr>
           <a:lstStyle/>
+          <a:p>
+            <a:pPr marL="285750" indent="-285750">
+              <a:spcAft>
+                <a:spcPts val="800"/>
+              </a:spcAft>
+              <a:buFont typeface="Arial"/>
+              <a:buChar char="•"/>
+              <a:defRPr sz="1800">
+                <a:solidFill>
+                  <a:srgbClr val="000000"/>
+                </a:solidFill>
+                <a:latin typeface="Times New Roman"/>
+              </a:defRPr>
+            </a:pPr>
+            <a:r>
+              <a:rPr dirty="0"/>
+              <a:t>Security Constraint: IoT edge devices (sensors, smart cameras, medical monitors) collect sensitive data that must be encrypted immediately before transmission.</a:t>
+            </a:r>
+            <a:endParaRPr lang="en-US"/>
+          </a:p>
+          <a:p>
+            <a:pPr marL="285750" indent="-285750">
+              <a:spcAft>
+                <a:spcPts val="800"/>
+              </a:spcAft>
+              <a:buFont typeface="Arial"/>
+              <a:buChar char="•"/>
+              <a:defRPr sz="1800">
+                <a:solidFill>
+                  <a:srgbClr val="000000"/>
+                </a:solidFill>
+                <a:latin typeface="Times New Roman"/>
+              </a:defRPr>
+            </a:pPr>
+            <a:r>
+              <a:rPr dirty="0"/>
+              <a:t>Hardware Constraint: Edge devices possess strictly limited CPU cycles, memory, and battery life.</a:t>
+            </a:r>
+            <a:endParaRPr dirty="0">
+              <a:cs typeface="Times New Roman"/>
+            </a:endParaRPr>
+          </a:p>
+          <a:p>
+            <a:pPr marL="285750" indent="-285750">
+              <a:spcAft>
+                <a:spcPts val="800"/>
+              </a:spcAft>
+              <a:buFont typeface="Arial"/>
+              <a:buChar char="•"/>
+              <a:defRPr sz="1800">
+                <a:solidFill>
+                  <a:srgbClr val="000000"/>
+                </a:solidFill>
+                <a:latin typeface="Times New Roman"/>
+              </a:defRPr>
+            </a:pPr>
+            <a:r>
+              <a:t>Conventional Problem: Traditional standard encryption (like full hardware AES) may exhaust the resources of ultra-constrained devices (e.g., simple RFID tags or microcontrollers).</a:t>
+            </a:r>
+            <a:endParaRPr>
+              <a:cs typeface="Times New Roman"/>
+            </a:endParaRPr>
+          </a:p>
           <a:p>
             <a:pPr>
               <a:spcAft>
@@ -7329,9 +9752,9 @@
                 <a:latin typeface="Times New Roman"/>
               </a:defRPr>
             </a:pPr>
-            <a:r>
-              <a:t>- Security Constraint: IoT edge devices (sensors, smart cameras, medical monitors) collect sensitive data that must be encrypted immediately before transmission.</a:t>
-            </a:r>
+            <a:endParaRPr lang="en-US">
+              <a:cs typeface="Times New Roman"/>
+            </a:endParaRPr>
           </a:p>
           <a:p>
             <a:pPr>
@@ -7346,7 +9769,7 @@
               </a:defRPr>
             </a:pPr>
             <a:r>
-              <a:t>- Hardware Constraint: Edge devices possess strictly limited CPU cycles, memory, and battery life.</a:t>
+              <a:t>Core Objective:</a:t>
             </a:r>
           </a:p>
           <a:p>
@@ -7362,239 +9785,12 @@
               </a:defRPr>
             </a:pPr>
             <a:r>
-              <a:t>- Conventional Problem: Traditional standard encryption (like full hardware AES) may exhaust the resources of ultra-constrained devices (e.g., simple RFID tags or microcontrollers).</a:t>
-            </a:r>
-          </a:p>
-          <a:p>
-            <a:pPr>
-              <a:spcAft>
-                <a:spcPts val="800"/>
-              </a:spcAft>
-              <a:defRPr sz="1800">
-                <a:solidFill>
-                  <a:srgbClr val="000000"/>
-                </a:solidFill>
-                <a:latin typeface="Times New Roman"/>
-              </a:defRPr>
-            </a:pPr>
-            <a:endParaRPr/>
-          </a:p>
-          <a:p>
-            <a:pPr>
-              <a:spcAft>
-                <a:spcPts val="800"/>
-              </a:spcAft>
-              <a:defRPr sz="1800">
-                <a:solidFill>
-                  <a:srgbClr val="000000"/>
-                </a:solidFill>
-                <a:latin typeface="Times New Roman"/>
-              </a:defRPr>
-            </a:pPr>
-            <a:r>
-              <a:t>Core Objective:</a:t>
-            </a:r>
-          </a:p>
-          <a:p>
-            <a:pPr>
-              <a:spcAft>
-                <a:spcPts val="800"/>
-              </a:spcAft>
-              <a:defRPr sz="1800">
-                <a:solidFill>
-                  <a:srgbClr val="000000"/>
-                </a:solidFill>
-                <a:latin typeface="Times New Roman"/>
-              </a:defRPr>
-            </a:pPr>
-            <a:r>
+              <a:rPr dirty="0"/>
               <a:t>To conduct a rigorous comparative evaluation of standard versus lightweight encryption algorithms -- measuring latency, throughput, CPU utilization, and memory footprint -- to identify the optimal algorithm for diverse edge environments.</a:t>
             </a:r>
-          </a:p>
-        </p:txBody>
-      </p:sp>
-    </p:spTree>
-  </p:cSld>
-  <p:clrMapOvr>
-    <a:masterClrMapping/>
-  </p:clrMapOvr>
-</p:sld>
-</file>
-
-<file path=ppt/slides/slide20.xml><?xml version="1.0" encoding="utf-8"?>
-<p:sld xmlns:a="http://schemas.openxmlformats.org/drawingml/2006/main" xmlns:r="http://schemas.openxmlformats.org/officeDocument/2006/relationships" xmlns:p="http://schemas.openxmlformats.org/presentationml/2006/main">
-  <p:cSld>
-    <p:bg>
-      <p:bgPr>
-        <a:solidFill>
-          <a:srgbClr val="FFFFFF"/>
-        </a:solidFill>
-        <a:effectLst/>
-      </p:bgPr>
-    </p:bg>
-    <p:spTree>
-      <p:nvGrpSpPr>
-        <p:cNvPr id="1" name=""/>
-        <p:cNvGrpSpPr/>
-        <p:nvPr/>
-      </p:nvGrpSpPr>
-      <p:grpSpPr>
-        <a:xfrm>
-          <a:off x="0" y="0"/>
-          <a:ext cx="0" cy="0"/>
-          <a:chOff x="0" y="0"/>
-          <a:chExt cx="0" cy="0"/>
-        </a:xfrm>
-      </p:grpSpPr>
-      <p:sp>
-        <p:nvSpPr>
-          <p:cNvPr id="2" name="TextBox 1"/>
-          <p:cNvSpPr txBox="1"/>
-          <p:nvPr/>
-        </p:nvSpPr>
-        <p:spPr>
-          <a:xfrm>
-            <a:off x="731520" y="2286000"/>
-            <a:ext cx="10698480" cy="1371600"/>
-          </a:xfrm>
-          <a:prstGeom prst="rect">
-            <a:avLst/>
-          </a:prstGeom>
-          <a:noFill/>
-        </p:spPr>
-        <p:txBody>
-          <a:bodyPr wrap="square">
-            <a:spAutoFit/>
-          </a:bodyPr>
-          <a:lstStyle/>
-          <a:p>
-            <a:pPr algn="ctr">
-              <a:defRPr sz="4800" b="1">
-                <a:solidFill>
-                  <a:srgbClr val="1E1E1E"/>
-                </a:solidFill>
-                <a:latin typeface="Times New Roman"/>
-              </a:defRPr>
-            </a:pPr>
-            <a:r>
-              <a:t>Thank You</a:t>
-            </a:r>
-          </a:p>
-        </p:txBody>
-      </p:sp>
-      <p:sp>
-        <p:nvSpPr>
-          <p:cNvPr id="3" name="Rectangle 2"/>
-          <p:cNvSpPr/>
-          <p:nvPr/>
-        </p:nvSpPr>
-        <p:spPr>
-          <a:xfrm>
-            <a:off x="731520" y="3657600"/>
-            <a:ext cx="10698480" cy="25400"/>
-          </a:xfrm>
-          <a:prstGeom prst="rect">
-            <a:avLst/>
-          </a:prstGeom>
-          <a:solidFill>
-            <a:srgbClr val="2563EB"/>
-          </a:solidFill>
-          <a:ln>
-            <a:noFill/>
-          </a:ln>
-        </p:spPr>
-        <p:style>
-          <a:lnRef idx="1">
-            <a:schemeClr val="accent1"/>
-          </a:lnRef>
-          <a:fillRef idx="3">
-            <a:schemeClr val="accent1"/>
-          </a:fillRef>
-          <a:effectRef idx="2">
-            <a:schemeClr val="accent1"/>
-          </a:effectRef>
-          <a:fontRef idx="minor">
-            <a:schemeClr val="lt1"/>
-          </a:fontRef>
-        </p:style>
-        <p:txBody>
-          <a:bodyPr rtlCol="0" anchor="ctr"/>
-          <a:lstStyle/>
-          <a:p>
-            <a:pPr algn="ctr"/>
-            <a:endParaRPr/>
-          </a:p>
-        </p:txBody>
-      </p:sp>
-      <p:sp>
-        <p:nvSpPr>
-          <p:cNvPr id="4" name="TextBox 3"/>
-          <p:cNvSpPr txBox="1"/>
-          <p:nvPr/>
-        </p:nvSpPr>
-        <p:spPr>
-          <a:xfrm>
-            <a:off x="731520" y="3931920"/>
-            <a:ext cx="10698480" cy="457200"/>
-          </a:xfrm>
-          <a:prstGeom prst="rect">
-            <a:avLst/>
-          </a:prstGeom>
-          <a:noFill/>
-        </p:spPr>
-        <p:txBody>
-          <a:bodyPr wrap="square">
-            <a:spAutoFit/>
-          </a:bodyPr>
-          <a:lstStyle/>
-          <a:p>
-            <a:pPr algn="ctr">
-              <a:defRPr sz="2000" b="0">
-                <a:solidFill>
-                  <a:srgbClr val="2563EB"/>
-                </a:solidFill>
-                <a:latin typeface="Times New Roman"/>
-              </a:defRPr>
-            </a:pPr>
-            <a:r>
-              <a:t>Performance Evaluation of Encryption Algorithms on Edge Devices</a:t>
-            </a:r>
-          </a:p>
-        </p:txBody>
-      </p:sp>
-      <p:sp>
-        <p:nvSpPr>
-          <p:cNvPr id="5" name="TextBox 4"/>
-          <p:cNvSpPr txBox="1"/>
-          <p:nvPr/>
-        </p:nvSpPr>
-        <p:spPr>
-          <a:xfrm>
-            <a:off x="731520" y="4572000"/>
-            <a:ext cx="10698480" cy="457200"/>
-          </a:xfrm>
-          <a:prstGeom prst="rect">
-            <a:avLst/>
-          </a:prstGeom>
-          <a:noFill/>
-        </p:spPr>
-        <p:txBody>
-          <a:bodyPr wrap="square">
-            <a:spAutoFit/>
-          </a:bodyPr>
-          <a:lstStyle/>
-          <a:p>
-            <a:pPr algn="ctr">
-              <a:defRPr sz="2400" b="0">
-                <a:solidFill>
-                  <a:srgbClr val="646464"/>
-                </a:solidFill>
-                <a:latin typeface="Times New Roman"/>
-              </a:defRPr>
-            </a:pPr>
-            <a:r>
-              <a:t>Ready for Q&amp;A</a:t>
-            </a:r>
+            <a:endParaRPr dirty="0">
+              <a:cs typeface="Times New Roman"/>
+            </a:endParaRPr>
           </a:p>
         </p:txBody>
       </p:sp>
@@ -7942,7 +10138,7 @@
         <p:spPr>
           <a:xfrm>
             <a:off x="731520" y="365760"/>
-            <a:ext cx="10698480" cy="640080"/>
+            <a:ext cx="10698480" cy="584775"/>
           </a:xfrm>
           <a:prstGeom prst="rect">
             <a:avLst/>
@@ -7950,7 +10146,7 @@
           <a:noFill/>
         </p:spPr>
         <p:txBody>
-          <a:bodyPr wrap="square">
+          <a:bodyPr wrap="square" lIns="91440" tIns="45720" rIns="91440" bIns="45720" anchor="t">
             <a:spAutoFit/>
           </a:bodyPr>
           <a:lstStyle/>
@@ -7964,7 +10160,7 @@
               </a:defRPr>
             </a:pPr>
             <a:r>
-              <a:t>Literature Survey (1/2)</a:t>
+              <a:t>Literature Survey</a:t>
             </a:r>
           </a:p>
         </p:txBody>
@@ -8019,7 +10215,13 @@
           <p:cNvGraphicFramePr>
             <a:graphicFrameLocks noGrp="1"/>
           </p:cNvGraphicFramePr>
-          <p:nvPr/>
+          <p:nvPr>
+            <p:extLst>
+              <p:ext uri="{D42A27DB-BD31-4B8C-83A1-F6EECF244321}">
+                <p14:modId xmlns:p14="http://schemas.microsoft.com/office/powerpoint/2010/main" val="876029260"/>
+              </p:ext>
+            </p:extLst>
+          </p:nvPr>
         </p:nvGraphicFramePr>
         <p:xfrm>
           <a:off x="457200" y="1188720"/>
@@ -8076,8 +10278,10 @@
                         </a:defRPr>
                       </a:pPr>
                       <a:r>
-                        <a:t>#</a:t>
-                      </a:r>
+                        <a:rPr lang="en-US" dirty="0" err="1"/>
+                        <a:t>S.No</a:t>
+                      </a:r>
+                      <a:endParaRPr dirty="0" err="1"/>
                     </a:p>
                   </a:txBody>
                   <a:tcPr>
@@ -8218,7 +10422,16 @@
                         </a:defRPr>
                       </a:pPr>
                       <a:r>
-                        <a:t>Daemen &amp; Rijmen, 2002</a:t>
+                        <a:rPr dirty="0"/>
+                        <a:t>Daemen &amp; </a:t>
+                      </a:r>
+                      <a:r>
+                        <a:rPr dirty="0" err="1"/>
+                        <a:t>Rijmen</a:t>
+                      </a:r>
+                      <a:r>
+                        <a:rPr dirty="0"/>
+                        <a:t>, 2002</a:t>
                       </a:r>
                     </a:p>
                   </a:txBody>
@@ -8284,7 +10497,12 @@
                         </a:defRPr>
                       </a:pPr>
                       <a:r>
-                        <a:t>ChaCha, a variant of Salsa20</a:t>
+                        <a:rPr dirty="0" err="1"/>
+                        <a:t>ChaCha</a:t>
+                      </a:r>
+                      <a:r>
+                        <a:rPr dirty="0"/>
+                        <a:t>, a variant of Salsa20</a:t>
                       </a:r>
                     </a:p>
                   </a:txBody>
@@ -8571,6 +10789,7 @@
                         </a:defRPr>
                       </a:pPr>
                       <a:r>
+                        <a:rPr dirty="0"/>
                         <a:t>Comparative framework for latency, throughput, memory. Our methodology mirrors this.</a:t>
                       </a:r>
                     </a:p>
@@ -8633,7 +10852,7 @@
         <p:spPr>
           <a:xfrm>
             <a:off x="731520" y="365760"/>
-            <a:ext cx="10698480" cy="640080"/>
+            <a:ext cx="10698480" cy="584775"/>
           </a:xfrm>
           <a:prstGeom prst="rect">
             <a:avLst/>
@@ -8641,7 +10860,7 @@
           <a:noFill/>
         </p:spPr>
         <p:txBody>
-          <a:bodyPr wrap="square">
+          <a:bodyPr wrap="square" lIns="91440" tIns="45720" rIns="91440" bIns="45720" anchor="t">
             <a:spAutoFit/>
           </a:bodyPr>
           <a:lstStyle/>
@@ -8655,7 +10874,7 @@
               </a:defRPr>
             </a:pPr>
             <a:r>
-              <a:t>Literature Survey (2/2)</a:t>
+              <a:t>Literature Survey</a:t>
             </a:r>
           </a:p>
         </p:txBody>
@@ -8710,7 +10929,13 @@
           <p:cNvGraphicFramePr>
             <a:graphicFrameLocks noGrp="1"/>
           </p:cNvGraphicFramePr>
-          <p:nvPr/>
+          <p:nvPr>
+            <p:extLst>
+              <p:ext uri="{D42A27DB-BD31-4B8C-83A1-F6EECF244321}">
+                <p14:modId xmlns:p14="http://schemas.microsoft.com/office/powerpoint/2010/main" val="3470156937"/>
+              </p:ext>
+            </p:extLst>
+          </p:nvPr>
         </p:nvGraphicFramePr>
         <p:xfrm>
           <a:off x="457200" y="1188720"/>
@@ -8767,8 +10992,10 @@
                         </a:defRPr>
                       </a:pPr>
                       <a:r>
-                        <a:t>#</a:t>
-                      </a:r>
+                        <a:rPr lang="en-US" dirty="0" err="1"/>
+                        <a:t>S.No</a:t>
+                      </a:r>
+                      <a:endParaRPr dirty="0" err="1"/>
                     </a:p>
                   </a:txBody>
                   <a:tcPr>
@@ -8930,7 +11157,16 @@
                         </a:defRPr>
                       </a:pPr>
                       <a:r>
-                        <a:t>Node count scales with area x density (N=AxD). Informs our distributed simulation.</a:t>
+                        <a:rPr dirty="0"/>
+                        <a:t>Node count scales with area x density (N=</a:t>
+                      </a:r>
+                      <a:r>
+                        <a:rPr dirty="0" err="1"/>
+                        <a:t>AxD</a:t>
+                      </a:r>
+                      <a:r>
+                        <a:rPr dirty="0"/>
+                        <a:t>). Informs our distributed simulation.</a:t>
                       </a:r>
                     </a:p>
                   </a:txBody>
@@ -9175,6 +11411,7 @@
                         </a:defRPr>
                       </a:pPr>
                       <a:r>
+                        <a:rPr dirty="0"/>
                         <a:t>NIST guidelines for lightweight crypto selection. Frames our algorithm comparison criteria.</a:t>
                       </a:r>
                     </a:p>
@@ -9241,7 +11478,12 @@
                         </a:defRPr>
                       </a:pPr>
                       <a:r>
-                        <a:t>Hatzivasilis et al., J. Crypto. Eng. 2018</a:t>
+                        <a:rPr dirty="0" err="1"/>
+                        <a:t>Hatzivasilis</a:t>
+                      </a:r>
+                      <a:r>
+                        <a:rPr dirty="0"/>
+                        <a:t> et al., J. Crypto. Eng. 2018</a:t>
                       </a:r>
                     </a:p>
                   </a:txBody>
@@ -9404,7 +11646,7 @@
         <p:spPr>
           <a:xfrm>
             <a:off x="731520" y="1371600"/>
-            <a:ext cx="10698480" cy="5029200"/>
+            <a:ext cx="10698480" cy="5221942"/>
           </a:xfrm>
           <a:prstGeom prst="rect">
             <a:avLst/>
@@ -9412,15 +11654,17 @@
           <a:noFill/>
         </p:spPr>
         <p:txBody>
-          <a:bodyPr wrap="square">
+          <a:bodyPr wrap="square" lIns="91440" tIns="45720" rIns="91440" bIns="45720" anchor="t">
             <a:spAutoFit/>
           </a:bodyPr>
           <a:lstStyle/>
           <a:p>
-            <a:pPr>
+            <a:pPr marL="285750" indent="-285750">
               <a:spcAft>
                 <a:spcPts val="800"/>
               </a:spcAft>
+              <a:buFont typeface="Arial"/>
+              <a:buChar char="•"/>
               <a:defRPr sz="1600">
                 <a:solidFill>
                   <a:srgbClr val="000000"/>
@@ -9431,12 +11675,15 @@
             <a:r>
               <a:t>Synthetic IoT Sensor Data:</a:t>
             </a:r>
-          </a:p>
-          <a:p>
-            <a:pPr>
+            <a:endParaRPr lang="en-US"/>
+          </a:p>
+          <a:p>
+            <a:pPr marL="285750" indent="-285750">
               <a:spcAft>
                 <a:spcPts val="800"/>
               </a:spcAft>
+              <a:buFont typeface="Arial"/>
+              <a:buChar char="•"/>
               <a:defRPr sz="1600">
                 <a:solidFill>
                   <a:srgbClr val="000000"/>
@@ -9445,14 +11692,23 @@
               </a:defRPr>
             </a:pPr>
             <a:r>
-              <a:t>- We generate realistic JSON payloads mimicking IoT sensor telemetry streams.</a:t>
-            </a:r>
-          </a:p>
-          <a:p>
-            <a:pPr>
+              <a:rPr lang="en-US" dirty="0"/>
+              <a:t> </a:t>
+            </a:r>
+            <a:r>
+              <a:t>We generate realistic JSON payloads mimicking IoT sensor telemetry streams.</a:t>
+            </a:r>
+            <a:endParaRPr>
+              <a:cs typeface="Times New Roman"/>
+            </a:endParaRPr>
+          </a:p>
+          <a:p>
+            <a:pPr marL="285750" indent="-285750">
               <a:spcAft>
                 <a:spcPts val="800"/>
               </a:spcAft>
+              <a:buFont typeface="Arial"/>
+              <a:buChar char="•"/>
               <a:defRPr sz="1600">
                 <a:solidFill>
                   <a:srgbClr val="000000"/>
@@ -9461,14 +11717,72 @@
               </a:defRPr>
             </a:pPr>
             <a:r>
-              <a:t>- Each record contains: timestamp, device_id, temperature_c, humidity_pct, pressure_hpa, light_lux, sensor_voltage, status.</a:t>
-            </a:r>
-          </a:p>
-          <a:p>
-            <a:pPr>
+              <a:rPr lang="en-US" dirty="0"/>
+              <a:t> </a:t>
+            </a:r>
+            <a:r>
+              <a:rPr dirty="0"/>
+              <a:t> Each record contains: timestamp, </a:t>
+            </a:r>
+            <a:r>
+              <a:rPr dirty="0" err="1"/>
+              <a:t>device_id</a:t>
+            </a:r>
+            <a:r>
+              <a:rPr dirty="0"/>
+              <a:t>, </a:t>
+            </a:r>
+            <a:r>
+              <a:rPr dirty="0" err="1"/>
+              <a:t>temperature_c</a:t>
+            </a:r>
+            <a:r>
+              <a:rPr dirty="0"/>
+              <a:t>, </a:t>
+            </a:r>
+            <a:r>
+              <a:rPr dirty="0" err="1"/>
+              <a:t>humidity_pct</a:t>
+            </a:r>
+            <a:r>
+              <a:rPr dirty="0"/>
+              <a:t>, </a:t>
+            </a:r>
+            <a:r>
+              <a:rPr dirty="0" err="1"/>
+              <a:t>pressure_hpa</a:t>
+            </a:r>
+            <a:r>
+              <a:rPr dirty="0"/>
+              <a:t>, </a:t>
+            </a:r>
+            <a:r>
+              <a:rPr dirty="0" err="1"/>
+              <a:t>light_lux</a:t>
+            </a:r>
+            <a:r>
+              <a:rPr dirty="0"/>
+              <a:t>, </a:t>
+            </a:r>
+            <a:r>
+              <a:rPr dirty="0" err="1"/>
+              <a:t>sensor_voltage</a:t>
+            </a:r>
+            <a:r>
+              <a:rPr dirty="0"/>
+              <a:t>, status.</a:t>
+            </a:r>
+            <a:endParaRPr dirty="0">
+              <a:cs typeface="Times New Roman"/>
+            </a:endParaRPr>
+          </a:p>
+          <a:p>
+            <a:pPr marL="285750" indent="-285750">
               <a:spcAft>
                 <a:spcPts val="800"/>
               </a:spcAft>
+              <a:buFont typeface="Arial"/>
+              <a:buChar char="•"/>
               <a:defRPr sz="1600">
                 <a:solidFill>
                   <a:srgbClr val="000000"/>
@@ -9476,13 +11790,17 @@
                 <a:latin typeface="Times New Roman"/>
               </a:defRPr>
             </a:pPr>
-            <a:endParaRPr/>
-          </a:p>
-          <a:p>
-            <a:pPr>
+            <a:endParaRPr>
+              <a:cs typeface="Times New Roman"/>
+            </a:endParaRPr>
+          </a:p>
+          <a:p>
+            <a:pPr marL="285750" indent="-285750">
               <a:spcAft>
                 <a:spcPts val="800"/>
               </a:spcAft>
+              <a:buFont typeface="Arial"/>
+              <a:buChar char="•"/>
               <a:defRPr sz="1600">
                 <a:solidFill>
                   <a:srgbClr val="000000"/>
@@ -9493,12 +11811,17 @@
             <a:r>
               <a:t>Data Sizes Used: 1KB, 10KB, 100KB</a:t>
             </a:r>
-          </a:p>
-          <a:p>
-            <a:pPr>
+            <a:endParaRPr>
+              <a:cs typeface="Times New Roman"/>
+            </a:endParaRPr>
+          </a:p>
+          <a:p>
+            <a:pPr marL="285750" indent="-285750">
               <a:spcAft>
                 <a:spcPts val="800"/>
               </a:spcAft>
+              <a:buFont typeface="Arial"/>
+              <a:buChar char="•"/>
               <a:defRPr sz="1600">
                 <a:solidFill>
                   <a:srgbClr val="000000"/>
@@ -9507,14 +11830,23 @@
               </a:defRPr>
             </a:pPr>
             <a:r>
-              <a:t>- 1KB: Single sensor reading (~5 JSON records) -- typical RFID/smart card payload.</a:t>
-            </a:r>
-          </a:p>
-          <a:p>
-            <a:pPr>
+              <a:rPr lang="en-US" dirty="0"/>
+              <a:t>  </a:t>
+            </a:r>
+            <a:r>
+              <a:t>1KB: Single sensor reading (~5 JSON records) -- typical RFID/smart card payload.</a:t>
+            </a:r>
+            <a:endParaRPr>
+              <a:cs typeface="Times New Roman"/>
+            </a:endParaRPr>
+          </a:p>
+          <a:p>
+            <a:pPr marL="285750" indent="-285750">
               <a:spcAft>
                 <a:spcPts val="800"/>
               </a:spcAft>
+              <a:buFont typeface="Arial"/>
+              <a:buChar char="•"/>
               <a:defRPr sz="1600">
                 <a:solidFill>
                   <a:srgbClr val="000000"/>
@@ -9523,14 +11855,23 @@
               </a:defRPr>
             </a:pPr>
             <a:r>
-              <a:t>- 10KB: Small batch of readings (~50 records) -- typical for periodic sensor uploads.</a:t>
-            </a:r>
-          </a:p>
-          <a:p>
-            <a:pPr>
+              <a:rPr lang="en-US" dirty="0"/>
+              <a:t>  </a:t>
+            </a:r>
+            <a:r>
+              <a:t>10KB: Small batch of readings (~50 records) -- typical for periodic sensor uploads.</a:t>
+            </a:r>
+            <a:endParaRPr>
+              <a:cs typeface="Times New Roman"/>
+            </a:endParaRPr>
+          </a:p>
+          <a:p>
+            <a:pPr marL="285750" indent="-285750">
               <a:spcAft>
                 <a:spcPts val="800"/>
               </a:spcAft>
+              <a:buFont typeface="Arial"/>
+              <a:buChar char="•"/>
               <a:defRPr sz="1600">
                 <a:solidFill>
                   <a:srgbClr val="000000"/>
@@ -9539,14 +11880,23 @@
               </a:defRPr>
             </a:pPr>
             <a:r>
-              <a:t>- 100KB: Larger aggregated batch (~500 records) -- typical for edge gateway aggregation.</a:t>
-            </a:r>
-          </a:p>
-          <a:p>
-            <a:pPr>
+              <a:rPr lang="en-US"/>
+              <a:t>  </a:t>
+            </a:r>
+            <a:r>
+              <a:t>100KB: Larger aggregated batch (~500 records) -- typical for edge gateway aggregation.</a:t>
+            </a:r>
+            <a:endParaRPr>
+              <a:cs typeface="Times New Roman"/>
+            </a:endParaRPr>
+          </a:p>
+          <a:p>
+            <a:pPr marL="285750" indent="-285750">
               <a:spcAft>
                 <a:spcPts val="800"/>
               </a:spcAft>
+              <a:buFont typeface="Arial"/>
+              <a:buChar char="•"/>
               <a:defRPr sz="1600">
                 <a:solidFill>
                   <a:srgbClr val="000000"/>
@@ -9554,13 +11904,17 @@
                 <a:latin typeface="Times New Roman"/>
               </a:defRPr>
             </a:pPr>
-            <a:endParaRPr/>
-          </a:p>
-          <a:p>
-            <a:pPr>
+            <a:endParaRPr>
+              <a:cs typeface="Times New Roman"/>
+            </a:endParaRPr>
+          </a:p>
+          <a:p>
+            <a:pPr marL="285750" indent="-285750">
               <a:spcAft>
                 <a:spcPts val="800"/>
               </a:spcAft>
+              <a:buFont typeface="Arial"/>
+              <a:buChar char="•"/>
               <a:defRPr sz="1600">
                 <a:solidFill>
                   <a:srgbClr val="000000"/>
@@ -9571,12 +11925,17 @@
             <a:r>
               <a:t>Generation Strategy:</a:t>
             </a:r>
-          </a:p>
-          <a:p>
-            <a:pPr>
+            <a:endParaRPr>
+              <a:cs typeface="Times New Roman"/>
+            </a:endParaRPr>
+          </a:p>
+          <a:p>
+            <a:pPr marL="285750" indent="-285750">
               <a:spcAft>
                 <a:spcPts val="800"/>
               </a:spcAft>
+              <a:buFont typeface="Arial"/>
+              <a:buChar char="•"/>
               <a:defRPr sz="1600">
                 <a:solidFill>
                   <a:srgbClr val="000000"/>
@@ -9585,14 +11944,19 @@
               </a:defRPr>
             </a:pPr>
             <a:r>
-              <a:t>- Records are accumulated until the serialized JSON meets the target byte size.</a:t>
-            </a:r>
-          </a:p>
-          <a:p>
-            <a:pPr>
+              <a:t> Records are accumulated until the serialized JSON meets the target byte size.</a:t>
+            </a:r>
+            <a:endParaRPr>
+              <a:cs typeface="Times New Roman"/>
+            </a:endParaRPr>
+          </a:p>
+          <a:p>
+            <a:pPr marL="285750" indent="-285750">
               <a:spcAft>
                 <a:spcPts val="800"/>
               </a:spcAft>
+              <a:buFont typeface="Arial"/>
+              <a:buChar char="•"/>
               <a:defRPr sz="1600">
                 <a:solidFill>
                   <a:srgbClr val="000000"/>
@@ -9601,14 +11965,23 @@
               </a:defRPr>
             </a:pPr>
             <a:r>
-              <a:t>- Data is then padded or trimmed to exactly match the requested size.</a:t>
-            </a:r>
-          </a:p>
-          <a:p>
-            <a:pPr>
+              <a:rPr lang="en-US" dirty="0"/>
+              <a:t> </a:t>
+            </a:r>
+            <a:r>
+              <a:t>Data is then padded or trimmed to exactly match the requested size.</a:t>
+            </a:r>
+            <a:endParaRPr>
+              <a:cs typeface="Times New Roman"/>
+            </a:endParaRPr>
+          </a:p>
+          <a:p>
+            <a:pPr marL="285750" indent="-285750">
               <a:spcAft>
                 <a:spcPts val="800"/>
               </a:spcAft>
+              <a:buFont typeface="Arial"/>
+              <a:buChar char="•"/>
               <a:defRPr sz="1600">
                 <a:solidFill>
                   <a:srgbClr val="000000"/>
@@ -9617,14 +11990,23 @@
               </a:defRPr>
             </a:pPr>
             <a:r>
-              <a:t>- The same data is used across all algorithms at each size for fair comparison.</a:t>
-            </a:r>
-          </a:p>
-          <a:p>
-            <a:pPr>
+              <a:rPr lang="en-US" dirty="0"/>
+              <a:t> </a:t>
+            </a:r>
+            <a:r>
+              <a:t>The same data is used across all algorithms at each size for fair comparison.</a:t>
+            </a:r>
+            <a:endParaRPr>
+              <a:cs typeface="Times New Roman"/>
+            </a:endParaRPr>
+          </a:p>
+          <a:p>
+            <a:pPr marL="285750" indent="-285750">
               <a:spcAft>
                 <a:spcPts val="800"/>
               </a:spcAft>
+              <a:buFont typeface="Arial"/>
+              <a:buChar char="•"/>
               <a:defRPr sz="1600">
                 <a:solidFill>
                   <a:srgbClr val="000000"/>
@@ -9632,13 +12014,17 @@
                 <a:latin typeface="Times New Roman"/>
               </a:defRPr>
             </a:pPr>
-            <a:endParaRPr/>
-          </a:p>
-          <a:p>
-            <a:pPr>
+            <a:endParaRPr>
+              <a:cs typeface="Times New Roman"/>
+            </a:endParaRPr>
+          </a:p>
+          <a:p>
+            <a:pPr marL="285750" indent="-285750">
               <a:spcAft>
                 <a:spcPts val="800"/>
               </a:spcAft>
+              <a:buFont typeface="Arial"/>
+              <a:buChar char="•"/>
               <a:defRPr sz="1600">
                 <a:solidFill>
                   <a:srgbClr val="000000"/>
@@ -9647,8 +12033,20 @@
               </a:defRPr>
             </a:pPr>
             <a:r>
-              <a:t>Total Benchmark Matrix: 4 algorithms x 3 sizes x 5 iterations x 2 ops (enc+dec) = 120 runs</a:t>
-            </a:r>
+              <a:rPr dirty="0"/>
+              <a:t>Total Benchmark Matrix: 4 algorithms x 3 sizes x 5 iterations x 2 ops (</a:t>
+            </a:r>
+            <a:r>
+              <a:rPr dirty="0" err="1"/>
+              <a:t>enc+dec</a:t>
+            </a:r>
+            <a:r>
+              <a:rPr dirty="0"/>
+              <a:t>) = 120 runs</a:t>
+            </a:r>
+            <a:endParaRPr dirty="0">
+              <a:cs typeface="Times New Roman"/>
+            </a:endParaRPr>
           </a:p>
         </p:txBody>
       </p:sp>
@@ -9693,8 +12091,8 @@
         </p:nvSpPr>
         <p:spPr>
           <a:xfrm>
-            <a:off x="731520" y="365760"/>
-            <a:ext cx="10698480" cy="640080"/>
+            <a:off x="637563" y="301251"/>
+            <a:ext cx="10792437" cy="584775"/>
           </a:xfrm>
           <a:prstGeom prst="rect">
             <a:avLst/>
@@ -9716,7 +12114,8 @@
               </a:defRPr>
             </a:pPr>
             <a:r>
-              <a:t>System Architecture</a:t>
+              <a:rPr dirty="0"/>
+              <a:t>Why Single-Node Benchmarking &amp; Distributed Systems?</a:t>
             </a:r>
           </a:p>
         </p:txBody>
@@ -9765,30 +12164,299 @@
           </a:p>
         </p:txBody>
       </p:sp>
-      <p:pic>
-        <p:nvPicPr>
-          <p:cNvPr id="4" name="Picture 3" descr="architecture_diagram.png"/>
-          <p:cNvPicPr>
-            <a:picLocks noChangeAspect="1"/>
-          </p:cNvPicPr>
+      <p:sp>
+        <p:nvSpPr>
+          <p:cNvPr id="4" name="TextBox 3"/>
+          <p:cNvSpPr txBox="1"/>
           <p:nvPr/>
-        </p:nvPicPr>
-        <p:blipFill>
-          <a:blip r:embed="rId2"/>
-          <a:stretch>
-            <a:fillRect/>
-          </a:stretch>
-        </p:blipFill>
+        </p:nvSpPr>
         <p:spPr>
           <a:xfrm>
-            <a:off x="1371600" y="1188720"/>
-            <a:ext cx="9418320" cy="5303520"/>
+            <a:off x="731520" y="1280160"/>
+            <a:ext cx="4846320" cy="5029200"/>
           </a:xfrm>
           <a:prstGeom prst="rect">
             <a:avLst/>
           </a:prstGeom>
+          <a:noFill/>
         </p:spPr>
-      </p:pic>
+        <p:txBody>
+          <a:bodyPr wrap="square">
+            <a:spAutoFit/>
+          </a:bodyPr>
+          <a:lstStyle/>
+          <a:p>
+            <a:pPr>
+              <a:spcAft>
+                <a:spcPts val="800"/>
+              </a:spcAft>
+              <a:defRPr sz="1400">
+                <a:solidFill>
+                  <a:srgbClr val="000000"/>
+                </a:solidFill>
+                <a:latin typeface="Times New Roman"/>
+              </a:defRPr>
+            </a:pPr>
+            <a:r>
+              <a:t>Why Single-Node First?</a:t>
+            </a:r>
+          </a:p>
+          <a:p>
+            <a:pPr>
+              <a:spcAft>
+                <a:spcPts val="800"/>
+              </a:spcAft>
+              <a:defRPr sz="1400">
+                <a:solidFill>
+                  <a:srgbClr val="000000"/>
+                </a:solidFill>
+                <a:latin typeface="Times New Roman"/>
+              </a:defRPr>
+            </a:pPr>
+            <a:endParaRPr/>
+          </a:p>
+          <a:p>
+            <a:pPr>
+              <a:spcAft>
+                <a:spcPts val="800"/>
+              </a:spcAft>
+              <a:defRPr sz="1400">
+                <a:solidFill>
+                  <a:srgbClr val="000000"/>
+                </a:solidFill>
+                <a:latin typeface="Times New Roman"/>
+              </a:defRPr>
+            </a:pPr>
+            <a:r>
+              <a:t>1. Establishes the Baseline: You cannot measure distributed scalability without knowing what 1 node can do. Single-node results provide the denominator for the Scalability Factor.</a:t>
+            </a:r>
+          </a:p>
+          <a:p>
+            <a:pPr>
+              <a:spcAft>
+                <a:spcPts val="800"/>
+              </a:spcAft>
+              <a:defRPr sz="1400">
+                <a:solidFill>
+                  <a:srgbClr val="000000"/>
+                </a:solidFill>
+                <a:latin typeface="Times New Roman"/>
+              </a:defRPr>
+            </a:pPr>
+            <a:endParaRPr/>
+          </a:p>
+          <a:p>
+            <a:pPr>
+              <a:spcAft>
+                <a:spcPts val="800"/>
+              </a:spcAft>
+              <a:defRPr sz="1400">
+                <a:solidFill>
+                  <a:srgbClr val="000000"/>
+                </a:solidFill>
+                <a:latin typeface="Times New Roman"/>
+              </a:defRPr>
+            </a:pPr>
+            <a:r>
+              <a:t>2. Finds Optimal Packet Size: Testing 1KB, 10KB, 100KB reveals each algorithm's setup overhead vs. processing cost curve, identifying the ideal network packet size.</a:t>
+            </a:r>
+          </a:p>
+          <a:p>
+            <a:pPr>
+              <a:spcAft>
+                <a:spcPts val="800"/>
+              </a:spcAft>
+              <a:defRPr sz="1400">
+                <a:solidFill>
+                  <a:srgbClr val="000000"/>
+                </a:solidFill>
+                <a:latin typeface="Times New Roman"/>
+              </a:defRPr>
+            </a:pPr>
+            <a:endParaRPr/>
+          </a:p>
+          <a:p>
+            <a:pPr>
+              <a:spcAft>
+                <a:spcPts val="800"/>
+              </a:spcAft>
+              <a:defRPr sz="1400">
+                <a:solidFill>
+                  <a:srgbClr val="000000"/>
+                </a:solidFill>
+                <a:latin typeface="Times New Roman"/>
+              </a:defRPr>
+            </a:pPr>
+            <a:r>
+              <a:t>3. Proves Hardware Feasibility: Isolates exact CPU% and peak RAM per device, proving the algorithm is physically deployable on constrained IoT hardware.</a:t>
+            </a:r>
+          </a:p>
+        </p:txBody>
+      </p:sp>
+      <p:sp>
+        <p:nvSpPr>
+          <p:cNvPr id="5" name="TextBox 4"/>
+          <p:cNvSpPr txBox="1"/>
+          <p:nvPr/>
+        </p:nvSpPr>
+        <p:spPr>
+          <a:xfrm>
+            <a:off x="5943600" y="1280160"/>
+            <a:ext cx="5303520" cy="5029200"/>
+          </a:xfrm>
+          <a:prstGeom prst="rect">
+            <a:avLst/>
+          </a:prstGeom>
+          <a:noFill/>
+        </p:spPr>
+        <p:txBody>
+          <a:bodyPr wrap="square">
+            <a:spAutoFit/>
+          </a:bodyPr>
+          <a:lstStyle/>
+          <a:p>
+            <a:pPr>
+              <a:spcAft>
+                <a:spcPts val="800"/>
+              </a:spcAft>
+              <a:defRPr sz="1400">
+                <a:solidFill>
+                  <a:srgbClr val="000000"/>
+                </a:solidFill>
+                <a:latin typeface="Times New Roman"/>
+              </a:defRPr>
+            </a:pPr>
+            <a:r>
+              <a:rPr dirty="0"/>
+              <a:t>Why Distributed Systems?</a:t>
+            </a:r>
+          </a:p>
+          <a:p>
+            <a:pPr>
+              <a:spcAft>
+                <a:spcPts val="800"/>
+              </a:spcAft>
+              <a:defRPr sz="1400">
+                <a:solidFill>
+                  <a:srgbClr val="000000"/>
+                </a:solidFill>
+                <a:latin typeface="Times New Roman"/>
+              </a:defRPr>
+            </a:pPr>
+            <a:endParaRPr dirty="0"/>
+          </a:p>
+          <a:p>
+            <a:pPr>
+              <a:spcAft>
+                <a:spcPts val="800"/>
+              </a:spcAft>
+              <a:defRPr sz="1400">
+                <a:solidFill>
+                  <a:srgbClr val="000000"/>
+                </a:solidFill>
+                <a:latin typeface="Times New Roman"/>
+              </a:defRPr>
+            </a:pPr>
+            <a:r>
+              <a:rPr dirty="0"/>
+              <a:t>1. Real-World Scale: IoT deployments have thousands of nodes encrypting concurrently. A single-node test cannot capture inter-node overhead or parallel contention.</a:t>
+            </a:r>
+          </a:p>
+          <a:p>
+            <a:pPr>
+              <a:spcAft>
+                <a:spcPts val="800"/>
+              </a:spcAft>
+              <a:defRPr sz="1400">
+                <a:solidFill>
+                  <a:srgbClr val="000000"/>
+                </a:solidFill>
+                <a:latin typeface="Times New Roman"/>
+              </a:defRPr>
+            </a:pPr>
+            <a:endParaRPr dirty="0"/>
+          </a:p>
+          <a:p>
+            <a:pPr>
+              <a:spcAft>
+                <a:spcPts val="800"/>
+              </a:spcAft>
+              <a:defRPr sz="1400">
+                <a:solidFill>
+                  <a:srgbClr val="000000"/>
+                </a:solidFill>
+                <a:latin typeface="Times New Roman"/>
+              </a:defRPr>
+            </a:pPr>
+            <a:r>
+              <a:rPr dirty="0"/>
+              <a:t>2. Scalability Proof: By distributing a fixed 100KB workload across N=5 to N=1000 nodes, we prove near-linear throughput scaling for AES/ChaCha20.</a:t>
+            </a:r>
+          </a:p>
+          <a:p>
+            <a:pPr>
+              <a:spcAft>
+                <a:spcPts val="800"/>
+              </a:spcAft>
+              <a:defRPr sz="1400">
+                <a:solidFill>
+                  <a:srgbClr val="000000"/>
+                </a:solidFill>
+                <a:latin typeface="Times New Roman"/>
+              </a:defRPr>
+            </a:pPr>
+            <a:endParaRPr dirty="0"/>
+          </a:p>
+          <a:p>
+            <a:pPr>
+              <a:spcAft>
+                <a:spcPts val="800"/>
+              </a:spcAft>
+              <a:defRPr sz="1400">
+                <a:solidFill>
+                  <a:srgbClr val="000000"/>
+                </a:solidFill>
+                <a:latin typeface="Times New Roman"/>
+              </a:defRPr>
+            </a:pPr>
+            <a:r>
+              <a:rPr dirty="0"/>
+              <a:t>3. Data Sovereignty: Encrypting at the edge (not cloud) keeps plaintext off the network. This architecture tolerates compromised intermediate nodes.</a:t>
+            </a:r>
+          </a:p>
+          <a:p>
+            <a:pPr>
+              <a:spcAft>
+                <a:spcPts val="800"/>
+              </a:spcAft>
+              <a:defRPr sz="1400">
+                <a:solidFill>
+                  <a:srgbClr val="000000"/>
+                </a:solidFill>
+                <a:latin typeface="Times New Roman"/>
+              </a:defRPr>
+            </a:pPr>
+            <a:endParaRPr dirty="0"/>
+          </a:p>
+          <a:p>
+            <a:pPr>
+              <a:spcAft>
+                <a:spcPts val="800"/>
+              </a:spcAft>
+              <a:defRPr sz="1400">
+                <a:solidFill>
+                  <a:srgbClr val="000000"/>
+                </a:solidFill>
+                <a:latin typeface="Times New Roman"/>
+              </a:defRPr>
+            </a:pPr>
+            <a:r>
+              <a:rPr dirty="0"/>
+              <a:t>4. Key Finding: AES/ChaCha20 scale almost perfectly. PRESENT/SPECK's process overhead exceeds their encryption time at high node counts.</a:t>
+            </a:r>
+          </a:p>
+        </p:txBody>
+      </p:sp>
     </p:spTree>
   </p:cSld>
   <p:clrMapOvr>
@@ -9853,7 +12521,7 @@
               </a:defRPr>
             </a:pPr>
             <a:r>
-              <a:t>Overall Execution Flow</a:t>
+              <a:t>System Architecture</a:t>
             </a:r>
           </a:p>
         </p:txBody>
@@ -9902,195 +12570,30 @@
           </a:p>
         </p:txBody>
       </p:sp>
-      <p:sp>
-        <p:nvSpPr>
-          <p:cNvPr id="4" name="TextBox 3"/>
-          <p:cNvSpPr txBox="1"/>
+      <p:pic>
+        <p:nvPicPr>
+          <p:cNvPr id="4" name="Picture 3" descr="architecture_diagram.png"/>
+          <p:cNvPicPr>
+            <a:picLocks noChangeAspect="1"/>
+          </p:cNvPicPr>
           <p:nvPr/>
-        </p:nvSpPr>
+        </p:nvPicPr>
+        <p:blipFill>
+          <a:blip r:embed="rId2"/>
+          <a:stretch>
+            <a:fillRect/>
+          </a:stretch>
+        </p:blipFill>
         <p:spPr>
           <a:xfrm>
-            <a:off x="731520" y="1371600"/>
-            <a:ext cx="10698480" cy="5029200"/>
+            <a:off x="1371600" y="1188720"/>
+            <a:ext cx="9418320" cy="5303520"/>
           </a:xfrm>
           <a:prstGeom prst="rect">
             <a:avLst/>
           </a:prstGeom>
-          <a:noFill/>
         </p:spPr>
-        <p:txBody>
-          <a:bodyPr wrap="square">
-            <a:spAutoFit/>
-          </a:bodyPr>
-          <a:lstStyle/>
-          <a:p>
-            <a:pPr>
-              <a:spcAft>
-                <a:spcPts val="800"/>
-              </a:spcAft>
-              <a:defRPr sz="1600">
-                <a:solidFill>
-                  <a:srgbClr val="000000"/>
-                </a:solidFill>
-                <a:latin typeface="Times New Roman"/>
-              </a:defRPr>
-            </a:pPr>
-            <a:r>
-              <a:t>Step 1: Data Generation --&gt; generate_iot_data(size_bytes) creates synthetic IoT JSON payloads of exact target size.</a:t>
-            </a:r>
-          </a:p>
-          <a:p>
-            <a:pPr>
-              <a:spcAft>
-                <a:spcPts val="800"/>
-              </a:spcAft>
-              <a:defRPr sz="1600">
-                <a:solidFill>
-                  <a:srgbClr val="000000"/>
-                </a:solidFill>
-                <a:latin typeface="Times New Roman"/>
-              </a:defRPr>
-            </a:pPr>
-            <a:endParaRPr/>
-          </a:p>
-          <a:p>
-            <a:pPr>
-              <a:spcAft>
-                <a:spcPts val="800"/>
-              </a:spcAft>
-              <a:defRPr sz="1600">
-                <a:solidFill>
-                  <a:srgbClr val="000000"/>
-                </a:solidFill>
-                <a:latin typeface="Times New Roman"/>
-              </a:defRPr>
-            </a:pPr>
-            <a:r>
-              <a:t>Step 2: Key Generation --&gt; Each algorithm module generates a cryptographic key (AES: 256-bit, ChaCha20: 256-bit, PRESENT: 80-bit, SPECK: 128-bit).</a:t>
-            </a:r>
-          </a:p>
-          <a:p>
-            <a:pPr>
-              <a:spcAft>
-                <a:spcPts val="800"/>
-              </a:spcAft>
-              <a:defRPr sz="1600">
-                <a:solidFill>
-                  <a:srgbClr val="000000"/>
-                </a:solidFill>
-                <a:latin typeface="Times New Roman"/>
-              </a:defRPr>
-            </a:pPr>
-            <a:endParaRPr/>
-          </a:p>
-          <a:p>
-            <a:pPr>
-              <a:spcAft>
-                <a:spcPts val="800"/>
-              </a:spcAft>
-              <a:defRPr sz="1600">
-                <a:solidFill>
-                  <a:srgbClr val="000000"/>
-                </a:solidFill>
-                <a:latin typeface="Times New Roman"/>
-              </a:defRPr>
-            </a:pPr>
-            <a:r>
-              <a:t>Step 3: Benchmarked Encryption --&gt; BenchmarkProfiler context manager wraps encrypt(data, key). Captures wall-clock time, CPU%, peak memory, throughput.</a:t>
-            </a:r>
-          </a:p>
-          <a:p>
-            <a:pPr>
-              <a:spcAft>
-                <a:spcPts val="800"/>
-              </a:spcAft>
-              <a:defRPr sz="1600">
-                <a:solidFill>
-                  <a:srgbClr val="000000"/>
-                </a:solidFill>
-                <a:latin typeface="Times New Roman"/>
-              </a:defRPr>
-            </a:pPr>
-            <a:endParaRPr/>
-          </a:p>
-          <a:p>
-            <a:pPr>
-              <a:spcAft>
-                <a:spcPts val="800"/>
-              </a:spcAft>
-              <a:defRPr sz="1600">
-                <a:solidFill>
-                  <a:srgbClr val="000000"/>
-                </a:solidFill>
-                <a:latin typeface="Times New Roman"/>
-              </a:defRPr>
-            </a:pPr>
-            <a:r>
-              <a:t>Step 4: Simulated Edge Transmission --&gt; 50ms delay injected between encrypt and decrypt to model real edge-to-cloud network latency.</a:t>
-            </a:r>
-          </a:p>
-          <a:p>
-            <a:pPr>
-              <a:spcAft>
-                <a:spcPts val="800"/>
-              </a:spcAft>
-              <a:defRPr sz="1600">
-                <a:solidFill>
-                  <a:srgbClr val="000000"/>
-                </a:solidFill>
-                <a:latin typeface="Times New Roman"/>
-              </a:defRPr>
-            </a:pPr>
-            <a:endParaRPr/>
-          </a:p>
-          <a:p>
-            <a:pPr>
-              <a:spcAft>
-                <a:spcPts val="800"/>
-              </a:spcAft>
-              <a:defRPr sz="1600">
-                <a:solidFill>
-                  <a:srgbClr val="000000"/>
-                </a:solidFill>
-                <a:latin typeface="Times New Roman"/>
-              </a:defRPr>
-            </a:pPr>
-            <a:r>
-              <a:t>Step 5: Benchmarked Decryption --&gt; Same profiler wraps decrypt(nonce, ciphertext, tag, key). Integrity assertion: decrypted == original data.</a:t>
-            </a:r>
-          </a:p>
-          <a:p>
-            <a:pPr>
-              <a:spcAft>
-                <a:spcPts val="800"/>
-              </a:spcAft>
-              <a:defRPr sz="1600">
-                <a:solidFill>
-                  <a:srgbClr val="000000"/>
-                </a:solidFill>
-                <a:latin typeface="Times New Roman"/>
-              </a:defRPr>
-            </a:pPr>
-            <a:endParaRPr/>
-          </a:p>
-          <a:p>
-            <a:pPr>
-              <a:spcAft>
-                <a:spcPts val="800"/>
-              </a:spcAft>
-              <a:defRPr sz="1600">
-                <a:solidFill>
-                  <a:srgbClr val="000000"/>
-                </a:solidFill>
-                <a:latin typeface="Times New Roman"/>
-              </a:defRPr>
-            </a:pPr>
-            <a:r>
-              <a:t>Step 6: Results Aggregation --&gt; All 120 measurements saved to CSV/JSON. Pandas aggregation computes averages. Matplotlib generates 6 comparison graphs.</a:t>
-            </a:r>
-          </a:p>
-        </p:txBody>
-      </p:sp>
+      </p:pic>
     </p:spTree>
   </p:cSld>
   <p:clrMapOvr>
@@ -10155,7 +12658,7 @@
               </a:defRPr>
             </a:pPr>
             <a:r>
-              <a:t>Encryption Algorithm Models</a:t>
+              <a:t>Overall Execution Flow</a:t>
             </a:r>
           </a:p>
         </p:txBody>
@@ -10204,916 +12707,195 @@
           </a:p>
         </p:txBody>
       </p:sp>
-      <p:graphicFrame>
-        <p:nvGraphicFramePr>
-          <p:cNvPr id="4" name="Table 3"/>
-          <p:cNvGraphicFramePr>
-            <a:graphicFrameLocks noGrp="1"/>
-          </p:cNvGraphicFramePr>
+      <p:sp>
+        <p:nvSpPr>
+          <p:cNvPr id="4" name="TextBox 3"/>
+          <p:cNvSpPr txBox="1"/>
           <p:nvPr/>
-        </p:nvGraphicFramePr>
-        <p:xfrm>
-          <a:off x="457200" y="1188720"/>
-          <a:ext cx="11247120" cy="2426970"/>
-        </p:xfrm>
-        <a:graphic>
-          <a:graphicData uri="http://schemas.openxmlformats.org/drawingml/2006/table">
-            <a:tbl>
-              <a:tblPr firstRow="1" bandRow="1">
-                <a:tableStyleId>{5C22544A-7EE6-4342-B048-85BDC9FD1C3A}</a:tableStyleId>
-              </a:tblPr>
-              <a:tblGrid>
-                <a:gridCol w="2249424">
-                  <a:extLst>
-                    <a:ext uri="{9D8B030D-6E8A-4147-A177-3AD203B41FA5}">
-                      <a16:colId xmlns:a16="http://schemas.microsoft.com/office/drawing/2014/main" val="20000"/>
-                    </a:ext>
-                  </a:extLst>
-                </a:gridCol>
-                <a:gridCol w="2249424">
-                  <a:extLst>
-                    <a:ext uri="{9D8B030D-6E8A-4147-A177-3AD203B41FA5}">
-                      <a16:colId xmlns:a16="http://schemas.microsoft.com/office/drawing/2014/main" val="20001"/>
-                    </a:ext>
-                  </a:extLst>
-                </a:gridCol>
-                <a:gridCol w="2249424">
-                  <a:extLst>
-                    <a:ext uri="{9D8B030D-6E8A-4147-A177-3AD203B41FA5}">
-                      <a16:colId xmlns:a16="http://schemas.microsoft.com/office/drawing/2014/main" val="20002"/>
-                    </a:ext>
-                  </a:extLst>
-                </a:gridCol>
-                <a:gridCol w="2249424">
-                  <a:extLst>
-                    <a:ext uri="{9D8B030D-6E8A-4147-A177-3AD203B41FA5}">
-                      <a16:colId xmlns:a16="http://schemas.microsoft.com/office/drawing/2014/main" val="20003"/>
-                    </a:ext>
-                  </a:extLst>
-                </a:gridCol>
-                <a:gridCol w="2249424">
-                  <a:extLst>
-                    <a:ext uri="{9D8B030D-6E8A-4147-A177-3AD203B41FA5}">
-                      <a16:colId xmlns:a16="http://schemas.microsoft.com/office/drawing/2014/main" val="20004"/>
-                    </a:ext>
-                  </a:extLst>
-                </a:gridCol>
-              </a:tblGrid>
-              <a:tr h="285750">
-                <a:tc>
-                  <a:txBody>
-                    <a:bodyPr/>
-                    <a:lstStyle/>
-                    <a:p>
-                      <a:pPr algn="ctr">
-                        <a:defRPr sz="1100" b="1">
-                          <a:solidFill>
-                            <a:srgbClr val="FFFFFF"/>
-                          </a:solidFill>
-                          <a:latin typeface="Times New Roman"/>
-                        </a:defRPr>
-                      </a:pPr>
-                      <a:r>
-                        <a:t>Property</a:t>
-                      </a:r>
-                    </a:p>
-                  </a:txBody>
-                  <a:tcPr>
-                    <a:solidFill>
-                      <a:srgbClr val="1E1E1E"/>
-                    </a:solidFill>
-                  </a:tcPr>
-                </a:tc>
-                <a:tc>
-                  <a:txBody>
-                    <a:bodyPr/>
-                    <a:lstStyle/>
-                    <a:p>
-                      <a:pPr algn="ctr">
-                        <a:defRPr sz="1100" b="1">
-                          <a:solidFill>
-                            <a:srgbClr val="FFFFFF"/>
-                          </a:solidFill>
-                          <a:latin typeface="Times New Roman"/>
-                        </a:defRPr>
-                      </a:pPr>
-                      <a:r>
-                        <a:t>AES-256-GCM</a:t>
-                      </a:r>
-                    </a:p>
-                  </a:txBody>
-                  <a:tcPr>
-                    <a:solidFill>
-                      <a:srgbClr val="1E1E1E"/>
-                    </a:solidFill>
-                  </a:tcPr>
-                </a:tc>
-                <a:tc>
-                  <a:txBody>
-                    <a:bodyPr/>
-                    <a:lstStyle/>
-                    <a:p>
-                      <a:pPr algn="ctr">
-                        <a:defRPr sz="1100" b="1">
-                          <a:solidFill>
-                            <a:srgbClr val="FFFFFF"/>
-                          </a:solidFill>
-                          <a:latin typeface="Times New Roman"/>
-                        </a:defRPr>
-                      </a:pPr>
-                      <a:r>
-                        <a:t>ChaCha20-Poly1305</a:t>
-                      </a:r>
-                    </a:p>
-                  </a:txBody>
-                  <a:tcPr>
-                    <a:solidFill>
-                      <a:srgbClr val="1E1E1E"/>
-                    </a:solidFill>
-                  </a:tcPr>
-                </a:tc>
-                <a:tc>
-                  <a:txBody>
-                    <a:bodyPr/>
-                    <a:lstStyle/>
-                    <a:p>
-                      <a:pPr algn="ctr">
-                        <a:defRPr sz="1100" b="1">
-                          <a:solidFill>
-                            <a:srgbClr val="FFFFFF"/>
-                          </a:solidFill>
-                          <a:latin typeface="Times New Roman"/>
-                        </a:defRPr>
-                      </a:pPr>
-                      <a:r>
-                        <a:t>PRESENT-80</a:t>
-                      </a:r>
-                    </a:p>
-                  </a:txBody>
-                  <a:tcPr>
-                    <a:solidFill>
-                      <a:srgbClr val="1E1E1E"/>
-                    </a:solidFill>
-                  </a:tcPr>
-                </a:tc>
-                <a:tc>
-                  <a:txBody>
-                    <a:bodyPr/>
-                    <a:lstStyle/>
-                    <a:p>
-                      <a:pPr algn="ctr">
-                        <a:defRPr sz="1100" b="1">
-                          <a:solidFill>
-                            <a:srgbClr val="FFFFFF"/>
-                          </a:solidFill>
-                          <a:latin typeface="Times New Roman"/>
-                        </a:defRPr>
-                      </a:pPr>
-                      <a:r>
-                        <a:t>SPECK-64/128</a:t>
-                      </a:r>
-                    </a:p>
-                  </a:txBody>
-                  <a:tcPr>
-                    <a:solidFill>
-                      <a:srgbClr val="1E1E1E"/>
-                    </a:solidFill>
-                  </a:tcPr>
-                </a:tc>
-                <a:extLst>
-                  <a:ext uri="{0D108BD9-81ED-4DB2-BD59-A6C34878D82A}">
-                    <a16:rowId xmlns:a16="http://schemas.microsoft.com/office/drawing/2014/main" val="10000"/>
-                  </a:ext>
-                </a:extLst>
-              </a:tr>
-              <a:tr h="285750">
-                <a:tc>
-                  <a:txBody>
-                    <a:bodyPr/>
-                    <a:lstStyle/>
-                    <a:p>
-                      <a:pPr algn="ctr">
-                        <a:defRPr sz="1100">
-                          <a:latin typeface="Times New Roman"/>
-                        </a:defRPr>
-                      </a:pPr>
-                      <a:r>
-                        <a:t>Type</a:t>
-                      </a:r>
-                    </a:p>
-                  </a:txBody>
-                  <a:tcPr>
-                    <a:solidFill>
-                      <a:srgbClr val="F0F0FF"/>
-                    </a:solidFill>
-                  </a:tcPr>
-                </a:tc>
-                <a:tc>
-                  <a:txBody>
-                    <a:bodyPr/>
-                    <a:lstStyle/>
-                    <a:p>
-                      <a:pPr algn="ctr">
-                        <a:defRPr sz="1100">
-                          <a:latin typeface="Times New Roman"/>
-                        </a:defRPr>
-                      </a:pPr>
-                      <a:r>
-                        <a:t>Block Cipher</a:t>
-                      </a:r>
-                    </a:p>
-                  </a:txBody>
-                  <a:tcPr>
-                    <a:solidFill>
-                      <a:srgbClr val="F0F0FF"/>
-                    </a:solidFill>
-                  </a:tcPr>
-                </a:tc>
-                <a:tc>
-                  <a:txBody>
-                    <a:bodyPr/>
-                    <a:lstStyle/>
-                    <a:p>
-                      <a:pPr algn="ctr">
-                        <a:defRPr sz="1100">
-                          <a:latin typeface="Times New Roman"/>
-                        </a:defRPr>
-                      </a:pPr>
-                      <a:r>
-                        <a:t>Stream Cipher</a:t>
-                      </a:r>
-                    </a:p>
-                  </a:txBody>
-                  <a:tcPr>
-                    <a:solidFill>
-                      <a:srgbClr val="F0F0FF"/>
-                    </a:solidFill>
-                  </a:tcPr>
-                </a:tc>
-                <a:tc>
-                  <a:txBody>
-                    <a:bodyPr/>
-                    <a:lstStyle/>
-                    <a:p>
-                      <a:pPr algn="ctr">
-                        <a:defRPr sz="1100">
-                          <a:latin typeface="Times New Roman"/>
-                        </a:defRPr>
-                      </a:pPr>
-                      <a:r>
-                        <a:t>Block Cipher (Lightweight)</a:t>
-                      </a:r>
-                    </a:p>
-                  </a:txBody>
-                  <a:tcPr>
-                    <a:solidFill>
-                      <a:srgbClr val="F0F0FF"/>
-                    </a:solidFill>
-                  </a:tcPr>
-                </a:tc>
-                <a:tc>
-                  <a:txBody>
-                    <a:bodyPr/>
-                    <a:lstStyle/>
-                    <a:p>
-                      <a:pPr algn="ctr">
-                        <a:defRPr sz="1100">
-                          <a:latin typeface="Times New Roman"/>
-                        </a:defRPr>
-                      </a:pPr>
-                      <a:r>
-                        <a:t>Block Cipher (Lightweight)</a:t>
-                      </a:r>
-                    </a:p>
-                  </a:txBody>
-                  <a:tcPr>
-                    <a:solidFill>
-                      <a:srgbClr val="F0F0FF"/>
-                    </a:solidFill>
-                  </a:tcPr>
-                </a:tc>
-                <a:extLst>
-                  <a:ext uri="{0D108BD9-81ED-4DB2-BD59-A6C34878D82A}">
-                    <a16:rowId xmlns:a16="http://schemas.microsoft.com/office/drawing/2014/main" val="10001"/>
-                  </a:ext>
-                </a:extLst>
-              </a:tr>
-              <a:tr h="285750">
-                <a:tc>
-                  <a:txBody>
-                    <a:bodyPr/>
-                    <a:lstStyle/>
-                    <a:p>
-                      <a:pPr algn="ctr">
-                        <a:defRPr sz="1100">
-                          <a:latin typeface="Times New Roman"/>
-                        </a:defRPr>
-                      </a:pPr>
-                      <a:r>
-                        <a:t>Structure</a:t>
-                      </a:r>
-                    </a:p>
-                  </a:txBody>
-                  <a:tcPr/>
-                </a:tc>
-                <a:tc>
-                  <a:txBody>
-                    <a:bodyPr/>
-                    <a:lstStyle/>
-                    <a:p>
-                      <a:pPr algn="ctr">
-                        <a:defRPr sz="1100">
-                          <a:latin typeface="Times New Roman"/>
-                        </a:defRPr>
-                      </a:pPr>
-                      <a:r>
-                        <a:t>SPN (SubBytes, ShiftRows, MixColumns)</a:t>
-                      </a:r>
-                    </a:p>
-                  </a:txBody>
-                  <a:tcPr/>
-                </a:tc>
-                <a:tc>
-                  <a:txBody>
-                    <a:bodyPr/>
-                    <a:lstStyle/>
-                    <a:p>
-                      <a:pPr algn="ctr">
-                        <a:defRPr sz="1100">
-                          <a:latin typeface="Times New Roman"/>
-                        </a:defRPr>
-                      </a:pPr>
-                      <a:r>
-                        <a:t>ARX (Add, Rotate, XOR)</a:t>
-                      </a:r>
-                    </a:p>
-                  </a:txBody>
-                  <a:tcPr/>
-                </a:tc>
-                <a:tc>
-                  <a:txBody>
-                    <a:bodyPr/>
-                    <a:lstStyle/>
-                    <a:p>
-                      <a:pPr algn="ctr">
-                        <a:defRPr sz="1100">
-                          <a:latin typeface="Times New Roman"/>
-                        </a:defRPr>
-                      </a:pPr>
-                      <a:r>
-                        <a:t>SPN (4-bit S-Box + P-Box)</a:t>
-                      </a:r>
-                    </a:p>
-                  </a:txBody>
-                  <a:tcPr/>
-                </a:tc>
-                <a:tc>
-                  <a:txBody>
-                    <a:bodyPr/>
-                    <a:lstStyle/>
-                    <a:p>
-                      <a:pPr algn="ctr">
-                        <a:defRPr sz="1100">
-                          <a:latin typeface="Times New Roman"/>
-                        </a:defRPr>
-                      </a:pPr>
-                      <a:r>
-                        <a:t>ARX (Add, Rotate, XOR)</a:t>
-                      </a:r>
-                    </a:p>
-                  </a:txBody>
-                  <a:tcPr/>
-                </a:tc>
-                <a:extLst>
-                  <a:ext uri="{0D108BD9-81ED-4DB2-BD59-A6C34878D82A}">
-                    <a16:rowId xmlns:a16="http://schemas.microsoft.com/office/drawing/2014/main" val="10002"/>
-                  </a:ext>
-                </a:extLst>
-              </a:tr>
-              <a:tr h="285750">
-                <a:tc>
-                  <a:txBody>
-                    <a:bodyPr/>
-                    <a:lstStyle/>
-                    <a:p>
-                      <a:pPr algn="ctr">
-                        <a:defRPr sz="1100">
-                          <a:latin typeface="Times New Roman"/>
-                        </a:defRPr>
-                      </a:pPr>
-                      <a:r>
-                        <a:t>Block Size</a:t>
-                      </a:r>
-                    </a:p>
-                  </a:txBody>
-                  <a:tcPr>
-                    <a:solidFill>
-                      <a:srgbClr val="F0F0FF"/>
-                    </a:solidFill>
-                  </a:tcPr>
-                </a:tc>
-                <a:tc>
-                  <a:txBody>
-                    <a:bodyPr/>
-                    <a:lstStyle/>
-                    <a:p>
-                      <a:pPr algn="ctr">
-                        <a:defRPr sz="1100">
-                          <a:latin typeface="Times New Roman"/>
-                        </a:defRPr>
-                      </a:pPr>
-                      <a:r>
-                        <a:t>128 bits</a:t>
-                      </a:r>
-                    </a:p>
-                  </a:txBody>
-                  <a:tcPr>
-                    <a:solidFill>
-                      <a:srgbClr val="F0F0FF"/>
-                    </a:solidFill>
-                  </a:tcPr>
-                </a:tc>
-                <a:tc>
-                  <a:txBody>
-                    <a:bodyPr/>
-                    <a:lstStyle/>
-                    <a:p>
-                      <a:pPr algn="ctr">
-                        <a:defRPr sz="1100">
-                          <a:latin typeface="Times New Roman"/>
-                        </a:defRPr>
-                      </a:pPr>
-                      <a:r>
-                        <a:t>N/A (stream)</a:t>
-                      </a:r>
-                    </a:p>
-                  </a:txBody>
-                  <a:tcPr>
-                    <a:solidFill>
-                      <a:srgbClr val="F0F0FF"/>
-                    </a:solidFill>
-                  </a:tcPr>
-                </a:tc>
-                <a:tc>
-                  <a:txBody>
-                    <a:bodyPr/>
-                    <a:lstStyle/>
-                    <a:p>
-                      <a:pPr algn="ctr">
-                        <a:defRPr sz="1100">
-                          <a:latin typeface="Times New Roman"/>
-                        </a:defRPr>
-                      </a:pPr>
-                      <a:r>
-                        <a:t>64 bits</a:t>
-                      </a:r>
-                    </a:p>
-                  </a:txBody>
-                  <a:tcPr>
-                    <a:solidFill>
-                      <a:srgbClr val="F0F0FF"/>
-                    </a:solidFill>
-                  </a:tcPr>
-                </a:tc>
-                <a:tc>
-                  <a:txBody>
-                    <a:bodyPr/>
-                    <a:lstStyle/>
-                    <a:p>
-                      <a:pPr algn="ctr">
-                        <a:defRPr sz="1100">
-                          <a:latin typeface="Times New Roman"/>
-                        </a:defRPr>
-                      </a:pPr>
-                      <a:r>
-                        <a:t>64 bits</a:t>
-                      </a:r>
-                    </a:p>
-                  </a:txBody>
-                  <a:tcPr>
-                    <a:solidFill>
-                      <a:srgbClr val="F0F0FF"/>
-                    </a:solidFill>
-                  </a:tcPr>
-                </a:tc>
-                <a:extLst>
-                  <a:ext uri="{0D108BD9-81ED-4DB2-BD59-A6C34878D82A}">
-                    <a16:rowId xmlns:a16="http://schemas.microsoft.com/office/drawing/2014/main" val="10003"/>
-                  </a:ext>
-                </a:extLst>
-              </a:tr>
-              <a:tr h="285750">
-                <a:tc>
-                  <a:txBody>
-                    <a:bodyPr/>
-                    <a:lstStyle/>
-                    <a:p>
-                      <a:pPr algn="ctr">
-                        <a:defRPr sz="1100">
-                          <a:latin typeface="Times New Roman"/>
-                        </a:defRPr>
-                      </a:pPr>
-                      <a:r>
-                        <a:t>Key Size</a:t>
-                      </a:r>
-                    </a:p>
-                  </a:txBody>
-                  <a:tcPr/>
-                </a:tc>
-                <a:tc>
-                  <a:txBody>
-                    <a:bodyPr/>
-                    <a:lstStyle/>
-                    <a:p>
-                      <a:pPr algn="ctr">
-                        <a:defRPr sz="1100">
-                          <a:latin typeface="Times New Roman"/>
-                        </a:defRPr>
-                      </a:pPr>
-                      <a:r>
-                        <a:t>256 bits</a:t>
-                      </a:r>
-                    </a:p>
-                  </a:txBody>
-                  <a:tcPr/>
-                </a:tc>
-                <a:tc>
-                  <a:txBody>
-                    <a:bodyPr/>
-                    <a:lstStyle/>
-                    <a:p>
-                      <a:pPr algn="ctr">
-                        <a:defRPr sz="1100">
-                          <a:latin typeface="Times New Roman"/>
-                        </a:defRPr>
-                      </a:pPr>
-                      <a:r>
-                        <a:t>256 bits</a:t>
-                      </a:r>
-                    </a:p>
-                  </a:txBody>
-                  <a:tcPr/>
-                </a:tc>
-                <a:tc>
-                  <a:txBody>
-                    <a:bodyPr/>
-                    <a:lstStyle/>
-                    <a:p>
-                      <a:pPr algn="ctr">
-                        <a:defRPr sz="1100">
-                          <a:latin typeface="Times New Roman"/>
-                        </a:defRPr>
-                      </a:pPr>
-                      <a:r>
-                        <a:t>80 bits</a:t>
-                      </a:r>
-                    </a:p>
-                  </a:txBody>
-                  <a:tcPr/>
-                </a:tc>
-                <a:tc>
-                  <a:txBody>
-                    <a:bodyPr/>
-                    <a:lstStyle/>
-                    <a:p>
-                      <a:pPr algn="ctr">
-                        <a:defRPr sz="1100">
-                          <a:latin typeface="Times New Roman"/>
-                        </a:defRPr>
-                      </a:pPr>
-                      <a:r>
-                        <a:t>128 bits</a:t>
-                      </a:r>
-                    </a:p>
-                  </a:txBody>
-                  <a:tcPr/>
-                </a:tc>
-                <a:extLst>
-                  <a:ext uri="{0D108BD9-81ED-4DB2-BD59-A6C34878D82A}">
-                    <a16:rowId xmlns:a16="http://schemas.microsoft.com/office/drawing/2014/main" val="10004"/>
-                  </a:ext>
-                </a:extLst>
-              </a:tr>
-              <a:tr h="285750">
-                <a:tc>
-                  <a:txBody>
-                    <a:bodyPr/>
-                    <a:lstStyle/>
-                    <a:p>
-                      <a:pPr algn="ctr">
-                        <a:defRPr sz="1100">
-                          <a:latin typeface="Times New Roman"/>
-                        </a:defRPr>
-                      </a:pPr>
-                      <a:r>
-                        <a:t>Rounds</a:t>
-                      </a:r>
-                    </a:p>
-                  </a:txBody>
-                  <a:tcPr>
-                    <a:solidFill>
-                      <a:srgbClr val="F0F0FF"/>
-                    </a:solidFill>
-                  </a:tcPr>
-                </a:tc>
-                <a:tc>
-                  <a:txBody>
-                    <a:bodyPr/>
-                    <a:lstStyle/>
-                    <a:p>
-                      <a:pPr algn="ctr">
-                        <a:defRPr sz="1100">
-                          <a:latin typeface="Times New Roman"/>
-                        </a:defRPr>
-                      </a:pPr>
-                      <a:r>
-                        <a:t>14</a:t>
-                      </a:r>
-                    </a:p>
-                  </a:txBody>
-                  <a:tcPr>
-                    <a:solidFill>
-                      <a:srgbClr val="F0F0FF"/>
-                    </a:solidFill>
-                  </a:tcPr>
-                </a:tc>
-                <a:tc>
-                  <a:txBody>
-                    <a:bodyPr/>
-                    <a:lstStyle/>
-                    <a:p>
-                      <a:pPr algn="ctr">
-                        <a:defRPr sz="1100">
-                          <a:latin typeface="Times New Roman"/>
-                        </a:defRPr>
-                      </a:pPr>
-                      <a:r>
-                        <a:t>20 quarter-rounds</a:t>
-                      </a:r>
-                    </a:p>
-                  </a:txBody>
-                  <a:tcPr>
-                    <a:solidFill>
-                      <a:srgbClr val="F0F0FF"/>
-                    </a:solidFill>
-                  </a:tcPr>
-                </a:tc>
-                <a:tc>
-                  <a:txBody>
-                    <a:bodyPr/>
-                    <a:lstStyle/>
-                    <a:p>
-                      <a:pPr algn="ctr">
-                        <a:defRPr sz="1100">
-                          <a:latin typeface="Times New Roman"/>
-                        </a:defRPr>
-                      </a:pPr>
-                      <a:r>
-                        <a:t>31</a:t>
-                      </a:r>
-                    </a:p>
-                  </a:txBody>
-                  <a:tcPr>
-                    <a:solidFill>
-                      <a:srgbClr val="F0F0FF"/>
-                    </a:solidFill>
-                  </a:tcPr>
-                </a:tc>
-                <a:tc>
-                  <a:txBody>
-                    <a:bodyPr/>
-                    <a:lstStyle/>
-                    <a:p>
-                      <a:pPr algn="ctr">
-                        <a:defRPr sz="1100">
-                          <a:latin typeface="Times New Roman"/>
-                        </a:defRPr>
-                      </a:pPr>
-                      <a:r>
-                        <a:t>27</a:t>
-                      </a:r>
-                    </a:p>
-                  </a:txBody>
-                  <a:tcPr>
-                    <a:solidFill>
-                      <a:srgbClr val="F0F0FF"/>
-                    </a:solidFill>
-                  </a:tcPr>
-                </a:tc>
-                <a:extLst>
-                  <a:ext uri="{0D108BD9-81ED-4DB2-BD59-A6C34878D82A}">
-                    <a16:rowId xmlns:a16="http://schemas.microsoft.com/office/drawing/2014/main" val="10005"/>
-                  </a:ext>
-                </a:extLst>
-              </a:tr>
-              <a:tr h="285750">
-                <a:tc>
-                  <a:txBody>
-                    <a:bodyPr/>
-                    <a:lstStyle/>
-                    <a:p>
-                      <a:pPr algn="ctr">
-                        <a:defRPr sz="1100">
-                          <a:latin typeface="Times New Roman"/>
-                        </a:defRPr>
-                      </a:pPr>
-                      <a:r>
-                        <a:t>Auth Mode</a:t>
-                      </a:r>
-                    </a:p>
-                  </a:txBody>
-                  <a:tcPr/>
-                </a:tc>
-                <a:tc>
-                  <a:txBody>
-                    <a:bodyPr/>
-                    <a:lstStyle/>
-                    <a:p>
-                      <a:pPr algn="ctr">
-                        <a:defRPr sz="1100">
-                          <a:latin typeface="Times New Roman"/>
-                        </a:defRPr>
-                      </a:pPr>
-                      <a:r>
-                        <a:t>GCM (GHASH)</a:t>
-                      </a:r>
-                    </a:p>
-                  </a:txBody>
-                  <a:tcPr/>
-                </a:tc>
-                <a:tc>
-                  <a:txBody>
-                    <a:bodyPr/>
-                    <a:lstStyle/>
-                    <a:p>
-                      <a:pPr algn="ctr">
-                        <a:defRPr sz="1100">
-                          <a:latin typeface="Times New Roman"/>
-                        </a:defRPr>
-                      </a:pPr>
-                      <a:r>
-                        <a:t>Poly1305 MAC</a:t>
-                      </a:r>
-                    </a:p>
-                  </a:txBody>
-                  <a:tcPr/>
-                </a:tc>
-                <a:tc>
-                  <a:txBody>
-                    <a:bodyPr/>
-                    <a:lstStyle/>
-                    <a:p>
-                      <a:pPr algn="ctr">
-                        <a:defRPr sz="1100">
-                          <a:latin typeface="Times New Roman"/>
-                        </a:defRPr>
-                      </a:pPr>
-                      <a:r>
-                        <a:t>CTR + HMAC-SHA256</a:t>
-                      </a:r>
-                    </a:p>
-                  </a:txBody>
-                  <a:tcPr/>
-                </a:tc>
-                <a:tc>
-                  <a:txBody>
-                    <a:bodyPr/>
-                    <a:lstStyle/>
-                    <a:p>
-                      <a:pPr algn="ctr">
-                        <a:defRPr sz="1100">
-                          <a:latin typeface="Times New Roman"/>
-                        </a:defRPr>
-                      </a:pPr>
-                      <a:r>
-                        <a:t>CTR + HMAC-SHA256</a:t>
-                      </a:r>
-                    </a:p>
-                  </a:txBody>
-                  <a:tcPr/>
-                </a:tc>
-                <a:extLst>
-                  <a:ext uri="{0D108BD9-81ED-4DB2-BD59-A6C34878D82A}">
-                    <a16:rowId xmlns:a16="http://schemas.microsoft.com/office/drawing/2014/main" val="10006"/>
-                  </a:ext>
-                </a:extLst>
-              </a:tr>
-              <a:tr h="285750">
-                <a:tc>
-                  <a:txBody>
-                    <a:bodyPr/>
-                    <a:lstStyle/>
-                    <a:p>
-                      <a:pPr algn="ctr">
-                        <a:defRPr sz="1100">
-                          <a:latin typeface="Times New Roman"/>
-                        </a:defRPr>
-                      </a:pPr>
-                      <a:r>
-                        <a:t>Gate Count</a:t>
-                      </a:r>
-                    </a:p>
-                  </a:txBody>
-                  <a:tcPr>
-                    <a:solidFill>
-                      <a:srgbClr val="F0F0FF"/>
-                    </a:solidFill>
-                  </a:tcPr>
-                </a:tc>
-                <a:tc>
-                  <a:txBody>
-                    <a:bodyPr/>
-                    <a:lstStyle/>
-                    <a:p>
-                      <a:pPr algn="ctr">
-                        <a:defRPr sz="1100">
-                          <a:latin typeface="Times New Roman"/>
-                        </a:defRPr>
-                      </a:pPr>
-                      <a:r>
-                        <a:t>~50,000 GE</a:t>
-                      </a:r>
-                    </a:p>
-                  </a:txBody>
-                  <a:tcPr>
-                    <a:solidFill>
-                      <a:srgbClr val="F0F0FF"/>
-                    </a:solidFill>
-                  </a:tcPr>
-                </a:tc>
-                <a:tc>
-                  <a:txBody>
-                    <a:bodyPr/>
-                    <a:lstStyle/>
-                    <a:p>
-                      <a:pPr algn="ctr">
-                        <a:defRPr sz="1100">
-                          <a:latin typeface="Times New Roman"/>
-                        </a:defRPr>
-                      </a:pPr>
-                      <a:r>
-                        <a:t>~38,000 GE</a:t>
-                      </a:r>
-                    </a:p>
-                  </a:txBody>
-                  <a:tcPr>
-                    <a:solidFill>
-                      <a:srgbClr val="F0F0FF"/>
-                    </a:solidFill>
-                  </a:tcPr>
-                </a:tc>
-                <a:tc>
-                  <a:txBody>
-                    <a:bodyPr/>
-                    <a:lstStyle/>
-                    <a:p>
-                      <a:pPr algn="ctr">
-                        <a:defRPr sz="1100">
-                          <a:latin typeface="Times New Roman"/>
-                        </a:defRPr>
-                      </a:pPr>
-                      <a:r>
-                        <a:t>~1,570 GE</a:t>
-                      </a:r>
-                    </a:p>
-                  </a:txBody>
-                  <a:tcPr>
-                    <a:solidFill>
-                      <a:srgbClr val="F0F0FF"/>
-                    </a:solidFill>
-                  </a:tcPr>
-                </a:tc>
-                <a:tc>
-                  <a:txBody>
-                    <a:bodyPr/>
-                    <a:lstStyle/>
-                    <a:p>
-                      <a:pPr algn="ctr">
-                        <a:defRPr sz="1100">
-                          <a:latin typeface="Times New Roman"/>
-                        </a:defRPr>
-                      </a:pPr>
-                      <a:r>
-                        <a:t>~2,400 GE</a:t>
-                      </a:r>
-                    </a:p>
-                  </a:txBody>
-                  <a:tcPr>
-                    <a:solidFill>
-                      <a:srgbClr val="F0F0FF"/>
-                    </a:solidFill>
-                  </a:tcPr>
-                </a:tc>
-                <a:extLst>
-                  <a:ext uri="{0D108BD9-81ED-4DB2-BD59-A6C34878D82A}">
-                    <a16:rowId xmlns:a16="http://schemas.microsoft.com/office/drawing/2014/main" val="10007"/>
-                  </a:ext>
-                </a:extLst>
-              </a:tr>
-            </a:tbl>
-          </a:graphicData>
-        </a:graphic>
-      </p:graphicFrame>
+        </p:nvSpPr>
+        <p:spPr>
+          <a:xfrm>
+            <a:off x="731520" y="1371600"/>
+            <a:ext cx="10698480" cy="5029200"/>
+          </a:xfrm>
+          <a:prstGeom prst="rect">
+            <a:avLst/>
+          </a:prstGeom>
+          <a:noFill/>
+        </p:spPr>
+        <p:txBody>
+          <a:bodyPr wrap="square">
+            <a:spAutoFit/>
+          </a:bodyPr>
+          <a:lstStyle/>
+          <a:p>
+            <a:pPr>
+              <a:spcAft>
+                <a:spcPts val="800"/>
+              </a:spcAft>
+              <a:defRPr sz="1600">
+                <a:solidFill>
+                  <a:srgbClr val="000000"/>
+                </a:solidFill>
+                <a:latin typeface="Times New Roman"/>
+              </a:defRPr>
+            </a:pPr>
+            <a:r>
+              <a:t>Step 1: Data Generation --&gt; generate_iot_data(size_bytes) creates synthetic IoT JSON payloads of exact target size.</a:t>
+            </a:r>
+          </a:p>
+          <a:p>
+            <a:pPr>
+              <a:spcAft>
+                <a:spcPts val="800"/>
+              </a:spcAft>
+              <a:defRPr sz="1600">
+                <a:solidFill>
+                  <a:srgbClr val="000000"/>
+                </a:solidFill>
+                <a:latin typeface="Times New Roman"/>
+              </a:defRPr>
+            </a:pPr>
+            <a:endParaRPr/>
+          </a:p>
+          <a:p>
+            <a:pPr>
+              <a:spcAft>
+                <a:spcPts val="800"/>
+              </a:spcAft>
+              <a:defRPr sz="1600">
+                <a:solidFill>
+                  <a:srgbClr val="000000"/>
+                </a:solidFill>
+                <a:latin typeface="Times New Roman"/>
+              </a:defRPr>
+            </a:pPr>
+            <a:r>
+              <a:t>Step 2: Key Generation --&gt; Each algorithm module generates a cryptographic key (AES: 256-bit, ChaCha20: 256-bit, PRESENT: 80-bit, SPECK: 128-bit).</a:t>
+            </a:r>
+          </a:p>
+          <a:p>
+            <a:pPr>
+              <a:spcAft>
+                <a:spcPts val="800"/>
+              </a:spcAft>
+              <a:defRPr sz="1600">
+                <a:solidFill>
+                  <a:srgbClr val="000000"/>
+                </a:solidFill>
+                <a:latin typeface="Times New Roman"/>
+              </a:defRPr>
+            </a:pPr>
+            <a:endParaRPr/>
+          </a:p>
+          <a:p>
+            <a:pPr>
+              <a:spcAft>
+                <a:spcPts val="800"/>
+              </a:spcAft>
+              <a:defRPr sz="1600">
+                <a:solidFill>
+                  <a:srgbClr val="000000"/>
+                </a:solidFill>
+                <a:latin typeface="Times New Roman"/>
+              </a:defRPr>
+            </a:pPr>
+            <a:r>
+              <a:t>Step 3: Benchmarked Encryption --&gt; BenchmarkProfiler context manager wraps encrypt(data, key). Captures wall-clock time, CPU%, peak memory, throughput.</a:t>
+            </a:r>
+          </a:p>
+          <a:p>
+            <a:pPr>
+              <a:spcAft>
+                <a:spcPts val="800"/>
+              </a:spcAft>
+              <a:defRPr sz="1600">
+                <a:solidFill>
+                  <a:srgbClr val="000000"/>
+                </a:solidFill>
+                <a:latin typeface="Times New Roman"/>
+              </a:defRPr>
+            </a:pPr>
+            <a:endParaRPr/>
+          </a:p>
+          <a:p>
+            <a:pPr>
+              <a:spcAft>
+                <a:spcPts val="800"/>
+              </a:spcAft>
+              <a:defRPr sz="1600">
+                <a:solidFill>
+                  <a:srgbClr val="000000"/>
+                </a:solidFill>
+                <a:latin typeface="Times New Roman"/>
+              </a:defRPr>
+            </a:pPr>
+            <a:r>
+              <a:t>Step 4: Simulated Edge Transmission --&gt; 50ms delay injected between encrypt and decrypt to model real edge-to-cloud network latency.</a:t>
+            </a:r>
+          </a:p>
+          <a:p>
+            <a:pPr>
+              <a:spcAft>
+                <a:spcPts val="800"/>
+              </a:spcAft>
+              <a:defRPr sz="1600">
+                <a:solidFill>
+                  <a:srgbClr val="000000"/>
+                </a:solidFill>
+                <a:latin typeface="Times New Roman"/>
+              </a:defRPr>
+            </a:pPr>
+            <a:endParaRPr/>
+          </a:p>
+          <a:p>
+            <a:pPr>
+              <a:spcAft>
+                <a:spcPts val="800"/>
+              </a:spcAft>
+              <a:defRPr sz="1600">
+                <a:solidFill>
+                  <a:srgbClr val="000000"/>
+                </a:solidFill>
+                <a:latin typeface="Times New Roman"/>
+              </a:defRPr>
+            </a:pPr>
+            <a:r>
+              <a:t>Step 5: Benchmarked Decryption --&gt; Same profiler wraps decrypt(nonce, ciphertext, tag, key). Integrity assertion: decrypted == original data.</a:t>
+            </a:r>
+          </a:p>
+          <a:p>
+            <a:pPr>
+              <a:spcAft>
+                <a:spcPts val="800"/>
+              </a:spcAft>
+              <a:defRPr sz="1600">
+                <a:solidFill>
+                  <a:srgbClr val="000000"/>
+                </a:solidFill>
+                <a:latin typeface="Times New Roman"/>
+              </a:defRPr>
+            </a:pPr>
+            <a:endParaRPr/>
+          </a:p>
+          <a:p>
+            <a:pPr>
+              <a:spcAft>
+                <a:spcPts val="800"/>
+              </a:spcAft>
+              <a:defRPr sz="1600">
+                <a:solidFill>
+                  <a:srgbClr val="000000"/>
+                </a:solidFill>
+                <a:latin typeface="Times New Roman"/>
+              </a:defRPr>
+            </a:pPr>
+            <a:r>
+              <a:t>Step 6: Results Aggregation --&gt; All 120 measurements saved to CSV/JSON. Pandas aggregation computes averages. Matplotlib generates 6 comparison graphs.</a:t>
+            </a:r>
+          </a:p>
+        </p:txBody>
+      </p:sp>
     </p:spTree>
   </p:cSld>
   <p:clrMapOvr>
